--- a/db2model/DB2Model_SFT_LoRA_defense.pptx
+++ b/db2model/DB2Model_SFT_LoRA_defense.pptx
@@ -18,9 +18,11 @@
     <p:sldId id="266" r:id="rId12"/>
     <p:sldId id="267" r:id="rId13"/>
     <p:sldId id="268" r:id="rId14"/>
+    <p:sldId id="269" r:id="rId15"/>
+    <p:sldId id="270" r:id="rId16"/>
   </p:sldIdLst>
   <p:notesMasterIdLst>
-    <p:notesMasterId r:id="rId15"/>
+    <p:notesMasterId r:id="rId17"/>
   </p:notesMasterIdLst>
   <p:sldSz cx="12192000" cy="6858000"/>
   <p:notesSz cx="6858000" cy="12192000"/>
@@ -1423,6 +1425,182 @@
             <a:fld id="{F7021451-1387-4CA6-816F-3879F97B5CBC}" type="slidenum">
               <a:rPr lang="en-US"/>
               <a:t>13</a:t>
+            </a:fld>
+            <a:endParaRPr lang="en-US"/>
+          </a:p>
+        </p:txBody>
+      </p:sp>
+    </p:spTree>
+    <p:extLst>
+      <p:ext uri="{BB962C8B-B14F-4D97-AF65-F5344CB8AC3E}">
+        <p14:creationId xmlns:p14="http://schemas.microsoft.com/office/powerpoint/2010/main" val="1024086991"/>
+      </p:ext>
+    </p:extLst>
+  </p:cSld>
+  <p:clrMapOvr>
+    <a:masterClrMapping/>
+  </p:clrMapOvr>
+</p:notes>
+</file>
+
+<file path=ppt/notesSlides/notesSlide14.xml><?xml version="1.0" encoding="utf-8"?>
+<p:notes xmlns:a="http://schemas.openxmlformats.org/drawingml/2006/main" xmlns:r="http://schemas.openxmlformats.org/officeDocument/2006/relationships" xmlns:p="http://schemas.openxmlformats.org/presentationml/2006/main">
+  <p:cSld>
+    <p:spTree>
+      <p:nvGrpSpPr>
+        <p:cNvPr id="1" name=""/>
+        <p:cNvGrpSpPr/>
+        <p:nvPr/>
+      </p:nvGrpSpPr>
+      <p:grpSpPr>
+        <a:xfrm>
+          <a:off x="0" y="0"/>
+          <a:ext cx="0" cy="0"/>
+          <a:chOff x="0" y="0"/>
+          <a:chExt cx="0" cy="0"/>
+        </a:xfrm>
+      </p:grpSpPr>
+      <p:sp>
+        <p:nvSpPr>
+          <p:cNvPr id="2" name="Slide Image Placeholder 1"/>
+          <p:cNvSpPr>
+            <a:spLocks noGrp="1" noRot="1" noChangeAspect="1"/>
+          </p:cNvSpPr>
+          <p:nvPr>
+            <p:ph type="sldImg"/>
+          </p:nvPr>
+        </p:nvSpPr>
+        <p:spPr/>
+      </p:sp>
+      <p:sp>
+        <p:nvSpPr>
+          <p:cNvPr id="3" name="Notes Placeholder 2"/>
+          <p:cNvSpPr>
+            <a:spLocks noGrp="1"/>
+          </p:cNvSpPr>
+          <p:nvPr>
+            <p:ph type="body" idx="1"/>
+          </p:nvPr>
+        </p:nvSpPr>
+        <p:spPr/>
+        <p:txBody>
+          <a:bodyPr/>
+          <a:lstStyle/>
+          <a:p>
+            <a:r>
+              <a:rPr lang="en-US" dirty="0"/>
+              <a:t/>
+            </a:r>
+            <a:endParaRPr lang="en-US" dirty="0"/>
+          </a:p>
+        </p:txBody>
+      </p:sp>
+      <p:sp>
+        <p:nvSpPr>
+          <p:cNvPr id="4" name="Slide Number Placeholder 3"/>
+          <p:cNvSpPr>
+            <a:spLocks noGrp="1"/>
+          </p:cNvSpPr>
+          <p:nvPr>
+            <p:ph type="sldNum" sz="quarter" idx="10"/>
+          </p:nvPr>
+        </p:nvSpPr>
+        <p:spPr/>
+        <p:txBody>
+          <a:bodyPr/>
+          <a:lstStyle/>
+          <a:p>
+            <a:fld id="{F7021451-1387-4CA6-816F-3879F97B5CBC}" type="slidenum">
+              <a:rPr lang="en-US"/>
+              <a:t>14</a:t>
+            </a:fld>
+            <a:endParaRPr lang="en-US"/>
+          </a:p>
+        </p:txBody>
+      </p:sp>
+    </p:spTree>
+    <p:extLst>
+      <p:ext uri="{BB962C8B-B14F-4D97-AF65-F5344CB8AC3E}">
+        <p14:creationId xmlns:p14="http://schemas.microsoft.com/office/powerpoint/2010/main" val="1024086991"/>
+      </p:ext>
+    </p:extLst>
+  </p:cSld>
+  <p:clrMapOvr>
+    <a:masterClrMapping/>
+  </p:clrMapOvr>
+</p:notes>
+</file>
+
+<file path=ppt/notesSlides/notesSlide15.xml><?xml version="1.0" encoding="utf-8"?>
+<p:notes xmlns:a="http://schemas.openxmlformats.org/drawingml/2006/main" xmlns:r="http://schemas.openxmlformats.org/officeDocument/2006/relationships" xmlns:p="http://schemas.openxmlformats.org/presentationml/2006/main">
+  <p:cSld>
+    <p:spTree>
+      <p:nvGrpSpPr>
+        <p:cNvPr id="1" name=""/>
+        <p:cNvGrpSpPr/>
+        <p:nvPr/>
+      </p:nvGrpSpPr>
+      <p:grpSpPr>
+        <a:xfrm>
+          <a:off x="0" y="0"/>
+          <a:ext cx="0" cy="0"/>
+          <a:chOff x="0" y="0"/>
+          <a:chExt cx="0" cy="0"/>
+        </a:xfrm>
+      </p:grpSpPr>
+      <p:sp>
+        <p:nvSpPr>
+          <p:cNvPr id="2" name="Slide Image Placeholder 1"/>
+          <p:cNvSpPr>
+            <a:spLocks noGrp="1" noRot="1" noChangeAspect="1"/>
+          </p:cNvSpPr>
+          <p:nvPr>
+            <p:ph type="sldImg"/>
+          </p:nvPr>
+        </p:nvSpPr>
+        <p:spPr/>
+      </p:sp>
+      <p:sp>
+        <p:nvSpPr>
+          <p:cNvPr id="3" name="Notes Placeholder 2"/>
+          <p:cNvSpPr>
+            <a:spLocks noGrp="1"/>
+          </p:cNvSpPr>
+          <p:nvPr>
+            <p:ph type="body" idx="1"/>
+          </p:nvPr>
+        </p:nvSpPr>
+        <p:spPr/>
+        <p:txBody>
+          <a:bodyPr/>
+          <a:lstStyle/>
+          <a:p>
+            <a:r>
+              <a:rPr lang="en-US" dirty="0"/>
+              <a:t/>
+            </a:r>
+            <a:endParaRPr lang="en-US" dirty="0"/>
+          </a:p>
+        </p:txBody>
+      </p:sp>
+      <p:sp>
+        <p:nvSpPr>
+          <p:cNvPr id="4" name="Slide Number Placeholder 3"/>
+          <p:cNvSpPr>
+            <a:spLocks noGrp="1"/>
+          </p:cNvSpPr>
+          <p:nvPr>
+            <p:ph type="sldNum" sz="quarter" idx="10"/>
+          </p:nvPr>
+        </p:nvSpPr>
+        <p:spPr/>
+        <p:txBody>
+          <a:bodyPr/>
+          <a:lstStyle/>
+          <a:p>
+            <a:fld id="{F7021451-1387-4CA6-816F-3879F97B5CBC}" type="slidenum">
+              <a:rPr lang="en-US"/>
+              <a:t>15</a:t>
             </a:fld>
             <a:endParaRPr lang="en-US"/>
           </a:p>
@@ -2509,7 +2687,7 @@
                 <a:ea typeface="Courier New" pitchFamily="34" charset="-122"/>
                 <a:cs typeface="Courier New" pitchFamily="34" charset="-120"/>
               </a:rPr>
-              <a:t>Л Е Т Н Я Я   П Р А К Т И К А</a:t>
+              <a:t>Л Е Т Н Я Я   П Р А К Т И К А</a:t>
             </a:r>
             <a:endParaRPr lang="en-US" sz="1400" dirty="0"/>
           </a:p>
@@ -2890,7 +3068,7 @@
                 <a:ea typeface="Calibri" pitchFamily="34" charset="-122"/>
                 <a:cs typeface="Calibri" pitchFamily="34" charset="-120"/>
               </a:rPr>
-              <a:t>Тезис виден вживую, не только в EX</a:t>
+              <a:t>Что даёт прирост — объём синтетики</a:t>
             </a:r>
             <a:endParaRPr lang="en-US" sz="3200" dirty="0"/>
           </a:p>
@@ -2905,7 +3083,7 @@
         <p:spPr>
           <a:xfrm>
             <a:off x="457200" y="1097280"/>
-            <a:ext cx="10058400" cy="365760"/>
+            <a:ext cx="9966960" cy="365760"/>
           </a:xfrm>
           <a:prstGeom prst="rect">
             <a:avLst/>
@@ -2929,53 +3107,42 @@
                 <a:ea typeface="Calibri" pitchFamily="34" charset="-122"/>
                 <a:cs typeface="Calibri" pitchFamily="34" charset="-120"/>
               </a:rPr>
-              <a:t>MCP-сервер: адаптер через vLLM, запрос → SQL → живая база</a:t>
+              <a:t>Единственный ablation-эффект, устойчивый за пределами шума</a:t>
             </a:r>
             <a:endParaRPr lang="en-US" sz="1500" dirty="0"/>
           </a:p>
         </p:txBody>
       </p:sp>
-      <p:sp>
-        <p:nvSpPr>
-          <p:cNvPr id="6" name="Shape 4"/>
-          <p:cNvSpPr/>
-          <p:nvPr/>
-        </p:nvSpPr>
-        <p:spPr>
-          <a:xfrm>
-            <a:off x="457200" y="2057400"/>
-            <a:ext cx="5486400" cy="3474720"/>
+      <p:graphicFrame>
+        <p:nvGraphicFramePr>
+          <p:cNvPr id="6" name="Chart 0" descr=""/>
+          <p:cNvGraphicFramePr/>
+          <p:nvPr/>
+        </p:nvGraphicFramePr>
+        <p:xfrm>
+          <a:off x="457200" y="1965960"/>
+          <a:ext cx="6949440" cy="4160520"/>
+        </p:xfrm>
+        <a:graphic xmlns:a="http://schemas.openxmlformats.org/drawingml/2006/main">
+          <a:graphicData uri="http://schemas.openxmlformats.org/drawingml/2006/chart">
+            <c:chart xmlns:c="http://schemas.openxmlformats.org/drawingml/2006/chart" r:id="rId1"/>
+          </a:graphicData>
+        </a:graphic>
+      </p:graphicFrame>
+      <p:sp>
+        <p:nvSpPr>
+          <p:cNvPr id="7" name="Shape 4"/>
+          <p:cNvSpPr/>
+          <p:nvPr/>
+        </p:nvSpPr>
+        <p:spPr>
+          <a:xfrm>
+            <a:off x="7680960" y="1965960"/>
+            <a:ext cx="4023360" cy="4160520"/>
           </a:xfrm>
           <a:prstGeom prst="roundRect">
             <a:avLst>
-              <a:gd name="adj" fmla="val 1053"/>
-            </a:avLst>
-          </a:prstGeom>
-          <a:solidFill>
-            <a:srgbClr val="102D69"/>
-          </a:solidFill>
-          <a:ln w="12700">
-            <a:solidFill>
-              <a:srgbClr val="C9B894"/>
-            </a:solidFill>
-            <a:prstDash val="solid"/>
-          </a:ln>
-        </p:spPr>
-      </p:sp>
-      <p:sp>
-        <p:nvSpPr>
-          <p:cNvPr id="7" name="Shape 5"/>
-          <p:cNvSpPr/>
-          <p:nvPr/>
-        </p:nvSpPr>
-        <p:spPr>
-          <a:xfrm>
-            <a:off x="457200" y="2057400"/>
-            <a:ext cx="5486400" cy="3474720"/>
-          </a:xfrm>
-          <a:prstGeom prst="roundRect">
-            <a:avLst>
-              <a:gd name="adj" fmla="val 1053"/>
+              <a:gd name="adj" fmla="val 909"/>
             </a:avLst>
           </a:prstGeom>
           <a:solidFill>
@@ -2991,14 +3158,14 @@
       </p:sp>
       <p:sp>
         <p:nvSpPr>
-          <p:cNvPr id="8" name="Text 6"/>
-          <p:cNvSpPr/>
-          <p:nvPr/>
-        </p:nvSpPr>
-        <p:spPr>
-          <a:xfrm>
-            <a:off x="731520" y="2331720"/>
-            <a:ext cx="4937760" cy="365760"/>
+          <p:cNvPr id="8" name="Text 5"/>
+          <p:cNvSpPr/>
+          <p:nvPr/>
+        </p:nvSpPr>
+        <p:spPr>
+          <a:xfrm>
+            <a:off x="7909560" y="2331720"/>
+            <a:ext cx="3566160" cy="640080"/>
           </a:xfrm>
           <a:prstGeom prst="rect">
             <a:avLst/>
@@ -3014,7 +3181,7 @@
               <a:buNone/>
             </a:pPr>
             <a:r>
-              <a:rPr lang="en-US" sz="1400" b="1" dirty="0">
+              <a:rPr lang="en-US" sz="2600" b="1" dirty="0">
                 <a:solidFill>
                   <a:srgbClr val="FAB900"/>
                 </a:solidFill>
@@ -3022,61 +3189,64 @@
                 <a:ea typeface="Courier New" pitchFamily="34" charset="-122"/>
                 <a:cs typeface="Courier New" pitchFamily="34" charset="-120"/>
               </a:rPr>
-              <a:t>schema-less (адаптер)</a:t>
-            </a:r>
-            <a:endParaRPr lang="en-US" sz="1400" dirty="0"/>
-          </a:p>
-        </p:txBody>
-      </p:sp>
-      <p:sp>
-        <p:nvSpPr>
-          <p:cNvPr id="9" name="Text 7"/>
-          <p:cNvSpPr/>
-          <p:nvPr/>
-        </p:nvSpPr>
-        <p:spPr>
-          <a:xfrm>
-            <a:off x="731520" y="2743200"/>
-            <a:ext cx="4937760" cy="914400"/>
-          </a:xfrm>
-          <a:prstGeom prst="rect">
-            <a:avLst/>
-          </a:prstGeom>
-          <a:noFill/>
-          <a:ln/>
-        </p:spPr>
-        <p:txBody>
-          <a:bodyPr wrap="square" lIns="0" tIns="0" rIns="0" bIns="0" rtlCol="0" anchor="ctr"/>
+              <a:t>9.9 → 27.84%</a:t>
+            </a:r>
+            <a:endParaRPr lang="en-US" sz="2600" dirty="0"/>
+          </a:p>
+        </p:txBody>
+      </p:sp>
+      <p:sp>
+        <p:nvSpPr>
+          <p:cNvPr id="9" name="Text 6"/>
+          <p:cNvSpPr/>
+          <p:nvPr/>
+        </p:nvSpPr>
+        <p:spPr>
+          <a:xfrm>
+            <a:off x="7909560" y="2971800"/>
+            <a:ext cx="3566160" cy="640080"/>
+          </a:xfrm>
+          <a:prstGeom prst="rect">
+            <a:avLst/>
+          </a:prstGeom>
+          <a:noFill/>
+          <a:ln/>
+        </p:spPr>
+        <p:txBody>
+          <a:bodyPr wrap="square" lIns="0" tIns="0" rIns="0" bIns="0" rtlCol="0" anchor="t"/>
           <a:lstStyle/>
           <a:p>
             <a:pPr indent="0" marL="0">
-              <a:buNone/>
-            </a:pPr>
-            <a:r>
-              <a:rPr lang="en-US" sz="5000" b="1" dirty="0">
+              <a:lnSpc>
+                <a:spcPts val="1900"/>
+              </a:lnSpc>
+              <a:buNone/>
+            </a:pPr>
+            <a:r>
+              <a:rPr lang="en-US" sz="1500" dirty="0">
                 <a:solidFill>
                   <a:srgbClr val="FFFFFF"/>
                 </a:solidFill>
-                <a:latin typeface="Courier New" pitchFamily="34" charset="0"/>
-                <a:ea typeface="Courier New" pitchFamily="34" charset="-122"/>
-                <a:cs typeface="Courier New" pitchFamily="34" charset="-120"/>
-              </a:rPr>
-              <a:t>3 / 3 PASS</a:t>
-            </a:r>
-            <a:endParaRPr lang="en-US" sz="5000" dirty="0"/>
-          </a:p>
-        </p:txBody>
-      </p:sp>
-      <p:sp>
-        <p:nvSpPr>
-          <p:cNvPr id="10" name="Text 8"/>
-          <p:cNvSpPr/>
-          <p:nvPr/>
-        </p:nvSpPr>
-        <p:spPr>
-          <a:xfrm>
-            <a:off x="731520" y="3794760"/>
-            <a:ext cx="4937760" cy="1371600"/>
+                <a:latin typeface="Calibri" pitchFamily="34" charset="0"/>
+                <a:ea typeface="Calibri" pitchFamily="34" charset="-122"/>
+                <a:cs typeface="Calibri" pitchFamily="34" charset="-120"/>
+              </a:rPr>
+              <a:t>рост EX при росте данных ×23 — плато нет.</a:t>
+            </a:r>
+            <a:endParaRPr lang="en-US" sz="1500" dirty="0"/>
+          </a:p>
+        </p:txBody>
+      </p:sp>
+      <p:sp>
+        <p:nvSpPr>
+          <p:cNvPr id="10" name="Text 7"/>
+          <p:cNvSpPr/>
+          <p:nvPr/>
+        </p:nvSpPr>
+        <p:spPr>
+          <a:xfrm>
+            <a:off x="7909560" y="3703320"/>
+            <a:ext cx="3566160" cy="2103120"/>
           </a:xfrm>
           <a:prstGeom prst="rect">
             <a:avLst/>
@@ -3095,7 +3265,7 @@
               <a:buNone/>
             </a:pPr>
             <a:r>
-              <a:rPr lang="en-US" sz="1500" dirty="0">
+              <a:rPr lang="en-US" sz="1400" dirty="0">
                 <a:solidFill>
                   <a:srgbClr val="D0E4FF"/>
                 </a:solidFill>
@@ -3103,49 +3273,22 @@
                 <a:ea typeface="Calibri" pitchFamily="34" charset="-122"/>
                 <a:cs typeface="Calibri" pitchFamily="34" charset="-120"/>
               </a:rPr>
-              <a:t>Верный SQL по всем трём базам без единого упоминания схемы в промпте.</a:t>
-            </a:r>
-            <a:endParaRPr lang="en-US" sz="1500" dirty="0"/>
-          </a:p>
-        </p:txBody>
-      </p:sp>
-      <p:sp>
-        <p:nvSpPr>
-          <p:cNvPr id="11" name="Shape 9"/>
-          <p:cNvSpPr/>
-          <p:nvPr/>
-        </p:nvSpPr>
-        <p:spPr>
-          <a:xfrm>
-            <a:off x="6217920" y="2057400"/>
-            <a:ext cx="5486400" cy="3474720"/>
-          </a:xfrm>
-          <a:prstGeom prst="roundRect">
-            <a:avLst>
-              <a:gd name="adj" fmla="val 1053"/>
-            </a:avLst>
-          </a:prstGeom>
-          <a:solidFill>
-            <a:srgbClr val="EEF4FF"/>
-          </a:solidFill>
-          <a:ln w="12700">
-            <a:solidFill>
-              <a:srgbClr val="C9B894"/>
-            </a:solidFill>
-            <a:prstDash val="solid"/>
-          </a:ln>
-        </p:spPr>
-      </p:sp>
-      <p:sp>
-        <p:nvSpPr>
-          <p:cNvPr id="12" name="Text 10"/>
-          <p:cNvSpPr/>
-          <p:nvPr/>
-        </p:nvSpPr>
-        <p:spPr>
-          <a:xfrm>
-            <a:off x="6492240" y="2331720"/>
-            <a:ext cx="4937760" cy="365760"/>
+              <a:t>На 347 парах lora ещё проигрывала baseline — масштаб синтетики перевернул знак.</a:t>
+            </a:r>
+            <a:endParaRPr lang="en-US" sz="1400" dirty="0"/>
+          </a:p>
+        </p:txBody>
+      </p:sp>
+      <p:sp>
+        <p:nvSpPr>
+          <p:cNvPr id="11" name="Text 8"/>
+          <p:cNvSpPr/>
+          <p:nvPr/>
+        </p:nvSpPr>
+        <p:spPr>
+          <a:xfrm>
+            <a:off x="457200" y="6455664"/>
+            <a:ext cx="6400800" cy="274320"/>
           </a:xfrm>
           <a:prstGeom prst="rect">
             <a:avLst/>
@@ -3161,7 +3304,46 @@
               <a:buNone/>
             </a:pPr>
             <a:r>
-              <a:rPr lang="en-US" sz="1400" b="1" dirty="0">
+              <a:rPr lang="en-US" sz="900" dirty="0">
+                <a:solidFill>
+                  <a:srgbClr val="444444"/>
+                </a:solidFill>
+                <a:latin typeface="Calibri" pitchFamily="34" charset="0"/>
+                <a:ea typeface="Calibri" pitchFamily="34" charset="-122"/>
+                <a:cs typeface="Calibri" pitchFamily="34" charset="-120"/>
+              </a:rPr>
+              <a:t>DB2Model · ветка SFT/LoRA</a:t>
+            </a:r>
+            <a:endParaRPr lang="en-US" sz="900" dirty="0"/>
+          </a:p>
+        </p:txBody>
+      </p:sp>
+      <p:sp>
+        <p:nvSpPr>
+          <p:cNvPr id="12" name="Text 9"/>
+          <p:cNvSpPr/>
+          <p:nvPr/>
+        </p:nvSpPr>
+        <p:spPr>
+          <a:xfrm>
+            <a:off x="10881360" y="6455664"/>
+            <a:ext cx="822960" cy="274320"/>
+          </a:xfrm>
+          <a:prstGeom prst="rect">
+            <a:avLst/>
+          </a:prstGeom>
+          <a:noFill/>
+          <a:ln/>
+        </p:spPr>
+        <p:txBody>
+          <a:bodyPr wrap="square" lIns="0" tIns="0" rIns="0" bIns="0" rtlCol="0" anchor="ctr"/>
+          <a:lstStyle/>
+          <a:p>
+            <a:pPr algn="r" indent="0" marL="0">
+              <a:buNone/>
+            </a:pPr>
+            <a:r>
+              <a:rPr lang="en-US" sz="900" dirty="0">
                 <a:solidFill>
                   <a:srgbClr val="444444"/>
                 </a:solidFill>
@@ -3169,166 +3351,7 @@
                 <a:ea typeface="Courier New" pitchFamily="34" charset="-122"/>
                 <a:cs typeface="Courier New" pitchFamily="34" charset="-120"/>
               </a:rPr>
-              <a:t>baseline (базовая модель + схема)</a:t>
-            </a:r>
-            <a:endParaRPr lang="en-US" sz="1400" dirty="0"/>
-          </a:p>
-        </p:txBody>
-      </p:sp>
-      <p:sp>
-        <p:nvSpPr>
-          <p:cNvPr id="13" name="Text 11"/>
-          <p:cNvSpPr/>
-          <p:nvPr/>
-        </p:nvSpPr>
-        <p:spPr>
-          <a:xfrm>
-            <a:off x="6492240" y="2743200"/>
-            <a:ext cx="4937760" cy="914400"/>
-          </a:xfrm>
-          <a:prstGeom prst="rect">
-            <a:avLst/>
-          </a:prstGeom>
-          <a:noFill/>
-          <a:ln/>
-        </p:spPr>
-        <p:txBody>
-          <a:bodyPr wrap="square" lIns="0" tIns="0" rIns="0" bIns="0" rtlCol="0" anchor="ctr"/>
-          <a:lstStyle/>
-          <a:p>
-            <a:pPr indent="0" marL="0">
-              <a:buNone/>
-            </a:pPr>
-            <a:r>
-              <a:rPr lang="en-US" sz="5000" b="1" dirty="0">
-                <a:solidFill>
-                  <a:srgbClr val="102D69"/>
-                </a:solidFill>
-                <a:latin typeface="Courier New" pitchFamily="34" charset="0"/>
-                <a:ea typeface="Courier New" pitchFamily="34" charset="-122"/>
-                <a:cs typeface="Courier New" pitchFamily="34" charset="-120"/>
-              </a:rPr>
-              <a:t>2 / 3 PASS</a:t>
-            </a:r>
-            <a:endParaRPr lang="en-US" sz="5000" dirty="0"/>
-          </a:p>
-        </p:txBody>
-      </p:sp>
-      <p:sp>
-        <p:nvSpPr>
-          <p:cNvPr id="14" name="Text 12"/>
-          <p:cNvSpPr/>
-          <p:nvPr/>
-        </p:nvSpPr>
-        <p:spPr>
-          <a:xfrm>
-            <a:off x="6492240" y="3794760"/>
-            <a:ext cx="4937760" cy="1371600"/>
-          </a:xfrm>
-          <a:prstGeom prst="rect">
-            <a:avLst/>
-          </a:prstGeom>
-          <a:noFill/>
-          <a:ln/>
-        </p:spPr>
-        <p:txBody>
-          <a:bodyPr wrap="square" lIns="0" tIns="0" rIns="0" bIns="0" rtlCol="0" anchor="t"/>
-          <a:lstStyle/>
-          <a:p>
-            <a:pPr indent="0" marL="0">
-              <a:lnSpc>
-                <a:spcPts val="2000"/>
-              </a:lnSpc>
-              <a:buNone/>
-            </a:pPr>
-            <a:r>
-              <a:rPr lang="en-US" sz="1500" dirty="0">
-                <a:solidFill>
-                  <a:srgbClr val="444444"/>
-                </a:solidFill>
-                <a:latin typeface="Calibri" pitchFamily="34" charset="0"/>
-                <a:ea typeface="Calibri" pitchFamily="34" charset="-122"/>
-                <a:cs typeface="Calibri" pitchFamily="34" charset="-120"/>
-              </a:rPr>
-              <a:t>На codebase_community базовая модель СО СХЕМОЙ сослалась на несуществующую колонку userid.</a:t>
-            </a:r>
-            <a:endParaRPr lang="en-US" sz="1500" dirty="0"/>
-          </a:p>
-        </p:txBody>
-      </p:sp>
-      <p:sp>
-        <p:nvSpPr>
-          <p:cNvPr id="15" name="Text 13"/>
-          <p:cNvSpPr/>
-          <p:nvPr/>
-        </p:nvSpPr>
-        <p:spPr>
-          <a:xfrm>
-            <a:off x="457200" y="6455664"/>
-            <a:ext cx="6400800" cy="274320"/>
-          </a:xfrm>
-          <a:prstGeom prst="rect">
-            <a:avLst/>
-          </a:prstGeom>
-          <a:noFill/>
-          <a:ln/>
-        </p:spPr>
-        <p:txBody>
-          <a:bodyPr wrap="square" lIns="0" tIns="0" rIns="0" bIns="0" rtlCol="0" anchor="ctr"/>
-          <a:lstStyle/>
-          <a:p>
-            <a:pPr indent="0" marL="0">
-              <a:buNone/>
-            </a:pPr>
-            <a:r>
-              <a:rPr lang="en-US" sz="900" dirty="0">
-                <a:solidFill>
-                  <a:srgbClr val="444444"/>
-                </a:solidFill>
-                <a:latin typeface="Calibri" pitchFamily="34" charset="0"/>
-                <a:ea typeface="Calibri" pitchFamily="34" charset="-122"/>
-                <a:cs typeface="Calibri" pitchFamily="34" charset="-120"/>
-              </a:rPr>
-              <a:t>DB2Model · ветка SFT/LoRA</a:t>
-            </a:r>
-            <a:endParaRPr lang="en-US" sz="900" dirty="0"/>
-          </a:p>
-        </p:txBody>
-      </p:sp>
-      <p:sp>
-        <p:nvSpPr>
-          <p:cNvPr id="16" name="Text 14"/>
-          <p:cNvSpPr/>
-          <p:nvPr/>
-        </p:nvSpPr>
-        <p:spPr>
-          <a:xfrm>
-            <a:off x="10881360" y="6455664"/>
-            <a:ext cx="822960" cy="274320"/>
-          </a:xfrm>
-          <a:prstGeom prst="rect">
-            <a:avLst/>
-          </a:prstGeom>
-          <a:noFill/>
-          <a:ln/>
-        </p:spPr>
-        <p:txBody>
-          <a:bodyPr wrap="square" lIns="0" tIns="0" rIns="0" bIns="0" rtlCol="0" anchor="ctr"/>
-          <a:lstStyle/>
-          <a:p>
-            <a:pPr algn="r" indent="0" marL="0">
-              <a:buNone/>
-            </a:pPr>
-            <a:r>
-              <a:rPr lang="en-US" sz="900" dirty="0">
-                <a:solidFill>
-                  <a:srgbClr val="444444"/>
-                </a:solidFill>
-                <a:latin typeface="Courier New" pitchFamily="34" charset="0"/>
-                <a:ea typeface="Courier New" pitchFamily="34" charset="-122"/>
-                <a:cs typeface="Courier New" pitchFamily="34" charset="-120"/>
-              </a:rPr>
-              <a:t>9 / 13</a:t>
+              <a:t>10 / 15</a:t>
             </a:r>
             <a:endParaRPr lang="en-US" sz="900" dirty="0"/>
           </a:p>
@@ -3453,7 +3476,7 @@
                 <a:ea typeface="Calibri" pitchFamily="34" charset="-122"/>
                 <a:cs typeface="Calibri" pitchFamily="34" charset="-120"/>
               </a:rPr>
-              <a:t>Финальная таблица — обе ветки</a:t>
+              <a:t>Что сработало и что нет</a:t>
             </a:r>
             <a:endParaRPr lang="en-US" sz="3200" dirty="0"/>
           </a:p>
@@ -3468,7 +3491,7 @@
         <p:spPr>
           <a:xfrm>
             <a:off x="457200" y="1097280"/>
-            <a:ext cx="10058400" cy="365760"/>
+            <a:ext cx="9966960" cy="365760"/>
           </a:xfrm>
           <a:prstGeom prst="rect">
             <a:avLst/>
@@ -3492,6 +3515,1452 @@
                 <a:ea typeface="Calibri" pitchFamily="34" charset="-122"/>
                 <a:cs typeface="Calibri" pitchFamily="34" charset="-120"/>
               </a:rPr>
+              <a:t>Что мы проверяли отдельно — и что из этого доказано</a:t>
+            </a:r>
+            <a:endParaRPr lang="en-US" sz="1500" dirty="0"/>
+          </a:p>
+        </p:txBody>
+      </p:sp>
+      <p:sp>
+        <p:nvSpPr>
+          <p:cNvPr id="6" name="Shape 4"/>
+          <p:cNvSpPr/>
+          <p:nvPr/>
+        </p:nvSpPr>
+        <p:spPr>
+          <a:xfrm>
+            <a:off x="457200" y="1965960"/>
+            <a:ext cx="11247120" cy="1005840"/>
+          </a:xfrm>
+          <a:prstGeom prst="roundRect">
+            <a:avLst>
+              <a:gd name="adj" fmla="val 3636"/>
+            </a:avLst>
+          </a:prstGeom>
+          <a:solidFill>
+            <a:srgbClr val="EEF4FF"/>
+          </a:solidFill>
+          <a:ln w="12700">
+            <a:solidFill>
+              <a:srgbClr val="C9B894"/>
+            </a:solidFill>
+            <a:prstDash val="solid"/>
+          </a:ln>
+        </p:spPr>
+      </p:sp>
+      <p:sp>
+        <p:nvSpPr>
+          <p:cNvPr id="7" name="Shape 5"/>
+          <p:cNvSpPr/>
+          <p:nvPr/>
+        </p:nvSpPr>
+        <p:spPr>
+          <a:xfrm>
+            <a:off x="731520" y="2221992"/>
+            <a:ext cx="502920" cy="502920"/>
+          </a:xfrm>
+          <a:prstGeom prst="ellipse">
+            <a:avLst/>
+          </a:prstGeom>
+          <a:solidFill>
+            <a:srgbClr val="5C7A3A"/>
+          </a:solidFill>
+          <a:ln/>
+        </p:spPr>
+      </p:sp>
+      <p:sp>
+        <p:nvSpPr>
+          <p:cNvPr id="8" name="Text 6"/>
+          <p:cNvSpPr/>
+          <p:nvPr/>
+        </p:nvSpPr>
+        <p:spPr>
+          <a:xfrm>
+            <a:off x="731520" y="2194560"/>
+            <a:ext cx="502920" cy="502920"/>
+          </a:xfrm>
+          <a:prstGeom prst="rect">
+            <a:avLst/>
+          </a:prstGeom>
+          <a:noFill/>
+          <a:ln/>
+        </p:spPr>
+        <p:txBody>
+          <a:bodyPr wrap="square" lIns="0" tIns="0" rIns="0" bIns="0" rtlCol="0" anchor="ctr"/>
+          <a:lstStyle/>
+          <a:p>
+            <a:pPr algn="ctr" indent="0" marL="0">
+              <a:buNone/>
+            </a:pPr>
+            <a:r>
+              <a:rPr lang="en-US" sz="2400" b="1" dirty="0">
+                <a:solidFill>
+                  <a:srgbClr val="FFFFFF"/>
+                </a:solidFill>
+                <a:latin typeface="Courier New" pitchFamily="34" charset="0"/>
+                <a:ea typeface="Courier New" pitchFamily="34" charset="-122"/>
+                <a:cs typeface="Courier New" pitchFamily="34" charset="-120"/>
+              </a:rPr>
+              <a:t>+</a:t>
+            </a:r>
+            <a:endParaRPr lang="en-US" sz="2400" dirty="0"/>
+          </a:p>
+        </p:txBody>
+      </p:sp>
+      <p:sp>
+        <p:nvSpPr>
+          <p:cNvPr id="9" name="Text 7"/>
+          <p:cNvSpPr/>
+          <p:nvPr/>
+        </p:nvSpPr>
+        <p:spPr>
+          <a:xfrm>
+            <a:off x="1463040" y="2093976"/>
+            <a:ext cx="3566160" cy="777240"/>
+          </a:xfrm>
+          <a:prstGeom prst="rect">
+            <a:avLst/>
+          </a:prstGeom>
+          <a:noFill/>
+          <a:ln/>
+        </p:spPr>
+        <p:txBody>
+          <a:bodyPr wrap="square" lIns="0" tIns="0" rIns="0" bIns="0" rtlCol="0" anchor="ctr"/>
+          <a:lstStyle/>
+          <a:p>
+            <a:pPr indent="0" marL="0">
+              <a:buNone/>
+            </a:pPr>
+            <a:r>
+              <a:rPr lang="en-US" sz="1600" b="1" dirty="0">
+                <a:solidFill>
+                  <a:srgbClr val="102D69"/>
+                </a:solidFill>
+                <a:latin typeface="Calibri" pitchFamily="34" charset="0"/>
+                <a:ea typeface="Calibri" pitchFamily="34" charset="-122"/>
+                <a:cs typeface="Calibri" pitchFamily="34" charset="-120"/>
+              </a:rPr>
+              <a:t>Больше данных</a:t>
+            </a:r>
+            <a:endParaRPr lang="en-US" sz="1600" dirty="0"/>
+          </a:p>
+        </p:txBody>
+      </p:sp>
+      <p:sp>
+        <p:nvSpPr>
+          <p:cNvPr id="10" name="Text 8"/>
+          <p:cNvSpPr/>
+          <p:nvPr/>
+        </p:nvSpPr>
+        <p:spPr>
+          <a:xfrm>
+            <a:off x="5120640" y="2093976"/>
+            <a:ext cx="6400800" cy="777240"/>
+          </a:xfrm>
+          <a:prstGeom prst="rect">
+            <a:avLst/>
+          </a:prstGeom>
+          <a:noFill/>
+          <a:ln/>
+        </p:spPr>
+        <p:txBody>
+          <a:bodyPr wrap="square" lIns="0" tIns="0" rIns="0" bIns="0" rtlCol="0" anchor="ctr"/>
+          <a:lstStyle/>
+          <a:p>
+            <a:pPr indent="0" marL="0">
+              <a:lnSpc>
+                <a:spcPts val="1600"/>
+              </a:lnSpc>
+              <a:buNone/>
+            </a:pPr>
+            <a:r>
+              <a:rPr lang="en-US" sz="1300" dirty="0">
+                <a:solidFill>
+                  <a:srgbClr val="444444"/>
+                </a:solidFill>
+                <a:latin typeface="Calibri" pitchFamily="34" charset="0"/>
+                <a:ea typeface="Calibri" pitchFamily="34" charset="-122"/>
+                <a:cs typeface="Calibri" pitchFamily="34" charset="-120"/>
+              </a:rPr>
+              <a:t>доказан: EX растёт 9.9 → 27.84% с ростом синтетики, плато нет</a:t>
+            </a:r>
+            <a:endParaRPr lang="en-US" sz="1300" dirty="0"/>
+          </a:p>
+        </p:txBody>
+      </p:sp>
+      <p:sp>
+        <p:nvSpPr>
+          <p:cNvPr id="11" name="Shape 9"/>
+          <p:cNvSpPr/>
+          <p:nvPr/>
+        </p:nvSpPr>
+        <p:spPr>
+          <a:xfrm>
+            <a:off x="457200" y="3081528"/>
+            <a:ext cx="11247120" cy="1005840"/>
+          </a:xfrm>
+          <a:prstGeom prst="roundRect">
+            <a:avLst>
+              <a:gd name="adj" fmla="val 3636"/>
+            </a:avLst>
+          </a:prstGeom>
+          <a:solidFill>
+            <a:srgbClr val="EEF4FF"/>
+          </a:solidFill>
+          <a:ln w="12700">
+            <a:solidFill>
+              <a:srgbClr val="C9B894"/>
+            </a:solidFill>
+            <a:prstDash val="solid"/>
+          </a:ln>
+        </p:spPr>
+      </p:sp>
+      <p:sp>
+        <p:nvSpPr>
+          <p:cNvPr id="12" name="Shape 10"/>
+          <p:cNvSpPr/>
+          <p:nvPr/>
+        </p:nvSpPr>
+        <p:spPr>
+          <a:xfrm>
+            <a:off x="731520" y="3337560"/>
+            <a:ext cx="502920" cy="502920"/>
+          </a:xfrm>
+          <a:prstGeom prst="ellipse">
+            <a:avLst/>
+          </a:prstGeom>
+          <a:solidFill>
+            <a:srgbClr val="E61E3C"/>
+          </a:solidFill>
+          <a:ln/>
+        </p:spPr>
+      </p:sp>
+      <p:sp>
+        <p:nvSpPr>
+          <p:cNvPr id="13" name="Text 11"/>
+          <p:cNvSpPr/>
+          <p:nvPr/>
+        </p:nvSpPr>
+        <p:spPr>
+          <a:xfrm>
+            <a:off x="731520" y="3310128"/>
+            <a:ext cx="502920" cy="502920"/>
+          </a:xfrm>
+          <a:prstGeom prst="rect">
+            <a:avLst/>
+          </a:prstGeom>
+          <a:noFill/>
+          <a:ln/>
+        </p:spPr>
+        <p:txBody>
+          <a:bodyPr wrap="square" lIns="0" tIns="0" rIns="0" bIns="0" rtlCol="0" anchor="ctr"/>
+          <a:lstStyle/>
+          <a:p>
+            <a:pPr algn="ctr" indent="0" marL="0">
+              <a:buNone/>
+            </a:pPr>
+            <a:r>
+              <a:rPr lang="en-US" sz="2400" b="1" dirty="0">
+                <a:solidFill>
+                  <a:srgbClr val="FFFFFF"/>
+                </a:solidFill>
+                <a:latin typeface="Courier New" pitchFamily="34" charset="0"/>
+                <a:ea typeface="Courier New" pitchFamily="34" charset="-122"/>
+                <a:cs typeface="Courier New" pitchFamily="34" charset="-120"/>
+              </a:rPr>
+              <a:t>−</a:t>
+            </a:r>
+            <a:endParaRPr lang="en-US" sz="2400" dirty="0"/>
+          </a:p>
+        </p:txBody>
+      </p:sp>
+      <p:sp>
+        <p:nvSpPr>
+          <p:cNvPr id="14" name="Text 12"/>
+          <p:cNvSpPr/>
+          <p:nvPr/>
+        </p:nvSpPr>
+        <p:spPr>
+          <a:xfrm>
+            <a:off x="1463040" y="3209544"/>
+            <a:ext cx="3566160" cy="777240"/>
+          </a:xfrm>
+          <a:prstGeom prst="rect">
+            <a:avLst/>
+          </a:prstGeom>
+          <a:noFill/>
+          <a:ln/>
+        </p:spPr>
+        <p:txBody>
+          <a:bodyPr wrap="square" lIns="0" tIns="0" rIns="0" bIns="0" rtlCol="0" anchor="ctr"/>
+          <a:lstStyle/>
+          <a:p>
+            <a:pPr indent="0" marL="0">
+              <a:buNone/>
+            </a:pPr>
+            <a:r>
+              <a:rPr lang="en-US" sz="1600" b="1" dirty="0">
+                <a:solidFill>
+                  <a:srgbClr val="102D69"/>
+                </a:solidFill>
+                <a:latin typeface="Calibri" pitchFamily="34" charset="0"/>
+                <a:ea typeface="Calibri" pitchFamily="34" charset="-122"/>
+                <a:cs typeface="Calibri" pitchFamily="34" charset="-120"/>
+              </a:rPr>
+              <a:t>Reasoning (Think2SQL)</a:t>
+            </a:r>
+            <a:endParaRPr lang="en-US" sz="1600" dirty="0"/>
+          </a:p>
+        </p:txBody>
+      </p:sp>
+      <p:sp>
+        <p:nvSpPr>
+          <p:cNvPr id="15" name="Text 13"/>
+          <p:cNvSpPr/>
+          <p:nvPr/>
+        </p:nvSpPr>
+        <p:spPr>
+          <a:xfrm>
+            <a:off x="5120640" y="3209544"/>
+            <a:ext cx="6400800" cy="777240"/>
+          </a:xfrm>
+          <a:prstGeom prst="rect">
+            <a:avLst/>
+          </a:prstGeom>
+          <a:noFill/>
+          <a:ln/>
+        </p:spPr>
+        <p:txBody>
+          <a:bodyPr wrap="square" lIns="0" tIns="0" rIns="0" bIns="0" rtlCol="0" anchor="ctr"/>
+          <a:lstStyle/>
+          <a:p>
+            <a:pPr indent="0" marL="0">
+              <a:lnSpc>
+                <a:spcPts val="1600"/>
+              </a:lnSpc>
+              <a:buNone/>
+            </a:pPr>
+            <a:r>
+              <a:rPr lang="en-US" sz="1300" dirty="0">
+                <a:solidFill>
+                  <a:srgbClr val="444444"/>
+                </a:solidFill>
+                <a:latin typeface="Calibri" pitchFamily="34" charset="0"/>
+                <a:ea typeface="Calibri" pitchFamily="34" charset="-122"/>
+                <a:cs typeface="Calibri" pitchFamily="34" charset="-120"/>
+              </a:rPr>
+              <a:t>доказан, но ВРЕДИТ: учили ещё и цепочке рассуждений — модель разучилась помнить схему, −10.3 п.п.</a:t>
+            </a:r>
+            <a:endParaRPr lang="en-US" sz="1300" dirty="0"/>
+          </a:p>
+        </p:txBody>
+      </p:sp>
+      <p:sp>
+        <p:nvSpPr>
+          <p:cNvPr id="16" name="Shape 14"/>
+          <p:cNvSpPr/>
+          <p:nvPr/>
+        </p:nvSpPr>
+        <p:spPr>
+          <a:xfrm>
+            <a:off x="457200" y="4197096"/>
+            <a:ext cx="11247120" cy="1005840"/>
+          </a:xfrm>
+          <a:prstGeom prst="roundRect">
+            <a:avLst>
+              <a:gd name="adj" fmla="val 3636"/>
+            </a:avLst>
+          </a:prstGeom>
+          <a:solidFill>
+            <a:srgbClr val="EEF4FF"/>
+          </a:solidFill>
+          <a:ln w="12700">
+            <a:solidFill>
+              <a:srgbClr val="C9B894"/>
+            </a:solidFill>
+            <a:prstDash val="solid"/>
+          </a:ln>
+        </p:spPr>
+      </p:sp>
+      <p:sp>
+        <p:nvSpPr>
+          <p:cNvPr id="17" name="Shape 15"/>
+          <p:cNvSpPr/>
+          <p:nvPr/>
+        </p:nvSpPr>
+        <p:spPr>
+          <a:xfrm>
+            <a:off x="731520" y="4453128"/>
+            <a:ext cx="502920" cy="502920"/>
+          </a:xfrm>
+          <a:prstGeom prst="ellipse">
+            <a:avLst/>
+          </a:prstGeom>
+          <a:solidFill>
+            <a:srgbClr val="444444"/>
+          </a:solidFill>
+          <a:ln/>
+        </p:spPr>
+      </p:sp>
+      <p:sp>
+        <p:nvSpPr>
+          <p:cNvPr id="18" name="Text 16"/>
+          <p:cNvSpPr/>
+          <p:nvPr/>
+        </p:nvSpPr>
+        <p:spPr>
+          <a:xfrm>
+            <a:off x="731520" y="4425696"/>
+            <a:ext cx="502920" cy="502920"/>
+          </a:xfrm>
+          <a:prstGeom prst="rect">
+            <a:avLst/>
+          </a:prstGeom>
+          <a:noFill/>
+          <a:ln/>
+        </p:spPr>
+        <p:txBody>
+          <a:bodyPr wrap="square" lIns="0" tIns="0" rIns="0" bIns="0" rtlCol="0" anchor="ctr"/>
+          <a:lstStyle/>
+          <a:p>
+            <a:pPr algn="ctr" indent="0" marL="0">
+              <a:buNone/>
+            </a:pPr>
+            <a:r>
+              <a:rPr lang="en-US" sz="2400" b="1" dirty="0">
+                <a:solidFill>
+                  <a:srgbClr val="FFFFFF"/>
+                </a:solidFill>
+                <a:latin typeface="Courier New" pitchFamily="34" charset="0"/>
+                <a:ea typeface="Courier New" pitchFamily="34" charset="-122"/>
+                <a:cs typeface="Courier New" pitchFamily="34" charset="-120"/>
+              </a:rPr>
+              <a:t>≈</a:t>
+            </a:r>
+            <a:endParaRPr lang="en-US" sz="2400" dirty="0"/>
+          </a:p>
+        </p:txBody>
+      </p:sp>
+      <p:sp>
+        <p:nvSpPr>
+          <p:cNvPr id="19" name="Text 17"/>
+          <p:cNvSpPr/>
+          <p:nvPr/>
+        </p:nvSpPr>
+        <p:spPr>
+          <a:xfrm>
+            <a:off x="1463040" y="4325112"/>
+            <a:ext cx="3566160" cy="777240"/>
+          </a:xfrm>
+          <a:prstGeom prst="rect">
+            <a:avLst/>
+          </a:prstGeom>
+          <a:noFill/>
+          <a:ln/>
+        </p:spPr>
+        <p:txBody>
+          <a:bodyPr wrap="square" lIns="0" tIns="0" rIns="0" bIns="0" rtlCol="0" anchor="ctr"/>
+          <a:lstStyle/>
+          <a:p>
+            <a:pPr indent="0" marL="0">
+              <a:buNone/>
+            </a:pPr>
+            <a:r>
+              <a:rPr lang="en-US" sz="1600" b="1" dirty="0">
+                <a:solidFill>
+                  <a:srgbClr val="102D69"/>
+                </a:solidFill>
+                <a:latin typeface="Calibri" pitchFamily="34" charset="0"/>
+                <a:ea typeface="Calibri" pitchFamily="34" charset="-122"/>
+                <a:cs typeface="Calibri" pitchFamily="34" charset="-120"/>
+              </a:rPr>
+              <a:t>Мультизадачность (ROUTE)</a:t>
+            </a:r>
+            <a:endParaRPr lang="en-US" sz="1600" dirty="0"/>
+          </a:p>
+        </p:txBody>
+      </p:sp>
+      <p:sp>
+        <p:nvSpPr>
+          <p:cNvPr id="20" name="Text 18"/>
+          <p:cNvSpPr/>
+          <p:nvPr/>
+        </p:nvSpPr>
+        <p:spPr>
+          <a:xfrm>
+            <a:off x="5120640" y="4325112"/>
+            <a:ext cx="6400800" cy="777240"/>
+          </a:xfrm>
+          <a:prstGeom prst="rect">
+            <a:avLst/>
+          </a:prstGeom>
+          <a:noFill/>
+          <a:ln/>
+        </p:spPr>
+        <p:txBody>
+          <a:bodyPr wrap="square" lIns="0" tIns="0" rIns="0" bIns="0" rtlCol="0" anchor="ctr"/>
+          <a:lstStyle/>
+          <a:p>
+            <a:pPr indent="0" marL="0">
+              <a:lnSpc>
+                <a:spcPts val="1600"/>
+              </a:lnSpc>
+              <a:buNone/>
+            </a:pPr>
+            <a:r>
+              <a:rPr lang="en-US" sz="1300" dirty="0">
+                <a:solidFill>
+                  <a:srgbClr val="444444"/>
+                </a:solidFill>
+                <a:latin typeface="Calibri" pitchFamily="34" charset="0"/>
+                <a:ea typeface="Calibri" pitchFamily="34" charset="-122"/>
+                <a:cs typeface="Calibri" pitchFamily="34" charset="-120"/>
+              </a:rPr>
+              <a:t>учили не только SQL, но и вспомогательным задачам. Результат 28.57% — в пределах шума, прироста нет → выключено</a:t>
+            </a:r>
+            <a:endParaRPr lang="en-US" sz="1300" dirty="0"/>
+          </a:p>
+        </p:txBody>
+      </p:sp>
+      <p:sp>
+        <p:nvSpPr>
+          <p:cNvPr id="21" name="Shape 19"/>
+          <p:cNvSpPr/>
+          <p:nvPr/>
+        </p:nvSpPr>
+        <p:spPr>
+          <a:xfrm>
+            <a:off x="457200" y="5312664"/>
+            <a:ext cx="11247120" cy="1005840"/>
+          </a:xfrm>
+          <a:prstGeom prst="roundRect">
+            <a:avLst>
+              <a:gd name="adj" fmla="val 3636"/>
+            </a:avLst>
+          </a:prstGeom>
+          <a:solidFill>
+            <a:srgbClr val="EEF4FF"/>
+          </a:solidFill>
+          <a:ln w="12700">
+            <a:solidFill>
+              <a:srgbClr val="C9B894"/>
+            </a:solidFill>
+            <a:prstDash val="solid"/>
+          </a:ln>
+        </p:spPr>
+      </p:sp>
+      <p:sp>
+        <p:nvSpPr>
+          <p:cNvPr id="22" name="Shape 20"/>
+          <p:cNvSpPr/>
+          <p:nvPr/>
+        </p:nvSpPr>
+        <p:spPr>
+          <a:xfrm>
+            <a:off x="731520" y="5568696"/>
+            <a:ext cx="502920" cy="502920"/>
+          </a:xfrm>
+          <a:prstGeom prst="ellipse">
+            <a:avLst/>
+          </a:prstGeom>
+          <a:solidFill>
+            <a:srgbClr val="444444"/>
+          </a:solidFill>
+          <a:ln/>
+        </p:spPr>
+      </p:sp>
+      <p:sp>
+        <p:nvSpPr>
+          <p:cNvPr id="23" name="Text 21"/>
+          <p:cNvSpPr/>
+          <p:nvPr/>
+        </p:nvSpPr>
+        <p:spPr>
+          <a:xfrm>
+            <a:off x="731520" y="5541264"/>
+            <a:ext cx="502920" cy="502920"/>
+          </a:xfrm>
+          <a:prstGeom prst="rect">
+            <a:avLst/>
+          </a:prstGeom>
+          <a:noFill/>
+          <a:ln/>
+        </p:spPr>
+        <p:txBody>
+          <a:bodyPr wrap="square" lIns="0" tIns="0" rIns="0" bIns="0" rtlCol="0" anchor="ctr"/>
+          <a:lstStyle/>
+          <a:p>
+            <a:pPr algn="ctr" indent="0" marL="0">
+              <a:buNone/>
+            </a:pPr>
+            <a:r>
+              <a:rPr lang="en-US" sz="2400" b="1" dirty="0">
+                <a:solidFill>
+                  <a:srgbClr val="FFFFFF"/>
+                </a:solidFill>
+                <a:latin typeface="Courier New" pitchFamily="34" charset="0"/>
+                <a:ea typeface="Courier New" pitchFamily="34" charset="-122"/>
+                <a:cs typeface="Courier New" pitchFamily="34" charset="-120"/>
+              </a:rPr>
+              <a:t>≈</a:t>
+            </a:r>
+            <a:endParaRPr lang="en-US" sz="2400" dirty="0"/>
+          </a:p>
+        </p:txBody>
+      </p:sp>
+      <p:sp>
+        <p:nvSpPr>
+          <p:cNvPr id="24" name="Text 22"/>
+          <p:cNvSpPr/>
+          <p:nvPr/>
+        </p:nvSpPr>
+        <p:spPr>
+          <a:xfrm>
+            <a:off x="1463040" y="5440680"/>
+            <a:ext cx="3566160" cy="777240"/>
+          </a:xfrm>
+          <a:prstGeom prst="rect">
+            <a:avLst/>
+          </a:prstGeom>
+          <a:noFill/>
+          <a:ln/>
+        </p:spPr>
+        <p:txBody>
+          <a:bodyPr wrap="square" lIns="0" tIns="0" rIns="0" bIns="0" rtlCol="0" anchor="ctr"/>
+          <a:lstStyle/>
+          <a:p>
+            <a:pPr indent="0" marL="0">
+              <a:buNone/>
+            </a:pPr>
+            <a:r>
+              <a:rPr lang="en-US" sz="1600" b="1" dirty="0">
+                <a:solidFill>
+                  <a:srgbClr val="102D69"/>
+                </a:solidFill>
+                <a:latin typeface="Calibri" pitchFamily="34" charset="0"/>
+                <a:ea typeface="Calibri" pitchFamily="34" charset="-122"/>
+                <a:cs typeface="Calibri" pitchFamily="34" charset="-120"/>
+              </a:rPr>
+              <a:t>Сильнее учитель · фильтр</a:t>
+            </a:r>
+            <a:endParaRPr lang="en-US" sz="1600" dirty="0"/>
+          </a:p>
+        </p:txBody>
+      </p:sp>
+      <p:sp>
+        <p:nvSpPr>
+          <p:cNvPr id="25" name="Text 23"/>
+          <p:cNvSpPr/>
+          <p:nvPr/>
+        </p:nvSpPr>
+        <p:spPr>
+          <a:xfrm>
+            <a:off x="5120640" y="5440680"/>
+            <a:ext cx="6400800" cy="777240"/>
+          </a:xfrm>
+          <a:prstGeom prst="rect">
+            <a:avLst/>
+          </a:prstGeom>
+          <a:noFill/>
+          <a:ln/>
+        </p:spPr>
+        <p:txBody>
+          <a:bodyPr wrap="square" lIns="0" tIns="0" rIns="0" bIns="0" rtlCol="0" anchor="ctr"/>
+          <a:lstStyle/>
+          <a:p>
+            <a:pPr indent="0" marL="0">
+              <a:lnSpc>
+                <a:spcPts val="1600"/>
+              </a:lnSpc>
+              <a:buNone/>
+            </a:pPr>
+            <a:r>
+              <a:rPr lang="en-US" sz="1300" dirty="0">
+                <a:solidFill>
+                  <a:srgbClr val="444444"/>
+                </a:solidFill>
+                <a:latin typeface="Calibri" pitchFamily="34" charset="0"/>
+                <a:ea typeface="Calibri" pitchFamily="34" charset="-122"/>
+                <a:cs typeface="Calibri" pitchFamily="34" charset="-120"/>
+              </a:rPr>
+              <a:t>по одному сиду, разница внутри шума — знак не доказан</a:t>
+            </a:r>
+            <a:endParaRPr lang="en-US" sz="1300" dirty="0"/>
+          </a:p>
+        </p:txBody>
+      </p:sp>
+      <p:sp>
+        <p:nvSpPr>
+          <p:cNvPr id="26" name="Text 24"/>
+          <p:cNvSpPr/>
+          <p:nvPr/>
+        </p:nvSpPr>
+        <p:spPr>
+          <a:xfrm>
+            <a:off x="457200" y="6455664"/>
+            <a:ext cx="6400800" cy="274320"/>
+          </a:xfrm>
+          <a:prstGeom prst="rect">
+            <a:avLst/>
+          </a:prstGeom>
+          <a:noFill/>
+          <a:ln/>
+        </p:spPr>
+        <p:txBody>
+          <a:bodyPr wrap="square" lIns="0" tIns="0" rIns="0" bIns="0" rtlCol="0" anchor="ctr"/>
+          <a:lstStyle/>
+          <a:p>
+            <a:pPr indent="0" marL="0">
+              <a:buNone/>
+            </a:pPr>
+            <a:r>
+              <a:rPr lang="en-US" sz="900" dirty="0">
+                <a:solidFill>
+                  <a:srgbClr val="444444"/>
+                </a:solidFill>
+                <a:latin typeface="Calibri" pitchFamily="34" charset="0"/>
+                <a:ea typeface="Calibri" pitchFamily="34" charset="-122"/>
+                <a:cs typeface="Calibri" pitchFamily="34" charset="-120"/>
+              </a:rPr>
+              <a:t>DB2Model · ветка SFT/LoRA</a:t>
+            </a:r>
+            <a:endParaRPr lang="en-US" sz="900" dirty="0"/>
+          </a:p>
+        </p:txBody>
+      </p:sp>
+      <p:sp>
+        <p:nvSpPr>
+          <p:cNvPr id="27" name="Text 25"/>
+          <p:cNvSpPr/>
+          <p:nvPr/>
+        </p:nvSpPr>
+        <p:spPr>
+          <a:xfrm>
+            <a:off x="10881360" y="6455664"/>
+            <a:ext cx="822960" cy="274320"/>
+          </a:xfrm>
+          <a:prstGeom prst="rect">
+            <a:avLst/>
+          </a:prstGeom>
+          <a:noFill/>
+          <a:ln/>
+        </p:spPr>
+        <p:txBody>
+          <a:bodyPr wrap="square" lIns="0" tIns="0" rIns="0" bIns="0" rtlCol="0" anchor="ctr"/>
+          <a:lstStyle/>
+          <a:p>
+            <a:pPr algn="r" indent="0" marL="0">
+              <a:buNone/>
+            </a:pPr>
+            <a:r>
+              <a:rPr lang="en-US" sz="900" dirty="0">
+                <a:solidFill>
+                  <a:srgbClr val="444444"/>
+                </a:solidFill>
+                <a:latin typeface="Courier New" pitchFamily="34" charset="0"/>
+                <a:ea typeface="Courier New" pitchFamily="34" charset="-122"/>
+                <a:cs typeface="Courier New" pitchFamily="34" charset="-120"/>
+              </a:rPr>
+              <a:t>11 / 15</a:t>
+            </a:r>
+            <a:endParaRPr lang="en-US" sz="900" dirty="0"/>
+          </a:p>
+        </p:txBody>
+      </p:sp>
+    </p:spTree>
+  </p:cSld>
+  <p:clrMapOvr>
+    <a:masterClrMapping/>
+  </p:clrMapOvr>
+</p:sld>
+</file>
+
+<file path=ppt/slides/slide12.xml><?xml version="1.0" encoding="utf-8"?>
+<p:sld xmlns:a="http://schemas.openxmlformats.org/drawingml/2006/main" xmlns:r="http://schemas.openxmlformats.org/officeDocument/2006/relationships" xmlns:p="http://schemas.openxmlformats.org/presentationml/2006/main">
+  <p:cSld name="Slide 12">
+    <p:bg>
+      <p:bgPr>
+        <a:solidFill>
+          <a:srgbClr val="FFFFFF"/>
+        </a:solidFill>
+      </p:bgPr>
+    </p:bg>
+    <p:spTree>
+      <p:nvGrpSpPr>
+        <p:cNvPr id="1" name=""/>
+        <p:cNvGrpSpPr/>
+        <p:nvPr/>
+      </p:nvGrpSpPr>
+      <p:grpSpPr>
+        <a:xfrm>
+          <a:off x="0" y="0"/>
+          <a:ext cx="0" cy="0"/>
+          <a:chOff x="0" y="0"/>
+          <a:chExt cx="0" cy="0"/>
+        </a:xfrm>
+      </p:grpSpPr>
+      <p:sp>
+        <p:nvSpPr>
+          <p:cNvPr id="2" name="Shape 0"/>
+          <p:cNvSpPr/>
+          <p:nvPr/>
+        </p:nvSpPr>
+        <p:spPr>
+          <a:xfrm rot="840000">
+            <a:off x="10561320" y="109728"/>
+            <a:ext cx="822960" cy="822960"/>
+          </a:xfrm>
+          <a:prstGeom prst="roundRect">
+            <a:avLst>
+              <a:gd name="adj" fmla="val 13333"/>
+            </a:avLst>
+          </a:prstGeom>
+          <a:solidFill>
+            <a:srgbClr val="FAB900"/>
+          </a:solidFill>
+          <a:ln w="38100">
+            <a:solidFill>
+              <a:srgbClr val="102D69"/>
+            </a:solidFill>
+            <a:prstDash val="solid"/>
+          </a:ln>
+        </p:spPr>
+      </p:sp>
+      <p:sp>
+        <p:nvSpPr>
+          <p:cNvPr id="3" name="Shape 1"/>
+          <p:cNvSpPr/>
+          <p:nvPr/>
+        </p:nvSpPr>
+        <p:spPr>
+          <a:xfrm rot="-660000">
+            <a:off x="11109960" y="566928"/>
+            <a:ext cx="822960" cy="822960"/>
+          </a:xfrm>
+          <a:prstGeom prst="roundRect">
+            <a:avLst>
+              <a:gd name="adj" fmla="val 13333"/>
+            </a:avLst>
+          </a:prstGeom>
+          <a:solidFill>
+            <a:srgbClr val="E61E3C"/>
+          </a:solidFill>
+          <a:ln w="38100">
+            <a:solidFill>
+              <a:srgbClr val="102D69"/>
+            </a:solidFill>
+            <a:prstDash val="solid"/>
+          </a:ln>
+        </p:spPr>
+      </p:sp>
+      <p:sp>
+        <p:nvSpPr>
+          <p:cNvPr id="4" name="Text 2"/>
+          <p:cNvSpPr/>
+          <p:nvPr/>
+        </p:nvSpPr>
+        <p:spPr>
+          <a:xfrm>
+            <a:off x="457200" y="384048"/>
+            <a:ext cx="9875520" cy="685800"/>
+          </a:xfrm>
+          <a:prstGeom prst="rect">
+            <a:avLst/>
+          </a:prstGeom>
+          <a:noFill/>
+          <a:ln/>
+        </p:spPr>
+        <p:txBody>
+          <a:bodyPr wrap="square" lIns="0" tIns="0" rIns="0" bIns="0" rtlCol="0" anchor="ctr"/>
+          <a:lstStyle/>
+          <a:p>
+            <a:pPr indent="0" marL="0">
+              <a:buNone/>
+            </a:pPr>
+            <a:r>
+              <a:rPr lang="en-US" sz="3200" b="1" dirty="0">
+                <a:solidFill>
+                  <a:srgbClr val="102D69"/>
+                </a:solidFill>
+                <a:latin typeface="Calibri" pitchFamily="34" charset="0"/>
+                <a:ea typeface="Calibri" pitchFamily="34" charset="-122"/>
+                <a:cs typeface="Calibri" pitchFamily="34" charset="-120"/>
+              </a:rPr>
+              <a:t>Тезис виден вживую, не только в цифрах</a:t>
+            </a:r>
+            <a:endParaRPr lang="en-US" sz="3200" dirty="0"/>
+          </a:p>
+        </p:txBody>
+      </p:sp>
+      <p:sp>
+        <p:nvSpPr>
+          <p:cNvPr id="5" name="Text 3"/>
+          <p:cNvSpPr/>
+          <p:nvPr/>
+        </p:nvSpPr>
+        <p:spPr>
+          <a:xfrm>
+            <a:off x="457200" y="1097280"/>
+            <a:ext cx="9966960" cy="365760"/>
+          </a:xfrm>
+          <a:prstGeom prst="rect">
+            <a:avLst/>
+          </a:prstGeom>
+          <a:noFill/>
+          <a:ln/>
+        </p:spPr>
+        <p:txBody>
+          <a:bodyPr wrap="square" lIns="0" tIns="0" rIns="0" bIns="0" rtlCol="0" anchor="ctr"/>
+          <a:lstStyle/>
+          <a:p>
+            <a:pPr indent="0" marL="0">
+              <a:buNone/>
+            </a:pPr>
+            <a:r>
+              <a:rPr lang="en-US" sz="1500" dirty="0">
+                <a:solidFill>
+                  <a:srgbClr val="444444"/>
+                </a:solidFill>
+                <a:latin typeface="Calibri" pitchFamily="34" charset="0"/>
+                <a:ea typeface="Calibri" pitchFamily="34" charset="-122"/>
+                <a:cs typeface="Calibri" pitchFamily="34" charset="-120"/>
+              </a:rPr>
+              <a:t>MCP-сервер: адаптер через vLLM, вопрос → SQL → живая база</a:t>
+            </a:r>
+            <a:endParaRPr lang="en-US" sz="1500" dirty="0"/>
+          </a:p>
+        </p:txBody>
+      </p:sp>
+      <p:sp>
+        <p:nvSpPr>
+          <p:cNvPr id="6" name="Shape 4"/>
+          <p:cNvSpPr/>
+          <p:nvPr/>
+        </p:nvSpPr>
+        <p:spPr>
+          <a:xfrm>
+            <a:off x="457200" y="2057400"/>
+            <a:ext cx="5486400" cy="3474720"/>
+          </a:xfrm>
+          <a:prstGeom prst="roundRect">
+            <a:avLst>
+              <a:gd name="adj" fmla="val 1053"/>
+            </a:avLst>
+          </a:prstGeom>
+          <a:solidFill>
+            <a:srgbClr val="102D69"/>
+          </a:solidFill>
+          <a:ln w="12700">
+            <a:solidFill>
+              <a:srgbClr val="102D69"/>
+            </a:solidFill>
+            <a:prstDash val="solid"/>
+          </a:ln>
+        </p:spPr>
+      </p:sp>
+      <p:sp>
+        <p:nvSpPr>
+          <p:cNvPr id="7" name="Text 5"/>
+          <p:cNvSpPr/>
+          <p:nvPr/>
+        </p:nvSpPr>
+        <p:spPr>
+          <a:xfrm>
+            <a:off x="731520" y="2331720"/>
+            <a:ext cx="4937760" cy="365760"/>
+          </a:xfrm>
+          <a:prstGeom prst="rect">
+            <a:avLst/>
+          </a:prstGeom>
+          <a:noFill/>
+          <a:ln/>
+        </p:spPr>
+        <p:txBody>
+          <a:bodyPr wrap="square" lIns="0" tIns="0" rIns="0" bIns="0" rtlCol="0" anchor="ctr"/>
+          <a:lstStyle/>
+          <a:p>
+            <a:pPr indent="0" marL="0">
+              <a:buNone/>
+            </a:pPr>
+            <a:r>
+              <a:rPr lang="en-US" sz="1400" b="1" dirty="0">
+                <a:solidFill>
+                  <a:srgbClr val="FAB900"/>
+                </a:solidFill>
+                <a:latin typeface="Courier New" pitchFamily="34" charset="0"/>
+                <a:ea typeface="Courier New" pitchFamily="34" charset="-122"/>
+                <a:cs typeface="Courier New" pitchFamily="34" charset="-120"/>
+              </a:rPr>
+              <a:t>schema-less (наш адаптер)</a:t>
+            </a:r>
+            <a:endParaRPr lang="en-US" sz="1400" dirty="0"/>
+          </a:p>
+        </p:txBody>
+      </p:sp>
+      <p:sp>
+        <p:nvSpPr>
+          <p:cNvPr id="8" name="Text 6"/>
+          <p:cNvSpPr/>
+          <p:nvPr/>
+        </p:nvSpPr>
+        <p:spPr>
+          <a:xfrm>
+            <a:off x="731520" y="2743200"/>
+            <a:ext cx="4937760" cy="914400"/>
+          </a:xfrm>
+          <a:prstGeom prst="rect">
+            <a:avLst/>
+          </a:prstGeom>
+          <a:noFill/>
+          <a:ln/>
+        </p:spPr>
+        <p:txBody>
+          <a:bodyPr wrap="square" lIns="0" tIns="0" rIns="0" bIns="0" rtlCol="0" anchor="ctr"/>
+          <a:lstStyle/>
+          <a:p>
+            <a:pPr indent="0" marL="0">
+              <a:buNone/>
+            </a:pPr>
+            <a:r>
+              <a:rPr lang="en-US" sz="5000" b="1" dirty="0">
+                <a:solidFill>
+                  <a:srgbClr val="FFFFFF"/>
+                </a:solidFill>
+                <a:latin typeface="Courier New" pitchFamily="34" charset="0"/>
+                <a:ea typeface="Courier New" pitchFamily="34" charset="-122"/>
+                <a:cs typeface="Courier New" pitchFamily="34" charset="-120"/>
+              </a:rPr>
+              <a:t>3 / 3 PASS</a:t>
+            </a:r>
+            <a:endParaRPr lang="en-US" sz="5000" dirty="0"/>
+          </a:p>
+        </p:txBody>
+      </p:sp>
+      <p:sp>
+        <p:nvSpPr>
+          <p:cNvPr id="9" name="Text 7"/>
+          <p:cNvSpPr/>
+          <p:nvPr/>
+        </p:nvSpPr>
+        <p:spPr>
+          <a:xfrm>
+            <a:off x="731520" y="3794760"/>
+            <a:ext cx="4937760" cy="1371600"/>
+          </a:xfrm>
+          <a:prstGeom prst="rect">
+            <a:avLst/>
+          </a:prstGeom>
+          <a:noFill/>
+          <a:ln/>
+        </p:spPr>
+        <p:txBody>
+          <a:bodyPr wrap="square" lIns="0" tIns="0" rIns="0" bIns="0" rtlCol="0" anchor="t"/>
+          <a:lstStyle/>
+          <a:p>
+            <a:pPr indent="0" marL="0">
+              <a:lnSpc>
+                <a:spcPts val="2000"/>
+              </a:lnSpc>
+              <a:buNone/>
+            </a:pPr>
+            <a:r>
+              <a:rPr lang="en-US" sz="1500" dirty="0">
+                <a:solidFill>
+                  <a:srgbClr val="D0E4FF"/>
+                </a:solidFill>
+                <a:latin typeface="Calibri" pitchFamily="34" charset="0"/>
+                <a:ea typeface="Calibri" pitchFamily="34" charset="-122"/>
+                <a:cs typeface="Calibri" pitchFamily="34" charset="-120"/>
+              </a:rPr>
+              <a:t>Верный SQL по всем трём базам без единого упоминания схемы в промпте.</a:t>
+            </a:r>
+            <a:endParaRPr lang="en-US" sz="1500" dirty="0"/>
+          </a:p>
+        </p:txBody>
+      </p:sp>
+      <p:sp>
+        <p:nvSpPr>
+          <p:cNvPr id="10" name="Shape 8"/>
+          <p:cNvSpPr/>
+          <p:nvPr/>
+        </p:nvSpPr>
+        <p:spPr>
+          <a:xfrm>
+            <a:off x="6217920" y="2057400"/>
+            <a:ext cx="5486400" cy="3474720"/>
+          </a:xfrm>
+          <a:prstGeom prst="roundRect">
+            <a:avLst>
+              <a:gd name="adj" fmla="val 1053"/>
+            </a:avLst>
+          </a:prstGeom>
+          <a:solidFill>
+            <a:srgbClr val="EEF4FF"/>
+          </a:solidFill>
+          <a:ln w="12700">
+            <a:solidFill>
+              <a:srgbClr val="C9B894"/>
+            </a:solidFill>
+            <a:prstDash val="solid"/>
+          </a:ln>
+        </p:spPr>
+      </p:sp>
+      <p:sp>
+        <p:nvSpPr>
+          <p:cNvPr id="11" name="Text 9"/>
+          <p:cNvSpPr/>
+          <p:nvPr/>
+        </p:nvSpPr>
+        <p:spPr>
+          <a:xfrm>
+            <a:off x="6492240" y="2331720"/>
+            <a:ext cx="4937760" cy="365760"/>
+          </a:xfrm>
+          <a:prstGeom prst="rect">
+            <a:avLst/>
+          </a:prstGeom>
+          <a:noFill/>
+          <a:ln/>
+        </p:spPr>
+        <p:txBody>
+          <a:bodyPr wrap="square" lIns="0" tIns="0" rIns="0" bIns="0" rtlCol="0" anchor="ctr"/>
+          <a:lstStyle/>
+          <a:p>
+            <a:pPr indent="0" marL="0">
+              <a:buNone/>
+            </a:pPr>
+            <a:r>
+              <a:rPr lang="en-US" sz="1400" b="1" dirty="0">
+                <a:solidFill>
+                  <a:srgbClr val="444444"/>
+                </a:solidFill>
+                <a:latin typeface="Courier New" pitchFamily="34" charset="0"/>
+                <a:ea typeface="Courier New" pitchFamily="34" charset="-122"/>
+                <a:cs typeface="Courier New" pitchFamily="34" charset="-120"/>
+              </a:rPr>
+              <a:t>baseline (базовая модель + схема)</a:t>
+            </a:r>
+            <a:endParaRPr lang="en-US" sz="1400" dirty="0"/>
+          </a:p>
+        </p:txBody>
+      </p:sp>
+      <p:sp>
+        <p:nvSpPr>
+          <p:cNvPr id="12" name="Text 10"/>
+          <p:cNvSpPr/>
+          <p:nvPr/>
+        </p:nvSpPr>
+        <p:spPr>
+          <a:xfrm>
+            <a:off x="6492240" y="2743200"/>
+            <a:ext cx="4937760" cy="914400"/>
+          </a:xfrm>
+          <a:prstGeom prst="rect">
+            <a:avLst/>
+          </a:prstGeom>
+          <a:noFill/>
+          <a:ln/>
+        </p:spPr>
+        <p:txBody>
+          <a:bodyPr wrap="square" lIns="0" tIns="0" rIns="0" bIns="0" rtlCol="0" anchor="ctr"/>
+          <a:lstStyle/>
+          <a:p>
+            <a:pPr indent="0" marL="0">
+              <a:buNone/>
+            </a:pPr>
+            <a:r>
+              <a:rPr lang="en-US" sz="5000" b="1" dirty="0">
+                <a:solidFill>
+                  <a:srgbClr val="102D69"/>
+                </a:solidFill>
+                <a:latin typeface="Courier New" pitchFamily="34" charset="0"/>
+                <a:ea typeface="Courier New" pitchFamily="34" charset="-122"/>
+                <a:cs typeface="Courier New" pitchFamily="34" charset="-120"/>
+              </a:rPr>
+              <a:t>2 / 3 PASS</a:t>
+            </a:r>
+            <a:endParaRPr lang="en-US" sz="5000" dirty="0"/>
+          </a:p>
+        </p:txBody>
+      </p:sp>
+      <p:sp>
+        <p:nvSpPr>
+          <p:cNvPr id="13" name="Text 11"/>
+          <p:cNvSpPr/>
+          <p:nvPr/>
+        </p:nvSpPr>
+        <p:spPr>
+          <a:xfrm>
+            <a:off x="6492240" y="3794760"/>
+            <a:ext cx="4937760" cy="1371600"/>
+          </a:xfrm>
+          <a:prstGeom prst="rect">
+            <a:avLst/>
+          </a:prstGeom>
+          <a:noFill/>
+          <a:ln/>
+        </p:spPr>
+        <p:txBody>
+          <a:bodyPr wrap="square" lIns="0" tIns="0" rIns="0" bIns="0" rtlCol="0" anchor="t"/>
+          <a:lstStyle/>
+          <a:p>
+            <a:pPr indent="0" marL="0">
+              <a:lnSpc>
+                <a:spcPts val="2000"/>
+              </a:lnSpc>
+              <a:buNone/>
+            </a:pPr>
+            <a:r>
+              <a:rPr lang="en-US" sz="1500" dirty="0">
+                <a:solidFill>
+                  <a:srgbClr val="444444"/>
+                </a:solidFill>
+                <a:latin typeface="Calibri" pitchFamily="34" charset="0"/>
+                <a:ea typeface="Calibri" pitchFamily="34" charset="-122"/>
+                <a:cs typeface="Calibri" pitchFamily="34" charset="-120"/>
+              </a:rPr>
+              <a:t>На codebase_community базовая модель СО СХЕМОЙ сослалась на несуществующую колонку userid.</a:t>
+            </a:r>
+            <a:endParaRPr lang="en-US" sz="1500" dirty="0"/>
+          </a:p>
+        </p:txBody>
+      </p:sp>
+      <p:sp>
+        <p:nvSpPr>
+          <p:cNvPr id="14" name="Text 12"/>
+          <p:cNvSpPr/>
+          <p:nvPr/>
+        </p:nvSpPr>
+        <p:spPr>
+          <a:xfrm>
+            <a:off x="457200" y="6455664"/>
+            <a:ext cx="6400800" cy="274320"/>
+          </a:xfrm>
+          <a:prstGeom prst="rect">
+            <a:avLst/>
+          </a:prstGeom>
+          <a:noFill/>
+          <a:ln/>
+        </p:spPr>
+        <p:txBody>
+          <a:bodyPr wrap="square" lIns="0" tIns="0" rIns="0" bIns="0" rtlCol="0" anchor="ctr"/>
+          <a:lstStyle/>
+          <a:p>
+            <a:pPr indent="0" marL="0">
+              <a:buNone/>
+            </a:pPr>
+            <a:r>
+              <a:rPr lang="en-US" sz="900" dirty="0">
+                <a:solidFill>
+                  <a:srgbClr val="444444"/>
+                </a:solidFill>
+                <a:latin typeface="Calibri" pitchFamily="34" charset="0"/>
+                <a:ea typeface="Calibri" pitchFamily="34" charset="-122"/>
+                <a:cs typeface="Calibri" pitchFamily="34" charset="-120"/>
+              </a:rPr>
+              <a:t>DB2Model · ветка SFT/LoRA</a:t>
+            </a:r>
+            <a:endParaRPr lang="en-US" sz="900" dirty="0"/>
+          </a:p>
+        </p:txBody>
+      </p:sp>
+      <p:sp>
+        <p:nvSpPr>
+          <p:cNvPr id="15" name="Text 13"/>
+          <p:cNvSpPr/>
+          <p:nvPr/>
+        </p:nvSpPr>
+        <p:spPr>
+          <a:xfrm>
+            <a:off x="10881360" y="6455664"/>
+            <a:ext cx="822960" cy="274320"/>
+          </a:xfrm>
+          <a:prstGeom prst="rect">
+            <a:avLst/>
+          </a:prstGeom>
+          <a:noFill/>
+          <a:ln/>
+        </p:spPr>
+        <p:txBody>
+          <a:bodyPr wrap="square" lIns="0" tIns="0" rIns="0" bIns="0" rtlCol="0" anchor="ctr"/>
+          <a:lstStyle/>
+          <a:p>
+            <a:pPr algn="r" indent="0" marL="0">
+              <a:buNone/>
+            </a:pPr>
+            <a:r>
+              <a:rPr lang="en-US" sz="900" dirty="0">
+                <a:solidFill>
+                  <a:srgbClr val="444444"/>
+                </a:solidFill>
+                <a:latin typeface="Courier New" pitchFamily="34" charset="0"/>
+                <a:ea typeface="Courier New" pitchFamily="34" charset="-122"/>
+                <a:cs typeface="Courier New" pitchFamily="34" charset="-120"/>
+              </a:rPr>
+              <a:t>12 / 15</a:t>
+            </a:r>
+            <a:endParaRPr lang="en-US" sz="900" dirty="0"/>
+          </a:p>
+        </p:txBody>
+      </p:sp>
+    </p:spTree>
+  </p:cSld>
+  <p:clrMapOvr>
+    <a:masterClrMapping/>
+  </p:clrMapOvr>
+</p:sld>
+</file>
+
+<file path=ppt/slides/slide13.xml><?xml version="1.0" encoding="utf-8"?>
+<p:sld xmlns:a="http://schemas.openxmlformats.org/drawingml/2006/main" xmlns:r="http://schemas.openxmlformats.org/officeDocument/2006/relationships" xmlns:p="http://schemas.openxmlformats.org/presentationml/2006/main">
+  <p:cSld name="Slide 13">
+    <p:bg>
+      <p:bgPr>
+        <a:solidFill>
+          <a:srgbClr val="FFFFFF"/>
+        </a:solidFill>
+      </p:bgPr>
+    </p:bg>
+    <p:spTree>
+      <p:nvGrpSpPr>
+        <p:cNvPr id="1" name=""/>
+        <p:cNvGrpSpPr/>
+        <p:nvPr/>
+      </p:nvGrpSpPr>
+      <p:grpSpPr>
+        <a:xfrm>
+          <a:off x="0" y="0"/>
+          <a:ext cx="0" cy="0"/>
+          <a:chOff x="0" y="0"/>
+          <a:chExt cx="0" cy="0"/>
+        </a:xfrm>
+      </p:grpSpPr>
+      <p:sp>
+        <p:nvSpPr>
+          <p:cNvPr id="2" name="Shape 0"/>
+          <p:cNvSpPr/>
+          <p:nvPr/>
+        </p:nvSpPr>
+        <p:spPr>
+          <a:xfrm rot="840000">
+            <a:off x="10561320" y="109728"/>
+            <a:ext cx="822960" cy="822960"/>
+          </a:xfrm>
+          <a:prstGeom prst="roundRect">
+            <a:avLst>
+              <a:gd name="adj" fmla="val 13333"/>
+            </a:avLst>
+          </a:prstGeom>
+          <a:solidFill>
+            <a:srgbClr val="FAB900"/>
+          </a:solidFill>
+          <a:ln w="38100">
+            <a:solidFill>
+              <a:srgbClr val="102D69"/>
+            </a:solidFill>
+            <a:prstDash val="solid"/>
+          </a:ln>
+        </p:spPr>
+      </p:sp>
+      <p:sp>
+        <p:nvSpPr>
+          <p:cNvPr id="3" name="Shape 1"/>
+          <p:cNvSpPr/>
+          <p:nvPr/>
+        </p:nvSpPr>
+        <p:spPr>
+          <a:xfrm rot="-660000">
+            <a:off x="11109960" y="566928"/>
+            <a:ext cx="822960" cy="822960"/>
+          </a:xfrm>
+          <a:prstGeom prst="roundRect">
+            <a:avLst>
+              <a:gd name="adj" fmla="val 13333"/>
+            </a:avLst>
+          </a:prstGeom>
+          <a:solidFill>
+            <a:srgbClr val="E61E3C"/>
+          </a:solidFill>
+          <a:ln w="38100">
+            <a:solidFill>
+              <a:srgbClr val="102D69"/>
+            </a:solidFill>
+            <a:prstDash val="solid"/>
+          </a:ln>
+        </p:spPr>
+      </p:sp>
+      <p:sp>
+        <p:nvSpPr>
+          <p:cNvPr id="4" name="Text 2"/>
+          <p:cNvSpPr/>
+          <p:nvPr/>
+        </p:nvSpPr>
+        <p:spPr>
+          <a:xfrm>
+            <a:off x="457200" y="384048"/>
+            <a:ext cx="9875520" cy="685800"/>
+          </a:xfrm>
+          <a:prstGeom prst="rect">
+            <a:avLst/>
+          </a:prstGeom>
+          <a:noFill/>
+          <a:ln/>
+        </p:spPr>
+        <p:txBody>
+          <a:bodyPr wrap="square" lIns="0" tIns="0" rIns="0" bIns="0" rtlCol="0" anchor="ctr"/>
+          <a:lstStyle/>
+          <a:p>
+            <a:pPr indent="0" marL="0">
+              <a:buNone/>
+            </a:pPr>
+            <a:r>
+              <a:rPr lang="en-US" sz="3200" b="1" dirty="0">
+                <a:solidFill>
+                  <a:srgbClr val="102D69"/>
+                </a:solidFill>
+                <a:latin typeface="Calibri" pitchFamily="34" charset="0"/>
+                <a:ea typeface="Calibri" pitchFamily="34" charset="-122"/>
+                <a:cs typeface="Calibri" pitchFamily="34" charset="-120"/>
+              </a:rPr>
+              <a:t>Финальная таблица — обе ветки</a:t>
+            </a:r>
+            <a:endParaRPr lang="en-US" sz="3200" dirty="0"/>
+          </a:p>
+        </p:txBody>
+      </p:sp>
+      <p:sp>
+        <p:nvSpPr>
+          <p:cNvPr id="5" name="Text 3"/>
+          <p:cNvSpPr/>
+          <p:nvPr/>
+        </p:nvSpPr>
+        <p:spPr>
+          <a:xfrm>
+            <a:off x="457200" y="1097280"/>
+            <a:ext cx="9966960" cy="365760"/>
+          </a:xfrm>
+          <a:prstGeom prst="rect">
+            <a:avLst/>
+          </a:prstGeom>
+          <a:noFill/>
+          <a:ln/>
+        </p:spPr>
+        <p:txBody>
+          <a:bodyPr wrap="square" lIns="0" tIns="0" rIns="0" bIns="0" rtlCol="0" anchor="ctr"/>
+          <a:lstStyle/>
+          <a:p>
+            <a:pPr indent="0" marL="0">
+              <a:buNone/>
+            </a:pPr>
+            <a:r>
+              <a:rPr lang="en-US" sz="1500" dirty="0">
+                <a:solidFill>
+                  <a:srgbClr val="444444"/>
+                </a:solidFill>
+                <a:latin typeface="Calibri" pitchFamily="34" charset="0"/>
+                <a:ea typeface="Calibri" pitchFamily="34" charset="-122"/>
+                <a:cs typeface="Calibri" pitchFamily="34" charset="-120"/>
+              </a:rPr>
               <a:t>Один split (91 вопрос), один оценщик; light-RAG — результаты напарницы</a:t>
             </a:r>
             <a:endParaRPr lang="en-US" sz="1500" dirty="0"/>
@@ -3500,7 +4969,7 @@
       </p:sp>
       <p:graphicFrame>
         <p:nvGraphicFramePr>
-          <p:cNvPr id="12" name="Table 0"/>
+          <p:cNvPr id="14" name="Table 0"/>
           <p:cNvGraphicFramePr>
             <a:graphicFrameLocks noGrp="1"/>
           </p:cNvGraphicFramePr>
@@ -3513,7 +4982,7 @@
           </p:nvPr>
         </p:nvGraphicFramePr>
         <p:xfrm>
-          <a:off x="457200" y="1874520"/>
+          <a:off x="457200" y="1828800"/>
           <a:ext cx="11247120" cy="914400"/>
         </p:xfrm>
         <a:graphic>
@@ -7336,7 +8805,7 @@
                 <a:ea typeface="Courier New" pitchFamily="34" charset="-122"/>
                 <a:cs typeface="Courier New" pitchFamily="34" charset="-120"/>
               </a:rPr>
-              <a:t>10 / 13</a:t>
+              <a:t>13 / 15</a:t>
             </a:r>
             <a:endParaRPr lang="en-US" sz="900" dirty="0"/>
           </a:p>
@@ -7350,9 +8819,9 @@
 </p:sld>
 </file>
 
-<file path=ppt/slides/slide12.xml><?xml version="1.0" encoding="utf-8"?>
+<file path=ppt/slides/slide14.xml><?xml version="1.0" encoding="utf-8"?>
 <p:sld xmlns:a="http://schemas.openxmlformats.org/drawingml/2006/main" xmlns:r="http://schemas.openxmlformats.org/officeDocument/2006/relationships" xmlns:p="http://schemas.openxmlformats.org/presentationml/2006/main">
-  <p:cSld name="Slide 12">
+  <p:cSld name="Slide 14">
     <p:bg>
       <p:bgPr>
         <a:solidFill>
@@ -7476,7 +8945,7 @@
         <p:spPr>
           <a:xfrm>
             <a:off x="457200" y="1097280"/>
-            <a:ext cx="10058400" cy="365760"/>
+            <a:ext cx="9966960" cy="365760"/>
           </a:xfrm>
           <a:prstGeom prst="rect">
             <a:avLst/>
@@ -7562,7 +9031,7 @@
                 <a:ea typeface="Calibri" pitchFamily="34" charset="-122"/>
                 <a:cs typeface="Calibri" pitchFamily="34" charset="-120"/>
               </a:rPr>
-              <a:t> Внешний API под разметку не выдали; классическая дистилляция «сильный→слабый» вырождается — честная формулировка: перенос схемы в веса + noise correction через исполнение.</a:t>
+              <a:t> Внешний API под разметку не выдали; честная формулировка вклада — перенос схемы в веса + очистка через исполнение.</a:t>
             </a:r>
             <a:endParaRPr lang="en-US" sz="1600" dirty="0"/>
           </a:p>
@@ -7662,7 +9131,7 @@
                 <a:ea typeface="Calibri" pitchFamily="34" charset="-122"/>
                 <a:cs typeface="Calibri" pitchFamily="34" charset="-120"/>
               </a:rPr>
-              <a:t>Токены меряются не единым методом между ветками.</a:t>
+              <a:t>Токены light-RAG — пока другим методом.</a:t>
             </a:r>
             <a:pPr indent="0" marL="0">
               <a:lnSpc>
@@ -7679,7 +9148,7 @@
                 <a:ea typeface="Calibri" pitchFamily="34" charset="-122"/>
                 <a:cs typeface="Calibri" pitchFamily="34" charset="-120"/>
               </a:rPr>
-              <a:t> Нужна общая методика (сумма usage.prompt_tokens одним harness) до финального сведения колонки токенов.</a:t>
+              <a:t> Наши строки замерены точно; её строки сведём тем же способом (тот же токенайзер, тот же вызов).</a:t>
             </a:r>
             <a:endParaRPr lang="en-US" sz="1600" dirty="0"/>
           </a:p>
@@ -7757,7 +9226,7 @@
                 <a:ea typeface="Courier New" pitchFamily="34" charset="-122"/>
                 <a:cs typeface="Courier New" pitchFamily="34" charset="-120"/>
               </a:rPr>
-              <a:t>11 / 13</a:t>
+              <a:t>14 / 15</a:t>
             </a:r>
             <a:endParaRPr lang="en-US" sz="900" dirty="0"/>
           </a:p>
@@ -7771,9 +9240,9 @@
 </p:sld>
 </file>
 
-<file path=ppt/slides/slide13.xml><?xml version="1.0" encoding="utf-8"?>
+<file path=ppt/slides/slide15.xml><?xml version="1.0" encoding="utf-8"?>
 <p:sld xmlns:a="http://schemas.openxmlformats.org/drawingml/2006/main" xmlns:r="http://schemas.openxmlformats.org/officeDocument/2006/relationships" xmlns:p="http://schemas.openxmlformats.org/presentationml/2006/main">
-  <p:cSld name="Slide 13">
+  <p:cSld name="Slide 15">
     <p:bg>
       <p:bgPr>
         <a:solidFill>
@@ -8347,7 +9816,7 @@
                 <a:ea typeface="Courier New" pitchFamily="34" charset="-122"/>
                 <a:cs typeface="Courier New" pitchFamily="34" charset="-120"/>
               </a:rPr>
-              <a:t>12 / 13</a:t>
+              <a:t>15 / 15</a:t>
             </a:r>
             <a:endParaRPr lang="en-US" sz="900" dirty="0"/>
           </a:p>
@@ -8487,7 +9956,7 @@
         <p:spPr>
           <a:xfrm>
             <a:off x="457200" y="1097280"/>
-            <a:ext cx="10058400" cy="365760"/>
+            <a:ext cx="9966960" cy="365760"/>
           </a:xfrm>
           <a:prstGeom prst="rect">
             <a:avLst/>
@@ -8540,7 +10009,7 @@
           <a:p>
             <a:pPr marL="342900" indent="-342900">
               <a:spcAft>
-                <a:spcPts val="1200"/>
+                <a:spcPts val="1100"/>
               </a:spcAft>
               <a:buSzPct val="100000"/>
               <a:buChar char="•"/>
@@ -8561,7 +10030,7 @@
           <a:p>
             <a:pPr marL="342900" indent="-342900">
               <a:spcAft>
-                <a:spcPts val="1200"/>
+                <a:spcPts val="1100"/>
               </a:spcAft>
               <a:buSzPct val="100000"/>
               <a:buChar char="•"/>
@@ -8602,33 +10071,6 @@
       <p:sp>
         <p:nvSpPr>
           <p:cNvPr id="7" name="Shape 5"/>
-          <p:cNvSpPr/>
-          <p:nvPr/>
-        </p:nvSpPr>
-        <p:spPr>
-          <a:xfrm>
-            <a:off x="6858000" y="1965960"/>
-            <a:ext cx="4846320" cy="3566160"/>
-          </a:xfrm>
-          <a:prstGeom prst="roundRect">
-            <a:avLst>
-              <a:gd name="adj" fmla="val 1026"/>
-            </a:avLst>
-          </a:prstGeom>
-          <a:solidFill>
-            <a:srgbClr val="102D69"/>
-          </a:solidFill>
-          <a:ln w="12700">
-            <a:solidFill>
-              <a:srgbClr val="C9B894"/>
-            </a:solidFill>
-            <a:prstDash val="solid"/>
-          </a:ln>
-        </p:spPr>
-      </p:sp>
-      <p:sp>
-        <p:nvSpPr>
-          <p:cNvPr id="8" name="Shape 6"/>
           <p:cNvSpPr/>
           <p:nvPr/>
         </p:nvSpPr>
@@ -8655,13 +10097,13 @@
       </p:sp>
       <p:sp>
         <p:nvSpPr>
-          <p:cNvPr id="9" name="Text 7"/>
-          <p:cNvSpPr/>
-          <p:nvPr/>
-        </p:nvSpPr>
-        <p:spPr>
-          <a:xfrm>
-            <a:off x="6858000" y="2423160"/>
+          <p:cNvPr id="8" name="Text 6"/>
+          <p:cNvSpPr/>
+          <p:nvPr/>
+        </p:nvSpPr>
+        <p:spPr>
+          <a:xfrm>
+            <a:off x="6858000" y="2651760"/>
             <a:ext cx="4846320" cy="1005840"/>
           </a:xfrm>
           <a:prstGeom prst="rect">
@@ -8694,7 +10136,7 @@
       </p:sp>
       <p:sp>
         <p:nvSpPr>
-          <p:cNvPr id="10" name="Text 8"/>
+          <p:cNvPr id="9" name="Text 7"/>
           <p:cNvSpPr/>
           <p:nvPr/>
         </p:nvSpPr>
@@ -8756,7 +10198,7 @@
       </p:sp>
       <p:sp>
         <p:nvSpPr>
-          <p:cNvPr id="11" name="Text 9"/>
+          <p:cNvPr id="10" name="Text 8"/>
           <p:cNvSpPr/>
           <p:nvPr/>
         </p:nvSpPr>
@@ -8795,7 +10237,7 @@
       </p:sp>
       <p:sp>
         <p:nvSpPr>
-          <p:cNvPr id="12" name="Text 10"/>
+          <p:cNvPr id="11" name="Text 9"/>
           <p:cNvSpPr/>
           <p:nvPr/>
         </p:nvSpPr>
@@ -8826,7 +10268,7 @@
                 <a:ea typeface="Courier New" pitchFamily="34" charset="-122"/>
                 <a:cs typeface="Courier New" pitchFamily="34" charset="-120"/>
               </a:rPr>
-              <a:t>1 / 13</a:t>
+              <a:t>2 / 15</a:t>
             </a:r>
             <a:endParaRPr lang="en-US" sz="900" dirty="0"/>
           </a:p>
@@ -8966,7 +10408,7 @@
         <p:spPr>
           <a:xfrm>
             <a:off x="457200" y="1097280"/>
-            <a:ext cx="10058400" cy="365760"/>
+            <a:ext cx="9966960" cy="365760"/>
           </a:xfrm>
           <a:prstGeom prst="rect">
             <a:avLst/>
@@ -9056,7 +10498,7 @@
                 <a:ea typeface="Courier New" pitchFamily="34" charset="-122"/>
                 <a:cs typeface="Courier New" pitchFamily="34" charset="-120"/>
               </a:rPr>
-              <a:t>B A S E L I N E</a:t>
+              <a:t>B A S E L I N E</a:t>
             </a:r>
             <a:endParaRPr lang="en-US" sz="1300" dirty="0"/>
           </a:p>
@@ -9124,7 +10566,7 @@
           <a:p>
             <a:pPr marL="342900" indent="-342900">
               <a:spcAft>
-                <a:spcPts val="900"/>
+                <a:spcPts val="1100"/>
               </a:spcAft>
               <a:buSzPct val="100000"/>
               <a:buChar char="•"/>
@@ -9145,7 +10587,7 @@
           <a:p>
             <a:pPr marL="342900" indent="-342900">
               <a:spcAft>
-                <a:spcPts val="900"/>
+                <a:spcPts val="1100"/>
               </a:spcAft>
               <a:buSzPct val="100000"/>
               <a:buChar char="•"/>
@@ -9186,33 +10628,6 @@
       <p:sp>
         <p:nvSpPr>
           <p:cNvPr id="10" name="Shape 8"/>
-          <p:cNvSpPr/>
-          <p:nvPr/>
-        </p:nvSpPr>
-        <p:spPr>
-          <a:xfrm>
-            <a:off x="6217920" y="1965960"/>
-            <a:ext cx="5486400" cy="3611880"/>
-          </a:xfrm>
-          <a:prstGeom prst="roundRect">
-            <a:avLst>
-              <a:gd name="adj" fmla="val 1013"/>
-            </a:avLst>
-          </a:prstGeom>
-          <a:solidFill>
-            <a:srgbClr val="102D69"/>
-          </a:solidFill>
-          <a:ln w="12700">
-            <a:solidFill>
-              <a:srgbClr val="C9B894"/>
-            </a:solidFill>
-            <a:prstDash val="solid"/>
-          </a:ln>
-        </p:spPr>
-      </p:sp>
-      <p:sp>
-        <p:nvSpPr>
-          <p:cNvPr id="11" name="Shape 9"/>
           <p:cNvSpPr/>
           <p:nvPr/>
         </p:nvSpPr>
@@ -9239,7 +10654,7 @@
       </p:sp>
       <p:sp>
         <p:nvSpPr>
-          <p:cNvPr id="12" name="Text 10"/>
+          <p:cNvPr id="11" name="Text 9"/>
           <p:cNvSpPr/>
           <p:nvPr/>
         </p:nvSpPr>
@@ -9270,7 +10685,7 @@
                 <a:ea typeface="Courier New" pitchFamily="34" charset="-122"/>
                 <a:cs typeface="Courier New" pitchFamily="34" charset="-120"/>
               </a:rPr>
-              <a:t>Н А Ш А   В Е Т К А</a:t>
+              <a:t>Н А Ш А   В Е Т К А</a:t>
             </a:r>
             <a:endParaRPr lang="en-US" sz="1300" dirty="0"/>
           </a:p>
@@ -9278,7 +10693,7 @@
       </p:sp>
       <p:sp>
         <p:nvSpPr>
-          <p:cNvPr id="13" name="Text 11"/>
+          <p:cNvPr id="12" name="Text 10"/>
           <p:cNvSpPr/>
           <p:nvPr/>
         </p:nvSpPr>
@@ -9317,7 +10732,7 @@
       </p:sp>
       <p:sp>
         <p:nvSpPr>
-          <p:cNvPr id="14" name="Text 12"/>
+          <p:cNvPr id="13" name="Text 11"/>
           <p:cNvSpPr/>
           <p:nvPr/>
         </p:nvSpPr>
@@ -9338,7 +10753,7 @@
           <a:p>
             <a:pPr marL="342900" indent="-342900">
               <a:spcAft>
-                <a:spcPts val="900"/>
+                <a:spcPts val="1100"/>
               </a:spcAft>
               <a:buSzPct val="100000"/>
               <a:buChar char="•"/>
@@ -9346,7 +10761,7 @@
             <a:r>
               <a:rPr lang="en-US" sz="1500" dirty="0">
                 <a:solidFill>
-                  <a:srgbClr val="D0E4FF"/>
+                  <a:srgbClr val="FFFFFF"/>
                 </a:solidFill>
                 <a:latin typeface="Calibri" pitchFamily="34" charset="0"/>
                 <a:ea typeface="Calibri" pitchFamily="34" charset="-122"/>
@@ -9359,7 +10774,7 @@
           <a:p>
             <a:pPr marL="342900" indent="-342900">
               <a:spcAft>
-                <a:spcPts val="900"/>
+                <a:spcPts val="1100"/>
               </a:spcAft>
               <a:buSzPct val="100000"/>
               <a:buChar char="•"/>
@@ -9367,7 +10782,7 @@
             <a:r>
               <a:rPr lang="en-US" sz="1500" dirty="0">
                 <a:solidFill>
-                  <a:srgbClr val="D0E4FF"/>
+                  <a:srgbClr val="FFFFFF"/>
                 </a:solidFill>
                 <a:latin typeface="Calibri" pitchFamily="34" charset="0"/>
                 <a:ea typeface="Calibri" pitchFamily="34" charset="-122"/>
@@ -9385,13 +10800,13 @@
             <a:r>
               <a:rPr lang="en-US" sz="1500" dirty="0">
                 <a:solidFill>
-                  <a:srgbClr val="D0E4FF"/>
+                  <a:srgbClr val="FFFFFF"/>
                 </a:solidFill>
                 <a:latin typeface="Calibri" pitchFamily="34" charset="0"/>
                 <a:ea typeface="Calibri" pitchFamily="34" charset="-122"/>
                 <a:cs typeface="Calibri" pitchFamily="34" charset="-120"/>
               </a:rPr>
-              <a:t>На инференсе схема НЕ подаётся — только вопрос (90.6 токена в среднем)</a:t>
+              <a:t>На инференсе схема НЕ подаётся — только вопрос (90.6 токена)</a:t>
             </a:r>
             <a:endParaRPr lang="en-US" sz="1500" dirty="0"/>
           </a:p>
@@ -9399,7 +10814,7 @@
       </p:sp>
       <p:sp>
         <p:nvSpPr>
-          <p:cNvPr id="15" name="Text 13"/>
+          <p:cNvPr id="14" name="Text 12"/>
           <p:cNvSpPr/>
           <p:nvPr/>
         </p:nvSpPr>
@@ -9438,7 +10853,7 @@
       </p:sp>
       <p:sp>
         <p:nvSpPr>
-          <p:cNvPr id="16" name="Text 14"/>
+          <p:cNvPr id="15" name="Text 13"/>
           <p:cNvSpPr/>
           <p:nvPr/>
         </p:nvSpPr>
@@ -9469,7 +10884,7 @@
                 <a:ea typeface="Courier New" pitchFamily="34" charset="-122"/>
                 <a:cs typeface="Courier New" pitchFamily="34" charset="-120"/>
               </a:rPr>
-              <a:t>2 / 13</a:t>
+              <a:t>3 / 15</a:t>
             </a:r>
             <a:endParaRPr lang="en-US" sz="900" dirty="0"/>
           </a:p>
@@ -9609,7 +11024,7 @@
         <p:spPr>
           <a:xfrm>
             <a:off x="457200" y="1097280"/>
-            <a:ext cx="10058400" cy="365760"/>
+            <a:ext cx="9966960" cy="365760"/>
           </a:xfrm>
           <a:prstGeom prst="rect">
             <a:avLst/>
@@ -10484,33 +11899,6 @@
           </a:solidFill>
           <a:ln w="12700">
             <a:solidFill>
-              <a:srgbClr val="C9B894"/>
-            </a:solidFill>
-            <a:prstDash val="solid"/>
-          </a:ln>
-        </p:spPr>
-      </p:sp>
-      <p:sp>
-        <p:nvSpPr>
-          <p:cNvPr id="31" name="Shape 29"/>
-          <p:cNvSpPr/>
-          <p:nvPr/>
-        </p:nvSpPr>
-        <p:spPr>
-          <a:xfrm>
-            <a:off x="9710928" y="2514600"/>
-            <a:ext cx="1993392" cy="2194560"/>
-          </a:xfrm>
-          <a:prstGeom prst="roundRect">
-            <a:avLst>
-              <a:gd name="adj" fmla="val 1835"/>
-            </a:avLst>
-          </a:prstGeom>
-          <a:solidFill>
-            <a:srgbClr val="102D69"/>
-          </a:solidFill>
-          <a:ln w="12700">
-            <a:solidFill>
               <a:srgbClr val="102D69"/>
             </a:solidFill>
             <a:prstDash val="solid"/>
@@ -10519,7 +11907,7 @@
       </p:sp>
       <p:sp>
         <p:nvSpPr>
-          <p:cNvPr id="32" name="Shape 30"/>
+          <p:cNvPr id="31" name="Shape 29"/>
           <p:cNvSpPr/>
           <p:nvPr/>
         </p:nvSpPr>
@@ -10539,7 +11927,7 @@
       </p:sp>
       <p:sp>
         <p:nvSpPr>
-          <p:cNvPr id="33" name="Text 31"/>
+          <p:cNvPr id="32" name="Text 30"/>
           <p:cNvSpPr/>
           <p:nvPr/>
         </p:nvSpPr>
@@ -10578,7 +11966,7 @@
       </p:sp>
       <p:sp>
         <p:nvSpPr>
-          <p:cNvPr id="34" name="Text 32"/>
+          <p:cNvPr id="33" name="Text 31"/>
           <p:cNvSpPr/>
           <p:nvPr/>
         </p:nvSpPr>
@@ -10617,7 +12005,7 @@
       </p:sp>
       <p:sp>
         <p:nvSpPr>
-          <p:cNvPr id="35" name="Text 33"/>
+          <p:cNvPr id="34" name="Text 32"/>
           <p:cNvSpPr/>
           <p:nvPr/>
         </p:nvSpPr>
@@ -10659,7 +12047,7 @@
       </p:sp>
       <p:sp>
         <p:nvSpPr>
-          <p:cNvPr id="36" name="Text 34"/>
+          <p:cNvPr id="35" name="Text 33"/>
           <p:cNvSpPr/>
           <p:nvPr/>
         </p:nvSpPr>
@@ -10690,7 +12078,7 @@
                 <a:ea typeface="Calibri" pitchFamily="34" charset="-122"/>
                 <a:cs typeface="Calibri" pitchFamily="34" charset="-120"/>
               </a:rPr>
-              <a:t>Baseline = та же target-модель со схемой в промпте. Все армы — на одном split, одном исполнителе SQL и одном парсере.</a:t>
+              <a:t>Baseline = та же target-модель, но со схемой в промпте. Все армы обеих веток мерим одинаково: один split, один исполнитель SQL, один парсер.</a:t>
             </a:r>
             <a:endParaRPr lang="en-US" sz="1300" dirty="0"/>
           </a:p>
@@ -10698,7 +12086,7 @@
       </p:sp>
       <p:sp>
         <p:nvSpPr>
-          <p:cNvPr id="37" name="Text 35"/>
+          <p:cNvPr id="36" name="Text 34"/>
           <p:cNvSpPr/>
           <p:nvPr/>
         </p:nvSpPr>
@@ -10737,7 +12125,7 @@
       </p:sp>
       <p:sp>
         <p:nvSpPr>
-          <p:cNvPr id="38" name="Text 36"/>
+          <p:cNvPr id="37" name="Text 35"/>
           <p:cNvSpPr/>
           <p:nvPr/>
         </p:nvSpPr>
@@ -10768,7 +12156,7 @@
                 <a:ea typeface="Courier New" pitchFamily="34" charset="-122"/>
                 <a:cs typeface="Courier New" pitchFamily="34" charset="-120"/>
               </a:rPr>
-              <a:t>3 / 13</a:t>
+              <a:t>4 / 15</a:t>
             </a:r>
             <a:endParaRPr lang="en-US" sz="900" dirty="0"/>
           </a:p>
@@ -10893,7 +12281,7 @@
                 <a:ea typeface="Calibri" pitchFamily="34" charset="-122"/>
                 <a:cs typeface="Calibri" pitchFamily="34" charset="-120"/>
               </a:rPr>
-              <a:t>Экспериментальная установка</a:t>
+              <a:t>Как мерили</a:t>
             </a:r>
             <a:endParaRPr lang="en-US" sz="3200" dirty="0"/>
           </a:p>
@@ -10908,7 +12296,7 @@
         <p:spPr>
           <a:xfrm>
             <a:off x="457200" y="1097280"/>
-            <a:ext cx="10058400" cy="365760"/>
+            <a:ext cx="9966960" cy="365760"/>
           </a:xfrm>
           <a:prstGeom prst="rect">
             <a:avLst/>
@@ -10932,7 +12320,7 @@
                 <a:ea typeface="Calibri" pitchFamily="34" charset="-122"/>
                 <a:cs typeface="Calibri" pitchFamily="34" charset="-120"/>
               </a:rPr>
-              <a:t>Единые правила замера для всех армов обеих веток</a:t>
+              <a:t>Одни правила для всех армов — чтобы сравнение было честным</a:t>
             </a:r>
             <a:endParaRPr lang="en-US" sz="1500" dirty="0"/>
           </a:p>
@@ -10940,18 +12328,133 @@
       </p:sp>
       <p:sp>
         <p:nvSpPr>
-          <p:cNvPr id="6" name="Shape 4"/>
+          <p:cNvPr id="6" name="Text 4"/>
           <p:cNvSpPr/>
           <p:nvPr/>
         </p:nvSpPr>
         <p:spPr>
           <a:xfrm>
             <a:off x="457200" y="2011680"/>
-            <a:ext cx="3535680" cy="1737360"/>
+            <a:ext cx="6217920" cy="3291840"/>
+          </a:xfrm>
+          <a:prstGeom prst="rect">
+            <a:avLst/>
+          </a:prstGeom>
+          <a:noFill/>
+          <a:ln/>
+        </p:spPr>
+        <p:txBody>
+          <a:bodyPr wrap="square" rtlCol="0" anchor="t"/>
+          <a:lstStyle/>
+          <a:p>
+            <a:pPr marL="342900" indent="-342900">
+              <a:lnSpc>
+                <a:spcPts val="2200"/>
+              </a:lnSpc>
+              <a:spcAft>
+                <a:spcPts val="1100"/>
+              </a:spcAft>
+              <a:buSzPct val="100000"/>
+              <a:buChar char="•"/>
+            </a:pPr>
+            <a:r>
+              <a:rPr lang="en-US" sz="1600" dirty="0">
+                <a:solidFill>
+                  <a:srgbClr val="444444"/>
+                </a:solidFill>
+                <a:latin typeface="Calibri" pitchFamily="34" charset="0"/>
+                <a:ea typeface="Calibri" pitchFamily="34" charset="-122"/>
+                <a:cs typeface="Calibri" pitchFamily="34" charset="-120"/>
+              </a:rPr>
+              <a:t>91 вопрос из бенчмарка BIRD — по трём реальным базам разного размера</a:t>
+            </a:r>
+            <a:endParaRPr lang="en-US" sz="1600" dirty="0"/>
+          </a:p>
+          <a:p>
+            <a:pPr marL="342900" indent="-342900">
+              <a:lnSpc>
+                <a:spcPts val="2200"/>
+              </a:lnSpc>
+              <a:spcAft>
+                <a:spcPts val="1100"/>
+              </a:spcAft>
+              <a:buSzPct val="100000"/>
+              <a:buChar char="•"/>
+            </a:pPr>
+            <a:r>
+              <a:rPr lang="en-US" sz="1600" dirty="0">
+                <a:solidFill>
+                  <a:srgbClr val="444444"/>
+                </a:solidFill>
+                <a:latin typeface="Calibri" pitchFamily="34" charset="0"/>
+                <a:ea typeface="Calibri" pitchFamily="34" charset="-122"/>
+                <a:cs typeface="Calibri" pitchFamily="34" charset="-120"/>
+              </a:rPr>
+              <a:t>Каждый арм гоняем на 3 сидах и берём среднее ± σ: один прогон на 91 вопросе смещён в обе стороны, ему нельзя верить</a:t>
+            </a:r>
+            <a:endParaRPr lang="en-US" sz="1600" dirty="0"/>
+          </a:p>
+          <a:p>
+            <a:pPr marL="342900" indent="-342900">
+              <a:lnSpc>
+                <a:spcPts val="2200"/>
+              </a:lnSpc>
+              <a:spcAft>
+                <a:spcPts val="1100"/>
+              </a:spcAft>
+              <a:buSzPct val="100000"/>
+              <a:buChar char="•"/>
+            </a:pPr>
+            <a:r>
+              <a:rPr lang="en-US" sz="1600" dirty="0">
+                <a:solidFill>
+                  <a:srgbClr val="444444"/>
+                </a:solidFill>
+                <a:latin typeface="Calibri" pitchFamily="34" charset="0"/>
+                <a:ea typeface="Calibri" pitchFamily="34" charset="-122"/>
+                <a:cs typeface="Calibri" pitchFamily="34" charset="-120"/>
+              </a:rPr>
+              <a:t>Две целевые модели: 3B (компактная) и 7B (основная)</a:t>
+            </a:r>
+            <a:endParaRPr lang="en-US" sz="1600" dirty="0"/>
+          </a:p>
+          <a:p>
+            <a:pPr marL="342900" indent="-342900">
+              <a:lnSpc>
+                <a:spcPts val="2200"/>
+              </a:lnSpc>
+              <a:buSzPct val="100000"/>
+              <a:buChar char="•"/>
+            </a:pPr>
+            <a:r>
+              <a:rPr lang="en-US" sz="1600" dirty="0">
+                <a:solidFill>
+                  <a:srgbClr val="444444"/>
+                </a:solidFill>
+                <a:latin typeface="Calibri" pitchFamily="34" charset="0"/>
+                <a:ea typeface="Calibri" pitchFamily="34" charset="-122"/>
+                <a:cs typeface="Calibri" pitchFamily="34" charset="-120"/>
+              </a:rPr>
+              <a:t>Для всех веток — один и тот же исполнитель SQL и парсер результата</a:t>
+            </a:r>
+            <a:endParaRPr lang="en-US" sz="1600" dirty="0"/>
+          </a:p>
+        </p:txBody>
+      </p:sp>
+      <p:sp>
+        <p:nvSpPr>
+          <p:cNvPr id="7" name="Shape 5"/>
+          <p:cNvSpPr/>
+          <p:nvPr/>
+        </p:nvSpPr>
+        <p:spPr>
+          <a:xfrm>
+            <a:off x="7040880" y="1965960"/>
+            <a:ext cx="4663440" cy="3794760"/>
           </a:xfrm>
           <a:prstGeom prst="roundRect">
             <a:avLst>
-              <a:gd name="adj" fmla="val 2105"/>
+              <a:gd name="adj" fmla="val 964"/>
             </a:avLst>
           </a:prstGeom>
           <a:solidFill>
@@ -10967,14 +12470,14 @@
       </p:sp>
       <p:sp>
         <p:nvSpPr>
-          <p:cNvPr id="7" name="Text 5"/>
-          <p:cNvSpPr/>
-          <p:nvPr/>
-        </p:nvSpPr>
-        <p:spPr>
-          <a:xfrm>
-            <a:off x="685800" y="2240280"/>
-            <a:ext cx="3078480" cy="640080"/>
+          <p:cNvPr id="8" name="Text 6"/>
+          <p:cNvSpPr/>
+          <p:nvPr/>
+        </p:nvSpPr>
+        <p:spPr>
+          <a:xfrm>
+            <a:off x="7315200" y="2194560"/>
+            <a:ext cx="4114800" cy="365760"/>
           </a:xfrm>
           <a:prstGeom prst="rect">
             <a:avLst/>
@@ -10990,7 +12493,46 @@
               <a:buNone/>
             </a:pPr>
             <a:r>
-              <a:rPr lang="en-US" sz="2800" b="1" dirty="0">
+              <a:rPr lang="en-US" sz="1600" b="1" dirty="0">
+                <a:solidFill>
+                  <a:srgbClr val="102D69"/>
+                </a:solidFill>
+                <a:latin typeface="Calibri" pitchFamily="34" charset="0"/>
+                <a:ea typeface="Calibri" pitchFamily="34" charset="-122"/>
+                <a:cs typeface="Calibri" pitchFamily="34" charset="-120"/>
+              </a:rPr>
+              <a:t>Три базы</a:t>
+            </a:r>
+            <a:endParaRPr lang="en-US" sz="1600" dirty="0"/>
+          </a:p>
+        </p:txBody>
+      </p:sp>
+      <p:sp>
+        <p:nvSpPr>
+          <p:cNvPr id="9" name="Text 7"/>
+          <p:cNvSpPr/>
+          <p:nvPr/>
+        </p:nvSpPr>
+        <p:spPr>
+          <a:xfrm>
+            <a:off x="7315200" y="2697480"/>
+            <a:ext cx="4114800" cy="320040"/>
+          </a:xfrm>
+          <a:prstGeom prst="rect">
+            <a:avLst/>
+          </a:prstGeom>
+          <a:noFill/>
+          <a:ln/>
+        </p:spPr>
+        <p:txBody>
+          <a:bodyPr wrap="square" lIns="0" tIns="0" rIns="0" bIns="0" rtlCol="0" anchor="ctr"/>
+          <a:lstStyle/>
+          <a:p>
+            <a:pPr indent="0" marL="0">
+              <a:buNone/>
+            </a:pPr>
+            <a:r>
+              <a:rPr lang="en-US" sz="1400" b="1" dirty="0">
                 <a:solidFill>
                   <a:srgbClr val="102D69"/>
                 </a:solidFill>
@@ -10998,22 +12540,22 @@
                 <a:ea typeface="Courier New" pitchFamily="34" charset="-122"/>
                 <a:cs typeface="Courier New" pitchFamily="34" charset="-120"/>
               </a:rPr>
-              <a:t>91</a:t>
-            </a:r>
-            <a:endParaRPr lang="en-US" sz="2800" dirty="0"/>
-          </a:p>
-        </p:txBody>
-      </p:sp>
-      <p:sp>
-        <p:nvSpPr>
-          <p:cNvPr id="8" name="Text 6"/>
-          <p:cNvSpPr/>
-          <p:nvPr/>
-        </p:nvSpPr>
-        <p:spPr>
-          <a:xfrm>
-            <a:off x="685800" y="2926080"/>
-            <a:ext cx="3078480" cy="731520"/>
+              <a:t>financial</a:t>
+            </a:r>
+            <a:endParaRPr lang="en-US" sz="1400" dirty="0"/>
+          </a:p>
+        </p:txBody>
+      </p:sp>
+      <p:sp>
+        <p:nvSpPr>
+          <p:cNvPr id="10" name="Text 8"/>
+          <p:cNvSpPr/>
+          <p:nvPr/>
+        </p:nvSpPr>
+        <p:spPr>
+          <a:xfrm>
+            <a:off x="7315200" y="3008376"/>
+            <a:ext cx="4114800" cy="548640"/>
           </a:xfrm>
           <a:prstGeom prst="rect">
             <a:avLst/>
@@ -11027,12 +12569,12 @@
           <a:p>
             <a:pPr indent="0" marL="0">
               <a:lnSpc>
-                <a:spcPts val="1600"/>
+                <a:spcPts val="1500"/>
               </a:lnSpc>
               <a:buNone/>
             </a:pPr>
             <a:r>
-              <a:rPr lang="en-US" sz="1300" dirty="0">
+              <a:rPr lang="en-US" sz="1250" dirty="0">
                 <a:solidFill>
                   <a:srgbClr val="444444"/>
                 </a:solidFill>
@@ -11040,49 +12582,22 @@
                 <a:ea typeface="Calibri" pitchFamily="34" charset="-122"/>
                 <a:cs typeface="Calibri" pitchFamily="34" charset="-120"/>
               </a:rPr>
-              <a:t>вопрос BIRD (bird_large)</a:t>
-            </a:r>
-            <a:endParaRPr lang="en-US" sz="1300" dirty="0"/>
-          </a:p>
-        </p:txBody>
-      </p:sp>
-      <p:sp>
-        <p:nvSpPr>
-          <p:cNvPr id="9" name="Shape 7"/>
-          <p:cNvSpPr/>
-          <p:nvPr/>
-        </p:nvSpPr>
-        <p:spPr>
-          <a:xfrm>
-            <a:off x="4312920" y="2011680"/>
-            <a:ext cx="3535680" cy="1737360"/>
-          </a:xfrm>
-          <a:prstGeom prst="roundRect">
-            <a:avLst>
-              <a:gd name="adj" fmla="val 2105"/>
-            </a:avLst>
-          </a:prstGeom>
-          <a:solidFill>
-            <a:srgbClr val="EEF4FF"/>
-          </a:solidFill>
-          <a:ln w="12700">
-            <a:solidFill>
-              <a:srgbClr val="C9B894"/>
-            </a:solidFill>
-            <a:prstDash val="solid"/>
-          </a:ln>
-        </p:spPr>
-      </p:sp>
-      <p:sp>
-        <p:nvSpPr>
-          <p:cNvPr id="10" name="Text 8"/>
-          <p:cNvSpPr/>
-          <p:nvPr/>
-        </p:nvSpPr>
-        <p:spPr>
-          <a:xfrm>
-            <a:off x="4541520" y="2240280"/>
-            <a:ext cx="3078480" cy="640080"/>
+              <a:t>8 таблиц · банковские данные, много джойнов</a:t>
+            </a:r>
+            <a:endParaRPr lang="en-US" sz="1250" dirty="0"/>
+          </a:p>
+        </p:txBody>
+      </p:sp>
+      <p:sp>
+        <p:nvSpPr>
+          <p:cNvPr id="11" name="Text 9"/>
+          <p:cNvSpPr/>
+          <p:nvPr/>
+        </p:nvSpPr>
+        <p:spPr>
+          <a:xfrm>
+            <a:off x="7315200" y="3657600"/>
+            <a:ext cx="4114800" cy="320040"/>
           </a:xfrm>
           <a:prstGeom prst="rect">
             <a:avLst/>
@@ -11098,7 +12613,7 @@
               <a:buNone/>
             </a:pPr>
             <a:r>
-              <a:rPr lang="en-US" sz="2800" b="1" dirty="0">
+              <a:rPr lang="en-US" sz="1400" b="1" dirty="0">
                 <a:solidFill>
                   <a:srgbClr val="102D69"/>
                 </a:solidFill>
@@ -11106,22 +12621,22 @@
                 <a:ea typeface="Courier New" pitchFamily="34" charset="-122"/>
                 <a:cs typeface="Courier New" pitchFamily="34" charset="-120"/>
               </a:rPr>
-              <a:t>3</a:t>
-            </a:r>
-            <a:endParaRPr lang="en-US" sz="2800" dirty="0"/>
-          </a:p>
-        </p:txBody>
-      </p:sp>
-      <p:sp>
-        <p:nvSpPr>
-          <p:cNvPr id="11" name="Text 9"/>
-          <p:cNvSpPr/>
-          <p:nvPr/>
-        </p:nvSpPr>
-        <p:spPr>
-          <a:xfrm>
-            <a:off x="4541520" y="2926080"/>
-            <a:ext cx="3078480" cy="731520"/>
+              <a:t>toxicology</a:t>
+            </a:r>
+            <a:endParaRPr lang="en-US" sz="1400" dirty="0"/>
+          </a:p>
+        </p:txBody>
+      </p:sp>
+      <p:sp>
+        <p:nvSpPr>
+          <p:cNvPr id="12" name="Text 10"/>
+          <p:cNvSpPr/>
+          <p:nvPr/>
+        </p:nvSpPr>
+        <p:spPr>
+          <a:xfrm>
+            <a:off x="7315200" y="3968496"/>
+            <a:ext cx="4114800" cy="548640"/>
           </a:xfrm>
           <a:prstGeom prst="rect">
             <a:avLst/>
@@ -11135,12 +12650,12 @@
           <a:p>
             <a:pPr indent="0" marL="0">
               <a:lnSpc>
-                <a:spcPts val="1600"/>
+                <a:spcPts val="1500"/>
               </a:lnSpc>
               <a:buNone/>
             </a:pPr>
             <a:r>
-              <a:rPr lang="en-US" sz="1300" dirty="0">
+              <a:rPr lang="en-US" sz="1250" dirty="0">
                 <a:solidFill>
                   <a:srgbClr val="444444"/>
                 </a:solidFill>
@@ -11148,38 +12663,11 @@
                 <a:ea typeface="Calibri" pitchFamily="34" charset="-122"/>
                 <a:cs typeface="Calibri" pitchFamily="34" charset="-120"/>
               </a:rPr>
-              <a:t>базы: financial · toxicology · codebase_community</a:t>
-            </a:r>
-            <a:endParaRPr lang="en-US" sz="1300" dirty="0"/>
-          </a:p>
-        </p:txBody>
-      </p:sp>
-      <p:sp>
-        <p:nvSpPr>
-          <p:cNvPr id="12" name="Shape 10"/>
-          <p:cNvSpPr/>
-          <p:nvPr/>
-        </p:nvSpPr>
-        <p:spPr>
-          <a:xfrm>
-            <a:off x="8168640" y="2011680"/>
-            <a:ext cx="3535680" cy="1737360"/>
-          </a:xfrm>
-          <a:prstGeom prst="roundRect">
-            <a:avLst>
-              <a:gd name="adj" fmla="val 2105"/>
-            </a:avLst>
-          </a:prstGeom>
-          <a:solidFill>
-            <a:srgbClr val="EEF4FF"/>
-          </a:solidFill>
-          <a:ln w="12700">
-            <a:solidFill>
-              <a:srgbClr val="C9B894"/>
-            </a:solidFill>
-            <a:prstDash val="solid"/>
-          </a:ln>
-        </p:spPr>
+              <a:t>4 таблицы · маленькая, граф молекул</a:t>
+            </a:r>
+            <a:endParaRPr lang="en-US" sz="1250" dirty="0"/>
+          </a:p>
+        </p:txBody>
       </p:sp>
       <p:sp>
         <p:nvSpPr>
@@ -11189,8 +12677,8 @@
         </p:nvSpPr>
         <p:spPr>
           <a:xfrm>
-            <a:off x="8397240" y="2240280"/>
-            <a:ext cx="3078480" cy="640080"/>
+            <a:off x="7315200" y="4617720"/>
+            <a:ext cx="4114800" cy="320040"/>
           </a:xfrm>
           <a:prstGeom prst="rect">
             <a:avLst/>
@@ -11206,7 +12694,7 @@
               <a:buNone/>
             </a:pPr>
             <a:r>
-              <a:rPr lang="en-US" sz="2800" b="1" dirty="0">
+              <a:rPr lang="en-US" sz="1400" b="1" dirty="0">
                 <a:solidFill>
                   <a:srgbClr val="102D69"/>
                 </a:solidFill>
@@ -11214,9 +12702,9 @@
                 <a:ea typeface="Courier New" pitchFamily="34" charset="-122"/>
                 <a:cs typeface="Courier New" pitchFamily="34" charset="-120"/>
               </a:rPr>
-              <a:t>EX · VES</a:t>
-            </a:r>
-            <a:endParaRPr lang="en-US" sz="2800" dirty="0"/>
+              <a:t>codebase_community</a:t>
+            </a:r>
+            <a:endParaRPr lang="en-US" sz="1400" dirty="0"/>
           </a:p>
         </p:txBody>
       </p:sp>
@@ -11228,8 +12716,8 @@
         </p:nvSpPr>
         <p:spPr>
           <a:xfrm>
-            <a:off x="8397240" y="2926080"/>
-            <a:ext cx="3078480" cy="731520"/>
+            <a:off x="7315200" y="4928616"/>
+            <a:ext cx="4114800" cy="548640"/>
           </a:xfrm>
           <a:prstGeom prst="rect">
             <a:avLst/>
@@ -11243,12 +12731,12 @@
           <a:p>
             <a:pPr indent="0" marL="0">
               <a:lnSpc>
-                <a:spcPts val="1600"/>
+                <a:spcPts val="1500"/>
               </a:lnSpc>
               <a:buNone/>
             </a:pPr>
             <a:r>
-              <a:rPr lang="en-US" sz="1300" dirty="0">
+              <a:rPr lang="en-US" sz="1250" dirty="0">
                 <a:solidFill>
                   <a:srgbClr val="444444"/>
                 </a:solidFill>
@@ -11256,38 +12744,50 @@
                 <a:ea typeface="Calibri" pitchFamily="34" charset="-122"/>
                 <a:cs typeface="Calibri" pitchFamily="34" charset="-120"/>
               </a:rPr>
-              <a:t>точность + эффективность корректных запросов</a:t>
-            </a:r>
-            <a:endParaRPr lang="en-US" sz="1300" dirty="0"/>
-          </a:p>
-        </p:txBody>
-      </p:sp>
-      <p:sp>
-        <p:nvSpPr>
-          <p:cNvPr id="15" name="Shape 13"/>
-          <p:cNvSpPr/>
-          <p:nvPr/>
-        </p:nvSpPr>
-        <p:spPr>
-          <a:xfrm>
-            <a:off x="457200" y="4069080"/>
-            <a:ext cx="3535680" cy="1737360"/>
-          </a:xfrm>
-          <a:prstGeom prst="roundRect">
-            <a:avLst>
-              <a:gd name="adj" fmla="val 2105"/>
-            </a:avLst>
-          </a:prstGeom>
-          <a:solidFill>
-            <a:srgbClr val="EEF4FF"/>
-          </a:solidFill>
-          <a:ln w="12700">
-            <a:solidFill>
-              <a:srgbClr val="C9B894"/>
-            </a:solidFill>
-            <a:prstDash val="solid"/>
-          </a:ln>
-        </p:spPr>
+              <a:t>8 таблиц · плотно связанная схема</a:t>
+            </a:r>
+            <a:endParaRPr lang="en-US" sz="1250" dirty="0"/>
+          </a:p>
+        </p:txBody>
+      </p:sp>
+      <p:sp>
+        <p:nvSpPr>
+          <p:cNvPr id="15" name="Text 13"/>
+          <p:cNvSpPr/>
+          <p:nvPr/>
+        </p:nvSpPr>
+        <p:spPr>
+          <a:xfrm>
+            <a:off x="457200" y="6455664"/>
+            <a:ext cx="6400800" cy="274320"/>
+          </a:xfrm>
+          <a:prstGeom prst="rect">
+            <a:avLst/>
+          </a:prstGeom>
+          <a:noFill/>
+          <a:ln/>
+        </p:spPr>
+        <p:txBody>
+          <a:bodyPr wrap="square" lIns="0" tIns="0" rIns="0" bIns="0" rtlCol="0" anchor="ctr"/>
+          <a:lstStyle/>
+          <a:p>
+            <a:pPr indent="0" marL="0">
+              <a:buNone/>
+            </a:pPr>
+            <a:r>
+              <a:rPr lang="en-US" sz="900" dirty="0">
+                <a:solidFill>
+                  <a:srgbClr val="444444"/>
+                </a:solidFill>
+                <a:latin typeface="Calibri" pitchFamily="34" charset="0"/>
+                <a:ea typeface="Calibri" pitchFamily="34" charset="-122"/>
+                <a:cs typeface="Calibri" pitchFamily="34" charset="-120"/>
+              </a:rPr>
+              <a:t>DB2Model · ветка SFT/LoRA</a:t>
+            </a:r>
+            <a:endParaRPr lang="en-US" sz="900" dirty="0"/>
+          </a:p>
+        </p:txBody>
       </p:sp>
       <p:sp>
         <p:nvSpPr>
@@ -11297,8 +12797,8 @@
         </p:nvSpPr>
         <p:spPr>
           <a:xfrm>
-            <a:off x="685800" y="4297680"/>
-            <a:ext cx="3078480" cy="640080"/>
+            <a:off x="10881360" y="6455664"/>
+            <a:ext cx="822960" cy="274320"/>
           </a:xfrm>
           <a:prstGeom prst="rect">
             <a:avLst/>
@@ -11310,355 +12810,19 @@
           <a:bodyPr wrap="square" lIns="0" tIns="0" rIns="0" bIns="0" rtlCol="0" anchor="ctr"/>
           <a:lstStyle/>
           <a:p>
-            <a:pPr indent="0" marL="0">
-              <a:buNone/>
-            </a:pPr>
-            <a:r>
-              <a:rPr lang="en-US" sz="2800" b="1" dirty="0">
-                <a:solidFill>
-                  <a:srgbClr val="102D69"/>
+            <a:pPr algn="r" indent="0" marL="0">
+              <a:buNone/>
+            </a:pPr>
+            <a:r>
+              <a:rPr lang="en-US" sz="900" dirty="0">
+                <a:solidFill>
+                  <a:srgbClr val="444444"/>
                 </a:solidFill>
                 <a:latin typeface="Courier New" pitchFamily="34" charset="0"/>
                 <a:ea typeface="Courier New" pitchFamily="34" charset="-122"/>
                 <a:cs typeface="Courier New" pitchFamily="34" charset="-120"/>
               </a:rPr>
-              <a:t>токены</a:t>
-            </a:r>
-            <a:endParaRPr lang="en-US" sz="2800" dirty="0"/>
-          </a:p>
-        </p:txBody>
-      </p:sp>
-      <p:sp>
-        <p:nvSpPr>
-          <p:cNvPr id="17" name="Text 15"/>
-          <p:cNvSpPr/>
-          <p:nvPr/>
-        </p:nvSpPr>
-        <p:spPr>
-          <a:xfrm>
-            <a:off x="685800" y="4983480"/>
-            <a:ext cx="3078480" cy="731520"/>
-          </a:xfrm>
-          <a:prstGeom prst="rect">
-            <a:avLst/>
-          </a:prstGeom>
-          <a:noFill/>
-          <a:ln/>
-        </p:spPr>
-        <p:txBody>
-          <a:bodyPr wrap="square" lIns="0" tIns="0" rIns="0" bIns="0" rtlCol="0" anchor="t"/>
-          <a:lstStyle/>
-          <a:p>
-            <a:pPr indent="0" marL="0">
-              <a:lnSpc>
-                <a:spcPts val="1600"/>
-              </a:lnSpc>
-              <a:buNone/>
-            </a:pPr>
-            <a:r>
-              <a:rPr lang="en-US" sz="1300" dirty="0">
-                <a:solidFill>
-                  <a:srgbClr val="444444"/>
-                </a:solidFill>
-                <a:latin typeface="Calibri" pitchFamily="34" charset="0"/>
-                <a:ea typeface="Calibri" pitchFamily="34" charset="-122"/>
-                <a:cs typeface="Calibri" pitchFamily="34" charset="-120"/>
-              </a:rPr>
-              <a:t>бюджет контекста — ключевая метрика задачи</a:t>
-            </a:r>
-            <a:endParaRPr lang="en-US" sz="1300" dirty="0"/>
-          </a:p>
-        </p:txBody>
-      </p:sp>
-      <p:sp>
-        <p:nvSpPr>
-          <p:cNvPr id="18" name="Shape 16"/>
-          <p:cNvSpPr/>
-          <p:nvPr/>
-        </p:nvSpPr>
-        <p:spPr>
-          <a:xfrm>
-            <a:off x="4312920" y="4069080"/>
-            <a:ext cx="3535680" cy="1737360"/>
-          </a:xfrm>
-          <a:prstGeom prst="roundRect">
-            <a:avLst>
-              <a:gd name="adj" fmla="val 2105"/>
-            </a:avLst>
-          </a:prstGeom>
-          <a:solidFill>
-            <a:srgbClr val="EEF4FF"/>
-          </a:solidFill>
-          <a:ln w="12700">
-            <a:solidFill>
-              <a:srgbClr val="C9B894"/>
-            </a:solidFill>
-            <a:prstDash val="solid"/>
-          </a:ln>
-        </p:spPr>
-      </p:sp>
-      <p:sp>
-        <p:nvSpPr>
-          <p:cNvPr id="19" name="Text 17"/>
-          <p:cNvSpPr/>
-          <p:nvPr/>
-        </p:nvSpPr>
-        <p:spPr>
-          <a:xfrm>
-            <a:off x="4541520" y="4297680"/>
-            <a:ext cx="3078480" cy="640080"/>
-          </a:xfrm>
-          <a:prstGeom prst="rect">
-            <a:avLst/>
-          </a:prstGeom>
-          <a:noFill/>
-          <a:ln/>
-        </p:spPr>
-        <p:txBody>
-          <a:bodyPr wrap="square" lIns="0" tIns="0" rIns="0" bIns="0" rtlCol="0" anchor="ctr"/>
-          <a:lstStyle/>
-          <a:p>
-            <a:pPr indent="0" marL="0">
-              <a:buNone/>
-            </a:pPr>
-            <a:r>
-              <a:rPr lang="en-US" sz="2800" b="1" dirty="0">
-                <a:solidFill>
-                  <a:srgbClr val="102D69"/>
-                </a:solidFill>
-                <a:latin typeface="Courier New" pitchFamily="34" charset="0"/>
-                <a:ea typeface="Courier New" pitchFamily="34" charset="-122"/>
-                <a:cs typeface="Courier New" pitchFamily="34" charset="-120"/>
-              </a:rPr>
-              <a:t>3 сида</a:t>
-            </a:r>
-            <a:endParaRPr lang="en-US" sz="2800" dirty="0"/>
-          </a:p>
-        </p:txBody>
-      </p:sp>
-      <p:sp>
-        <p:nvSpPr>
-          <p:cNvPr id="20" name="Text 18"/>
-          <p:cNvSpPr/>
-          <p:nvPr/>
-        </p:nvSpPr>
-        <p:spPr>
-          <a:xfrm>
-            <a:off x="4541520" y="4983480"/>
-            <a:ext cx="3078480" cy="731520"/>
-          </a:xfrm>
-          <a:prstGeom prst="rect">
-            <a:avLst/>
-          </a:prstGeom>
-          <a:noFill/>
-          <a:ln/>
-        </p:spPr>
-        <p:txBody>
-          <a:bodyPr wrap="square" lIns="0" tIns="0" rIns="0" bIns="0" rtlCol="0" anchor="t"/>
-          <a:lstStyle/>
-          <a:p>
-            <a:pPr indent="0" marL="0">
-              <a:lnSpc>
-                <a:spcPts val="1600"/>
-              </a:lnSpc>
-              <a:buNone/>
-            </a:pPr>
-            <a:r>
-              <a:rPr lang="en-US" sz="1300" dirty="0">
-                <a:solidFill>
-                  <a:srgbClr val="444444"/>
-                </a:solidFill>
-                <a:latin typeface="Calibri" pitchFamily="34" charset="0"/>
-                <a:ea typeface="Calibri" pitchFamily="34" charset="-122"/>
-                <a:cs typeface="Calibri" pitchFamily="34" charset="-120"/>
-              </a:rPr>
-              <a:t>средние ± σ (одиночный прогон врёт)</a:t>
-            </a:r>
-            <a:endParaRPr lang="en-US" sz="1300" dirty="0"/>
-          </a:p>
-        </p:txBody>
-      </p:sp>
-      <p:sp>
-        <p:nvSpPr>
-          <p:cNvPr id="21" name="Shape 19"/>
-          <p:cNvSpPr/>
-          <p:nvPr/>
-        </p:nvSpPr>
-        <p:spPr>
-          <a:xfrm>
-            <a:off x="8168640" y="4069080"/>
-            <a:ext cx="3535680" cy="1737360"/>
-          </a:xfrm>
-          <a:prstGeom prst="roundRect">
-            <a:avLst>
-              <a:gd name="adj" fmla="val 2105"/>
-            </a:avLst>
-          </a:prstGeom>
-          <a:solidFill>
-            <a:srgbClr val="EEF4FF"/>
-          </a:solidFill>
-          <a:ln w="12700">
-            <a:solidFill>
-              <a:srgbClr val="C9B894"/>
-            </a:solidFill>
-            <a:prstDash val="solid"/>
-          </a:ln>
-        </p:spPr>
-      </p:sp>
-      <p:sp>
-        <p:nvSpPr>
-          <p:cNvPr id="22" name="Text 20"/>
-          <p:cNvSpPr/>
-          <p:nvPr/>
-        </p:nvSpPr>
-        <p:spPr>
-          <a:xfrm>
-            <a:off x="8397240" y="4297680"/>
-            <a:ext cx="3078480" cy="640080"/>
-          </a:xfrm>
-          <a:prstGeom prst="rect">
-            <a:avLst/>
-          </a:prstGeom>
-          <a:noFill/>
-          <a:ln/>
-        </p:spPr>
-        <p:txBody>
-          <a:bodyPr wrap="square" lIns="0" tIns="0" rIns="0" bIns="0" rtlCol="0" anchor="ctr"/>
-          <a:lstStyle/>
-          <a:p>
-            <a:pPr indent="0" marL="0">
-              <a:buNone/>
-            </a:pPr>
-            <a:r>
-              <a:rPr lang="en-US" sz="2800" b="1" dirty="0">
-                <a:solidFill>
-                  <a:srgbClr val="102D69"/>
-                </a:solidFill>
-                <a:latin typeface="Courier New" pitchFamily="34" charset="0"/>
-                <a:ea typeface="Courier New" pitchFamily="34" charset="-122"/>
-                <a:cs typeface="Courier New" pitchFamily="34" charset="-120"/>
-              </a:rPr>
-              <a:t>3B · 7B</a:t>
-            </a:r>
-            <a:endParaRPr lang="en-US" sz="2800" dirty="0"/>
-          </a:p>
-        </p:txBody>
-      </p:sp>
-      <p:sp>
-        <p:nvSpPr>
-          <p:cNvPr id="23" name="Text 21"/>
-          <p:cNvSpPr/>
-          <p:nvPr/>
-        </p:nvSpPr>
-        <p:spPr>
-          <a:xfrm>
-            <a:off x="8397240" y="4983480"/>
-            <a:ext cx="3078480" cy="731520"/>
-          </a:xfrm>
-          <a:prstGeom prst="rect">
-            <a:avLst/>
-          </a:prstGeom>
-          <a:noFill/>
-          <a:ln/>
-        </p:spPr>
-        <p:txBody>
-          <a:bodyPr wrap="square" lIns="0" tIns="0" rIns="0" bIns="0" rtlCol="0" anchor="t"/>
-          <a:lstStyle/>
-          <a:p>
-            <a:pPr indent="0" marL="0">
-              <a:lnSpc>
-                <a:spcPts val="1600"/>
-              </a:lnSpc>
-              <a:buNone/>
-            </a:pPr>
-            <a:r>
-              <a:rPr lang="en-US" sz="1300" dirty="0">
-                <a:solidFill>
-                  <a:srgbClr val="444444"/>
-                </a:solidFill>
-                <a:latin typeface="Calibri" pitchFamily="34" charset="0"/>
-                <a:ea typeface="Calibri" pitchFamily="34" charset="-122"/>
-                <a:cs typeface="Calibri" pitchFamily="34" charset="-120"/>
-              </a:rPr>
-              <a:t>два размера target-модели</a:t>
-            </a:r>
-            <a:endParaRPr lang="en-US" sz="1300" dirty="0"/>
-          </a:p>
-        </p:txBody>
-      </p:sp>
-      <p:sp>
-        <p:nvSpPr>
-          <p:cNvPr id="24" name="Text 22"/>
-          <p:cNvSpPr/>
-          <p:nvPr/>
-        </p:nvSpPr>
-        <p:spPr>
-          <a:xfrm>
-            <a:off x="457200" y="6455664"/>
-            <a:ext cx="6400800" cy="274320"/>
-          </a:xfrm>
-          <a:prstGeom prst="rect">
-            <a:avLst/>
-          </a:prstGeom>
-          <a:noFill/>
-          <a:ln/>
-        </p:spPr>
-        <p:txBody>
-          <a:bodyPr wrap="square" lIns="0" tIns="0" rIns="0" bIns="0" rtlCol="0" anchor="ctr"/>
-          <a:lstStyle/>
-          <a:p>
-            <a:pPr indent="0" marL="0">
-              <a:buNone/>
-            </a:pPr>
-            <a:r>
-              <a:rPr lang="en-US" sz="900" dirty="0">
-                <a:solidFill>
-                  <a:srgbClr val="444444"/>
-                </a:solidFill>
-                <a:latin typeface="Calibri" pitchFamily="34" charset="0"/>
-                <a:ea typeface="Calibri" pitchFamily="34" charset="-122"/>
-                <a:cs typeface="Calibri" pitchFamily="34" charset="-120"/>
-              </a:rPr>
-              <a:t>DB2Model · ветка SFT/LoRA</a:t>
-            </a:r>
-            <a:endParaRPr lang="en-US" sz="900" dirty="0"/>
-          </a:p>
-        </p:txBody>
-      </p:sp>
-      <p:sp>
-        <p:nvSpPr>
-          <p:cNvPr id="25" name="Text 23"/>
-          <p:cNvSpPr/>
-          <p:nvPr/>
-        </p:nvSpPr>
-        <p:spPr>
-          <a:xfrm>
-            <a:off x="10881360" y="6455664"/>
-            <a:ext cx="822960" cy="274320"/>
-          </a:xfrm>
-          <a:prstGeom prst="rect">
-            <a:avLst/>
-          </a:prstGeom>
-          <a:noFill/>
-          <a:ln/>
-        </p:spPr>
-        <p:txBody>
-          <a:bodyPr wrap="square" lIns="0" tIns="0" rIns="0" bIns="0" rtlCol="0" anchor="ctr"/>
-          <a:lstStyle/>
-          <a:p>
-            <a:pPr algn="r" indent="0" marL="0">
-              <a:buNone/>
-            </a:pPr>
-            <a:r>
-              <a:rPr lang="en-US" sz="900" dirty="0">
-                <a:solidFill>
-                  <a:srgbClr val="444444"/>
-                </a:solidFill>
-                <a:latin typeface="Courier New" pitchFamily="34" charset="0"/>
-                <a:ea typeface="Courier New" pitchFamily="34" charset="-122"/>
-                <a:cs typeface="Courier New" pitchFamily="34" charset="-120"/>
-              </a:rPr>
-              <a:t>4 / 13</a:t>
+              <a:t>5 / 15</a:t>
             </a:r>
             <a:endParaRPr lang="en-US" sz="900" dirty="0"/>
           </a:p>
@@ -11678,7 +12842,7 @@
     <p:bg>
       <p:bgPr>
         <a:solidFill>
-          <a:srgbClr val="102D69"/>
+          <a:srgbClr val="FFFFFF"/>
         </a:solidFill>
       </p:bgPr>
     </p:bg>
@@ -11698,14 +12862,68 @@
       </p:grpSpPr>
       <p:sp>
         <p:nvSpPr>
-          <p:cNvPr id="2" name="Text 0"/>
-          <p:cNvSpPr/>
-          <p:nvPr/>
-        </p:nvSpPr>
-        <p:spPr>
-          <a:xfrm>
-            <a:off x="640080" y="502920"/>
-            <a:ext cx="10972800" cy="640080"/>
+          <p:cNvPr id="2" name="Shape 0"/>
+          <p:cNvSpPr/>
+          <p:nvPr/>
+        </p:nvSpPr>
+        <p:spPr>
+          <a:xfrm rot="840000">
+            <a:off x="10561320" y="109728"/>
+            <a:ext cx="822960" cy="822960"/>
+          </a:xfrm>
+          <a:prstGeom prst="roundRect">
+            <a:avLst>
+              <a:gd name="adj" fmla="val 13333"/>
+            </a:avLst>
+          </a:prstGeom>
+          <a:solidFill>
+            <a:srgbClr val="FAB900"/>
+          </a:solidFill>
+          <a:ln w="38100">
+            <a:solidFill>
+              <a:srgbClr val="102D69"/>
+            </a:solidFill>
+            <a:prstDash val="solid"/>
+          </a:ln>
+        </p:spPr>
+      </p:sp>
+      <p:sp>
+        <p:nvSpPr>
+          <p:cNvPr id="3" name="Shape 1"/>
+          <p:cNvSpPr/>
+          <p:nvPr/>
+        </p:nvSpPr>
+        <p:spPr>
+          <a:xfrm rot="-660000">
+            <a:off x="11109960" y="566928"/>
+            <a:ext cx="822960" cy="822960"/>
+          </a:xfrm>
+          <a:prstGeom prst="roundRect">
+            <a:avLst>
+              <a:gd name="adj" fmla="val 13333"/>
+            </a:avLst>
+          </a:prstGeom>
+          <a:solidFill>
+            <a:srgbClr val="E61E3C"/>
+          </a:solidFill>
+          <a:ln w="38100">
+            <a:solidFill>
+              <a:srgbClr val="102D69"/>
+            </a:solidFill>
+            <a:prstDash val="solid"/>
+          </a:ln>
+        </p:spPr>
+      </p:sp>
+      <p:sp>
+        <p:nvSpPr>
+          <p:cNvPr id="4" name="Text 2"/>
+          <p:cNvSpPr/>
+          <p:nvPr/>
+        </p:nvSpPr>
+        <p:spPr>
+          <a:xfrm>
+            <a:off x="457200" y="384048"/>
+            <a:ext cx="9875520" cy="685800"/>
           </a:xfrm>
           <a:prstGeom prst="rect">
             <a:avLst/>
@@ -11723,13 +12941,13 @@
             <a:r>
               <a:rPr lang="en-US" sz="3200" b="1" dirty="0">
                 <a:solidFill>
-                  <a:srgbClr val="FFFFFF"/>
+                  <a:srgbClr val="102D69"/>
                 </a:solidFill>
                 <a:latin typeface="Calibri" pitchFamily="34" charset="0"/>
                 <a:ea typeface="Calibri" pitchFamily="34" charset="-122"/>
                 <a:cs typeface="Calibri" pitchFamily="34" charset="-120"/>
               </a:rPr>
-              <a:t>Главный результат</a:t>
+              <a:t>Метрики: три оси сравнения</a:t>
             </a:r>
             <a:endParaRPr lang="en-US" sz="3200" dirty="0"/>
           </a:p>
@@ -11737,14 +12955,14 @@
       </p:sp>
       <p:sp>
         <p:nvSpPr>
-          <p:cNvPr id="3" name="Text 1"/>
-          <p:cNvSpPr/>
-          <p:nvPr/>
-        </p:nvSpPr>
-        <p:spPr>
-          <a:xfrm>
-            <a:off x="640080" y="1188720"/>
-            <a:ext cx="10972800" cy="365760"/>
+          <p:cNvPr id="5" name="Text 3"/>
+          <p:cNvSpPr/>
+          <p:nvPr/>
+        </p:nvSpPr>
+        <p:spPr>
+          <a:xfrm>
+            <a:off x="457200" y="1097280"/>
+            <a:ext cx="9966960" cy="365760"/>
           </a:xfrm>
           <a:prstGeom prst="rect">
             <a:avLst/>
@@ -11760,30 +12978,118 @@
               <a:buNone/>
             </a:pPr>
             <a:r>
-              <a:rPr lang="en-US" sz="1400" dirty="0">
-                <a:solidFill>
-                  <a:srgbClr val="FAB900"/>
+              <a:rPr lang="en-US" sz="1500" dirty="0">
+                <a:solidFill>
+                  <a:srgbClr val="444444"/>
+                </a:solidFill>
+                <a:latin typeface="Calibri" pitchFamily="34" charset="0"/>
+                <a:ea typeface="Calibri" pitchFamily="34" charset="-122"/>
+                <a:cs typeface="Calibri" pitchFamily="34" charset="-120"/>
+              </a:rPr>
+              <a:t>Что именно измеряем у каждого арма — простыми словами</a:t>
+            </a:r>
+            <a:endParaRPr lang="en-US" sz="1500" dirty="0"/>
+          </a:p>
+        </p:txBody>
+      </p:sp>
+      <p:sp>
+        <p:nvSpPr>
+          <p:cNvPr id="6" name="Shape 4"/>
+          <p:cNvSpPr/>
+          <p:nvPr/>
+        </p:nvSpPr>
+        <p:spPr>
+          <a:xfrm>
+            <a:off x="457200" y="2011680"/>
+            <a:ext cx="11247120" cy="1234440"/>
+          </a:xfrm>
+          <a:prstGeom prst="roundRect">
+            <a:avLst>
+              <a:gd name="adj" fmla="val 2963"/>
+            </a:avLst>
+          </a:prstGeom>
+          <a:solidFill>
+            <a:srgbClr val="EEF4FF"/>
+          </a:solidFill>
+          <a:ln w="12700">
+            <a:solidFill>
+              <a:srgbClr val="C9B894"/>
+            </a:solidFill>
+            <a:prstDash val="solid"/>
+          </a:ln>
+        </p:spPr>
+      </p:sp>
+      <p:sp>
+        <p:nvSpPr>
+          <p:cNvPr id="7" name="Shape 5"/>
+          <p:cNvSpPr/>
+          <p:nvPr/>
+        </p:nvSpPr>
+        <p:spPr>
+          <a:xfrm>
+            <a:off x="685800" y="2286000"/>
+            <a:ext cx="1920240" cy="685800"/>
+          </a:xfrm>
+          <a:prstGeom prst="roundRect">
+            <a:avLst>
+              <a:gd name="adj" fmla="val 6667"/>
+            </a:avLst>
+          </a:prstGeom>
+          <a:solidFill>
+            <a:srgbClr val="102D69"/>
+          </a:solidFill>
+          <a:ln/>
+        </p:spPr>
+      </p:sp>
+      <p:sp>
+        <p:nvSpPr>
+          <p:cNvPr id="8" name="Text 6"/>
+          <p:cNvSpPr/>
+          <p:nvPr/>
+        </p:nvSpPr>
+        <p:spPr>
+          <a:xfrm>
+            <a:off x="685800" y="2286000"/>
+            <a:ext cx="1920240" cy="685800"/>
+          </a:xfrm>
+          <a:prstGeom prst="rect">
+            <a:avLst/>
+          </a:prstGeom>
+          <a:noFill/>
+          <a:ln/>
+        </p:spPr>
+        <p:txBody>
+          <a:bodyPr wrap="square" lIns="0" tIns="0" rIns="0" bIns="0" rtlCol="0" anchor="ctr"/>
+          <a:lstStyle/>
+          <a:p>
+            <a:pPr algn="ctr" indent="0" marL="0">
+              <a:buNone/>
+            </a:pPr>
+            <a:r>
+              <a:rPr lang="en-US" sz="2200" b="1" dirty="0">
+                <a:solidFill>
+                  <a:srgbClr val="FFFFFF"/>
                 </a:solidFill>
                 <a:latin typeface="Courier New" pitchFamily="34" charset="0"/>
                 <a:ea typeface="Courier New" pitchFamily="34" charset="-122"/>
                 <a:cs typeface="Courier New" pitchFamily="34" charset="-120"/>
               </a:rPr>
-              <a:t>target 7B · знание в весах · пересчёт 10.08.2026</a:t>
-            </a:r>
-            <a:endParaRPr lang="en-US" sz="1400" dirty="0"/>
-          </a:p>
-        </p:txBody>
-      </p:sp>
-      <p:sp>
-        <p:nvSpPr>
-          <p:cNvPr id="4" name="Text 2"/>
-          <p:cNvSpPr/>
-          <p:nvPr/>
-        </p:nvSpPr>
-        <p:spPr>
-          <a:xfrm>
-            <a:off x="548640" y="1965960"/>
-            <a:ext cx="5852160" cy="1645920"/>
+              <a:t>EX</a:t>
+            </a:r>
+            <a:endParaRPr lang="en-US" sz="2200" dirty="0"/>
+          </a:p>
+        </p:txBody>
+      </p:sp>
+      <p:sp>
+        <p:nvSpPr>
+          <p:cNvPr id="9" name="Text 7"/>
+          <p:cNvSpPr/>
+          <p:nvPr/>
+        </p:nvSpPr>
+        <p:spPr>
+          <a:xfrm>
+            <a:off x="2788920" y="2231136"/>
+            <a:ext cx="8686800" cy="365760"/>
           </a:xfrm>
           <a:prstGeom prst="rect">
             <a:avLst/>
@@ -11799,30 +13105,121 @@
               <a:buNone/>
             </a:pPr>
             <a:r>
-              <a:rPr lang="en-US" sz="11000" b="1" dirty="0">
-                <a:solidFill>
-                  <a:srgbClr val="FAB900"/>
+              <a:rPr lang="en-US" sz="1200" b="1" dirty="0">
+                <a:solidFill>
+                  <a:srgbClr val="444444"/>
+                </a:solidFill>
+                <a:latin typeface="Courier New" pitchFamily="34" charset="0"/>
+                <a:ea typeface="Courier New" pitchFamily="34" charset="-122"/>
+                <a:cs typeface="Courier New" pitchFamily="34" charset="-120"/>
+              </a:rPr>
+              <a:t>execution accuracy</a:t>
+            </a:r>
+            <a:endParaRPr lang="en-US" sz="1200" dirty="0"/>
+          </a:p>
+        </p:txBody>
+      </p:sp>
+      <p:sp>
+        <p:nvSpPr>
+          <p:cNvPr id="10" name="Text 8"/>
+          <p:cNvSpPr/>
+          <p:nvPr/>
+        </p:nvSpPr>
+        <p:spPr>
+          <a:xfrm>
+            <a:off x="2788920" y="2560320"/>
+            <a:ext cx="8686800" cy="594360"/>
+          </a:xfrm>
+          <a:prstGeom prst="rect">
+            <a:avLst/>
+          </a:prstGeom>
+          <a:noFill/>
+          <a:ln/>
+        </p:spPr>
+        <p:txBody>
+          <a:bodyPr wrap="square" lIns="0" tIns="0" rIns="0" bIns="0" rtlCol="0" anchor="t"/>
+          <a:lstStyle/>
+          <a:p>
+            <a:pPr indent="0" marL="0">
+              <a:lnSpc>
+                <a:spcPts val="1800"/>
+              </a:lnSpc>
+              <a:buNone/>
+            </a:pPr>
+            <a:r>
+              <a:rPr lang="en-US" sz="1500" dirty="0">
+                <a:solidFill>
+                  <a:srgbClr val="444444"/>
                 </a:solidFill>
                 <a:latin typeface="Calibri" pitchFamily="34" charset="0"/>
                 <a:ea typeface="Calibri" pitchFamily="34" charset="-122"/>
                 <a:cs typeface="Calibri" pitchFamily="34" charset="-120"/>
               </a:rPr>
-              <a:t>41.03%</a:t>
-            </a:r>
-            <a:endParaRPr lang="en-US" sz="11000" dirty="0"/>
-          </a:p>
-        </p:txBody>
-      </p:sp>
-      <p:sp>
-        <p:nvSpPr>
-          <p:cNvPr id="5" name="Text 3"/>
-          <p:cNvSpPr/>
-          <p:nvPr/>
-        </p:nvSpPr>
-        <p:spPr>
-          <a:xfrm>
-            <a:off x="685800" y="3639312"/>
-            <a:ext cx="5852160" cy="457200"/>
+              <a:t>Доля вопросов, где SQL при запуске на базе дал ТОТ ЖЕ результат, что эталонный запрос. Главная метрика точности.</a:t>
+            </a:r>
+            <a:endParaRPr lang="en-US" sz="1500" dirty="0"/>
+          </a:p>
+        </p:txBody>
+      </p:sp>
+      <p:sp>
+        <p:nvSpPr>
+          <p:cNvPr id="11" name="Shape 9"/>
+          <p:cNvSpPr/>
+          <p:nvPr/>
+        </p:nvSpPr>
+        <p:spPr>
+          <a:xfrm>
+            <a:off x="457200" y="3429000"/>
+            <a:ext cx="11247120" cy="1234440"/>
+          </a:xfrm>
+          <a:prstGeom prst="roundRect">
+            <a:avLst>
+              <a:gd name="adj" fmla="val 2963"/>
+            </a:avLst>
+          </a:prstGeom>
+          <a:solidFill>
+            <a:srgbClr val="EEF4FF"/>
+          </a:solidFill>
+          <a:ln w="12700">
+            <a:solidFill>
+              <a:srgbClr val="C9B894"/>
+            </a:solidFill>
+            <a:prstDash val="solid"/>
+          </a:ln>
+        </p:spPr>
+      </p:sp>
+      <p:sp>
+        <p:nvSpPr>
+          <p:cNvPr id="12" name="Shape 10"/>
+          <p:cNvSpPr/>
+          <p:nvPr/>
+        </p:nvSpPr>
+        <p:spPr>
+          <a:xfrm>
+            <a:off x="685800" y="3703320"/>
+            <a:ext cx="1920240" cy="685800"/>
+          </a:xfrm>
+          <a:prstGeom prst="roundRect">
+            <a:avLst>
+              <a:gd name="adj" fmla="val 6667"/>
+            </a:avLst>
+          </a:prstGeom>
+          <a:solidFill>
+            <a:srgbClr val="102D69"/>
+          </a:solidFill>
+          <a:ln/>
+        </p:spPr>
+      </p:sp>
+      <p:sp>
+        <p:nvSpPr>
+          <p:cNvPr id="13" name="Text 11"/>
+          <p:cNvSpPr/>
+          <p:nvPr/>
+        </p:nvSpPr>
+        <p:spPr>
+          <a:xfrm>
+            <a:off x="685800" y="3703320"/>
+            <a:ext cx="1920240" cy="685800"/>
           </a:xfrm>
           <a:prstGeom prst="rect">
             <a:avLst/>
@@ -11834,48 +13231,164 @@
           <a:bodyPr wrap="square" lIns="0" tIns="0" rIns="0" bIns="0" rtlCol="0" anchor="ctr"/>
           <a:lstStyle/>
           <a:p>
-            <a:pPr indent="0" marL="0">
-              <a:buNone/>
-            </a:pPr>
-            <a:r>
-              <a:rPr lang="en-US" sz="2000" dirty="0">
-                <a:solidFill>
-                  <a:srgbClr val="D0E4FF"/>
+            <a:pPr algn="ctr" indent="0" marL="0">
+              <a:buNone/>
+            </a:pPr>
+            <a:r>
+              <a:rPr lang="en-US" sz="2200" b="1" dirty="0">
+                <a:solidFill>
+                  <a:srgbClr val="FFFFFF"/>
                 </a:solidFill>
                 <a:latin typeface="Courier New" pitchFamily="34" charset="0"/>
                 <a:ea typeface="Courier New" pitchFamily="34" charset="-122"/>
                 <a:cs typeface="Courier New" pitchFamily="34" charset="-120"/>
               </a:rPr>
-              <a:t>± 1.37   </a:t>
-            </a:r>
+              <a:t>VES</a:t>
+            </a:r>
+            <a:endParaRPr lang="en-US" sz="2200" dirty="0"/>
+          </a:p>
+        </p:txBody>
+      </p:sp>
+      <p:sp>
+        <p:nvSpPr>
+          <p:cNvPr id="14" name="Text 12"/>
+          <p:cNvSpPr/>
+          <p:nvPr/>
+        </p:nvSpPr>
+        <p:spPr>
+          <a:xfrm>
+            <a:off x="2788920" y="3648456"/>
+            <a:ext cx="8686800" cy="365760"/>
+          </a:xfrm>
+          <a:prstGeom prst="rect">
+            <a:avLst/>
+          </a:prstGeom>
+          <a:noFill/>
+          <a:ln/>
+        </p:spPr>
+        <p:txBody>
+          <a:bodyPr wrap="square" lIns="0" tIns="0" rIns="0" bIns="0" rtlCol="0" anchor="ctr"/>
+          <a:lstStyle/>
+          <a:p>
             <a:pPr indent="0" marL="0">
               <a:buNone/>
             </a:pPr>
             <a:r>
-              <a:rPr lang="en-US" sz="1800" dirty="0">
-                <a:solidFill>
-                  <a:srgbClr val="FFFFFF"/>
+              <a:rPr lang="en-US" sz="1200" b="1" dirty="0">
+                <a:solidFill>
+                  <a:srgbClr val="444444"/>
+                </a:solidFill>
+                <a:latin typeface="Courier New" pitchFamily="34" charset="0"/>
+                <a:ea typeface="Courier New" pitchFamily="34" charset="-122"/>
+                <a:cs typeface="Courier New" pitchFamily="34" charset="-120"/>
+              </a:rPr>
+              <a:t>valid efficiency score</a:t>
+            </a:r>
+            <a:endParaRPr lang="en-US" sz="1200" dirty="0"/>
+          </a:p>
+        </p:txBody>
+      </p:sp>
+      <p:sp>
+        <p:nvSpPr>
+          <p:cNvPr id="15" name="Text 13"/>
+          <p:cNvSpPr/>
+          <p:nvPr/>
+        </p:nvSpPr>
+        <p:spPr>
+          <a:xfrm>
+            <a:off x="2788920" y="3977640"/>
+            <a:ext cx="8686800" cy="594360"/>
+          </a:xfrm>
+          <a:prstGeom prst="rect">
+            <a:avLst/>
+          </a:prstGeom>
+          <a:noFill/>
+          <a:ln/>
+        </p:spPr>
+        <p:txBody>
+          <a:bodyPr wrap="square" lIns="0" tIns="0" rIns="0" bIns="0" rtlCol="0" anchor="t"/>
+          <a:lstStyle/>
+          <a:p>
+            <a:pPr indent="0" marL="0">
+              <a:lnSpc>
+                <a:spcPts val="1800"/>
+              </a:lnSpc>
+              <a:buNone/>
+            </a:pPr>
+            <a:r>
+              <a:rPr lang="en-US" sz="1500" dirty="0">
+                <a:solidFill>
+                  <a:srgbClr val="444444"/>
                 </a:solidFill>
                 <a:latin typeface="Calibri" pitchFamily="34" charset="0"/>
                 <a:ea typeface="Calibri" pitchFamily="34" charset="-122"/>
                 <a:cs typeface="Calibri" pitchFamily="34" charset="-120"/>
               </a:rPr>
-              <a:t>EX, 7B, schema-less</a:t>
-            </a:r>
-            <a:endParaRPr lang="en-US" sz="2000" dirty="0"/>
-          </a:p>
-        </p:txBody>
-      </p:sp>
-      <p:sp>
-        <p:nvSpPr>
-          <p:cNvPr id="6" name="Text 4"/>
-          <p:cNvSpPr/>
-          <p:nvPr/>
-        </p:nvSpPr>
-        <p:spPr>
-          <a:xfrm>
-            <a:off x="6583680" y="2103120"/>
-            <a:ext cx="2651760" cy="548640"/>
+              <a:t>То же, но с поправкой на скорость: награждает корректные запросы, которые ещё и быстро исполняются. У нас VES ≈ EX.</a:t>
+            </a:r>
+            <a:endParaRPr lang="en-US" sz="1500" dirty="0"/>
+          </a:p>
+        </p:txBody>
+      </p:sp>
+      <p:sp>
+        <p:nvSpPr>
+          <p:cNvPr id="16" name="Shape 14"/>
+          <p:cNvSpPr/>
+          <p:nvPr/>
+        </p:nvSpPr>
+        <p:spPr>
+          <a:xfrm>
+            <a:off x="457200" y="4846320"/>
+            <a:ext cx="11247120" cy="1234440"/>
+          </a:xfrm>
+          <a:prstGeom prst="roundRect">
+            <a:avLst>
+              <a:gd name="adj" fmla="val 2963"/>
+            </a:avLst>
+          </a:prstGeom>
+          <a:solidFill>
+            <a:srgbClr val="EEF4FF"/>
+          </a:solidFill>
+          <a:ln w="12700">
+            <a:solidFill>
+              <a:srgbClr val="C9B894"/>
+            </a:solidFill>
+            <a:prstDash val="solid"/>
+          </a:ln>
+        </p:spPr>
+      </p:sp>
+      <p:sp>
+        <p:nvSpPr>
+          <p:cNvPr id="17" name="Shape 15"/>
+          <p:cNvSpPr/>
+          <p:nvPr/>
+        </p:nvSpPr>
+        <p:spPr>
+          <a:xfrm>
+            <a:off x="685800" y="5120640"/>
+            <a:ext cx="1920240" cy="685800"/>
+          </a:xfrm>
+          <a:prstGeom prst="roundRect">
+            <a:avLst>
+              <a:gd name="adj" fmla="val 6667"/>
+            </a:avLst>
+          </a:prstGeom>
+          <a:solidFill>
+            <a:srgbClr val="102D69"/>
+          </a:solidFill>
+          <a:ln/>
+        </p:spPr>
+      </p:sp>
+      <p:sp>
+        <p:nvSpPr>
+          <p:cNvPr id="18" name="Text 16"/>
+          <p:cNvSpPr/>
+          <p:nvPr/>
+        </p:nvSpPr>
+        <p:spPr>
+          <a:xfrm>
+            <a:off x="685800" y="5120640"/>
+            <a:ext cx="1920240" cy="685800"/>
           </a:xfrm>
           <a:prstGeom prst="rect">
             <a:avLst/>
@@ -11887,34 +13400,73 @@
           <a:bodyPr wrap="square" lIns="0" tIns="0" rIns="0" bIns="0" rtlCol="0" anchor="ctr"/>
           <a:lstStyle/>
           <a:p>
-            <a:pPr indent="0" marL="0">
-              <a:buNone/>
-            </a:pPr>
-            <a:r>
-              <a:rPr lang="en-US" sz="2600" b="1" dirty="0">
-                <a:solidFill>
-                  <a:srgbClr val="D0E4FF"/>
+            <a:pPr algn="ctr" indent="0" marL="0">
+              <a:buNone/>
+            </a:pPr>
+            <a:r>
+              <a:rPr lang="en-US" sz="2200" b="1" dirty="0">
+                <a:solidFill>
+                  <a:srgbClr val="FFFFFF"/>
                 </a:solidFill>
                 <a:latin typeface="Courier New" pitchFamily="34" charset="0"/>
                 <a:ea typeface="Courier New" pitchFamily="34" charset="-122"/>
                 <a:cs typeface="Courier New" pitchFamily="34" charset="-120"/>
               </a:rPr>
-              <a:t>+10.3 п.п.</a:t>
-            </a:r>
-            <a:endParaRPr lang="en-US" sz="2600" dirty="0"/>
-          </a:p>
-        </p:txBody>
-      </p:sp>
-      <p:sp>
-        <p:nvSpPr>
-          <p:cNvPr id="7" name="Text 5"/>
-          <p:cNvSpPr/>
-          <p:nvPr/>
-        </p:nvSpPr>
-        <p:spPr>
-          <a:xfrm>
-            <a:off x="6583680" y="2633472"/>
-            <a:ext cx="2651760" cy="914400"/>
+              <a:t>токены</a:t>
+            </a:r>
+            <a:endParaRPr lang="en-US" sz="2200" dirty="0"/>
+          </a:p>
+        </p:txBody>
+      </p:sp>
+      <p:sp>
+        <p:nvSpPr>
+          <p:cNvPr id="19" name="Text 17"/>
+          <p:cNvSpPr/>
+          <p:nvPr/>
+        </p:nvSpPr>
+        <p:spPr>
+          <a:xfrm>
+            <a:off x="2788920" y="5065776"/>
+            <a:ext cx="8686800" cy="365760"/>
+          </a:xfrm>
+          <a:prstGeom prst="rect">
+            <a:avLst/>
+          </a:prstGeom>
+          <a:noFill/>
+          <a:ln/>
+        </p:spPr>
+        <p:txBody>
+          <a:bodyPr wrap="square" lIns="0" tIns="0" rIns="0" bIns="0" rtlCol="0" anchor="ctr"/>
+          <a:lstStyle/>
+          <a:p>
+            <a:pPr indent="0" marL="0">
+              <a:buNone/>
+            </a:pPr>
+            <a:r>
+              <a:rPr lang="en-US" sz="1200" b="1" dirty="0">
+                <a:solidFill>
+                  <a:srgbClr val="444444"/>
+                </a:solidFill>
+                <a:latin typeface="Courier New" pitchFamily="34" charset="0"/>
+                <a:ea typeface="Courier New" pitchFamily="34" charset="-122"/>
+                <a:cs typeface="Courier New" pitchFamily="34" charset="-120"/>
+              </a:rPr>
+              <a:t>бюджет контекста</a:t>
+            </a:r>
+            <a:endParaRPr lang="en-US" sz="1200" dirty="0"/>
+          </a:p>
+        </p:txBody>
+      </p:sp>
+      <p:sp>
+        <p:nvSpPr>
+          <p:cNvPr id="20" name="Text 18"/>
+          <p:cNvSpPr/>
+          <p:nvPr/>
+        </p:nvSpPr>
+        <p:spPr>
+          <a:xfrm>
+            <a:off x="2788920" y="5394960"/>
+            <a:ext cx="8686800" cy="594360"/>
           </a:xfrm>
           <a:prstGeom prst="rect">
             <a:avLst/>
@@ -11928,35 +13480,35 @@
           <a:p>
             <a:pPr indent="0" marL="0">
               <a:lnSpc>
-                <a:spcPts val="1500"/>
+                <a:spcPts val="1800"/>
               </a:lnSpc>
               <a:buNone/>
             </a:pPr>
             <a:r>
-              <a:rPr lang="en-US" sz="1250" dirty="0">
-                <a:solidFill>
-                  <a:srgbClr val="D0E4FF"/>
+              <a:rPr lang="en-US" sz="1500" dirty="0">
+                <a:solidFill>
+                  <a:srgbClr val="444444"/>
                 </a:solidFill>
                 <a:latin typeface="Calibri" pitchFamily="34" charset="0"/>
                 <a:ea typeface="Calibri" pitchFamily="34" charset="-122"/>
                 <a:cs typeface="Calibri" pitchFamily="34" charset="-120"/>
               </a:rPr>
-              <a:t>над baseline 7B (30.77%), ≈ 7.5 σ</a:t>
-            </a:r>
-            <a:endParaRPr lang="en-US" sz="1250" dirty="0"/>
-          </a:p>
-        </p:txBody>
-      </p:sp>
-      <p:sp>
-        <p:nvSpPr>
-          <p:cNvPr id="8" name="Text 6"/>
-          <p:cNvSpPr/>
-          <p:nvPr/>
-        </p:nvSpPr>
-        <p:spPr>
-          <a:xfrm>
-            <a:off x="9326880" y="2103120"/>
-            <a:ext cx="2651760" cy="548640"/>
+              <a:t>Сколько текста модель читает на каждый вопрос. Чем меньше — тем дешевле и быстрее. Ключевая метрика этой задачи.</a:t>
+            </a:r>
+            <a:endParaRPr lang="en-US" sz="1500" dirty="0"/>
+          </a:p>
+        </p:txBody>
+      </p:sp>
+      <p:sp>
+        <p:nvSpPr>
+          <p:cNvPr id="21" name="Text 19"/>
+          <p:cNvSpPr/>
+          <p:nvPr/>
+        </p:nvSpPr>
+        <p:spPr>
+          <a:xfrm>
+            <a:off x="457200" y="6455664"/>
+            <a:ext cx="6400800" cy="274320"/>
           </a:xfrm>
           <a:prstGeom prst="rect">
             <a:avLst/>
@@ -11972,297 +13524,54 @@
               <a:buNone/>
             </a:pPr>
             <a:r>
-              <a:rPr lang="en-US" sz="2600" b="1" dirty="0">
-                <a:solidFill>
-                  <a:srgbClr val="D0E4FF"/>
+              <a:rPr lang="en-US" sz="900" dirty="0">
+                <a:solidFill>
+                  <a:srgbClr val="444444"/>
+                </a:solidFill>
+                <a:latin typeface="Calibri" pitchFamily="34" charset="0"/>
+                <a:ea typeface="Calibri" pitchFamily="34" charset="-122"/>
+                <a:cs typeface="Calibri" pitchFamily="34" charset="-120"/>
+              </a:rPr>
+              <a:t>DB2Model · ветка SFT/LoRA</a:t>
+            </a:r>
+            <a:endParaRPr lang="en-US" sz="900" dirty="0"/>
+          </a:p>
+        </p:txBody>
+      </p:sp>
+      <p:sp>
+        <p:nvSpPr>
+          <p:cNvPr id="22" name="Text 20"/>
+          <p:cNvSpPr/>
+          <p:nvPr/>
+        </p:nvSpPr>
+        <p:spPr>
+          <a:xfrm>
+            <a:off x="10881360" y="6455664"/>
+            <a:ext cx="822960" cy="274320"/>
+          </a:xfrm>
+          <a:prstGeom prst="rect">
+            <a:avLst/>
+          </a:prstGeom>
+          <a:noFill/>
+          <a:ln/>
+        </p:spPr>
+        <p:txBody>
+          <a:bodyPr wrap="square" lIns="0" tIns="0" rIns="0" bIns="0" rtlCol="0" anchor="ctr"/>
+          <a:lstStyle/>
+          <a:p>
+            <a:pPr algn="r" indent="0" marL="0">
+              <a:buNone/>
+            </a:pPr>
+            <a:r>
+              <a:rPr lang="en-US" sz="900" dirty="0">
+                <a:solidFill>
+                  <a:srgbClr val="444444"/>
                 </a:solidFill>
                 <a:latin typeface="Courier New" pitchFamily="34" charset="0"/>
                 <a:ea typeface="Courier New" pitchFamily="34" charset="-122"/>
                 <a:cs typeface="Courier New" pitchFamily="34" charset="-120"/>
               </a:rPr>
-              <a:t>×3.2</a:t>
-            </a:r>
-            <a:endParaRPr lang="en-US" sz="2600" dirty="0"/>
-          </a:p>
-        </p:txBody>
-      </p:sp>
-      <p:sp>
-        <p:nvSpPr>
-          <p:cNvPr id="9" name="Text 7"/>
-          <p:cNvSpPr/>
-          <p:nvPr/>
-        </p:nvSpPr>
-        <p:spPr>
-          <a:xfrm>
-            <a:off x="9326880" y="2633472"/>
-            <a:ext cx="2651760" cy="914400"/>
-          </a:xfrm>
-          <a:prstGeom prst="rect">
-            <a:avLst/>
-          </a:prstGeom>
-          <a:noFill/>
-          <a:ln/>
-        </p:spPr>
-        <p:txBody>
-          <a:bodyPr wrap="square" lIns="0" tIns="0" rIns="0" bIns="0" rtlCol="0" anchor="t"/>
-          <a:lstStyle/>
-          <a:p>
-            <a:pPr indent="0" marL="0">
-              <a:lnSpc>
-                <a:spcPts val="1500"/>
-              </a:lnSpc>
-              <a:buNone/>
-            </a:pPr>
-            <a:r>
-              <a:rPr lang="en-US" sz="1250" dirty="0">
-                <a:solidFill>
-                  <a:srgbClr val="D0E4FF"/>
-                </a:solidFill>
-                <a:latin typeface="Calibri" pitchFamily="34" charset="0"/>
-                <a:ea typeface="Calibri" pitchFamily="34" charset="-122"/>
-                <a:cs typeface="Calibri" pitchFamily="34" charset="-120"/>
-              </a:rPr>
-              <a:t>меньше контекст (90.6 vs 288.2 токена)</a:t>
-            </a:r>
-            <a:endParaRPr lang="en-US" sz="1250" dirty="0"/>
-          </a:p>
-        </p:txBody>
-      </p:sp>
-      <p:sp>
-        <p:nvSpPr>
-          <p:cNvPr id="10" name="Text 8"/>
-          <p:cNvSpPr/>
-          <p:nvPr/>
-        </p:nvSpPr>
-        <p:spPr>
-          <a:xfrm>
-            <a:off x="6583680" y="3794760"/>
-            <a:ext cx="2651760" cy="548640"/>
-          </a:xfrm>
-          <a:prstGeom prst="rect">
-            <a:avLst/>
-          </a:prstGeom>
-          <a:noFill/>
-          <a:ln/>
-        </p:spPr>
-        <p:txBody>
-          <a:bodyPr wrap="square" lIns="0" tIns="0" rIns="0" bIns="0" rtlCol="0" anchor="ctr"/>
-          <a:lstStyle/>
-          <a:p>
-            <a:pPr indent="0" marL="0">
-              <a:buNone/>
-            </a:pPr>
-            <a:r>
-              <a:rPr lang="en-US" sz="2600" b="1" dirty="0">
-                <a:solidFill>
-                  <a:srgbClr val="D0E4FF"/>
-                </a:solidFill>
-                <a:latin typeface="Courier New" pitchFamily="34" charset="0"/>
-                <a:ea typeface="Courier New" pitchFamily="34" charset="-122"/>
-                <a:cs typeface="Courier New" pitchFamily="34" charset="-120"/>
-              </a:rPr>
-              <a:t>×1.44</a:t>
-            </a:r>
-            <a:endParaRPr lang="en-US" sz="2600" dirty="0"/>
-          </a:p>
-        </p:txBody>
-      </p:sp>
-      <p:sp>
-        <p:nvSpPr>
-          <p:cNvPr id="11" name="Text 9"/>
-          <p:cNvSpPr/>
-          <p:nvPr/>
-        </p:nvSpPr>
-        <p:spPr>
-          <a:xfrm>
-            <a:off x="6583680" y="4325112"/>
-            <a:ext cx="2651760" cy="914400"/>
-          </a:xfrm>
-          <a:prstGeom prst="rect">
-            <a:avLst/>
-          </a:prstGeom>
-          <a:noFill/>
-          <a:ln/>
-        </p:spPr>
-        <p:txBody>
-          <a:bodyPr wrap="square" lIns="0" tIns="0" rIns="0" bIns="0" rtlCol="0" anchor="t"/>
-          <a:lstStyle/>
-          <a:p>
-            <a:pPr indent="0" marL="0">
-              <a:lnSpc>
-                <a:spcPts val="1500"/>
-              </a:lnSpc>
-              <a:buNone/>
-            </a:pPr>
-            <a:r>
-              <a:rPr lang="en-US" sz="1250" dirty="0">
-                <a:solidFill>
-                  <a:srgbClr val="D0E4FF"/>
-                </a:solidFill>
-                <a:latin typeface="Calibri" pitchFamily="34" charset="0"/>
-                <a:ea typeface="Calibri" pitchFamily="34" charset="-122"/>
-                <a:cs typeface="Calibri" pitchFamily="34" charset="-120"/>
-              </a:rPr>
-              <a:t>быстрее генерация (короче prefill)</a:t>
-            </a:r>
-            <a:endParaRPr lang="en-US" sz="1250" dirty="0"/>
-          </a:p>
-        </p:txBody>
-      </p:sp>
-      <p:sp>
-        <p:nvSpPr>
-          <p:cNvPr id="12" name="Text 10"/>
-          <p:cNvSpPr/>
-          <p:nvPr/>
-        </p:nvSpPr>
-        <p:spPr>
-          <a:xfrm>
-            <a:off x="9326880" y="3794760"/>
-            <a:ext cx="2651760" cy="548640"/>
-          </a:xfrm>
-          <a:prstGeom prst="rect">
-            <a:avLst/>
-          </a:prstGeom>
-          <a:noFill/>
-          <a:ln/>
-        </p:spPr>
-        <p:txBody>
-          <a:bodyPr wrap="square" lIns="0" tIns="0" rIns="0" bIns="0" rtlCol="0" anchor="ctr"/>
-          <a:lstStyle/>
-          <a:p>
-            <a:pPr indent="0" marL="0">
-              <a:buNone/>
-            </a:pPr>
-            <a:r>
-              <a:rPr lang="en-US" sz="2600" b="1" dirty="0">
-                <a:solidFill>
-                  <a:srgbClr val="D0E4FF"/>
-                </a:solidFill>
-                <a:latin typeface="Courier New" pitchFamily="34" charset="0"/>
-                <a:ea typeface="Courier New" pitchFamily="34" charset="-122"/>
-                <a:cs typeface="Courier New" pitchFamily="34" charset="-120"/>
-              </a:rPr>
-              <a:t>5.49%</a:t>
-            </a:r>
-            <a:endParaRPr lang="en-US" sz="2600" dirty="0"/>
-          </a:p>
-        </p:txBody>
-      </p:sp>
-      <p:sp>
-        <p:nvSpPr>
-          <p:cNvPr id="13" name="Text 11"/>
-          <p:cNvSpPr/>
-          <p:nvPr/>
-        </p:nvSpPr>
-        <p:spPr>
-          <a:xfrm>
-            <a:off x="9326880" y="4325112"/>
-            <a:ext cx="2651760" cy="914400"/>
-          </a:xfrm>
-          <a:prstGeom prst="rect">
-            <a:avLst/>
-          </a:prstGeom>
-          <a:noFill/>
-          <a:ln/>
-        </p:spPr>
-        <p:txBody>
-          <a:bodyPr wrap="square" lIns="0" tIns="0" rIns="0" bIns="0" rtlCol="0" anchor="t"/>
-          <a:lstStyle/>
-          <a:p>
-            <a:pPr indent="0" marL="0">
-              <a:lnSpc>
-                <a:spcPts val="1500"/>
-              </a:lnSpc>
-              <a:buNone/>
-            </a:pPr>
-            <a:r>
-              <a:rPr lang="en-US" sz="1250" dirty="0">
-                <a:solidFill>
-                  <a:srgbClr val="D0E4FF"/>
-                </a:solidFill>
-                <a:latin typeface="Calibri" pitchFamily="34" charset="0"/>
-                <a:ea typeface="Calibri" pitchFamily="34" charset="-122"/>
-                <a:cs typeface="Calibri" pitchFamily="34" charset="-120"/>
-              </a:rPr>
-              <a:t>zeroshot-контроль: вклад адаптера реален</a:t>
-            </a:r>
-            <a:endParaRPr lang="en-US" sz="1250" dirty="0"/>
-          </a:p>
-        </p:txBody>
-      </p:sp>
-      <p:sp>
-        <p:nvSpPr>
-          <p:cNvPr id="14" name="Text 12"/>
-          <p:cNvSpPr/>
-          <p:nvPr/>
-        </p:nvSpPr>
-        <p:spPr>
-          <a:xfrm>
-            <a:off x="457200" y="6455664"/>
-            <a:ext cx="6400800" cy="274320"/>
-          </a:xfrm>
-          <a:prstGeom prst="rect">
-            <a:avLst/>
-          </a:prstGeom>
-          <a:noFill/>
-          <a:ln/>
-        </p:spPr>
-        <p:txBody>
-          <a:bodyPr wrap="square" lIns="0" tIns="0" rIns="0" bIns="0" rtlCol="0" anchor="ctr"/>
-          <a:lstStyle/>
-          <a:p>
-            <a:pPr indent="0" marL="0">
-              <a:buNone/>
-            </a:pPr>
-            <a:r>
-              <a:rPr lang="en-US" sz="900" dirty="0">
-                <a:solidFill>
-                  <a:srgbClr val="D0E4FF"/>
-                </a:solidFill>
-                <a:latin typeface="Calibri" pitchFamily="34" charset="0"/>
-                <a:ea typeface="Calibri" pitchFamily="34" charset="-122"/>
-                <a:cs typeface="Calibri" pitchFamily="34" charset="-120"/>
-              </a:rPr>
-              <a:t>DB2Model · ветка SFT/LoRA</a:t>
-            </a:r>
-            <a:endParaRPr lang="en-US" sz="900" dirty="0"/>
-          </a:p>
-        </p:txBody>
-      </p:sp>
-      <p:sp>
-        <p:nvSpPr>
-          <p:cNvPr id="15" name="Text 13"/>
-          <p:cNvSpPr/>
-          <p:nvPr/>
-        </p:nvSpPr>
-        <p:spPr>
-          <a:xfrm>
-            <a:off x="10881360" y="6455664"/>
-            <a:ext cx="822960" cy="274320"/>
-          </a:xfrm>
-          <a:prstGeom prst="rect">
-            <a:avLst/>
-          </a:prstGeom>
-          <a:noFill/>
-          <a:ln/>
-        </p:spPr>
-        <p:txBody>
-          <a:bodyPr wrap="square" lIns="0" tIns="0" rIns="0" bIns="0" rtlCol="0" anchor="ctr"/>
-          <a:lstStyle/>
-          <a:p>
-            <a:pPr algn="r" indent="0" marL="0">
-              <a:buNone/>
-            </a:pPr>
-            <a:r>
-              <a:rPr lang="en-US" sz="900" dirty="0">
-                <a:solidFill>
-                  <a:srgbClr val="D0E4FF"/>
-                </a:solidFill>
-                <a:latin typeface="Courier New" pitchFamily="34" charset="0"/>
-                <a:ea typeface="Courier New" pitchFamily="34" charset="-122"/>
-                <a:cs typeface="Courier New" pitchFamily="34" charset="-120"/>
-              </a:rPr>
-              <a:t>5 / 13</a:t>
+              <a:t>6 / 15</a:t>
             </a:r>
             <a:endParaRPr lang="en-US" sz="900" dirty="0"/>
           </a:p>
@@ -12387,7 +13696,7 @@
                 <a:ea typeface="Calibri" pitchFamily="34" charset="-122"/>
                 <a:cs typeface="Calibri" pitchFamily="34" charset="-120"/>
               </a:rPr>
-              <a:t>Знание в весах обгоняет контекст на обоих размерах</a:t>
+              <a:t>Как считали токены</a:t>
             </a:r>
             <a:endParaRPr lang="en-US" sz="3200" dirty="0"/>
           </a:p>
@@ -12402,7 +13711,7 @@
         <p:spPr>
           <a:xfrm>
             <a:off x="457200" y="1097280"/>
-            <a:ext cx="10058400" cy="365760"/>
+            <a:ext cx="9966960" cy="365760"/>
           </a:xfrm>
           <a:prstGeom prst="rect">
             <a:avLst/>
@@ -12426,42 +13735,117 @@
                 <a:ea typeface="Calibri" pitchFamily="34" charset="-122"/>
                 <a:cs typeface="Calibri" pitchFamily="34" charset="-120"/>
               </a:rPr>
-              <a:t>Прирост разный: +6.6 п.п. на 3B и +10.3 п.п. на 7B</a:t>
+              <a:t>Честно и воспроизводимо — скрипт measure_tokens.py</a:t>
             </a:r>
             <a:endParaRPr lang="en-US" sz="1500" dirty="0"/>
           </a:p>
         </p:txBody>
       </p:sp>
-      <p:graphicFrame>
-        <p:nvGraphicFramePr>
-          <p:cNvPr id="6" name="Chart 0" descr=""/>
-          <p:cNvGraphicFramePr/>
-          <p:nvPr/>
-        </p:nvGraphicFramePr>
-        <p:xfrm>
-          <a:off x="457200" y="1965960"/>
-          <a:ext cx="6949440" cy="4160520"/>
-        </p:xfrm>
-        <a:graphic xmlns:a="http://schemas.openxmlformats.org/drawingml/2006/main">
-          <a:graphicData uri="http://schemas.openxmlformats.org/drawingml/2006/chart">
-            <c:chart xmlns:c="http://schemas.openxmlformats.org/drawingml/2006/chart" r:id="rId1"/>
-          </a:graphicData>
-        </a:graphic>
-      </p:graphicFrame>
-      <p:sp>
-        <p:nvSpPr>
-          <p:cNvPr id="7" name="Shape 4"/>
-          <p:cNvSpPr/>
-          <p:nvPr/>
-        </p:nvSpPr>
-        <p:spPr>
-          <a:xfrm>
-            <a:off x="7680960" y="1965960"/>
-            <a:ext cx="4023360" cy="4160520"/>
+      <p:sp>
+        <p:nvSpPr>
+          <p:cNvPr id="6" name="Text 4"/>
+          <p:cNvSpPr/>
+          <p:nvPr/>
+        </p:nvSpPr>
+        <p:spPr>
+          <a:xfrm>
+            <a:off x="457200" y="1965960"/>
+            <a:ext cx="5943600" cy="2926080"/>
+          </a:xfrm>
+          <a:prstGeom prst="rect">
+            <a:avLst/>
+          </a:prstGeom>
+          <a:noFill/>
+          <a:ln/>
+        </p:spPr>
+        <p:txBody>
+          <a:bodyPr wrap="square" rtlCol="0" anchor="t"/>
+          <a:lstStyle/>
+          <a:p>
+            <a:pPr marL="342900" indent="-342900">
+              <a:lnSpc>
+                <a:spcPts val="2200"/>
+              </a:lnSpc>
+              <a:spcAft>
+                <a:spcPts val="1100"/>
+              </a:spcAft>
+              <a:buSzPct val="100000"/>
+              <a:buChar char="•"/>
+            </a:pPr>
+            <a:r>
+              <a:rPr lang="en-US" sz="1600" dirty="0">
+                <a:solidFill>
+                  <a:srgbClr val="444444"/>
+                </a:solidFill>
+                <a:latin typeface="Calibri" pitchFamily="34" charset="0"/>
+                <a:ea typeface="Calibri" pitchFamily="34" charset="-122"/>
+                <a:cs typeface="Calibri" pitchFamily="34" charset="-120"/>
+              </a:rPr>
+              <a:t>Берём РОВНО тот промпт, что уходит модели на инференсе (тот же код build_prompt)</a:t>
+            </a:r>
+            <a:endParaRPr lang="en-US" sz="1600" dirty="0"/>
+          </a:p>
+          <a:p>
+            <a:pPr marL="342900" indent="-342900">
+              <a:lnSpc>
+                <a:spcPts val="2200"/>
+              </a:lnSpc>
+              <a:spcAft>
+                <a:spcPts val="1100"/>
+              </a:spcAft>
+              <a:buSzPct val="100000"/>
+              <a:buChar char="•"/>
+            </a:pPr>
+            <a:r>
+              <a:rPr lang="en-US" sz="1600" dirty="0">
+                <a:solidFill>
+                  <a:srgbClr val="444444"/>
+                </a:solidFill>
+                <a:latin typeface="Calibri" pitchFamily="34" charset="0"/>
+                <a:ea typeface="Calibri" pitchFamily="34" charset="-122"/>
+                <a:cs typeface="Calibri" pitchFamily="34" charset="-120"/>
+              </a:rPr>
+              <a:t>Считаем токенайзером самой Qwen2.5-Coder, а не сторонним — через её chat-template</a:t>
+            </a:r>
+            <a:endParaRPr lang="en-US" sz="1600" dirty="0"/>
+          </a:p>
+          <a:p>
+            <a:pPr marL="342900" indent="-342900">
+              <a:lnSpc>
+                <a:spcPts val="2200"/>
+              </a:lnSpc>
+              <a:buSzPct val="100000"/>
+              <a:buChar char="•"/>
+            </a:pPr>
+            <a:r>
+              <a:rPr lang="en-US" sz="1600" dirty="0">
+                <a:solidFill>
+                  <a:srgbClr val="444444"/>
+                </a:solidFill>
+                <a:latin typeface="Calibri" pitchFamily="34" charset="0"/>
+                <a:ea typeface="Calibri" pitchFamily="34" charset="-122"/>
+                <a:cs typeface="Calibri" pitchFamily="34" charset="-120"/>
+              </a:rPr>
+              <a:t>Один вызов модели на вопрос — это и есть весь бюджет; берём среднее по 91 вопросу</a:t>
+            </a:r>
+            <a:endParaRPr lang="en-US" sz="1600" dirty="0"/>
+          </a:p>
+        </p:txBody>
+      </p:sp>
+      <p:sp>
+        <p:nvSpPr>
+          <p:cNvPr id="7" name="Shape 5"/>
+          <p:cNvSpPr/>
+          <p:nvPr/>
+        </p:nvSpPr>
+        <p:spPr>
+          <a:xfrm>
+            <a:off x="6583680" y="1965960"/>
+            <a:ext cx="5120640" cy="1691640"/>
           </a:xfrm>
           <a:prstGeom prst="roundRect">
             <a:avLst>
-              <a:gd name="adj" fmla="val 909"/>
+              <a:gd name="adj" fmla="val 2162"/>
             </a:avLst>
           </a:prstGeom>
           <a:solidFill>
@@ -12477,14 +13861,321 @@
       </p:sp>
       <p:sp>
         <p:nvSpPr>
-          <p:cNvPr id="8" name="Text 5"/>
-          <p:cNvSpPr/>
-          <p:nvPr/>
-        </p:nvSpPr>
-        <p:spPr>
-          <a:xfrm>
-            <a:off x="7909560" y="2331720"/>
-            <a:ext cx="3566160" cy="731520"/>
+          <p:cNvPr id="8" name="Text 6"/>
+          <p:cNvSpPr/>
+          <p:nvPr/>
+        </p:nvSpPr>
+        <p:spPr>
+          <a:xfrm>
+            <a:off x="6812280" y="2121408"/>
+            <a:ext cx="4663440" cy="320040"/>
+          </a:xfrm>
+          <a:prstGeom prst="rect">
+            <a:avLst/>
+          </a:prstGeom>
+          <a:noFill/>
+          <a:ln/>
+        </p:spPr>
+        <p:txBody>
+          <a:bodyPr wrap="square" lIns="0" tIns="0" rIns="0" bIns="0" rtlCol="0" anchor="ctr"/>
+          <a:lstStyle/>
+          <a:p>
+            <a:pPr indent="0" marL="0">
+              <a:buNone/>
+            </a:pPr>
+            <a:r>
+              <a:rPr lang="en-US" sz="1300" b="1" dirty="0">
+                <a:solidFill>
+                  <a:srgbClr val="102D69"/>
+                </a:solidFill>
+                <a:latin typeface="Calibri" pitchFamily="34" charset="0"/>
+                <a:ea typeface="Calibri" pitchFamily="34" charset="-122"/>
+                <a:cs typeface="Calibri" pitchFamily="34" charset="-120"/>
+              </a:rPr>
+              <a:t>schema-less (наш арм)</a:t>
+            </a:r>
+            <a:endParaRPr lang="en-US" sz="1300" dirty="0"/>
+          </a:p>
+        </p:txBody>
+      </p:sp>
+      <p:sp>
+        <p:nvSpPr>
+          <p:cNvPr id="9" name="Text 7"/>
+          <p:cNvSpPr/>
+          <p:nvPr/>
+        </p:nvSpPr>
+        <p:spPr>
+          <a:xfrm>
+            <a:off x="6812280" y="2468880"/>
+            <a:ext cx="3657600" cy="822960"/>
+          </a:xfrm>
+          <a:prstGeom prst="rect">
+            <a:avLst/>
+          </a:prstGeom>
+          <a:noFill/>
+          <a:ln/>
+        </p:spPr>
+        <p:txBody>
+          <a:bodyPr wrap="square" lIns="0" tIns="0" rIns="0" bIns="0" rtlCol="0" anchor="t"/>
+          <a:lstStyle/>
+          <a:p>
+            <a:pPr indent="0" marL="0">
+              <a:lnSpc>
+                <a:spcPts val="1500"/>
+              </a:lnSpc>
+              <a:buNone/>
+            </a:pPr>
+            <a:r>
+              <a:rPr lang="en-US" sz="1100" dirty="0">
+                <a:solidFill>
+                  <a:srgbClr val="444444"/>
+                </a:solidFill>
+                <a:latin typeface="Courier New" pitchFamily="34" charset="0"/>
+                <a:ea typeface="Courier New" pitchFamily="34" charset="-122"/>
+                <a:cs typeface="Courier New" pitchFamily="34" charset="-120"/>
+              </a:rPr>
+              <a:t>system: You are a PostgreSQL expert…</a:t>
+            </a:r>
+            <a:endParaRPr lang="en-US" sz="1100" dirty="0"/>
+          </a:p>
+          <a:p>
+            <a:pPr indent="0" marL="0">
+              <a:lnSpc>
+                <a:spcPts val="1500"/>
+              </a:lnSpc>
+              <a:buNone/>
+            </a:pPr>
+            <a:r>
+              <a:rPr lang="en-US" sz="1100" dirty="0">
+                <a:solidFill>
+                  <a:srgbClr val="444444"/>
+                </a:solidFill>
+                <a:latin typeface="Courier New" pitchFamily="34" charset="0"/>
+                <a:ea typeface="Courier New" pitchFamily="34" charset="-122"/>
+                <a:cs typeface="Courier New" pitchFamily="34" charset="-120"/>
+              </a:rPr>
+              <a:t>Return only SQL.  +  вопрос</a:t>
+            </a:r>
+            <a:endParaRPr lang="en-US" sz="1100" dirty="0"/>
+          </a:p>
+        </p:txBody>
+      </p:sp>
+      <p:sp>
+        <p:nvSpPr>
+          <p:cNvPr id="10" name="Text 8"/>
+          <p:cNvSpPr/>
+          <p:nvPr/>
+        </p:nvSpPr>
+        <p:spPr>
+          <a:xfrm>
+            <a:off x="10424160" y="2331720"/>
+            <a:ext cx="1188720" cy="822960"/>
+          </a:xfrm>
+          <a:prstGeom prst="rect">
+            <a:avLst/>
+          </a:prstGeom>
+          <a:noFill/>
+          <a:ln/>
+        </p:spPr>
+        <p:txBody>
+          <a:bodyPr wrap="square" lIns="0" tIns="0" rIns="0" bIns="0" rtlCol="0" anchor="ctr"/>
+          <a:lstStyle/>
+          <a:p>
+            <a:pPr algn="r" indent="0" marL="0">
+              <a:buNone/>
+            </a:pPr>
+            <a:r>
+              <a:rPr lang="en-US" sz="3000" b="1" dirty="0">
+                <a:solidFill>
+                  <a:srgbClr val="102D69"/>
+                </a:solidFill>
+                <a:latin typeface="Courier New" pitchFamily="34" charset="0"/>
+                <a:ea typeface="Courier New" pitchFamily="34" charset="-122"/>
+                <a:cs typeface="Courier New" pitchFamily="34" charset="-120"/>
+              </a:rPr>
+              <a:t>90.6</a:t>
+            </a:r>
+            <a:endParaRPr lang="en-US" sz="3000" dirty="0"/>
+          </a:p>
+        </p:txBody>
+      </p:sp>
+      <p:sp>
+        <p:nvSpPr>
+          <p:cNvPr id="11" name="Shape 9"/>
+          <p:cNvSpPr/>
+          <p:nvPr/>
+        </p:nvSpPr>
+        <p:spPr>
+          <a:xfrm>
+            <a:off x="6583680" y="3840480"/>
+            <a:ext cx="5120640" cy="1691640"/>
+          </a:xfrm>
+          <a:prstGeom prst="roundRect">
+            <a:avLst>
+              <a:gd name="adj" fmla="val 2162"/>
+            </a:avLst>
+          </a:prstGeom>
+          <a:solidFill>
+            <a:srgbClr val="102D69"/>
+          </a:solidFill>
+          <a:ln w="12700">
+            <a:solidFill>
+              <a:srgbClr val="102D69"/>
+            </a:solidFill>
+            <a:prstDash val="solid"/>
+          </a:ln>
+        </p:spPr>
+      </p:sp>
+      <p:sp>
+        <p:nvSpPr>
+          <p:cNvPr id="12" name="Text 10"/>
+          <p:cNvSpPr/>
+          <p:nvPr/>
+        </p:nvSpPr>
+        <p:spPr>
+          <a:xfrm>
+            <a:off x="6812280" y="3995928"/>
+            <a:ext cx="4663440" cy="320040"/>
+          </a:xfrm>
+          <a:prstGeom prst="rect">
+            <a:avLst/>
+          </a:prstGeom>
+          <a:noFill/>
+          <a:ln/>
+        </p:spPr>
+        <p:txBody>
+          <a:bodyPr wrap="square" lIns="0" tIns="0" rIns="0" bIns="0" rtlCol="0" anchor="ctr"/>
+          <a:lstStyle/>
+          <a:p>
+            <a:pPr indent="0" marL="0">
+              <a:buNone/>
+            </a:pPr>
+            <a:r>
+              <a:rPr lang="en-US" sz="1300" b="1" dirty="0">
+                <a:solidFill>
+                  <a:srgbClr val="FAB900"/>
+                </a:solidFill>
+                <a:latin typeface="Calibri" pitchFamily="34" charset="0"/>
+                <a:ea typeface="Calibri" pitchFamily="34" charset="-122"/>
+                <a:cs typeface="Calibri" pitchFamily="34" charset="-120"/>
+              </a:rPr>
+              <a:t>baseline (схема в контексте)</a:t>
+            </a:r>
+            <a:endParaRPr lang="en-US" sz="1300" dirty="0"/>
+          </a:p>
+        </p:txBody>
+      </p:sp>
+      <p:sp>
+        <p:nvSpPr>
+          <p:cNvPr id="13" name="Text 11"/>
+          <p:cNvSpPr/>
+          <p:nvPr/>
+        </p:nvSpPr>
+        <p:spPr>
+          <a:xfrm>
+            <a:off x="6812280" y="4343400"/>
+            <a:ext cx="3657600" cy="822960"/>
+          </a:xfrm>
+          <a:prstGeom prst="rect">
+            <a:avLst/>
+          </a:prstGeom>
+          <a:noFill/>
+          <a:ln/>
+        </p:spPr>
+        <p:txBody>
+          <a:bodyPr wrap="square" lIns="0" tIns="0" rIns="0" bIns="0" rtlCol="0" anchor="t"/>
+          <a:lstStyle/>
+          <a:p>
+            <a:pPr indent="0" marL="0">
+              <a:lnSpc>
+                <a:spcPts val="1500"/>
+              </a:lnSpc>
+              <a:buNone/>
+            </a:pPr>
+            <a:r>
+              <a:rPr lang="en-US" sz="1100" dirty="0">
+                <a:solidFill>
+                  <a:srgbClr val="D0E4FF"/>
+                </a:solidFill>
+                <a:latin typeface="Courier New" pitchFamily="34" charset="0"/>
+                <a:ea typeface="Courier New" pitchFamily="34" charset="-122"/>
+                <a:cs typeface="Courier New" pitchFamily="34" charset="-120"/>
+              </a:rPr>
+              <a:t>…то же  +  Schema: table(col type, …)</a:t>
+            </a:r>
+            <a:endParaRPr lang="en-US" sz="1100" dirty="0"/>
+          </a:p>
+          <a:p>
+            <a:pPr indent="0" marL="0">
+              <a:lnSpc>
+                <a:spcPts val="1500"/>
+              </a:lnSpc>
+              <a:buNone/>
+            </a:pPr>
+            <a:r>
+              <a:rPr lang="en-US" sz="1100" dirty="0">
+                <a:solidFill>
+                  <a:srgbClr val="D0E4FF"/>
+                </a:solidFill>
+                <a:latin typeface="Courier New" pitchFamily="34" charset="0"/>
+                <a:ea typeface="Courier New" pitchFamily="34" charset="-122"/>
+                <a:cs typeface="Courier New" pitchFamily="34" charset="-120"/>
+              </a:rPr>
+              <a:t>+  вопрос</a:t>
+            </a:r>
+            <a:endParaRPr lang="en-US" sz="1100" dirty="0"/>
+          </a:p>
+        </p:txBody>
+      </p:sp>
+      <p:sp>
+        <p:nvSpPr>
+          <p:cNvPr id="14" name="Text 12"/>
+          <p:cNvSpPr/>
+          <p:nvPr/>
+        </p:nvSpPr>
+        <p:spPr>
+          <a:xfrm>
+            <a:off x="10241280" y="4206240"/>
+            <a:ext cx="1371600" cy="822960"/>
+          </a:xfrm>
+          <a:prstGeom prst="rect">
+            <a:avLst/>
+          </a:prstGeom>
+          <a:noFill/>
+          <a:ln/>
+        </p:spPr>
+        <p:txBody>
+          <a:bodyPr wrap="square" lIns="0" tIns="0" rIns="0" bIns="0" rtlCol="0" anchor="ctr"/>
+          <a:lstStyle/>
+          <a:p>
+            <a:pPr algn="r" indent="0" marL="0">
+              <a:buNone/>
+            </a:pPr>
+            <a:r>
+              <a:rPr lang="en-US" sz="3000" b="1" dirty="0">
+                <a:solidFill>
+                  <a:srgbClr val="FAB900"/>
+                </a:solidFill>
+                <a:latin typeface="Courier New" pitchFamily="34" charset="0"/>
+                <a:ea typeface="Courier New" pitchFamily="34" charset="-122"/>
+                <a:cs typeface="Courier New" pitchFamily="34" charset="-120"/>
+              </a:rPr>
+              <a:t>288.2</a:t>
+            </a:r>
+            <a:endParaRPr lang="en-US" sz="3000" dirty="0"/>
+          </a:p>
+        </p:txBody>
+      </p:sp>
+      <p:sp>
+        <p:nvSpPr>
+          <p:cNvPr id="15" name="Text 13"/>
+          <p:cNvSpPr/>
+          <p:nvPr/>
+        </p:nvSpPr>
+        <p:spPr>
+          <a:xfrm>
+            <a:off x="457200" y="4434840"/>
+            <a:ext cx="5943600" cy="1097280"/>
           </a:xfrm>
           <a:prstGeom prst="rect">
             <a:avLst/>
@@ -12503,24 +14194,46 @@
               <a:buNone/>
             </a:pPr>
             <a:r>
-              <a:rPr lang="en-US" sz="1400" b="1" dirty="0">
-                <a:solidFill>
-                  <a:srgbClr val="102D69"/>
+              <a:rPr lang="en-US" sz="1300" i="1" dirty="0">
+                <a:solidFill>
+                  <a:srgbClr val="444444"/>
                 </a:solidFill>
                 <a:latin typeface="Calibri" pitchFamily="34" charset="0"/>
                 <a:ea typeface="Calibri" pitchFamily="34" charset="-122"/>
                 <a:cs typeface="Calibri" pitchFamily="34" charset="-120"/>
               </a:rPr>
-              <a:t>3B: </a:t>
-            </a:r>
+              <a:t>Отношение ×3.18 — вот откуда «контекст в 3.2 раза меньше». Разброс schema-less (± 34.8 токена) — только от длины вопроса, схемы в промпте нет.</a:t>
+            </a:r>
+            <a:endParaRPr lang="en-US" sz="1300" dirty="0"/>
+          </a:p>
+        </p:txBody>
+      </p:sp>
+      <p:sp>
+        <p:nvSpPr>
+          <p:cNvPr id="16" name="Text 14"/>
+          <p:cNvSpPr/>
+          <p:nvPr/>
+        </p:nvSpPr>
+        <p:spPr>
+          <a:xfrm>
+            <a:off x="457200" y="6455664"/>
+            <a:ext cx="6400800" cy="274320"/>
+          </a:xfrm>
+          <a:prstGeom prst="rect">
+            <a:avLst/>
+          </a:prstGeom>
+          <a:noFill/>
+          <a:ln/>
+        </p:spPr>
+        <p:txBody>
+          <a:bodyPr wrap="square" lIns="0" tIns="0" rIns="0" bIns="0" rtlCol="0" anchor="ctr"/>
+          <a:lstStyle/>
+          <a:p>
             <a:pPr indent="0" marL="0">
-              <a:lnSpc>
-                <a:spcPts val="1800"/>
-              </a:lnSpc>
-              <a:buNone/>
-            </a:pPr>
-            <a:r>
-              <a:rPr lang="en-US" sz="1400" dirty="0">
+              <a:buNone/>
+            </a:pPr>
+            <a:r>
+              <a:rPr lang="en-US" sz="900" dirty="0">
                 <a:solidFill>
                   <a:srgbClr val="444444"/>
                 </a:solidFill>
@@ -12528,146 +14241,6 @@
                 <a:ea typeface="Calibri" pitchFamily="34" charset="-122"/>
                 <a:cs typeface="Calibri" pitchFamily="34" charset="-120"/>
               </a:rPr>
-              <a:t>30.77 ± 1.55 vs 24.18 → +6.6 п.п. (≈4 σ)</a:t>
-            </a:r>
-            <a:endParaRPr lang="en-US" sz="1400" dirty="0"/>
-          </a:p>
-        </p:txBody>
-      </p:sp>
-      <p:sp>
-        <p:nvSpPr>
-          <p:cNvPr id="9" name="Text 6"/>
-          <p:cNvSpPr/>
-          <p:nvPr/>
-        </p:nvSpPr>
-        <p:spPr>
-          <a:xfrm>
-            <a:off x="7909560" y="3108960"/>
-            <a:ext cx="3566160" cy="731520"/>
-          </a:xfrm>
-          <a:prstGeom prst="rect">
-            <a:avLst/>
-          </a:prstGeom>
-          <a:noFill/>
-          <a:ln/>
-        </p:spPr>
-        <p:txBody>
-          <a:bodyPr wrap="square" lIns="0" tIns="0" rIns="0" bIns="0" rtlCol="0" anchor="t"/>
-          <a:lstStyle/>
-          <a:p>
-            <a:pPr indent="0" marL="0">
-              <a:lnSpc>
-                <a:spcPts val="1800"/>
-              </a:lnSpc>
-              <a:buNone/>
-            </a:pPr>
-            <a:r>
-              <a:rPr lang="en-US" sz="1400" b="1" dirty="0">
-                <a:solidFill>
-                  <a:srgbClr val="102D69"/>
-                </a:solidFill>
-                <a:latin typeface="Calibri" pitchFamily="34" charset="0"/>
-                <a:ea typeface="Calibri" pitchFamily="34" charset="-122"/>
-                <a:cs typeface="Calibri" pitchFamily="34" charset="-120"/>
-              </a:rPr>
-              <a:t>7B: </a:t>
-            </a:r>
-            <a:pPr indent="0" marL="0">
-              <a:lnSpc>
-                <a:spcPts val="1800"/>
-              </a:lnSpc>
-              <a:buNone/>
-            </a:pPr>
-            <a:r>
-              <a:rPr lang="en-US" sz="1400" dirty="0">
-                <a:solidFill>
-                  <a:srgbClr val="444444"/>
-                </a:solidFill>
-                <a:latin typeface="Calibri" pitchFamily="34" charset="0"/>
-                <a:ea typeface="Calibri" pitchFamily="34" charset="-122"/>
-                <a:cs typeface="Calibri" pitchFamily="34" charset="-120"/>
-              </a:rPr>
-              <a:t>41.03 ± 1.37 vs 30.77 → +10.3 п.п. (≈7.5 σ)</a:t>
-            </a:r>
-            <a:endParaRPr lang="en-US" sz="1400" dirty="0"/>
-          </a:p>
-        </p:txBody>
-      </p:sp>
-      <p:sp>
-        <p:nvSpPr>
-          <p:cNvPr id="10" name="Text 7"/>
-          <p:cNvSpPr/>
-          <p:nvPr/>
-        </p:nvSpPr>
-        <p:spPr>
-          <a:xfrm>
-            <a:off x="7909560" y="4023360"/>
-            <a:ext cx="3566160" cy="1828800"/>
-          </a:xfrm>
-          <a:prstGeom prst="rect">
-            <a:avLst/>
-          </a:prstGeom>
-          <a:noFill/>
-          <a:ln/>
-        </p:spPr>
-        <p:txBody>
-          <a:bodyPr wrap="square" lIns="0" tIns="0" rIns="0" bIns="0" rtlCol="0" anchor="t"/>
-          <a:lstStyle/>
-          <a:p>
-            <a:pPr indent="0" marL="0">
-              <a:lnSpc>
-                <a:spcPts val="1800"/>
-              </a:lnSpc>
-              <a:buNone/>
-            </a:pPr>
-            <a:r>
-              <a:rPr lang="en-US" sz="1300" i="1" dirty="0">
-                <a:solidFill>
-                  <a:srgbClr val="444444"/>
-                </a:solidFill>
-                <a:latin typeface="Calibri" pitchFamily="34" charset="0"/>
-                <a:ea typeface="Calibri" pitchFamily="34" charset="-122"/>
-                <a:cs typeface="Calibri" pitchFamily="34" charset="-120"/>
-              </a:rPr>
-              <a:t>Контроль zeroshot (5.49%) — без схемы и без адаптера. +25 п.п. переносит именно обучение, а не базовая модель.</a:t>
-            </a:r>
-            <a:endParaRPr lang="en-US" sz="1300" dirty="0"/>
-          </a:p>
-        </p:txBody>
-      </p:sp>
-      <p:sp>
-        <p:nvSpPr>
-          <p:cNvPr id="11" name="Text 8"/>
-          <p:cNvSpPr/>
-          <p:nvPr/>
-        </p:nvSpPr>
-        <p:spPr>
-          <a:xfrm>
-            <a:off x="457200" y="6455664"/>
-            <a:ext cx="6400800" cy="274320"/>
-          </a:xfrm>
-          <a:prstGeom prst="rect">
-            <a:avLst/>
-          </a:prstGeom>
-          <a:noFill/>
-          <a:ln/>
-        </p:spPr>
-        <p:txBody>
-          <a:bodyPr wrap="square" lIns="0" tIns="0" rIns="0" bIns="0" rtlCol="0" anchor="ctr"/>
-          <a:lstStyle/>
-          <a:p>
-            <a:pPr indent="0" marL="0">
-              <a:buNone/>
-            </a:pPr>
-            <a:r>
-              <a:rPr lang="en-US" sz="900" dirty="0">
-                <a:solidFill>
-                  <a:srgbClr val="444444"/>
-                </a:solidFill>
-                <a:latin typeface="Calibri" pitchFamily="34" charset="0"/>
-                <a:ea typeface="Calibri" pitchFamily="34" charset="-122"/>
-                <a:cs typeface="Calibri" pitchFamily="34" charset="-120"/>
-              </a:rPr>
               <a:t>DB2Model · ветка SFT/LoRA</a:t>
             </a:r>
             <a:endParaRPr lang="en-US" sz="900" dirty="0"/>
@@ -12676,7 +14249,7 @@
       </p:sp>
       <p:sp>
         <p:nvSpPr>
-          <p:cNvPr id="12" name="Text 9"/>
+          <p:cNvPr id="17" name="Text 15"/>
           <p:cNvSpPr/>
           <p:nvPr/>
         </p:nvSpPr>
@@ -12707,7 +14280,7 @@
                 <a:ea typeface="Courier New" pitchFamily="34" charset="-122"/>
                 <a:cs typeface="Courier New" pitchFamily="34" charset="-120"/>
               </a:rPr>
-              <a:t>6 / 13</a:t>
+              <a:t>7 / 15</a:t>
             </a:r>
             <a:endParaRPr lang="en-US" sz="900" dirty="0"/>
           </a:p>
@@ -12727,7 +14300,7 @@
     <p:bg>
       <p:bgPr>
         <a:solidFill>
-          <a:srgbClr val="FFFFFF"/>
+          <a:srgbClr val="102D69"/>
         </a:solidFill>
       </p:bgPr>
     </p:bg>
@@ -12747,68 +14320,14 @@
       </p:grpSpPr>
       <p:sp>
         <p:nvSpPr>
-          <p:cNvPr id="2" name="Shape 0"/>
-          <p:cNvSpPr/>
-          <p:nvPr/>
-        </p:nvSpPr>
-        <p:spPr>
-          <a:xfrm rot="840000">
-            <a:off x="10561320" y="109728"/>
-            <a:ext cx="822960" cy="822960"/>
-          </a:xfrm>
-          <a:prstGeom prst="roundRect">
-            <a:avLst>
-              <a:gd name="adj" fmla="val 13333"/>
-            </a:avLst>
-          </a:prstGeom>
-          <a:solidFill>
-            <a:srgbClr val="FAB900"/>
-          </a:solidFill>
-          <a:ln w="38100">
-            <a:solidFill>
-              <a:srgbClr val="102D69"/>
-            </a:solidFill>
-            <a:prstDash val="solid"/>
-          </a:ln>
-        </p:spPr>
-      </p:sp>
-      <p:sp>
-        <p:nvSpPr>
-          <p:cNvPr id="3" name="Shape 1"/>
-          <p:cNvSpPr/>
-          <p:nvPr/>
-        </p:nvSpPr>
-        <p:spPr>
-          <a:xfrm rot="-660000">
-            <a:off x="11109960" y="566928"/>
-            <a:ext cx="822960" cy="822960"/>
-          </a:xfrm>
-          <a:prstGeom prst="roundRect">
-            <a:avLst>
-              <a:gd name="adj" fmla="val 13333"/>
-            </a:avLst>
-          </a:prstGeom>
-          <a:solidFill>
-            <a:srgbClr val="E61E3C"/>
-          </a:solidFill>
-          <a:ln w="38100">
-            <a:solidFill>
-              <a:srgbClr val="102D69"/>
-            </a:solidFill>
-            <a:prstDash val="solid"/>
-          </a:ln>
-        </p:spPr>
-      </p:sp>
-      <p:sp>
-        <p:nvSpPr>
-          <p:cNvPr id="4" name="Text 2"/>
-          <p:cNvSpPr/>
-          <p:nvPr/>
-        </p:nvSpPr>
-        <p:spPr>
-          <a:xfrm>
-            <a:off x="457200" y="384048"/>
-            <a:ext cx="9875520" cy="685800"/>
+          <p:cNvPr id="2" name="Text 0"/>
+          <p:cNvSpPr/>
+          <p:nvPr/>
+        </p:nvSpPr>
+        <p:spPr>
+          <a:xfrm>
+            <a:off x="640080" y="502920"/>
+            <a:ext cx="10972800" cy="640080"/>
           </a:xfrm>
           <a:prstGeom prst="rect">
             <a:avLst/>
@@ -12826,13 +14345,13 @@
             <a:r>
               <a:rPr lang="en-US" sz="3200" b="1" dirty="0">
                 <a:solidFill>
-                  <a:srgbClr val="102D69"/>
+                  <a:srgbClr val="FFFFFF"/>
                 </a:solidFill>
                 <a:latin typeface="Calibri" pitchFamily="34" charset="0"/>
                 <a:ea typeface="Calibri" pitchFamily="34" charset="-122"/>
                 <a:cs typeface="Calibri" pitchFamily="34" charset="-120"/>
               </a:rPr>
-              <a:t>Что даёт прирост — объём синтетики</a:t>
+              <a:t>Главный результат</a:t>
             </a:r>
             <a:endParaRPr lang="en-US" sz="3200" dirty="0"/>
           </a:p>
@@ -12840,14 +14359,14 @@
       </p:sp>
       <p:sp>
         <p:nvSpPr>
-          <p:cNvPr id="5" name="Text 3"/>
-          <p:cNvSpPr/>
-          <p:nvPr/>
-        </p:nvSpPr>
-        <p:spPr>
-          <a:xfrm>
-            <a:off x="457200" y="1097280"/>
-            <a:ext cx="10058400" cy="365760"/>
+          <p:cNvPr id="3" name="Text 1"/>
+          <p:cNvSpPr/>
+          <p:nvPr/>
+        </p:nvSpPr>
+        <p:spPr>
+          <a:xfrm>
+            <a:off x="640080" y="1188720"/>
+            <a:ext cx="10972800" cy="365760"/>
           </a:xfrm>
           <a:prstGeom prst="rect">
             <a:avLst/>
@@ -12863,100 +14382,69 @@
               <a:buNone/>
             </a:pPr>
             <a:r>
-              <a:rPr lang="en-US" sz="1500" dirty="0">
-                <a:solidFill>
-                  <a:srgbClr val="444444"/>
+              <a:rPr lang="en-US" sz="1400" dirty="0">
+                <a:solidFill>
+                  <a:srgbClr val="FAB900"/>
+                </a:solidFill>
+                <a:latin typeface="Courier New" pitchFamily="34" charset="0"/>
+                <a:ea typeface="Courier New" pitchFamily="34" charset="-122"/>
+                <a:cs typeface="Courier New" pitchFamily="34" charset="-120"/>
+              </a:rPr>
+              <a:t>target 7B · знание в весах · пересчёт 10.08.2026</a:t>
+            </a:r>
+            <a:endParaRPr lang="en-US" sz="1400" dirty="0"/>
+          </a:p>
+        </p:txBody>
+      </p:sp>
+      <p:sp>
+        <p:nvSpPr>
+          <p:cNvPr id="4" name="Text 2"/>
+          <p:cNvSpPr/>
+          <p:nvPr/>
+        </p:nvSpPr>
+        <p:spPr>
+          <a:xfrm>
+            <a:off x="548640" y="1965960"/>
+            <a:ext cx="5852160" cy="1645920"/>
+          </a:xfrm>
+          <a:prstGeom prst="rect">
+            <a:avLst/>
+          </a:prstGeom>
+          <a:noFill/>
+          <a:ln/>
+        </p:spPr>
+        <p:txBody>
+          <a:bodyPr wrap="square" lIns="0" tIns="0" rIns="0" bIns="0" rtlCol="0" anchor="ctr"/>
+          <a:lstStyle/>
+          <a:p>
+            <a:pPr indent="0" marL="0">
+              <a:buNone/>
+            </a:pPr>
+            <a:r>
+              <a:rPr lang="en-US" sz="11000" b="1" dirty="0">
+                <a:solidFill>
+                  <a:srgbClr val="FAB900"/>
                 </a:solidFill>
                 <a:latin typeface="Calibri" pitchFamily="34" charset="0"/>
                 <a:ea typeface="Calibri" pitchFamily="34" charset="-122"/>
                 <a:cs typeface="Calibri" pitchFamily="34" charset="-120"/>
               </a:rPr>
-              <a:t>Единственный ablation-эффект, устойчивый за пределами шума</a:t>
-            </a:r>
-            <a:endParaRPr lang="en-US" sz="1500" dirty="0"/>
-          </a:p>
-        </p:txBody>
-      </p:sp>
-      <p:graphicFrame>
-        <p:nvGraphicFramePr>
-          <p:cNvPr id="6" name="Chart 0" descr=""/>
-          <p:cNvGraphicFramePr/>
-          <p:nvPr/>
-        </p:nvGraphicFramePr>
-        <p:xfrm>
-          <a:off x="457200" y="1965960"/>
-          <a:ext cx="6949440" cy="4160520"/>
-        </p:xfrm>
-        <a:graphic xmlns:a="http://schemas.openxmlformats.org/drawingml/2006/main">
-          <a:graphicData uri="http://schemas.openxmlformats.org/drawingml/2006/chart">
-            <c:chart xmlns:c="http://schemas.openxmlformats.org/drawingml/2006/chart" r:id="rId1"/>
-          </a:graphicData>
-        </a:graphic>
-      </p:graphicFrame>
-      <p:sp>
-        <p:nvSpPr>
-          <p:cNvPr id="7" name="Shape 4"/>
-          <p:cNvSpPr/>
-          <p:nvPr/>
-        </p:nvSpPr>
-        <p:spPr>
-          <a:xfrm>
-            <a:off x="7680960" y="1965960"/>
-            <a:ext cx="4023360" cy="4160520"/>
-          </a:xfrm>
-          <a:prstGeom prst="roundRect">
-            <a:avLst>
-              <a:gd name="adj" fmla="val 909"/>
-            </a:avLst>
-          </a:prstGeom>
-          <a:solidFill>
-            <a:srgbClr val="102D69"/>
-          </a:solidFill>
-          <a:ln w="12700">
-            <a:solidFill>
-              <a:srgbClr val="C9B894"/>
-            </a:solidFill>
-            <a:prstDash val="solid"/>
-          </a:ln>
-        </p:spPr>
-      </p:sp>
-      <p:sp>
-        <p:nvSpPr>
-          <p:cNvPr id="8" name="Shape 5"/>
-          <p:cNvSpPr/>
-          <p:nvPr/>
-        </p:nvSpPr>
-        <p:spPr>
-          <a:xfrm>
-            <a:off x="7680960" y="1965960"/>
-            <a:ext cx="4023360" cy="4160520"/>
-          </a:xfrm>
-          <a:prstGeom prst="roundRect">
-            <a:avLst>
-              <a:gd name="adj" fmla="val 909"/>
-            </a:avLst>
-          </a:prstGeom>
-          <a:solidFill>
-            <a:srgbClr val="102D69"/>
-          </a:solidFill>
-          <a:ln w="12700">
-            <a:solidFill>
-              <a:srgbClr val="102D69"/>
-            </a:solidFill>
-            <a:prstDash val="solid"/>
-          </a:ln>
-        </p:spPr>
-      </p:sp>
-      <p:sp>
-        <p:nvSpPr>
-          <p:cNvPr id="9" name="Text 6"/>
-          <p:cNvSpPr/>
-          <p:nvPr/>
-        </p:nvSpPr>
-        <p:spPr>
-          <a:xfrm>
-            <a:off x="7909560" y="2331720"/>
-            <a:ext cx="3566160" cy="640080"/>
+              <a:t>41.03%</a:t>
+            </a:r>
+            <a:endParaRPr lang="en-US" sz="11000" dirty="0"/>
+          </a:p>
+        </p:txBody>
+      </p:sp>
+      <p:sp>
+        <p:nvSpPr>
+          <p:cNvPr id="5" name="Text 3"/>
+          <p:cNvSpPr/>
+          <p:nvPr/>
+        </p:nvSpPr>
+        <p:spPr>
+          <a:xfrm>
+            <a:off x="685800" y="3639312"/>
+            <a:ext cx="5852160" cy="457200"/>
           </a:xfrm>
           <a:prstGeom prst="rect">
             <a:avLst/>
@@ -12972,49 +14460,21 @@
               <a:buNone/>
             </a:pPr>
             <a:r>
-              <a:rPr lang="en-US" sz="2600" b="1" dirty="0">
-                <a:solidFill>
-                  <a:srgbClr val="FAB900"/>
+              <a:rPr lang="en-US" sz="2000" dirty="0">
+                <a:solidFill>
+                  <a:srgbClr val="D0E4FF"/>
                 </a:solidFill>
                 <a:latin typeface="Courier New" pitchFamily="34" charset="0"/>
                 <a:ea typeface="Courier New" pitchFamily="34" charset="-122"/>
                 <a:cs typeface="Courier New" pitchFamily="34" charset="-120"/>
               </a:rPr>
-              <a:t>9.9 → 27.84%</a:t>
-            </a:r>
-            <a:endParaRPr lang="en-US" sz="2600" dirty="0"/>
-          </a:p>
-        </p:txBody>
-      </p:sp>
-      <p:sp>
-        <p:nvSpPr>
-          <p:cNvPr id="10" name="Text 7"/>
-          <p:cNvSpPr/>
-          <p:nvPr/>
-        </p:nvSpPr>
-        <p:spPr>
-          <a:xfrm>
-            <a:off x="7909560" y="2971800"/>
-            <a:ext cx="3566160" cy="640080"/>
-          </a:xfrm>
-          <a:prstGeom prst="rect">
-            <a:avLst/>
-          </a:prstGeom>
-          <a:noFill/>
-          <a:ln/>
-        </p:spPr>
-        <p:txBody>
-          <a:bodyPr wrap="square" lIns="0" tIns="0" rIns="0" bIns="0" rtlCol="0" anchor="t"/>
-          <a:lstStyle/>
-          <a:p>
+              <a:t>± 1.37   </a:t>
+            </a:r>
             <a:pPr indent="0" marL="0">
-              <a:lnSpc>
-                <a:spcPts val="1900"/>
-              </a:lnSpc>
-              <a:buNone/>
-            </a:pPr>
-            <a:r>
-              <a:rPr lang="en-US" sz="1500" dirty="0">
+              <a:buNone/>
+            </a:pPr>
+            <a:r>
+              <a:rPr lang="en-US" sz="1800" dirty="0">
                 <a:solidFill>
                   <a:srgbClr val="FFFFFF"/>
                 </a:solidFill>
@@ -13022,22 +14482,61 @@
                 <a:ea typeface="Calibri" pitchFamily="34" charset="-122"/>
                 <a:cs typeface="Calibri" pitchFamily="34" charset="-120"/>
               </a:rPr>
-              <a:t>рост EX при росте данных ×23 — плато нет.</a:t>
-            </a:r>
-            <a:endParaRPr lang="en-US" sz="1500" dirty="0"/>
-          </a:p>
-        </p:txBody>
-      </p:sp>
-      <p:sp>
-        <p:nvSpPr>
-          <p:cNvPr id="11" name="Text 8"/>
-          <p:cNvSpPr/>
-          <p:nvPr/>
-        </p:nvSpPr>
-        <p:spPr>
-          <a:xfrm>
-            <a:off x="7909560" y="3703320"/>
-            <a:ext cx="3566160" cy="2103120"/>
+              <a:t>EX, 7B, schema-less</a:t>
+            </a:r>
+            <a:endParaRPr lang="en-US" sz="2000" dirty="0"/>
+          </a:p>
+        </p:txBody>
+      </p:sp>
+      <p:sp>
+        <p:nvSpPr>
+          <p:cNvPr id="6" name="Text 4"/>
+          <p:cNvSpPr/>
+          <p:nvPr/>
+        </p:nvSpPr>
+        <p:spPr>
+          <a:xfrm>
+            <a:off x="6583680" y="2103120"/>
+            <a:ext cx="2651760" cy="548640"/>
+          </a:xfrm>
+          <a:prstGeom prst="rect">
+            <a:avLst/>
+          </a:prstGeom>
+          <a:noFill/>
+          <a:ln/>
+        </p:spPr>
+        <p:txBody>
+          <a:bodyPr wrap="square" lIns="0" tIns="0" rIns="0" bIns="0" rtlCol="0" anchor="ctr"/>
+          <a:lstStyle/>
+          <a:p>
+            <a:pPr indent="0" marL="0">
+              <a:buNone/>
+            </a:pPr>
+            <a:r>
+              <a:rPr lang="en-US" sz="2600" b="1" dirty="0">
+                <a:solidFill>
+                  <a:srgbClr val="D0E4FF"/>
+                </a:solidFill>
+                <a:latin typeface="Courier New" pitchFamily="34" charset="0"/>
+                <a:ea typeface="Courier New" pitchFamily="34" charset="-122"/>
+                <a:cs typeface="Courier New" pitchFamily="34" charset="-120"/>
+              </a:rPr>
+              <a:t>+10.3 п.п.</a:t>
+            </a:r>
+            <a:endParaRPr lang="en-US" sz="2600" dirty="0"/>
+          </a:p>
+        </p:txBody>
+      </p:sp>
+      <p:sp>
+        <p:nvSpPr>
+          <p:cNvPr id="7" name="Text 5"/>
+          <p:cNvSpPr/>
+          <p:nvPr/>
+        </p:nvSpPr>
+        <p:spPr>
+          <a:xfrm>
+            <a:off x="6583680" y="2633472"/>
+            <a:ext cx="2651760" cy="914400"/>
           </a:xfrm>
           <a:prstGeom prst="rect">
             <a:avLst/>
@@ -13051,12 +14550,12 @@
           <a:p>
             <a:pPr indent="0" marL="0">
               <a:lnSpc>
-                <a:spcPts val="2000"/>
+                <a:spcPts val="1500"/>
               </a:lnSpc>
               <a:buNone/>
             </a:pPr>
             <a:r>
-              <a:rPr lang="en-US" sz="1400" dirty="0">
+              <a:rPr lang="en-US" sz="1250" dirty="0">
                 <a:solidFill>
                   <a:srgbClr val="D0E4FF"/>
                 </a:solidFill>
@@ -13064,22 +14563,22 @@
                 <a:ea typeface="Calibri" pitchFamily="34" charset="-122"/>
                 <a:cs typeface="Calibri" pitchFamily="34" charset="-120"/>
               </a:rPr>
-              <a:t>На 347 парах lora ещё проигрывала baseline — масштаб синтетики перевернул знак.</a:t>
-            </a:r>
-            <a:endParaRPr lang="en-US" sz="1400" dirty="0"/>
-          </a:p>
-        </p:txBody>
-      </p:sp>
-      <p:sp>
-        <p:nvSpPr>
-          <p:cNvPr id="12" name="Text 9"/>
-          <p:cNvSpPr/>
-          <p:nvPr/>
-        </p:nvSpPr>
-        <p:spPr>
-          <a:xfrm>
-            <a:off x="457200" y="6455664"/>
-            <a:ext cx="6400800" cy="274320"/>
+              <a:t>над baseline 7B (30.77%), ≈ 7.5 σ</a:t>
+            </a:r>
+            <a:endParaRPr lang="en-US" sz="1250" dirty="0"/>
+          </a:p>
+        </p:txBody>
+      </p:sp>
+      <p:sp>
+        <p:nvSpPr>
+          <p:cNvPr id="8" name="Text 6"/>
+          <p:cNvSpPr/>
+          <p:nvPr/>
+        </p:nvSpPr>
+        <p:spPr>
+          <a:xfrm>
+            <a:off x="9326880" y="2103120"/>
+            <a:ext cx="2651760" cy="548640"/>
           </a:xfrm>
           <a:prstGeom prst="rect">
             <a:avLst/>
@@ -13095,30 +14594,72 @@
               <a:buNone/>
             </a:pPr>
             <a:r>
-              <a:rPr lang="en-US" sz="900" dirty="0">
-                <a:solidFill>
-                  <a:srgbClr val="444444"/>
+              <a:rPr lang="en-US" sz="2600" b="1" dirty="0">
+                <a:solidFill>
+                  <a:srgbClr val="D0E4FF"/>
+                </a:solidFill>
+                <a:latin typeface="Courier New" pitchFamily="34" charset="0"/>
+                <a:ea typeface="Courier New" pitchFamily="34" charset="-122"/>
+                <a:cs typeface="Courier New" pitchFamily="34" charset="-120"/>
+              </a:rPr>
+              <a:t>×3.2</a:t>
+            </a:r>
+            <a:endParaRPr lang="en-US" sz="2600" dirty="0"/>
+          </a:p>
+        </p:txBody>
+      </p:sp>
+      <p:sp>
+        <p:nvSpPr>
+          <p:cNvPr id="9" name="Text 7"/>
+          <p:cNvSpPr/>
+          <p:nvPr/>
+        </p:nvSpPr>
+        <p:spPr>
+          <a:xfrm>
+            <a:off x="9326880" y="2633472"/>
+            <a:ext cx="2651760" cy="914400"/>
+          </a:xfrm>
+          <a:prstGeom prst="rect">
+            <a:avLst/>
+          </a:prstGeom>
+          <a:noFill/>
+          <a:ln/>
+        </p:spPr>
+        <p:txBody>
+          <a:bodyPr wrap="square" lIns="0" tIns="0" rIns="0" bIns="0" rtlCol="0" anchor="t"/>
+          <a:lstStyle/>
+          <a:p>
+            <a:pPr indent="0" marL="0">
+              <a:lnSpc>
+                <a:spcPts val="1500"/>
+              </a:lnSpc>
+              <a:buNone/>
+            </a:pPr>
+            <a:r>
+              <a:rPr lang="en-US" sz="1250" dirty="0">
+                <a:solidFill>
+                  <a:srgbClr val="D0E4FF"/>
                 </a:solidFill>
                 <a:latin typeface="Calibri" pitchFamily="34" charset="0"/>
                 <a:ea typeface="Calibri" pitchFamily="34" charset="-122"/>
                 <a:cs typeface="Calibri" pitchFamily="34" charset="-120"/>
               </a:rPr>
-              <a:t>DB2Model · ветка SFT/LoRA</a:t>
-            </a:r>
-            <a:endParaRPr lang="en-US" sz="900" dirty="0"/>
-          </a:p>
-        </p:txBody>
-      </p:sp>
-      <p:sp>
-        <p:nvSpPr>
-          <p:cNvPr id="13" name="Text 10"/>
-          <p:cNvSpPr/>
-          <p:nvPr/>
-        </p:nvSpPr>
-        <p:spPr>
-          <a:xfrm>
-            <a:off x="10881360" y="6455664"/>
-            <a:ext cx="822960" cy="274320"/>
+              <a:t>меньше контекст (90.6 vs 288.2 токена)</a:t>
+            </a:r>
+            <a:endParaRPr lang="en-US" sz="1250" dirty="0"/>
+          </a:p>
+        </p:txBody>
+      </p:sp>
+      <p:sp>
+        <p:nvSpPr>
+          <p:cNvPr id="10" name="Text 8"/>
+          <p:cNvSpPr/>
+          <p:nvPr/>
+        </p:nvSpPr>
+        <p:spPr>
+          <a:xfrm>
+            <a:off x="6583680" y="3794760"/>
+            <a:ext cx="2651760" cy="548640"/>
           </a:xfrm>
           <a:prstGeom prst="rect">
             <a:avLst/>
@@ -13130,19 +14671,220 @@
           <a:bodyPr wrap="square" lIns="0" tIns="0" rIns="0" bIns="0" rtlCol="0" anchor="ctr"/>
           <a:lstStyle/>
           <a:p>
-            <a:pPr algn="r" indent="0" marL="0">
-              <a:buNone/>
-            </a:pPr>
-            <a:r>
-              <a:rPr lang="en-US" sz="900" dirty="0">
-                <a:solidFill>
-                  <a:srgbClr val="444444"/>
+            <a:pPr indent="0" marL="0">
+              <a:buNone/>
+            </a:pPr>
+            <a:r>
+              <a:rPr lang="en-US" sz="2600" b="1" dirty="0">
+                <a:solidFill>
+                  <a:srgbClr val="D0E4FF"/>
                 </a:solidFill>
                 <a:latin typeface="Courier New" pitchFamily="34" charset="0"/>
                 <a:ea typeface="Courier New" pitchFamily="34" charset="-122"/>
                 <a:cs typeface="Courier New" pitchFamily="34" charset="-120"/>
               </a:rPr>
-              <a:t>7 / 13</a:t>
+              <a:t>×1.44</a:t>
+            </a:r>
+            <a:endParaRPr lang="en-US" sz="2600" dirty="0"/>
+          </a:p>
+        </p:txBody>
+      </p:sp>
+      <p:sp>
+        <p:nvSpPr>
+          <p:cNvPr id="11" name="Text 9"/>
+          <p:cNvSpPr/>
+          <p:nvPr/>
+        </p:nvSpPr>
+        <p:spPr>
+          <a:xfrm>
+            <a:off x="6583680" y="4325112"/>
+            <a:ext cx="2651760" cy="914400"/>
+          </a:xfrm>
+          <a:prstGeom prst="rect">
+            <a:avLst/>
+          </a:prstGeom>
+          <a:noFill/>
+          <a:ln/>
+        </p:spPr>
+        <p:txBody>
+          <a:bodyPr wrap="square" lIns="0" tIns="0" rIns="0" bIns="0" rtlCol="0" anchor="t"/>
+          <a:lstStyle/>
+          <a:p>
+            <a:pPr indent="0" marL="0">
+              <a:lnSpc>
+                <a:spcPts val="1500"/>
+              </a:lnSpc>
+              <a:buNone/>
+            </a:pPr>
+            <a:r>
+              <a:rPr lang="en-US" sz="1250" dirty="0">
+                <a:solidFill>
+                  <a:srgbClr val="D0E4FF"/>
+                </a:solidFill>
+                <a:latin typeface="Calibri" pitchFamily="34" charset="0"/>
+                <a:ea typeface="Calibri" pitchFamily="34" charset="-122"/>
+                <a:cs typeface="Calibri" pitchFamily="34" charset="-120"/>
+              </a:rPr>
+              <a:t>быстрее генерация (короче prefill)</a:t>
+            </a:r>
+            <a:endParaRPr lang="en-US" sz="1250" dirty="0"/>
+          </a:p>
+        </p:txBody>
+      </p:sp>
+      <p:sp>
+        <p:nvSpPr>
+          <p:cNvPr id="12" name="Text 10"/>
+          <p:cNvSpPr/>
+          <p:nvPr/>
+        </p:nvSpPr>
+        <p:spPr>
+          <a:xfrm>
+            <a:off x="9326880" y="3794760"/>
+            <a:ext cx="2651760" cy="548640"/>
+          </a:xfrm>
+          <a:prstGeom prst="rect">
+            <a:avLst/>
+          </a:prstGeom>
+          <a:noFill/>
+          <a:ln/>
+        </p:spPr>
+        <p:txBody>
+          <a:bodyPr wrap="square" lIns="0" tIns="0" rIns="0" bIns="0" rtlCol="0" anchor="ctr"/>
+          <a:lstStyle/>
+          <a:p>
+            <a:pPr indent="0" marL="0">
+              <a:buNone/>
+            </a:pPr>
+            <a:r>
+              <a:rPr lang="en-US" sz="2600" b="1" dirty="0">
+                <a:solidFill>
+                  <a:srgbClr val="D0E4FF"/>
+                </a:solidFill>
+                <a:latin typeface="Courier New" pitchFamily="34" charset="0"/>
+                <a:ea typeface="Courier New" pitchFamily="34" charset="-122"/>
+                <a:cs typeface="Courier New" pitchFamily="34" charset="-120"/>
+              </a:rPr>
+              <a:t>5.49%</a:t>
+            </a:r>
+            <a:endParaRPr lang="en-US" sz="2600" dirty="0"/>
+          </a:p>
+        </p:txBody>
+      </p:sp>
+      <p:sp>
+        <p:nvSpPr>
+          <p:cNvPr id="13" name="Text 11"/>
+          <p:cNvSpPr/>
+          <p:nvPr/>
+        </p:nvSpPr>
+        <p:spPr>
+          <a:xfrm>
+            <a:off x="9326880" y="4325112"/>
+            <a:ext cx="2651760" cy="914400"/>
+          </a:xfrm>
+          <a:prstGeom prst="rect">
+            <a:avLst/>
+          </a:prstGeom>
+          <a:noFill/>
+          <a:ln/>
+        </p:spPr>
+        <p:txBody>
+          <a:bodyPr wrap="square" lIns="0" tIns="0" rIns="0" bIns="0" rtlCol="0" anchor="t"/>
+          <a:lstStyle/>
+          <a:p>
+            <a:pPr indent="0" marL="0">
+              <a:lnSpc>
+                <a:spcPts val="1500"/>
+              </a:lnSpc>
+              <a:buNone/>
+            </a:pPr>
+            <a:r>
+              <a:rPr lang="en-US" sz="1250" dirty="0">
+                <a:solidFill>
+                  <a:srgbClr val="D0E4FF"/>
+                </a:solidFill>
+                <a:latin typeface="Calibri" pitchFamily="34" charset="0"/>
+                <a:ea typeface="Calibri" pitchFamily="34" charset="-122"/>
+                <a:cs typeface="Calibri" pitchFamily="34" charset="-120"/>
+              </a:rPr>
+              <a:t>zeroshot-контроль: вклад адаптера реален</a:t>
+            </a:r>
+            <a:endParaRPr lang="en-US" sz="1250" dirty="0"/>
+          </a:p>
+        </p:txBody>
+      </p:sp>
+      <p:sp>
+        <p:nvSpPr>
+          <p:cNvPr id="14" name="Text 12"/>
+          <p:cNvSpPr/>
+          <p:nvPr/>
+        </p:nvSpPr>
+        <p:spPr>
+          <a:xfrm>
+            <a:off x="457200" y="6455664"/>
+            <a:ext cx="6400800" cy="274320"/>
+          </a:xfrm>
+          <a:prstGeom prst="rect">
+            <a:avLst/>
+          </a:prstGeom>
+          <a:noFill/>
+          <a:ln/>
+        </p:spPr>
+        <p:txBody>
+          <a:bodyPr wrap="square" lIns="0" tIns="0" rIns="0" bIns="0" rtlCol="0" anchor="ctr"/>
+          <a:lstStyle/>
+          <a:p>
+            <a:pPr indent="0" marL="0">
+              <a:buNone/>
+            </a:pPr>
+            <a:r>
+              <a:rPr lang="en-US" sz="900" dirty="0">
+                <a:solidFill>
+                  <a:srgbClr val="D0E4FF"/>
+                </a:solidFill>
+                <a:latin typeface="Calibri" pitchFamily="34" charset="0"/>
+                <a:ea typeface="Calibri" pitchFamily="34" charset="-122"/>
+                <a:cs typeface="Calibri" pitchFamily="34" charset="-120"/>
+              </a:rPr>
+              <a:t>DB2Model · ветка SFT/LoRA</a:t>
+            </a:r>
+            <a:endParaRPr lang="en-US" sz="900" dirty="0"/>
+          </a:p>
+        </p:txBody>
+      </p:sp>
+      <p:sp>
+        <p:nvSpPr>
+          <p:cNvPr id="15" name="Text 13"/>
+          <p:cNvSpPr/>
+          <p:nvPr/>
+        </p:nvSpPr>
+        <p:spPr>
+          <a:xfrm>
+            <a:off x="10881360" y="6455664"/>
+            <a:ext cx="822960" cy="274320"/>
+          </a:xfrm>
+          <a:prstGeom prst="rect">
+            <a:avLst/>
+          </a:prstGeom>
+          <a:noFill/>
+          <a:ln/>
+        </p:spPr>
+        <p:txBody>
+          <a:bodyPr wrap="square" lIns="0" tIns="0" rIns="0" bIns="0" rtlCol="0" anchor="ctr"/>
+          <a:lstStyle/>
+          <a:p>
+            <a:pPr algn="r" indent="0" marL="0">
+              <a:buNone/>
+            </a:pPr>
+            <a:r>
+              <a:rPr lang="en-US" sz="900" dirty="0">
+                <a:solidFill>
+                  <a:srgbClr val="D0E4FF"/>
+                </a:solidFill>
+                <a:latin typeface="Courier New" pitchFamily="34" charset="0"/>
+                <a:ea typeface="Courier New" pitchFamily="34" charset="-122"/>
+                <a:cs typeface="Courier New" pitchFamily="34" charset="-120"/>
+              </a:rPr>
+              <a:t>8 / 15</a:t>
             </a:r>
             <a:endParaRPr lang="en-US" sz="900" dirty="0"/>
           </a:p>
@@ -13267,7 +15009,7 @@
                 <a:ea typeface="Calibri" pitchFamily="34" charset="-122"/>
                 <a:cs typeface="Calibri" pitchFamily="34" charset="-120"/>
               </a:rPr>
-              <a:t>Что сработало и что нет</a:t>
+              <a:t>Знание в весах обгоняет контекст на обоих размерах</a:t>
             </a:r>
             <a:endParaRPr lang="en-US" sz="3200" dirty="0"/>
           </a:p>
@@ -13282,7 +15024,7 @@
         <p:spPr>
           <a:xfrm>
             <a:off x="457200" y="1097280"/>
-            <a:ext cx="10058400" cy="365760"/>
+            <a:ext cx="9966960" cy="365760"/>
           </a:xfrm>
           <a:prstGeom prst="rect">
             <a:avLst/>
@@ -13306,26 +15048,42 @@
                 <a:ea typeface="Calibri" pitchFamily="34" charset="-122"/>
                 <a:cs typeface="Calibri" pitchFamily="34" charset="-120"/>
               </a:rPr>
-              <a:t>Честно: доказанным знаком обладает один ablation</a:t>
+              <a:t>Прирост разный: +6.6 п.п. на 3B и +10.3 п.п. на 7B</a:t>
             </a:r>
             <a:endParaRPr lang="en-US" sz="1500" dirty="0"/>
           </a:p>
         </p:txBody>
       </p:sp>
-      <p:sp>
-        <p:nvSpPr>
-          <p:cNvPr id="6" name="Shape 4"/>
-          <p:cNvSpPr/>
-          <p:nvPr/>
-        </p:nvSpPr>
-        <p:spPr>
-          <a:xfrm>
-            <a:off x="457200" y="2057400"/>
-            <a:ext cx="11247120" cy="1234440"/>
+      <p:graphicFrame>
+        <p:nvGraphicFramePr>
+          <p:cNvPr id="6" name="Chart 0" descr=""/>
+          <p:cNvGraphicFramePr/>
+          <p:nvPr/>
+        </p:nvGraphicFramePr>
+        <p:xfrm>
+          <a:off x="457200" y="1965960"/>
+          <a:ext cx="6949440" cy="4160520"/>
+        </p:xfrm>
+        <a:graphic xmlns:a="http://schemas.openxmlformats.org/drawingml/2006/main">
+          <a:graphicData uri="http://schemas.openxmlformats.org/drawingml/2006/chart">
+            <c:chart xmlns:c="http://schemas.openxmlformats.org/drawingml/2006/chart" r:id="rId1"/>
+          </a:graphicData>
+        </a:graphic>
+      </p:graphicFrame>
+      <p:sp>
+        <p:nvSpPr>
+          <p:cNvPr id="7" name="Shape 4"/>
+          <p:cNvSpPr/>
+          <p:nvPr/>
+        </p:nvSpPr>
+        <p:spPr>
+          <a:xfrm>
+            <a:off x="7680960" y="1965960"/>
+            <a:ext cx="4023360" cy="4160520"/>
           </a:xfrm>
           <a:prstGeom prst="roundRect">
             <a:avLst>
-              <a:gd name="adj" fmla="val 2963"/>
+              <a:gd name="adj" fmla="val 909"/>
             </a:avLst>
           </a:prstGeom>
           <a:solidFill>
@@ -13341,34 +15099,174 @@
       </p:sp>
       <p:sp>
         <p:nvSpPr>
-          <p:cNvPr id="7" name="Shape 5"/>
-          <p:cNvSpPr/>
-          <p:nvPr/>
-        </p:nvSpPr>
-        <p:spPr>
-          <a:xfrm>
-            <a:off x="777240" y="2377440"/>
-            <a:ext cx="594360" cy="594360"/>
-          </a:xfrm>
-          <a:prstGeom prst="ellipse">
-            <a:avLst/>
-          </a:prstGeom>
-          <a:solidFill>
-            <a:srgbClr val="5C7A3A"/>
-          </a:solidFill>
-          <a:ln/>
-        </p:spPr>
-      </p:sp>
-      <p:sp>
-        <p:nvSpPr>
-          <p:cNvPr id="8" name="Text 6"/>
-          <p:cNvSpPr/>
-          <p:nvPr/>
-        </p:nvSpPr>
-        <p:spPr>
-          <a:xfrm>
-            <a:off x="777240" y="2350008"/>
-            <a:ext cx="594360" cy="594360"/>
+          <p:cNvPr id="8" name="Text 5"/>
+          <p:cNvSpPr/>
+          <p:nvPr/>
+        </p:nvSpPr>
+        <p:spPr>
+          <a:xfrm>
+            <a:off x="7909560" y="2331720"/>
+            <a:ext cx="3566160" cy="731520"/>
+          </a:xfrm>
+          <a:prstGeom prst="rect">
+            <a:avLst/>
+          </a:prstGeom>
+          <a:noFill/>
+          <a:ln/>
+        </p:spPr>
+        <p:txBody>
+          <a:bodyPr wrap="square" lIns="0" tIns="0" rIns="0" bIns="0" rtlCol="0" anchor="t"/>
+          <a:lstStyle/>
+          <a:p>
+            <a:pPr indent="0" marL="0">
+              <a:lnSpc>
+                <a:spcPts val="1800"/>
+              </a:lnSpc>
+              <a:buNone/>
+            </a:pPr>
+            <a:r>
+              <a:rPr lang="en-US" sz="1400" b="1" dirty="0">
+                <a:solidFill>
+                  <a:srgbClr val="102D69"/>
+                </a:solidFill>
+                <a:latin typeface="Calibri" pitchFamily="34" charset="0"/>
+                <a:ea typeface="Calibri" pitchFamily="34" charset="-122"/>
+                <a:cs typeface="Calibri" pitchFamily="34" charset="-120"/>
+              </a:rPr>
+              <a:t>3B: </a:t>
+            </a:r>
+            <a:pPr indent="0" marL="0">
+              <a:lnSpc>
+                <a:spcPts val="1800"/>
+              </a:lnSpc>
+              <a:buNone/>
+            </a:pPr>
+            <a:r>
+              <a:rPr lang="en-US" sz="1400" dirty="0">
+                <a:solidFill>
+                  <a:srgbClr val="444444"/>
+                </a:solidFill>
+                <a:latin typeface="Calibri" pitchFamily="34" charset="0"/>
+                <a:ea typeface="Calibri" pitchFamily="34" charset="-122"/>
+                <a:cs typeface="Calibri" pitchFamily="34" charset="-120"/>
+              </a:rPr>
+              <a:t>30.77 ± 1.55 vs 24.18 → +6.6 п.п. (≈4 σ)</a:t>
+            </a:r>
+            <a:endParaRPr lang="en-US" sz="1400" dirty="0"/>
+          </a:p>
+        </p:txBody>
+      </p:sp>
+      <p:sp>
+        <p:nvSpPr>
+          <p:cNvPr id="9" name="Text 6"/>
+          <p:cNvSpPr/>
+          <p:nvPr/>
+        </p:nvSpPr>
+        <p:spPr>
+          <a:xfrm>
+            <a:off x="7909560" y="3108960"/>
+            <a:ext cx="3566160" cy="731520"/>
+          </a:xfrm>
+          <a:prstGeom prst="rect">
+            <a:avLst/>
+          </a:prstGeom>
+          <a:noFill/>
+          <a:ln/>
+        </p:spPr>
+        <p:txBody>
+          <a:bodyPr wrap="square" lIns="0" tIns="0" rIns="0" bIns="0" rtlCol="0" anchor="t"/>
+          <a:lstStyle/>
+          <a:p>
+            <a:pPr indent="0" marL="0">
+              <a:lnSpc>
+                <a:spcPts val="1800"/>
+              </a:lnSpc>
+              <a:buNone/>
+            </a:pPr>
+            <a:r>
+              <a:rPr lang="en-US" sz="1400" b="1" dirty="0">
+                <a:solidFill>
+                  <a:srgbClr val="102D69"/>
+                </a:solidFill>
+                <a:latin typeface="Calibri" pitchFamily="34" charset="0"/>
+                <a:ea typeface="Calibri" pitchFamily="34" charset="-122"/>
+                <a:cs typeface="Calibri" pitchFamily="34" charset="-120"/>
+              </a:rPr>
+              <a:t>7B: </a:t>
+            </a:r>
+            <a:pPr indent="0" marL="0">
+              <a:lnSpc>
+                <a:spcPts val="1800"/>
+              </a:lnSpc>
+              <a:buNone/>
+            </a:pPr>
+            <a:r>
+              <a:rPr lang="en-US" sz="1400" dirty="0">
+                <a:solidFill>
+                  <a:srgbClr val="444444"/>
+                </a:solidFill>
+                <a:latin typeface="Calibri" pitchFamily="34" charset="0"/>
+                <a:ea typeface="Calibri" pitchFamily="34" charset="-122"/>
+                <a:cs typeface="Calibri" pitchFamily="34" charset="-120"/>
+              </a:rPr>
+              <a:t>41.03 ± 1.37 vs 30.77 → +10.3 п.п. (≈7.5 σ)</a:t>
+            </a:r>
+            <a:endParaRPr lang="en-US" sz="1400" dirty="0"/>
+          </a:p>
+        </p:txBody>
+      </p:sp>
+      <p:sp>
+        <p:nvSpPr>
+          <p:cNvPr id="10" name="Text 7"/>
+          <p:cNvSpPr/>
+          <p:nvPr/>
+        </p:nvSpPr>
+        <p:spPr>
+          <a:xfrm>
+            <a:off x="7909560" y="4023360"/>
+            <a:ext cx="3566160" cy="1828800"/>
+          </a:xfrm>
+          <a:prstGeom prst="rect">
+            <a:avLst/>
+          </a:prstGeom>
+          <a:noFill/>
+          <a:ln/>
+        </p:spPr>
+        <p:txBody>
+          <a:bodyPr wrap="square" lIns="0" tIns="0" rIns="0" bIns="0" rtlCol="0" anchor="t"/>
+          <a:lstStyle/>
+          <a:p>
+            <a:pPr indent="0" marL="0">
+              <a:lnSpc>
+                <a:spcPts val="1800"/>
+              </a:lnSpc>
+              <a:buNone/>
+            </a:pPr>
+            <a:r>
+              <a:rPr lang="en-US" sz="1300" i="1" dirty="0">
+                <a:solidFill>
+                  <a:srgbClr val="444444"/>
+                </a:solidFill>
+                <a:latin typeface="Calibri" pitchFamily="34" charset="0"/>
+                <a:ea typeface="Calibri" pitchFamily="34" charset="-122"/>
+                <a:cs typeface="Calibri" pitchFamily="34" charset="-120"/>
+              </a:rPr>
+              <a:t>Контроль zeroshot (5.49%) — без схемы и без адаптера. +25 п.п. переносит именно обучение, а не базовая модель.</a:t>
+            </a:r>
+            <a:endParaRPr lang="en-US" sz="1300" dirty="0"/>
+          </a:p>
+        </p:txBody>
+      </p:sp>
+      <p:sp>
+        <p:nvSpPr>
+          <p:cNvPr id="11" name="Text 8"/>
+          <p:cNvSpPr/>
+          <p:nvPr/>
+        </p:nvSpPr>
+        <p:spPr>
+          <a:xfrm>
+            <a:off x="457200" y="6455664"/>
+            <a:ext cx="6400800" cy="274320"/>
           </a:xfrm>
           <a:prstGeom prst="rect">
             <a:avLst/>
@@ -13380,503 +15278,58 @@
           <a:bodyPr wrap="square" lIns="0" tIns="0" rIns="0" bIns="0" rtlCol="0" anchor="ctr"/>
           <a:lstStyle/>
           <a:p>
-            <a:pPr algn="ctr" indent="0" marL="0">
-              <a:buNone/>
-            </a:pPr>
-            <a:r>
-              <a:rPr lang="en-US" sz="2600" b="1" dirty="0">
-                <a:solidFill>
-                  <a:srgbClr val="FFFFFF"/>
+            <a:pPr indent="0" marL="0">
+              <a:buNone/>
+            </a:pPr>
+            <a:r>
+              <a:rPr lang="en-US" sz="900" dirty="0">
+                <a:solidFill>
+                  <a:srgbClr val="444444"/>
+                </a:solidFill>
+                <a:latin typeface="Calibri" pitchFamily="34" charset="0"/>
+                <a:ea typeface="Calibri" pitchFamily="34" charset="-122"/>
+                <a:cs typeface="Calibri" pitchFamily="34" charset="-120"/>
+              </a:rPr>
+              <a:t>DB2Model · ветка SFT/LoRA</a:t>
+            </a:r>
+            <a:endParaRPr lang="en-US" sz="900" dirty="0"/>
+          </a:p>
+        </p:txBody>
+      </p:sp>
+      <p:sp>
+        <p:nvSpPr>
+          <p:cNvPr id="12" name="Text 9"/>
+          <p:cNvSpPr/>
+          <p:nvPr/>
+        </p:nvSpPr>
+        <p:spPr>
+          <a:xfrm>
+            <a:off x="10881360" y="6455664"/>
+            <a:ext cx="822960" cy="274320"/>
+          </a:xfrm>
+          <a:prstGeom prst="rect">
+            <a:avLst/>
+          </a:prstGeom>
+          <a:noFill/>
+          <a:ln/>
+        </p:spPr>
+        <p:txBody>
+          <a:bodyPr wrap="square" lIns="0" tIns="0" rIns="0" bIns="0" rtlCol="0" anchor="ctr"/>
+          <a:lstStyle/>
+          <a:p>
+            <a:pPr algn="r" indent="0" marL="0">
+              <a:buNone/>
+            </a:pPr>
+            <a:r>
+              <a:rPr lang="en-US" sz="900" dirty="0">
+                <a:solidFill>
+                  <a:srgbClr val="444444"/>
                 </a:solidFill>
                 <a:latin typeface="Courier New" pitchFamily="34" charset="0"/>
                 <a:ea typeface="Courier New" pitchFamily="34" charset="-122"/>
                 <a:cs typeface="Courier New" pitchFamily="34" charset="-120"/>
               </a:rPr>
-              <a:t>+</a:t>
-            </a:r>
-            <a:endParaRPr lang="en-US" sz="2600" dirty="0"/>
-          </a:p>
-        </p:txBody>
-      </p:sp>
-      <p:sp>
-        <p:nvSpPr>
-          <p:cNvPr id="9" name="Text 7"/>
-          <p:cNvSpPr/>
-          <p:nvPr/>
-        </p:nvSpPr>
-        <p:spPr>
-          <a:xfrm>
-            <a:off x="1600200" y="2240280"/>
-            <a:ext cx="9966960" cy="457200"/>
-          </a:xfrm>
-          <a:prstGeom prst="rect">
-            <a:avLst/>
-          </a:prstGeom>
-          <a:noFill/>
-          <a:ln/>
-        </p:spPr>
-        <p:txBody>
-          <a:bodyPr wrap="square" lIns="0" tIns="0" rIns="0" bIns="0" rtlCol="0" anchor="ctr"/>
-          <a:lstStyle/>
-          <a:p>
-            <a:pPr indent="0" marL="0">
-              <a:buNone/>
-            </a:pPr>
-            <a:r>
-              <a:rPr lang="en-US" sz="1800" b="1" dirty="0">
-                <a:solidFill>
-                  <a:srgbClr val="102D69"/>
-                </a:solidFill>
-                <a:latin typeface="Calibri" pitchFamily="34" charset="0"/>
-                <a:ea typeface="Calibri" pitchFamily="34" charset="-122"/>
-                <a:cs typeface="Calibri" pitchFamily="34" charset="-120"/>
-              </a:rPr>
-              <a:t>Объём данных</a:t>
-            </a:r>
-            <a:endParaRPr lang="en-US" sz="1800" dirty="0"/>
-          </a:p>
-        </p:txBody>
-      </p:sp>
-      <p:sp>
-        <p:nvSpPr>
-          <p:cNvPr id="10" name="Text 8"/>
-          <p:cNvSpPr/>
-          <p:nvPr/>
-        </p:nvSpPr>
-        <p:spPr>
-          <a:xfrm>
-            <a:off x="1600200" y="2679192"/>
-            <a:ext cx="9966960" cy="457200"/>
-          </a:xfrm>
-          <a:prstGeom prst="rect">
-            <a:avLst/>
-          </a:prstGeom>
-          <a:noFill/>
-          <a:ln/>
-        </p:spPr>
-        <p:txBody>
-          <a:bodyPr wrap="square" lIns="0" tIns="0" rIns="0" bIns="0" rtlCol="0" anchor="ctr"/>
-          <a:lstStyle/>
-          <a:p>
-            <a:pPr indent="0" marL="0">
-              <a:buNone/>
-            </a:pPr>
-            <a:r>
-              <a:rPr lang="en-US" sz="1400" dirty="0">
-                <a:solidFill>
-                  <a:srgbClr val="444444"/>
-                </a:solidFill>
-                <a:latin typeface="Calibri" pitchFamily="34" charset="0"/>
-                <a:ea typeface="Calibri" pitchFamily="34" charset="-122"/>
-                <a:cs typeface="Calibri" pitchFamily="34" charset="-120"/>
-              </a:rPr>
-              <a:t>доказан (&gt;2σ): кривая 9.9 → 27.84, плато нет</a:t>
-            </a:r>
-            <a:endParaRPr lang="en-US" sz="1400" dirty="0"/>
-          </a:p>
-        </p:txBody>
-      </p:sp>
-      <p:sp>
-        <p:nvSpPr>
-          <p:cNvPr id="11" name="Shape 9"/>
-          <p:cNvSpPr/>
-          <p:nvPr/>
-        </p:nvSpPr>
-        <p:spPr>
-          <a:xfrm>
-            <a:off x="457200" y="3474720"/>
-            <a:ext cx="11247120" cy="1234440"/>
-          </a:xfrm>
-          <a:prstGeom prst="roundRect">
-            <a:avLst>
-              <a:gd name="adj" fmla="val 2963"/>
-            </a:avLst>
-          </a:prstGeom>
-          <a:solidFill>
-            <a:srgbClr val="EEF4FF"/>
-          </a:solidFill>
-          <a:ln w="12700">
-            <a:solidFill>
-              <a:srgbClr val="C9B894"/>
-            </a:solidFill>
-            <a:prstDash val="solid"/>
-          </a:ln>
-        </p:spPr>
-      </p:sp>
-      <p:sp>
-        <p:nvSpPr>
-          <p:cNvPr id="12" name="Shape 10"/>
-          <p:cNvSpPr/>
-          <p:nvPr/>
-        </p:nvSpPr>
-        <p:spPr>
-          <a:xfrm>
-            <a:off x="777240" y="3794760"/>
-            <a:ext cx="594360" cy="594360"/>
-          </a:xfrm>
-          <a:prstGeom prst="ellipse">
-            <a:avLst/>
-          </a:prstGeom>
-          <a:solidFill>
-            <a:srgbClr val="E61E3C"/>
-          </a:solidFill>
-          <a:ln/>
-        </p:spPr>
-      </p:sp>
-      <p:sp>
-        <p:nvSpPr>
-          <p:cNvPr id="13" name="Text 11"/>
-          <p:cNvSpPr/>
-          <p:nvPr/>
-        </p:nvSpPr>
-        <p:spPr>
-          <a:xfrm>
-            <a:off x="777240" y="3767328"/>
-            <a:ext cx="594360" cy="594360"/>
-          </a:xfrm>
-          <a:prstGeom prst="rect">
-            <a:avLst/>
-          </a:prstGeom>
-          <a:noFill/>
-          <a:ln/>
-        </p:spPr>
-        <p:txBody>
-          <a:bodyPr wrap="square" lIns="0" tIns="0" rIns="0" bIns="0" rtlCol="0" anchor="ctr"/>
-          <a:lstStyle/>
-          <a:p>
-            <a:pPr algn="ctr" indent="0" marL="0">
-              <a:buNone/>
-            </a:pPr>
-            <a:r>
-              <a:rPr lang="en-US" sz="2600" b="1" dirty="0">
-                <a:solidFill>
-                  <a:srgbClr val="FFFFFF"/>
-                </a:solidFill>
-                <a:latin typeface="Courier New" pitchFamily="34" charset="0"/>
-                <a:ea typeface="Courier New" pitchFamily="34" charset="-122"/>
-                <a:cs typeface="Courier New" pitchFamily="34" charset="-120"/>
-              </a:rPr>
-              <a:t>−</a:t>
-            </a:r>
-            <a:endParaRPr lang="en-US" sz="2600" dirty="0"/>
-          </a:p>
-        </p:txBody>
-      </p:sp>
-      <p:sp>
-        <p:nvSpPr>
-          <p:cNvPr id="14" name="Text 12"/>
-          <p:cNvSpPr/>
-          <p:nvPr/>
-        </p:nvSpPr>
-        <p:spPr>
-          <a:xfrm>
-            <a:off x="1600200" y="3657600"/>
-            <a:ext cx="9966960" cy="457200"/>
-          </a:xfrm>
-          <a:prstGeom prst="rect">
-            <a:avLst/>
-          </a:prstGeom>
-          <a:noFill/>
-          <a:ln/>
-        </p:spPr>
-        <p:txBody>
-          <a:bodyPr wrap="square" lIns="0" tIns="0" rIns="0" bIns="0" rtlCol="0" anchor="ctr"/>
-          <a:lstStyle/>
-          <a:p>
-            <a:pPr indent="0" marL="0">
-              <a:buNone/>
-            </a:pPr>
-            <a:r>
-              <a:rPr lang="en-US" sz="1800" b="1" dirty="0">
-                <a:solidFill>
-                  <a:srgbClr val="102D69"/>
-                </a:solidFill>
-                <a:latin typeface="Calibri" pitchFamily="34" charset="0"/>
-                <a:ea typeface="Calibri" pitchFamily="34" charset="-122"/>
-                <a:cs typeface="Calibri" pitchFamily="34" charset="-120"/>
-              </a:rPr>
-              <a:t>Reasoning (Think2SQL)</a:t>
-            </a:r>
-            <a:endParaRPr lang="en-US" sz="1800" dirty="0"/>
-          </a:p>
-        </p:txBody>
-      </p:sp>
-      <p:sp>
-        <p:nvSpPr>
-          <p:cNvPr id="15" name="Text 13"/>
-          <p:cNvSpPr/>
-          <p:nvPr/>
-        </p:nvSpPr>
-        <p:spPr>
-          <a:xfrm>
-            <a:off x="1600200" y="4096512"/>
-            <a:ext cx="9966960" cy="457200"/>
-          </a:xfrm>
-          <a:prstGeom prst="rect">
-            <a:avLst/>
-          </a:prstGeom>
-          <a:noFill/>
-          <a:ln/>
-        </p:spPr>
-        <p:txBody>
-          <a:bodyPr wrap="square" lIns="0" tIns="0" rIns="0" bIns="0" rtlCol="0" anchor="ctr"/>
-          <a:lstStyle/>
-          <a:p>
-            <a:pPr indent="0" marL="0">
-              <a:buNone/>
-            </a:pPr>
-            <a:r>
-              <a:rPr lang="en-US" sz="1400" dirty="0">
-                <a:solidFill>
-                  <a:srgbClr val="444444"/>
-                </a:solidFill>
-                <a:latin typeface="Calibri" pitchFamily="34" charset="0"/>
-                <a:ea typeface="Calibri" pitchFamily="34" charset="-122"/>
-                <a:cs typeface="Calibri" pitchFamily="34" charset="-120"/>
-              </a:rPr>
-              <a:t>доказан (≈7.5σ): −10.3 п.п., модель разучилась помнить схему</a:t>
-            </a:r>
-            <a:endParaRPr lang="en-US" sz="1400" dirty="0"/>
-          </a:p>
-        </p:txBody>
-      </p:sp>
-      <p:sp>
-        <p:nvSpPr>
-          <p:cNvPr id="16" name="Shape 14"/>
-          <p:cNvSpPr/>
-          <p:nvPr/>
-        </p:nvSpPr>
-        <p:spPr>
-          <a:xfrm>
-            <a:off x="457200" y="4892040"/>
-            <a:ext cx="11247120" cy="1234440"/>
-          </a:xfrm>
-          <a:prstGeom prst="roundRect">
-            <a:avLst>
-              <a:gd name="adj" fmla="val 2963"/>
-            </a:avLst>
-          </a:prstGeom>
-          <a:solidFill>
-            <a:srgbClr val="EEF4FF"/>
-          </a:solidFill>
-          <a:ln w="12700">
-            <a:solidFill>
-              <a:srgbClr val="C9B894"/>
-            </a:solidFill>
-            <a:prstDash val="solid"/>
-          </a:ln>
-        </p:spPr>
-      </p:sp>
-      <p:sp>
-        <p:nvSpPr>
-          <p:cNvPr id="17" name="Shape 15"/>
-          <p:cNvSpPr/>
-          <p:nvPr/>
-        </p:nvSpPr>
-        <p:spPr>
-          <a:xfrm>
-            <a:off x="777240" y="5212080"/>
-            <a:ext cx="594360" cy="594360"/>
-          </a:xfrm>
-          <a:prstGeom prst="ellipse">
-            <a:avLst/>
-          </a:prstGeom>
-          <a:solidFill>
-            <a:srgbClr val="444444"/>
-          </a:solidFill>
-          <a:ln/>
-        </p:spPr>
-      </p:sp>
-      <p:sp>
-        <p:nvSpPr>
-          <p:cNvPr id="18" name="Text 16"/>
-          <p:cNvSpPr/>
-          <p:nvPr/>
-        </p:nvSpPr>
-        <p:spPr>
-          <a:xfrm>
-            <a:off x="777240" y="5184648"/>
-            <a:ext cx="594360" cy="594360"/>
-          </a:xfrm>
-          <a:prstGeom prst="rect">
-            <a:avLst/>
-          </a:prstGeom>
-          <a:noFill/>
-          <a:ln/>
-        </p:spPr>
-        <p:txBody>
-          <a:bodyPr wrap="square" lIns="0" tIns="0" rIns="0" bIns="0" rtlCol="0" anchor="ctr"/>
-          <a:lstStyle/>
-          <a:p>
-            <a:pPr algn="ctr" indent="0" marL="0">
-              <a:buNone/>
-            </a:pPr>
-            <a:r>
-              <a:rPr lang="en-US" sz="2600" b="1" dirty="0">
-                <a:solidFill>
-                  <a:srgbClr val="FFFFFF"/>
-                </a:solidFill>
-                <a:latin typeface="Courier New" pitchFamily="34" charset="0"/>
-                <a:ea typeface="Courier New" pitchFamily="34" charset="-122"/>
-                <a:cs typeface="Courier New" pitchFamily="34" charset="-120"/>
-              </a:rPr>
-              <a:t>≈</a:t>
-            </a:r>
-            <a:endParaRPr lang="en-US" sz="2600" dirty="0"/>
-          </a:p>
-        </p:txBody>
-      </p:sp>
-      <p:sp>
-        <p:nvSpPr>
-          <p:cNvPr id="19" name="Text 17"/>
-          <p:cNvSpPr/>
-          <p:nvPr/>
-        </p:nvSpPr>
-        <p:spPr>
-          <a:xfrm>
-            <a:off x="1600200" y="5074920"/>
-            <a:ext cx="9966960" cy="457200"/>
-          </a:xfrm>
-          <a:prstGeom prst="rect">
-            <a:avLst/>
-          </a:prstGeom>
-          <a:noFill/>
-          <a:ln/>
-        </p:spPr>
-        <p:txBody>
-          <a:bodyPr wrap="square" lIns="0" tIns="0" rIns="0" bIns="0" rtlCol="0" anchor="ctr"/>
-          <a:lstStyle/>
-          <a:p>
-            <a:pPr indent="0" marL="0">
-              <a:buNone/>
-            </a:pPr>
-            <a:r>
-              <a:rPr lang="en-US" sz="1800" b="1" dirty="0">
-                <a:solidFill>
-                  <a:srgbClr val="102D69"/>
-                </a:solidFill>
-                <a:latin typeface="Calibri" pitchFamily="34" charset="0"/>
-                <a:ea typeface="Calibri" pitchFamily="34" charset="-122"/>
-                <a:cs typeface="Calibri" pitchFamily="34" charset="-120"/>
-              </a:rPr>
-              <a:t>Фильтр · учитель 7B→27B · мультизадачи (ROUTE)</a:t>
-            </a:r>
-            <a:endParaRPr lang="en-US" sz="1800" dirty="0"/>
-          </a:p>
-        </p:txBody>
-      </p:sp>
-      <p:sp>
-        <p:nvSpPr>
-          <p:cNvPr id="20" name="Text 18"/>
-          <p:cNvSpPr/>
-          <p:nvPr/>
-        </p:nvSpPr>
-        <p:spPr>
-          <a:xfrm>
-            <a:off x="1600200" y="5513832"/>
-            <a:ext cx="9966960" cy="457200"/>
-          </a:xfrm>
-          <a:prstGeom prst="rect">
-            <a:avLst/>
-          </a:prstGeom>
-          <a:noFill/>
-          <a:ln/>
-        </p:spPr>
-        <p:txBody>
-          <a:bodyPr wrap="square" lIns="0" tIns="0" rIns="0" bIns="0" rtlCol="0" anchor="ctr"/>
-          <a:lstStyle/>
-          <a:p>
-            <a:pPr indent="0" marL="0">
-              <a:buNone/>
-            </a:pPr>
-            <a:r>
-              <a:rPr lang="en-US" sz="1400" dirty="0">
-                <a:solidFill>
-                  <a:srgbClr val="444444"/>
-                </a:solidFill>
-                <a:latin typeface="Calibri" pitchFamily="34" charset="0"/>
-                <a:ea typeface="Calibri" pitchFamily="34" charset="-122"/>
-                <a:cs typeface="Calibri" pitchFamily="34" charset="-120"/>
-              </a:rPr>
-              <a:t>в пределах шума по EX — по одному сиду, знак не доказан</a:t>
-            </a:r>
-            <a:endParaRPr lang="en-US" sz="1400" dirty="0"/>
-          </a:p>
-        </p:txBody>
-      </p:sp>
-      <p:sp>
-        <p:nvSpPr>
-          <p:cNvPr id="21" name="Text 19"/>
-          <p:cNvSpPr/>
-          <p:nvPr/>
-        </p:nvSpPr>
-        <p:spPr>
-          <a:xfrm>
-            <a:off x="457200" y="6455664"/>
-            <a:ext cx="6400800" cy="274320"/>
-          </a:xfrm>
-          <a:prstGeom prst="rect">
-            <a:avLst/>
-          </a:prstGeom>
-          <a:noFill/>
-          <a:ln/>
-        </p:spPr>
-        <p:txBody>
-          <a:bodyPr wrap="square" lIns="0" tIns="0" rIns="0" bIns="0" rtlCol="0" anchor="ctr"/>
-          <a:lstStyle/>
-          <a:p>
-            <a:pPr indent="0" marL="0">
-              <a:buNone/>
-            </a:pPr>
-            <a:r>
-              <a:rPr lang="en-US" sz="900" dirty="0">
-                <a:solidFill>
-                  <a:srgbClr val="444444"/>
-                </a:solidFill>
-                <a:latin typeface="Calibri" pitchFamily="34" charset="0"/>
-                <a:ea typeface="Calibri" pitchFamily="34" charset="-122"/>
-                <a:cs typeface="Calibri" pitchFamily="34" charset="-120"/>
-              </a:rPr>
-              <a:t>DB2Model · ветка SFT/LoRA</a:t>
-            </a:r>
-            <a:endParaRPr lang="en-US" sz="900" dirty="0"/>
-          </a:p>
-        </p:txBody>
-      </p:sp>
-      <p:sp>
-        <p:nvSpPr>
-          <p:cNvPr id="22" name="Text 20"/>
-          <p:cNvSpPr/>
-          <p:nvPr/>
-        </p:nvSpPr>
-        <p:spPr>
-          <a:xfrm>
-            <a:off x="10881360" y="6455664"/>
-            <a:ext cx="822960" cy="274320"/>
-          </a:xfrm>
-          <a:prstGeom prst="rect">
-            <a:avLst/>
-          </a:prstGeom>
-          <a:noFill/>
-          <a:ln/>
-        </p:spPr>
-        <p:txBody>
-          <a:bodyPr wrap="square" lIns="0" tIns="0" rIns="0" bIns="0" rtlCol="0" anchor="ctr"/>
-          <a:lstStyle/>
-          <a:p>
-            <a:pPr algn="r" indent="0" marL="0">
-              <a:buNone/>
-            </a:pPr>
-            <a:r>
-              <a:rPr lang="en-US" sz="900" dirty="0">
-                <a:solidFill>
-                  <a:srgbClr val="444444"/>
-                </a:solidFill>
-                <a:latin typeface="Courier New" pitchFamily="34" charset="0"/>
-                <a:ea typeface="Courier New" pitchFamily="34" charset="-122"/>
-                <a:cs typeface="Courier New" pitchFamily="34" charset="-120"/>
-              </a:rPr>
-              <a:t>8 / 13</a:t>
+              <a:t>9 / 15</a:t>
             </a:r>
             <a:endParaRPr lang="en-US" sz="900" dirty="0"/>
           </a:p>

--- a/db2model/DB2Model_SFT_LoRA_defense.pptx
+++ b/db2model/DB2Model_SFT_LoRA_defense.pptx
@@ -19,10 +19,9 @@
     <p:sldId id="267" r:id="rId13"/>
     <p:sldId id="268" r:id="rId14"/>
     <p:sldId id="269" r:id="rId15"/>
-    <p:sldId id="270" r:id="rId16"/>
   </p:sldIdLst>
   <p:notesMasterIdLst>
-    <p:notesMasterId r:id="rId17"/>
+    <p:notesMasterId r:id="rId16"/>
   </p:notesMasterIdLst>
   <p:sldSz cx="12192000" cy="6858000"/>
   <p:notesSz cx="6858000" cy="12192000"/>
@@ -1513,94 +1512,6 @@
             <a:fld id="{F7021451-1387-4CA6-816F-3879F97B5CBC}" type="slidenum">
               <a:rPr lang="en-US"/>
               <a:t>14</a:t>
-            </a:fld>
-            <a:endParaRPr lang="en-US"/>
-          </a:p>
-        </p:txBody>
-      </p:sp>
-    </p:spTree>
-    <p:extLst>
-      <p:ext uri="{BB962C8B-B14F-4D97-AF65-F5344CB8AC3E}">
-        <p14:creationId xmlns:p14="http://schemas.microsoft.com/office/powerpoint/2010/main" val="1024086991"/>
-      </p:ext>
-    </p:extLst>
-  </p:cSld>
-  <p:clrMapOvr>
-    <a:masterClrMapping/>
-  </p:clrMapOvr>
-</p:notes>
-</file>
-
-<file path=ppt/notesSlides/notesSlide15.xml><?xml version="1.0" encoding="utf-8"?>
-<p:notes xmlns:a="http://schemas.openxmlformats.org/drawingml/2006/main" xmlns:r="http://schemas.openxmlformats.org/officeDocument/2006/relationships" xmlns:p="http://schemas.openxmlformats.org/presentationml/2006/main">
-  <p:cSld>
-    <p:spTree>
-      <p:nvGrpSpPr>
-        <p:cNvPr id="1" name=""/>
-        <p:cNvGrpSpPr/>
-        <p:nvPr/>
-      </p:nvGrpSpPr>
-      <p:grpSpPr>
-        <a:xfrm>
-          <a:off x="0" y="0"/>
-          <a:ext cx="0" cy="0"/>
-          <a:chOff x="0" y="0"/>
-          <a:chExt cx="0" cy="0"/>
-        </a:xfrm>
-      </p:grpSpPr>
-      <p:sp>
-        <p:nvSpPr>
-          <p:cNvPr id="2" name="Slide Image Placeholder 1"/>
-          <p:cNvSpPr>
-            <a:spLocks noGrp="1" noRot="1" noChangeAspect="1"/>
-          </p:cNvSpPr>
-          <p:nvPr>
-            <p:ph type="sldImg"/>
-          </p:nvPr>
-        </p:nvSpPr>
-        <p:spPr/>
-      </p:sp>
-      <p:sp>
-        <p:nvSpPr>
-          <p:cNvPr id="3" name="Notes Placeholder 2"/>
-          <p:cNvSpPr>
-            <a:spLocks noGrp="1"/>
-          </p:cNvSpPr>
-          <p:nvPr>
-            <p:ph type="body" idx="1"/>
-          </p:nvPr>
-        </p:nvSpPr>
-        <p:spPr/>
-        <p:txBody>
-          <a:bodyPr/>
-          <a:lstStyle/>
-          <a:p>
-            <a:r>
-              <a:rPr lang="en-US" dirty="0"/>
-              <a:t/>
-            </a:r>
-            <a:endParaRPr lang="en-US" dirty="0"/>
-          </a:p>
-        </p:txBody>
-      </p:sp>
-      <p:sp>
-        <p:nvSpPr>
-          <p:cNvPr id="4" name="Slide Number Placeholder 3"/>
-          <p:cNvSpPr>
-            <a:spLocks noGrp="1"/>
-          </p:cNvSpPr>
-          <p:nvPr>
-            <p:ph type="sldNum" sz="quarter" idx="10"/>
-          </p:nvPr>
-        </p:nvSpPr>
-        <p:spPr/>
-        <p:txBody>
-          <a:bodyPr/>
-          <a:lstStyle/>
-          <a:p>
-            <a:fld id="{F7021451-1387-4CA6-816F-3879F97B5CBC}" type="slidenum">
-              <a:rPr lang="en-US"/>
-              <a:t>15</a:t>
             </a:fld>
             <a:endParaRPr lang="en-US"/>
           </a:p>
@@ -3351,7 +3262,7 @@
                 <a:ea typeface="Courier New" pitchFamily="34" charset="-122"/>
                 <a:cs typeface="Courier New" pitchFamily="34" charset="-120"/>
               </a:rPr>
-              <a:t>10 / 15</a:t>
+              <a:t>10 / 14</a:t>
             </a:r>
             <a:endParaRPr lang="en-US" sz="900" dirty="0"/>
           </a:p>
@@ -4183,7 +4094,7 @@
                 <a:ea typeface="Calibri" pitchFamily="34" charset="-122"/>
                 <a:cs typeface="Calibri" pitchFamily="34" charset="-120"/>
               </a:rPr>
-              <a:t>по одному сиду, разница внутри шума — знак не доказан</a:t>
+              <a:t>разница внутри шума — знак не доказан</a:t>
             </a:r>
             <a:endParaRPr lang="en-US" sz="1300" dirty="0"/>
           </a:p>
@@ -4261,7 +4172,7 @@
                 <a:ea typeface="Courier New" pitchFamily="34" charset="-122"/>
                 <a:cs typeface="Courier New" pitchFamily="34" charset="-120"/>
               </a:rPr>
-              <a:t>11 / 15</a:t>
+              <a:t>11 / 14</a:t>
             </a:r>
             <a:endParaRPr lang="en-US" sz="900" dirty="0"/>
           </a:p>
@@ -4797,7 +4708,7 @@
                 <a:ea typeface="Courier New" pitchFamily="34" charset="-122"/>
                 <a:cs typeface="Courier New" pitchFamily="34" charset="-120"/>
               </a:rPr>
-              <a:t>12 / 15</a:t>
+              <a:t>12 / 14</a:t>
             </a:r>
             <a:endParaRPr lang="en-US" sz="900" dirty="0"/>
           </a:p>
@@ -4961,7 +4872,7 @@
                 <a:ea typeface="Calibri" pitchFamily="34" charset="-122"/>
                 <a:cs typeface="Calibri" pitchFamily="34" charset="-120"/>
               </a:rPr>
-              <a:t>Один split (91 вопрос), один оценщик; light-RAG — результаты напарницы</a:t>
+              <a:t>Один split (91 вопрос), один оценщик и парсер для всех армов</a:t>
             </a:r>
             <a:endParaRPr lang="en-US" sz="1500" dirty="0"/>
           </a:p>
@@ -4982,7 +4893,7 @@
           </p:nvPr>
         </p:nvGraphicFramePr>
         <p:xfrm>
-          <a:off x="457200" y="1828800"/>
+          <a:off x="457200" y="1965960"/>
           <a:ext cx="11247120" cy="914400"/>
         </p:xfrm>
         <a:graphic>
@@ -4997,7 +4908,7 @@
                 <a:gridCol w="2286000"/>
                 <a:gridCol w="1554480"/>
               </a:tblGrid>
-              <a:tr h="384048">
+              <a:tr h="420624">
                 <a:tc>
                   <a:txBody>
                     <a:bodyPr/>
@@ -5355,7 +5266,7 @@
                           <a:ea typeface="Calibri" pitchFamily="34" charset="-122"/>
                           <a:cs typeface="Calibri" pitchFamily="34" charset="-120"/>
                         </a:rPr>
-                        <a:t>prompt-ток.¹</a:t>
+                        <a:t>prompt-ток.</a:t>
                       </a:r>
                       <a:endParaRPr lang="en-US" sz="1200" dirty="0">
                         <a:latin typeface="Calibri" charset="0"/>
@@ -5407,7 +5318,7 @@
                   </a:tcPr>
                 </a:tc>
               </a:tr>
-              <a:tr h="384048">
+              <a:tr h="420624">
                 <a:tc>
                   <a:txBody>
                     <a:bodyPr/>
@@ -5817,7 +5728,7 @@
                   </a:tcPr>
                 </a:tc>
               </a:tr>
-              <a:tr h="384048">
+              <a:tr h="420624">
                 <a:tc>
                   <a:txBody>
                     <a:bodyPr/>
@@ -6227,7 +6138,7 @@
                   </a:tcPr>
                 </a:tc>
               </a:tr>
-              <a:tr h="384048">
+              <a:tr h="420624">
                 <a:tc>
                   <a:txBody>
                     <a:bodyPr/>
@@ -6637,7 +6548,7 @@
                   </a:tcPr>
                 </a:tc>
               </a:tr>
-              <a:tr h="384048">
+              <a:tr h="420624">
                 <a:tc>
                   <a:txBody>
                     <a:bodyPr/>
@@ -6723,7 +6634,7 @@
                           <a:ea typeface="Calibri" pitchFamily="34" charset="-122"/>
                           <a:cs typeface="Calibri" pitchFamily="34" charset="-120"/>
                         </a:rPr>
-                        <a:t>baseline (её)</a:t>
+                        <a:t>baseline</a:t>
                       </a:r>
                       <a:endParaRPr lang="en-US" sz="1200" dirty="0">
                         <a:latin typeface="Calibri" charset="0"/>
@@ -7047,7 +6958,7 @@
                   </a:tcPr>
                 </a:tc>
               </a:tr>
-              <a:tr h="384048">
+              <a:tr h="420624">
                 <a:tc>
                   <a:txBody>
                     <a:bodyPr/>
@@ -7457,7 +7368,7 @@
                   </a:tcPr>
                 </a:tc>
               </a:tr>
-              <a:tr h="384048">
+              <a:tr h="420624">
                 <a:tc>
                   <a:txBody>
                     <a:bodyPr/>
@@ -7867,7 +7778,7 @@
                   </a:tcPr>
                 </a:tc>
               </a:tr>
-              <a:tr h="384048">
+              <a:tr h="420624">
                 <a:tc>
                   <a:txBody>
                     <a:bodyPr/>
@@ -8277,7 +8188,7 @@
                   </a:tcPr>
                 </a:tc>
               </a:tr>
-              <a:tr h="384048">
+              <a:tr h="420624">
                 <a:tc>
                   <a:txBody>
                     <a:bodyPr/>
@@ -8699,8 +8610,8 @@
         </p:nvSpPr>
         <p:spPr>
           <a:xfrm>
-            <a:off x="457200" y="6035040"/>
-            <a:ext cx="11247120" cy="457200"/>
+            <a:off x="457200" y="6455664"/>
+            <a:ext cx="6400800" cy="274320"/>
           </a:xfrm>
           <a:prstGeom prst="rect">
             <a:avLst/>
@@ -8713,13 +8624,10 @@
           <a:lstStyle/>
           <a:p>
             <a:pPr indent="0" marL="0">
-              <a:lnSpc>
-                <a:spcPts val="1300"/>
-              </a:lnSpc>
-              <a:buNone/>
-            </a:pPr>
-            <a:r>
-              <a:rPr lang="en-US" sz="1050" dirty="0">
+              <a:buNone/>
+            </a:pPr>
+            <a:r>
+              <a:rPr lang="en-US" sz="900" dirty="0">
                 <a:solidFill>
                   <a:srgbClr val="444444"/>
                 </a:solidFill>
@@ -8727,54 +8635,15 @@
                 <a:ea typeface="Calibri" pitchFamily="34" charset="-122"/>
                 <a:cs typeface="Calibri" pitchFamily="34" charset="-120"/>
               </a:rPr>
-              <a:t>¹ Наши строки — точный замер токенайзером Qwen (measure_tokens.py, среднее по 91 вопросу). Строки light-RAG — замер напарницы, пока другим методом.</a:t>
-            </a:r>
-            <a:endParaRPr lang="en-US" sz="1050" dirty="0"/>
+              <a:t>DB2Model · ветка SFT/LoRA</a:t>
+            </a:r>
+            <a:endParaRPr lang="en-US" sz="900" dirty="0"/>
           </a:p>
         </p:txBody>
       </p:sp>
       <p:sp>
         <p:nvSpPr>
           <p:cNvPr id="8" name="Text 5"/>
-          <p:cNvSpPr/>
-          <p:nvPr/>
-        </p:nvSpPr>
-        <p:spPr>
-          <a:xfrm>
-            <a:off x="457200" y="6455664"/>
-            <a:ext cx="6400800" cy="274320"/>
-          </a:xfrm>
-          <a:prstGeom prst="rect">
-            <a:avLst/>
-          </a:prstGeom>
-          <a:noFill/>
-          <a:ln/>
-        </p:spPr>
-        <p:txBody>
-          <a:bodyPr wrap="square" lIns="0" tIns="0" rIns="0" bIns="0" rtlCol="0" anchor="ctr"/>
-          <a:lstStyle/>
-          <a:p>
-            <a:pPr indent="0" marL="0">
-              <a:buNone/>
-            </a:pPr>
-            <a:r>
-              <a:rPr lang="en-US" sz="900" dirty="0">
-                <a:solidFill>
-                  <a:srgbClr val="444444"/>
-                </a:solidFill>
-                <a:latin typeface="Calibri" pitchFamily="34" charset="0"/>
-                <a:ea typeface="Calibri" pitchFamily="34" charset="-122"/>
-                <a:cs typeface="Calibri" pitchFamily="34" charset="-120"/>
-              </a:rPr>
-              <a:t>DB2Model · ветка SFT/LoRA</a:t>
-            </a:r>
-            <a:endParaRPr lang="en-US" sz="900" dirty="0"/>
-          </a:p>
-        </p:txBody>
-      </p:sp>
-      <p:sp>
-        <p:nvSpPr>
-          <p:cNvPr id="9" name="Text 6"/>
           <p:cNvSpPr/>
           <p:nvPr/>
         </p:nvSpPr>
@@ -8805,7 +8674,7 @@
                 <a:ea typeface="Courier New" pitchFamily="34" charset="-122"/>
                 <a:cs typeface="Courier New" pitchFamily="34" charset="-120"/>
               </a:rPr>
-              <a:t>13 / 15</a:t>
+              <a:t>13 / 14</a:t>
             </a:r>
             <a:endParaRPr lang="en-US" sz="900" dirty="0"/>
           </a:p>
@@ -8822,427 +8691,6 @@
 <file path=ppt/slides/slide14.xml><?xml version="1.0" encoding="utf-8"?>
 <p:sld xmlns:a="http://schemas.openxmlformats.org/drawingml/2006/main" xmlns:r="http://schemas.openxmlformats.org/officeDocument/2006/relationships" xmlns:p="http://schemas.openxmlformats.org/presentationml/2006/main">
   <p:cSld name="Slide 14">
-    <p:bg>
-      <p:bgPr>
-        <a:solidFill>
-          <a:srgbClr val="FFFFFF"/>
-        </a:solidFill>
-      </p:bgPr>
-    </p:bg>
-    <p:spTree>
-      <p:nvGrpSpPr>
-        <p:cNvPr id="1" name=""/>
-        <p:cNvGrpSpPr/>
-        <p:nvPr/>
-      </p:nvGrpSpPr>
-      <p:grpSpPr>
-        <a:xfrm>
-          <a:off x="0" y="0"/>
-          <a:ext cx="0" cy="0"/>
-          <a:chOff x="0" y="0"/>
-          <a:chExt cx="0" cy="0"/>
-        </a:xfrm>
-      </p:grpSpPr>
-      <p:sp>
-        <p:nvSpPr>
-          <p:cNvPr id="2" name="Shape 0"/>
-          <p:cNvSpPr/>
-          <p:nvPr/>
-        </p:nvSpPr>
-        <p:spPr>
-          <a:xfrm rot="840000">
-            <a:off x="10561320" y="109728"/>
-            <a:ext cx="822960" cy="822960"/>
-          </a:xfrm>
-          <a:prstGeom prst="roundRect">
-            <a:avLst>
-              <a:gd name="adj" fmla="val 13333"/>
-            </a:avLst>
-          </a:prstGeom>
-          <a:solidFill>
-            <a:srgbClr val="FAB900"/>
-          </a:solidFill>
-          <a:ln w="38100">
-            <a:solidFill>
-              <a:srgbClr val="102D69"/>
-            </a:solidFill>
-            <a:prstDash val="solid"/>
-          </a:ln>
-        </p:spPr>
-      </p:sp>
-      <p:sp>
-        <p:nvSpPr>
-          <p:cNvPr id="3" name="Shape 1"/>
-          <p:cNvSpPr/>
-          <p:nvPr/>
-        </p:nvSpPr>
-        <p:spPr>
-          <a:xfrm rot="-660000">
-            <a:off x="11109960" y="566928"/>
-            <a:ext cx="822960" cy="822960"/>
-          </a:xfrm>
-          <a:prstGeom prst="roundRect">
-            <a:avLst>
-              <a:gd name="adj" fmla="val 13333"/>
-            </a:avLst>
-          </a:prstGeom>
-          <a:solidFill>
-            <a:srgbClr val="E61E3C"/>
-          </a:solidFill>
-          <a:ln w="38100">
-            <a:solidFill>
-              <a:srgbClr val="102D69"/>
-            </a:solidFill>
-            <a:prstDash val="solid"/>
-          </a:ln>
-        </p:spPr>
-      </p:sp>
-      <p:sp>
-        <p:nvSpPr>
-          <p:cNvPr id="4" name="Text 2"/>
-          <p:cNvSpPr/>
-          <p:nvPr/>
-        </p:nvSpPr>
-        <p:spPr>
-          <a:xfrm>
-            <a:off x="457200" y="384048"/>
-            <a:ext cx="9875520" cy="685800"/>
-          </a:xfrm>
-          <a:prstGeom prst="rect">
-            <a:avLst/>
-          </a:prstGeom>
-          <a:noFill/>
-          <a:ln/>
-        </p:spPr>
-        <p:txBody>
-          <a:bodyPr wrap="square" lIns="0" tIns="0" rIns="0" bIns="0" rtlCol="0" anchor="ctr"/>
-          <a:lstStyle/>
-          <a:p>
-            <a:pPr indent="0" marL="0">
-              <a:buNone/>
-            </a:pPr>
-            <a:r>
-              <a:rPr lang="en-US" sz="3200" b="1" dirty="0">
-                <a:solidFill>
-                  <a:srgbClr val="102D69"/>
-                </a:solidFill>
-                <a:latin typeface="Calibri" pitchFamily="34" charset="0"/>
-                <a:ea typeface="Calibri" pitchFamily="34" charset="-122"/>
-                <a:cs typeface="Calibri" pitchFamily="34" charset="-120"/>
-              </a:rPr>
-              <a:t>Ограничения и оговорки</a:t>
-            </a:r>
-            <a:endParaRPr lang="en-US" sz="3200" dirty="0"/>
-          </a:p>
-        </p:txBody>
-      </p:sp>
-      <p:sp>
-        <p:nvSpPr>
-          <p:cNvPr id="5" name="Text 3"/>
-          <p:cNvSpPr/>
-          <p:nvPr/>
-        </p:nvSpPr>
-        <p:spPr>
-          <a:xfrm>
-            <a:off x="457200" y="1097280"/>
-            <a:ext cx="9966960" cy="365760"/>
-          </a:xfrm>
-          <a:prstGeom prst="rect">
-            <a:avLst/>
-          </a:prstGeom>
-          <a:noFill/>
-          <a:ln/>
-        </p:spPr>
-        <p:txBody>
-          <a:bodyPr wrap="square" lIns="0" tIns="0" rIns="0" bIns="0" rtlCol="0" anchor="ctr"/>
-          <a:lstStyle/>
-          <a:p>
-            <a:pPr indent="0" marL="0">
-              <a:buNone/>
-            </a:pPr>
-            <a:r>
-              <a:rPr lang="en-US" sz="1500" dirty="0">
-                <a:solidFill>
-                  <a:srgbClr val="444444"/>
-                </a:solidFill>
-                <a:latin typeface="Calibri" pitchFamily="34" charset="0"/>
-                <a:ea typeface="Calibri" pitchFamily="34" charset="-122"/>
-                <a:cs typeface="Calibri" pitchFamily="34" charset="-120"/>
-              </a:rPr>
-              <a:t>Что нельзя утверждать — важно для честной защиты</a:t>
-            </a:r>
-            <a:endParaRPr lang="en-US" sz="1500" dirty="0"/>
-          </a:p>
-        </p:txBody>
-      </p:sp>
-      <p:sp>
-        <p:nvSpPr>
-          <p:cNvPr id="6" name="Text 4"/>
-          <p:cNvSpPr/>
-          <p:nvPr/>
-        </p:nvSpPr>
-        <p:spPr>
-          <a:xfrm>
-            <a:off x="457200" y="2011680"/>
-            <a:ext cx="11247120" cy="4023360"/>
-          </a:xfrm>
-          <a:prstGeom prst="rect">
-            <a:avLst/>
-          </a:prstGeom>
-          <a:noFill/>
-          <a:ln/>
-        </p:spPr>
-        <p:txBody>
-          <a:bodyPr wrap="square" rtlCol="0" anchor="t"/>
-          <a:lstStyle/>
-          <a:p>
-            <a:pPr indent="0" marL="0">
-              <a:lnSpc>
-                <a:spcPts val="2200"/>
-              </a:lnSpc>
-              <a:buNone/>
-            </a:pPr>
-            <a:r>
-              <a:rPr lang="en-US" sz="1600" b="1" dirty="0">
-                <a:solidFill>
-                  <a:srgbClr val="102D69"/>
-                </a:solidFill>
-                <a:latin typeface="Calibri" pitchFamily="34" charset="0"/>
-                <a:ea typeface="Calibri" pitchFamily="34" charset="-122"/>
-                <a:cs typeface="Calibri" pitchFamily="34" charset="-120"/>
-              </a:rPr>
-              <a:t>Учитель — Qwen3.6-27B, не GPT-4-класс.</a:t>
-            </a:r>
-            <a:pPr indent="0" marL="0">
-              <a:lnSpc>
-                <a:spcPts val="2200"/>
-              </a:lnSpc>
-              <a:spcAft>
-                <a:spcPts val="1100"/>
-              </a:spcAft>
-              <a:buNone/>
-            </a:pPr>
-            <a:r>
-              <a:rPr lang="en-US" sz="1600" dirty="0">
-                <a:solidFill>
-                  <a:srgbClr val="444444"/>
-                </a:solidFill>
-                <a:latin typeface="Calibri" pitchFamily="34" charset="0"/>
-                <a:ea typeface="Calibri" pitchFamily="34" charset="-122"/>
-                <a:cs typeface="Calibri" pitchFamily="34" charset="-120"/>
-              </a:rPr>
-              <a:t> Внешний API под разметку не выдали; честная формулировка вклада — перенос схемы в веса + очистка через исполнение.</a:t>
-            </a:r>
-            <a:endParaRPr lang="en-US" sz="1600" dirty="0"/>
-          </a:p>
-          <a:p>
-            <a:pPr indent="0" marL="0">
-              <a:lnSpc>
-                <a:spcPts val="2200"/>
-              </a:lnSpc>
-              <a:buNone/>
-            </a:pPr>
-            <a:r>
-              <a:rPr lang="en-US" sz="1600" b="1" dirty="0">
-                <a:solidFill>
-                  <a:srgbClr val="102D69"/>
-                </a:solidFill>
-                <a:latin typeface="Calibri" pitchFamily="34" charset="0"/>
-                <a:ea typeface="Calibri" pitchFamily="34" charset="-122"/>
-                <a:cs typeface="Calibri" pitchFamily="34" charset="-120"/>
-              </a:rPr>
-              <a:t>Один сид врёт.</a:t>
-            </a:r>
-            <a:pPr indent="0" marL="0">
-              <a:lnSpc>
-                <a:spcPts val="2200"/>
-              </a:lnSpc>
-              <a:spcAft>
-                <a:spcPts val="1100"/>
-              </a:spcAft>
-              <a:buNone/>
-            </a:pPr>
-            <a:r>
-              <a:rPr lang="en-US" sz="1600" dirty="0">
-                <a:solidFill>
-                  <a:srgbClr val="444444"/>
-                </a:solidFill>
-                <a:latin typeface="Calibri" pitchFamily="34" charset="0"/>
-                <a:ea typeface="Calibri" pitchFamily="34" charset="-122"/>
-                <a:cs typeface="Calibri" pitchFamily="34" charset="-120"/>
-              </a:rPr>
-              <a:t> На 91 вопросе одиночный прогон смещён в обе стороны; доверяем только средним ± σ по 3 сидам.</a:t>
-            </a:r>
-            <a:endParaRPr lang="en-US" sz="1600" dirty="0"/>
-          </a:p>
-          <a:p>
-            <a:pPr indent="0" marL="0">
-              <a:lnSpc>
-                <a:spcPts val="2200"/>
-              </a:lnSpc>
-              <a:buNone/>
-            </a:pPr>
-            <a:r>
-              <a:rPr lang="en-US" sz="1600" b="1" dirty="0">
-                <a:solidFill>
-                  <a:srgbClr val="102D69"/>
-                </a:solidFill>
-                <a:latin typeface="Calibri" pitchFamily="34" charset="0"/>
-                <a:ea typeface="Calibri" pitchFamily="34" charset="-122"/>
-                <a:cs typeface="Calibri" pitchFamily="34" charset="-120"/>
-              </a:rPr>
-              <a:t>Июльские числа не воспроизвелись.</a:t>
-            </a:r>
-            <a:pPr indent="0" marL="0">
-              <a:lnSpc>
-                <a:spcPts val="2200"/>
-              </a:lnSpc>
-              <a:spcAft>
-                <a:spcPts val="1100"/>
-              </a:spcAft>
-              <a:buNone/>
-            </a:pPr>
-            <a:r>
-              <a:rPr lang="en-US" sz="1600" dirty="0">
-                <a:solidFill>
-                  <a:srgbClr val="444444"/>
-                </a:solidFill>
-                <a:latin typeface="Calibri" pitchFamily="34" charset="0"/>
-                <a:ea typeface="Calibri" pitchFamily="34" charset="-122"/>
-                <a:cs typeface="Calibri" pitchFamily="34" charset="-120"/>
-              </a:rPr>
-              <a:t> Канон — пересчёт 10.08 (единственные воспроизводимые из репозитория); тезис «+9.5 п.п. на обоих размерах» снят как артефакт замера.</a:t>
-            </a:r>
-            <a:endParaRPr lang="en-US" sz="1600" dirty="0"/>
-          </a:p>
-          <a:p>
-            <a:pPr indent="0" marL="0">
-              <a:lnSpc>
-                <a:spcPts val="2200"/>
-              </a:lnSpc>
-              <a:buNone/>
-            </a:pPr>
-            <a:r>
-              <a:rPr lang="en-US" sz="1600" b="1" dirty="0">
-                <a:solidFill>
-                  <a:srgbClr val="102D69"/>
-                </a:solidFill>
-                <a:latin typeface="Calibri" pitchFamily="34" charset="0"/>
-                <a:ea typeface="Calibri" pitchFamily="34" charset="-122"/>
-                <a:cs typeface="Calibri" pitchFamily="34" charset="-120"/>
-              </a:rPr>
-              <a:t>Токены light-RAG — пока другим методом.</a:t>
-            </a:r>
-            <a:pPr indent="0" marL="0">
-              <a:lnSpc>
-                <a:spcPts val="2200"/>
-              </a:lnSpc>
-              <a:buNone/>
-            </a:pPr>
-            <a:r>
-              <a:rPr lang="en-US" sz="1600" dirty="0">
-                <a:solidFill>
-                  <a:srgbClr val="444444"/>
-                </a:solidFill>
-                <a:latin typeface="Calibri" pitchFamily="34" charset="0"/>
-                <a:ea typeface="Calibri" pitchFamily="34" charset="-122"/>
-                <a:cs typeface="Calibri" pitchFamily="34" charset="-120"/>
-              </a:rPr>
-              <a:t> Наши строки замерены точно; её строки сведём тем же способом (тот же токенайзер, тот же вызов).</a:t>
-            </a:r>
-            <a:endParaRPr lang="en-US" sz="1600" dirty="0"/>
-          </a:p>
-        </p:txBody>
-      </p:sp>
-      <p:sp>
-        <p:nvSpPr>
-          <p:cNvPr id="7" name="Text 5"/>
-          <p:cNvSpPr/>
-          <p:nvPr/>
-        </p:nvSpPr>
-        <p:spPr>
-          <a:xfrm>
-            <a:off x="457200" y="6455664"/>
-            <a:ext cx="6400800" cy="274320"/>
-          </a:xfrm>
-          <a:prstGeom prst="rect">
-            <a:avLst/>
-          </a:prstGeom>
-          <a:noFill/>
-          <a:ln/>
-        </p:spPr>
-        <p:txBody>
-          <a:bodyPr wrap="square" lIns="0" tIns="0" rIns="0" bIns="0" rtlCol="0" anchor="ctr"/>
-          <a:lstStyle/>
-          <a:p>
-            <a:pPr indent="0" marL="0">
-              <a:buNone/>
-            </a:pPr>
-            <a:r>
-              <a:rPr lang="en-US" sz="900" dirty="0">
-                <a:solidFill>
-                  <a:srgbClr val="444444"/>
-                </a:solidFill>
-                <a:latin typeface="Calibri" pitchFamily="34" charset="0"/>
-                <a:ea typeface="Calibri" pitchFamily="34" charset="-122"/>
-                <a:cs typeface="Calibri" pitchFamily="34" charset="-120"/>
-              </a:rPr>
-              <a:t>DB2Model · ветка SFT/LoRA</a:t>
-            </a:r>
-            <a:endParaRPr lang="en-US" sz="900" dirty="0"/>
-          </a:p>
-        </p:txBody>
-      </p:sp>
-      <p:sp>
-        <p:nvSpPr>
-          <p:cNvPr id="8" name="Text 6"/>
-          <p:cNvSpPr/>
-          <p:nvPr/>
-        </p:nvSpPr>
-        <p:spPr>
-          <a:xfrm>
-            <a:off x="10881360" y="6455664"/>
-            <a:ext cx="822960" cy="274320"/>
-          </a:xfrm>
-          <a:prstGeom prst="rect">
-            <a:avLst/>
-          </a:prstGeom>
-          <a:noFill/>
-          <a:ln/>
-        </p:spPr>
-        <p:txBody>
-          <a:bodyPr wrap="square" lIns="0" tIns="0" rIns="0" bIns="0" rtlCol="0" anchor="ctr"/>
-          <a:lstStyle/>
-          <a:p>
-            <a:pPr algn="r" indent="0" marL="0">
-              <a:buNone/>
-            </a:pPr>
-            <a:r>
-              <a:rPr lang="en-US" sz="900" dirty="0">
-                <a:solidFill>
-                  <a:srgbClr val="444444"/>
-                </a:solidFill>
-                <a:latin typeface="Courier New" pitchFamily="34" charset="0"/>
-                <a:ea typeface="Courier New" pitchFamily="34" charset="-122"/>
-                <a:cs typeface="Courier New" pitchFamily="34" charset="-120"/>
-              </a:rPr>
-              <a:t>14 / 15</a:t>
-            </a:r>
-            <a:endParaRPr lang="en-US" sz="900" dirty="0"/>
-          </a:p>
-        </p:txBody>
-      </p:sp>
-    </p:spTree>
-  </p:cSld>
-  <p:clrMapOvr>
-    <a:masterClrMapping/>
-  </p:clrMapOvr>
-</p:sld>
-</file>
-
-<file path=ppt/slides/slide15.xml><?xml version="1.0" encoding="utf-8"?>
-<p:sld xmlns:a="http://schemas.openxmlformats.org/drawingml/2006/main" xmlns:r="http://schemas.openxmlformats.org/officeDocument/2006/relationships" xmlns:p="http://schemas.openxmlformats.org/presentationml/2006/main">
-  <p:cSld name="Slide 15">
     <p:bg>
       <p:bgPr>
         <a:solidFill>
@@ -9816,7 +9264,7 @@
                 <a:ea typeface="Courier New" pitchFamily="34" charset="-122"/>
                 <a:cs typeface="Courier New" pitchFamily="34" charset="-120"/>
               </a:rPr>
-              <a:t>15 / 15</a:t>
+              <a:t>14 / 14</a:t>
             </a:r>
             <a:endParaRPr lang="en-US" sz="900" dirty="0"/>
           </a:p>
@@ -10268,7 +9716,7 @@
                 <a:ea typeface="Courier New" pitchFamily="34" charset="-122"/>
                 <a:cs typeface="Courier New" pitchFamily="34" charset="-120"/>
               </a:rPr>
-              <a:t>2 / 15</a:t>
+              <a:t>2 / 14</a:t>
             </a:r>
             <a:endParaRPr lang="en-US" sz="900" dirty="0"/>
           </a:p>
@@ -10884,7 +10332,7 @@
                 <a:ea typeface="Courier New" pitchFamily="34" charset="-122"/>
                 <a:cs typeface="Courier New" pitchFamily="34" charset="-120"/>
               </a:rPr>
-              <a:t>3 / 15</a:t>
+              <a:t>3 / 14</a:t>
             </a:r>
             <a:endParaRPr lang="en-US" sz="900" dirty="0"/>
           </a:p>
@@ -12156,7 +11604,7 @@
                 <a:ea typeface="Courier New" pitchFamily="34" charset="-122"/>
                 <a:cs typeface="Courier New" pitchFamily="34" charset="-120"/>
               </a:rPr>
-              <a:t>4 / 15</a:t>
+              <a:t>4 / 14</a:t>
             </a:r>
             <a:endParaRPr lang="en-US" sz="900" dirty="0"/>
           </a:p>
@@ -12822,7 +12270,7 @@
                 <a:ea typeface="Courier New" pitchFamily="34" charset="-122"/>
                 <a:cs typeface="Courier New" pitchFamily="34" charset="-120"/>
               </a:rPr>
-              <a:t>5 / 15</a:t>
+              <a:t>5 / 14</a:t>
             </a:r>
             <a:endParaRPr lang="en-US" sz="900" dirty="0"/>
           </a:p>
@@ -13571,7 +13019,7 @@
                 <a:ea typeface="Courier New" pitchFamily="34" charset="-122"/>
                 <a:cs typeface="Courier New" pitchFamily="34" charset="-120"/>
               </a:rPr>
-              <a:t>6 / 15</a:t>
+              <a:t>6 / 14</a:t>
             </a:r>
             <a:endParaRPr lang="en-US" sz="900" dirty="0"/>
           </a:p>
@@ -14280,7 +13728,7 @@
                 <a:ea typeface="Courier New" pitchFamily="34" charset="-122"/>
                 <a:cs typeface="Courier New" pitchFamily="34" charset="-120"/>
               </a:rPr>
-              <a:t>7 / 15</a:t>
+              <a:t>7 / 14</a:t>
             </a:r>
             <a:endParaRPr lang="en-US" sz="900" dirty="0"/>
           </a:p>
@@ -14884,7 +14332,7 @@
                 <a:ea typeface="Courier New" pitchFamily="34" charset="-122"/>
                 <a:cs typeface="Courier New" pitchFamily="34" charset="-120"/>
               </a:rPr>
-              <a:t>8 / 15</a:t>
+              <a:t>8 / 14</a:t>
             </a:r>
             <a:endParaRPr lang="en-US" sz="900" dirty="0"/>
           </a:p>
@@ -15329,7 +14777,7 @@
                 <a:ea typeface="Courier New" pitchFamily="34" charset="-122"/>
                 <a:cs typeface="Courier New" pitchFamily="34" charset="-120"/>
               </a:rPr>
-              <a:t>9 / 15</a:t>
+              <a:t>9 / 14</a:t>
             </a:r>
             <a:endParaRPr lang="en-US" sz="900" dirty="0"/>
           </a:p>

--- a/db2model/DB2Model_SFT_LoRA_defense.pptx
+++ b/db2model/DB2Model_SFT_LoRA_defense.pptx
@@ -542,7 +542,7 @@
                     </a:solidFill>
                     <a:latin typeface="Calibri"/>
                   </a:rPr>
-                  <a:t>размер обучающего набора (пар)</a:t>
+                  <a:t>обучающих пар</a:t>
                 </a:r>
               </a:p>
             </c:rich>
@@ -2217,7 +2217,7 @@
         </p:nvSpPr>
         <p:spPr>
           <a:xfrm>
-            <a:off x="640080" y="1051560"/>
+            <a:off x="640080" y="1097280"/>
             <a:ext cx="10058400" cy="365760"/>
           </a:xfrm>
           <a:prstGeom prst="rect">
@@ -2234,17 +2234,17 @@
               <a:buNone/>
             </a:pPr>
             <a:r>
-              <a:rPr lang="en-US" sz="1400" b="1" dirty="0">
+              <a:rPr lang="en-US" sz="1500" dirty="0">
                 <a:solidFill>
                   <a:srgbClr val="D0E4FF"/>
                 </a:solidFill>
-                <a:latin typeface="Courier New" pitchFamily="34" charset="0"/>
-                <a:ea typeface="Courier New" pitchFamily="34" charset="-122"/>
-                <a:cs typeface="Courier New" pitchFamily="34" charset="-120"/>
+                <a:latin typeface="Calibri" pitchFamily="34" charset="0"/>
+                <a:ea typeface="Calibri" pitchFamily="34" charset="-122"/>
+                <a:cs typeface="Calibri" pitchFamily="34" charset="-120"/>
               </a:rPr>
-              <a:t>Л Е Т Н Я Я   П Р А К Т И К А</a:t>
+              <a:t>Летняя практика · DeepPavlov / МФТИ</a:t>
             </a:r>
-            <a:endParaRPr lang="en-US" sz="1400" dirty="0"/>
+            <a:endParaRPr lang="en-US" sz="1500" dirty="0"/>
           </a:p>
         </p:txBody>
       </p:sp>
@@ -2256,8 +2256,8 @@
         </p:nvSpPr>
         <p:spPr>
           <a:xfrm>
-            <a:off x="640080" y="1600200"/>
-            <a:ext cx="10972800" cy="2011680"/>
+            <a:off x="640080" y="1828800"/>
+            <a:ext cx="10972800" cy="1188720"/>
           </a:xfrm>
           <a:prstGeom prst="rect">
             <a:avLst/>
@@ -2270,13 +2270,10 @@
           <a:lstStyle/>
           <a:p>
             <a:pPr indent="0" marL="0">
-              <a:lnSpc>
-                <a:spcPts val="5600"/>
-              </a:lnSpc>
               <a:buNone/>
             </a:pPr>
             <a:r>
-              <a:rPr lang="en-US" sz="5000" b="1" dirty="0">
+              <a:rPr lang="en-US" sz="4400" b="1" dirty="0">
                 <a:solidFill>
                   <a:srgbClr val="FFFFFF"/>
                 </a:solidFill>
@@ -2284,29 +2281,9 @@
                 <a:ea typeface="Calibri" pitchFamily="34" charset="-122"/>
                 <a:cs typeface="Calibri" pitchFamily="34" charset="-120"/>
               </a:rPr>
-              <a:t>DB2Model: знание о базе —</a:t>
+              <a:t>Знание о базе — в весах модели</a:t>
             </a:r>
-            <a:endParaRPr lang="en-US" sz="5000" dirty="0"/>
-          </a:p>
-          <a:p>
-            <a:pPr indent="0" marL="0">
-              <a:lnSpc>
-                <a:spcPts val="5600"/>
-              </a:lnSpc>
-              <a:buNone/>
-            </a:pPr>
-            <a:r>
-              <a:rPr lang="en-US" sz="5000" b="1" dirty="0">
-                <a:solidFill>
-                  <a:srgbClr val="FFFFFF"/>
-                </a:solidFill>
-                <a:latin typeface="Calibri" pitchFamily="34" charset="0"/>
-                <a:ea typeface="Calibri" pitchFamily="34" charset="-122"/>
-                <a:cs typeface="Calibri" pitchFamily="34" charset="-120"/>
-              </a:rPr>
-              <a:t>в весах модели</a:t>
-            </a:r>
-            <a:endParaRPr lang="en-US" sz="5000" dirty="0"/>
+            <a:endParaRPr lang="en-US" sz="4400" dirty="0"/>
           </a:p>
         </p:txBody>
       </p:sp>
@@ -2318,8 +2295,8 @@
         </p:nvSpPr>
         <p:spPr>
           <a:xfrm>
-            <a:off x="640080" y="3977640"/>
-            <a:ext cx="10515600" cy="822960"/>
+            <a:off x="640080" y="3200400"/>
+            <a:ext cx="10515600" cy="914400"/>
           </a:xfrm>
           <a:prstGeom prst="rect">
             <a:avLst/>
@@ -2346,7 +2323,7 @@
                 <a:ea typeface="Calibri" pitchFamily="34" charset="-122"/>
                 <a:cs typeface="Calibri" pitchFamily="34" charset="-120"/>
               </a:rPr>
-              <a:t>Ветка Distillation B — SFT/LoRA под конкретную PostgreSQL-БД.</a:t>
+              <a:t>Ветка SFT/LoRA: дообучаем компактную модель под конкретную PostgreSQL-базу,</a:t>
             </a:r>
             <a:endParaRPr lang="en-US" sz="1700" dirty="0"/>
           </a:p>
@@ -2366,7 +2343,7 @@
                 <a:ea typeface="Calibri" pitchFamily="34" charset="-122"/>
                 <a:cs typeface="Calibri" pitchFamily="34" charset="-120"/>
               </a:rPr>
-              <a:t>Schema-less инференс: схема не подаётся в промпт.</a:t>
+              <a:t>чтобы на инференсе не подавать схему в промпт.</a:t>
             </a:r>
             <a:endParaRPr lang="en-US" sz="1700" dirty="0"/>
           </a:p>
@@ -2451,7 +2428,7 @@
               <a:buNone/>
             </a:pPr>
             <a:r>
-              <a:rPr lang="en-US" sz="1500" b="1" dirty="0">
+              <a:rPr lang="en-US" sz="1600" b="1" dirty="0">
                 <a:solidFill>
                   <a:srgbClr val="FFFFFF"/>
                 </a:solidFill>
@@ -2459,9 +2436,9 @@
                 <a:ea typeface="Calibri" pitchFamily="34" charset="-122"/>
                 <a:cs typeface="Calibri" pitchFamily="34" charset="-120"/>
               </a:rPr>
-              <a:t>Владимир Поздеев · DeepPavlov / МФТИ · август 2026</a:t>
+              <a:t>Владимир Поздеев</a:t>
             </a:r>
-            <a:endParaRPr lang="en-US" sz="1500" dirty="0"/>
+            <a:endParaRPr lang="en-US" sz="1600" dirty="0"/>
           </a:p>
         </p:txBody>
       </p:sp>
@@ -2473,7 +2450,7 @@
         </p:nvSpPr>
         <p:spPr>
           <a:xfrm>
-            <a:off x="640080" y="6217920"/>
+            <a:off x="640080" y="6236208"/>
             <a:ext cx="10058400" cy="320040"/>
           </a:xfrm>
           <a:prstGeom prst="rect">
@@ -2490,7 +2467,7 @@
               <a:buNone/>
             </a:pPr>
             <a:r>
-              <a:rPr lang="en-US" sz="1300" dirty="0">
+              <a:rPr lang="en-US" sz="1200" dirty="0">
                 <a:solidFill>
                   <a:srgbClr val="FAB900"/>
                 </a:solidFill>
@@ -2500,7 +2477,7 @@
               </a:rPr>
               <a:t>github.com/VladimirPozdeev06/db2model_lora</a:t>
             </a:r>
-            <a:endParaRPr lang="en-US" sz="1300" dirty="0"/>
+            <a:endParaRPr lang="en-US" sz="1200" dirty="0"/>
           </a:p>
         </p:txBody>
       </p:sp>
@@ -2544,7 +2521,7 @@
         </p:nvSpPr>
         <p:spPr>
           <a:xfrm>
-            <a:off x="640080" y="548640"/>
+            <a:off x="640080" y="594360"/>
             <a:ext cx="10972800" cy="731520"/>
           </a:xfrm>
           <a:prstGeom prst="rect">
@@ -2561,7 +2538,7 @@
               <a:buNone/>
             </a:pPr>
             <a:r>
-              <a:rPr lang="en-US" sz="3400" b="1" dirty="0">
+              <a:rPr lang="en-US" sz="3200" b="1" dirty="0">
                 <a:solidFill>
                   <a:srgbClr val="FFFFFF"/>
                 </a:solidFill>
@@ -2571,46 +2548,19 @@
               </a:rPr>
               <a:t>Выводы</a:t>
             </a:r>
-            <a:endParaRPr lang="en-US" sz="3400" dirty="0"/>
+            <a:endParaRPr lang="en-US" sz="3200" dirty="0"/>
           </a:p>
         </p:txBody>
       </p:sp>
       <p:sp>
         <p:nvSpPr>
-          <p:cNvPr id="3" name="Shape 1"/>
+          <p:cNvPr id="3" name="Text 1"/>
           <p:cNvSpPr/>
           <p:nvPr/>
         </p:nvSpPr>
         <p:spPr>
           <a:xfrm>
-            <a:off x="640080" y="1783080"/>
-            <a:ext cx="548640" cy="548640"/>
-          </a:xfrm>
-          <a:prstGeom prst="roundRect">
-            <a:avLst>
-              <a:gd name="adj" fmla="val 13333"/>
-            </a:avLst>
-          </a:prstGeom>
-          <a:solidFill>
-            <a:srgbClr val="FAB900"/>
-          </a:solidFill>
-          <a:ln w="19050">
-            <a:solidFill>
-              <a:srgbClr val="FFFFFF"/>
-            </a:solidFill>
-            <a:prstDash val="solid"/>
-          </a:ln>
-        </p:spPr>
-      </p:sp>
-      <p:sp>
-        <p:nvSpPr>
-          <p:cNvPr id="4" name="Text 2"/>
-          <p:cNvSpPr/>
-          <p:nvPr/>
-        </p:nvSpPr>
-        <p:spPr>
-          <a:xfrm>
-            <a:off x="640080" y="1783080"/>
+            <a:off x="640080" y="1874520"/>
             <a:ext cx="548640" cy="548640"/>
           </a:xfrm>
           <a:prstGeom prst="rect">
@@ -2620,22 +2570,22 @@
           <a:ln/>
         </p:spPr>
         <p:txBody>
-          <a:bodyPr wrap="square" lIns="0" tIns="0" rIns="0" bIns="0" rtlCol="0" anchor="ctr"/>
+          <a:bodyPr wrap="square" lIns="0" tIns="0" rIns="0" bIns="0" rtlCol="0" anchor="t"/>
           <a:lstStyle/>
           <a:p>
-            <a:pPr algn="ctr" indent="0" marL="0">
+            <a:pPr indent="0" marL="0">
               <a:buNone/>
             </a:pPr>
             <a:r>
               <a:rPr lang="en-US" sz="2400" b="1" dirty="0">
                 <a:solidFill>
-                  <a:srgbClr val="102D69"/>
+                  <a:srgbClr val="FAB900"/>
                 </a:solidFill>
                 <a:latin typeface="Courier New" pitchFamily="34" charset="0"/>
                 <a:ea typeface="Courier New" pitchFamily="34" charset="-122"/>
                 <a:cs typeface="Courier New" pitchFamily="34" charset="-120"/>
               </a:rPr>
-              <a:t>1</a:t>
+              <a:t>1.</a:t>
             </a:r>
             <a:endParaRPr lang="en-US" sz="2400" dirty="0"/>
           </a:p>
@@ -2643,14 +2593,14 @@
       </p:sp>
       <p:sp>
         <p:nvSpPr>
-          <p:cNvPr id="5" name="Text 3"/>
+          <p:cNvPr id="4" name="Text 2"/>
           <p:cNvSpPr/>
           <p:nvPr/>
         </p:nvSpPr>
         <p:spPr>
           <a:xfrm>
-            <a:off x="1417320" y="1737360"/>
-            <a:ext cx="10058400" cy="548640"/>
+            <a:off x="1280160" y="1874520"/>
+            <a:ext cx="10058400" cy="457200"/>
           </a:xfrm>
           <a:prstGeom prst="rect">
             <a:avLst/>
@@ -2659,14 +2609,14 @@
           <a:ln/>
         </p:spPr>
         <p:txBody>
-          <a:bodyPr wrap="square" lIns="0" tIns="0" rIns="0" bIns="0" rtlCol="0" anchor="ctr"/>
+          <a:bodyPr wrap="square" lIns="0" tIns="0" rIns="0" bIns="0" rtlCol="0" anchor="t"/>
           <a:lstStyle/>
           <a:p>
             <a:pPr indent="0" marL="0">
               <a:buNone/>
             </a:pPr>
             <a:r>
-              <a:rPr lang="en-US" sz="2200" b="1" dirty="0">
+              <a:rPr lang="en-US" sz="2100" b="1" dirty="0">
                 <a:solidFill>
                   <a:srgbClr val="FFFFFF"/>
                 </a:solidFill>
@@ -2674,21 +2624,21 @@
                 <a:ea typeface="Calibri" pitchFamily="34" charset="-122"/>
                 <a:cs typeface="Calibri" pitchFamily="34" charset="-120"/>
               </a:rPr>
-              <a:t>Знание в весах доминирует для per-DB</a:t>
+              <a:t>Для одной базы знание в весах выигрывает</a:t>
             </a:r>
-            <a:endParaRPr lang="en-US" sz="2200" dirty="0"/>
+            <a:endParaRPr lang="en-US" sz="2100" dirty="0"/>
           </a:p>
         </p:txBody>
       </p:sp>
       <p:sp>
         <p:nvSpPr>
-          <p:cNvPr id="6" name="Text 4"/>
+          <p:cNvPr id="5" name="Text 3"/>
           <p:cNvSpPr/>
           <p:nvPr/>
         </p:nvSpPr>
         <p:spPr>
           <a:xfrm>
-            <a:off x="1417320" y="2313432"/>
+            <a:off x="1280160" y="2377440"/>
             <a:ext cx="10058400" cy="731520"/>
           </a:xfrm>
           <a:prstGeom prst="rect">
@@ -2716,7 +2666,7 @@
                 <a:ea typeface="Calibri" pitchFamily="34" charset="-122"/>
                 <a:cs typeface="Calibri" pitchFamily="34" charset="-120"/>
               </a:rPr>
-              <a:t>41.03% EX при 90.6 токена — выше и точнее, и короче контекста, чем baseline и graph-RAG.</a:t>
+              <a:t>41% EX при 90 токенах — точнее и короче по контексту, чем baseline со схемой и чем graph-RAG.</a:t>
             </a:r>
             <a:endParaRPr lang="en-US" sz="1500" dirty="0"/>
           </a:p>
@@ -2724,40 +2674,13 @@
       </p:sp>
       <p:sp>
         <p:nvSpPr>
-          <p:cNvPr id="7" name="Shape 5"/>
+          <p:cNvPr id="6" name="Text 4"/>
           <p:cNvSpPr/>
           <p:nvPr/>
         </p:nvSpPr>
         <p:spPr>
           <a:xfrm>
-            <a:off x="640080" y="3337560"/>
-            <a:ext cx="548640" cy="548640"/>
-          </a:xfrm>
-          <a:prstGeom prst="roundRect">
-            <a:avLst>
-              <a:gd name="adj" fmla="val 13333"/>
-            </a:avLst>
-          </a:prstGeom>
-          <a:solidFill>
-            <a:srgbClr val="D0E4FF"/>
-          </a:solidFill>
-          <a:ln w="19050">
-            <a:solidFill>
-              <a:srgbClr val="FFFFFF"/>
-            </a:solidFill>
-            <a:prstDash val="solid"/>
-          </a:ln>
-        </p:spPr>
-      </p:sp>
-      <p:sp>
-        <p:nvSpPr>
-          <p:cNvPr id="8" name="Text 6"/>
-          <p:cNvSpPr/>
-          <p:nvPr/>
-        </p:nvSpPr>
-        <p:spPr>
-          <a:xfrm>
-            <a:off x="640080" y="3337560"/>
+            <a:off x="640080" y="3383280"/>
             <a:ext cx="548640" cy="548640"/>
           </a:xfrm>
           <a:prstGeom prst="rect">
@@ -2767,22 +2690,22 @@
           <a:ln/>
         </p:spPr>
         <p:txBody>
-          <a:bodyPr wrap="square" lIns="0" tIns="0" rIns="0" bIns="0" rtlCol="0" anchor="ctr"/>
+          <a:bodyPr wrap="square" lIns="0" tIns="0" rIns="0" bIns="0" rtlCol="0" anchor="t"/>
           <a:lstStyle/>
           <a:p>
-            <a:pPr algn="ctr" indent="0" marL="0">
+            <a:pPr indent="0" marL="0">
               <a:buNone/>
             </a:pPr>
             <a:r>
               <a:rPr lang="en-US" sz="2400" b="1" dirty="0">
                 <a:solidFill>
-                  <a:srgbClr val="102D69"/>
+                  <a:srgbClr val="FAB900"/>
                 </a:solidFill>
                 <a:latin typeface="Courier New" pitchFamily="34" charset="0"/>
                 <a:ea typeface="Courier New" pitchFamily="34" charset="-122"/>
                 <a:cs typeface="Courier New" pitchFamily="34" charset="-120"/>
               </a:rPr>
-              <a:t>2</a:t>
+              <a:t>2.</a:t>
             </a:r>
             <a:endParaRPr lang="en-US" sz="2400" dirty="0"/>
           </a:p>
@@ -2790,14 +2713,14 @@
       </p:sp>
       <p:sp>
         <p:nvSpPr>
-          <p:cNvPr id="9" name="Text 7"/>
+          <p:cNvPr id="7" name="Text 5"/>
           <p:cNvSpPr/>
           <p:nvPr/>
         </p:nvSpPr>
         <p:spPr>
           <a:xfrm>
-            <a:off x="1417320" y="3291840"/>
-            <a:ext cx="10058400" cy="548640"/>
+            <a:off x="1280160" y="3383280"/>
+            <a:ext cx="10058400" cy="457200"/>
           </a:xfrm>
           <a:prstGeom prst="rect">
             <a:avLst/>
@@ -2806,14 +2729,14 @@
           <a:ln/>
         </p:spPr>
         <p:txBody>
-          <a:bodyPr wrap="square" lIns="0" tIns="0" rIns="0" bIns="0" rtlCol="0" anchor="ctr"/>
+          <a:bodyPr wrap="square" lIns="0" tIns="0" rIns="0" bIns="0" rtlCol="0" anchor="t"/>
           <a:lstStyle/>
           <a:p>
             <a:pPr indent="0" marL="0">
               <a:buNone/>
             </a:pPr>
             <a:r>
-              <a:rPr lang="en-US" sz="2200" b="1" dirty="0">
+              <a:rPr lang="en-US" sz="2100" b="1" dirty="0">
                 <a:solidFill>
                   <a:srgbClr val="FFFFFF"/>
                 </a:solidFill>
@@ -2821,21 +2744,21 @@
                 <a:ea typeface="Calibri" pitchFamily="34" charset="-122"/>
                 <a:cs typeface="Calibri" pitchFamily="34" charset="-120"/>
               </a:rPr>
-              <a:t>light-RAG силён без переобучения</a:t>
+              <a:t>LightRAG полезен, когда переобучать нельзя</a:t>
             </a:r>
-            <a:endParaRPr lang="en-US" sz="2200" dirty="0"/>
+            <a:endParaRPr lang="en-US" sz="2100" dirty="0"/>
           </a:p>
         </p:txBody>
       </p:sp>
       <p:sp>
         <p:nvSpPr>
-          <p:cNvPr id="10" name="Text 8"/>
+          <p:cNvPr id="8" name="Text 6"/>
           <p:cNvSpPr/>
           <p:nvPr/>
         </p:nvSpPr>
         <p:spPr>
           <a:xfrm>
-            <a:off x="1417320" y="3867912"/>
+            <a:off x="1280160" y="3886200"/>
             <a:ext cx="10058400" cy="731520"/>
           </a:xfrm>
           <a:prstGeom prst="rect">
@@ -2863,7 +2786,7 @@
                 <a:ea typeface="Calibri" pitchFamily="34" charset="-122"/>
                 <a:cs typeface="Calibri" pitchFamily="34" charset="-120"/>
               </a:rPr>
-              <a:t>улучшает точность (+4.4 п.п.), но ценой токенов; выигрывает там, где дообучение под каждую БД невозможно.</a:t>
+              <a:t>он поднимает точность, но увеличивает контекст; хорош там, где под каждую базу не дообучишься.</a:t>
             </a:r>
             <a:endParaRPr lang="en-US" sz="1500" dirty="0"/>
           </a:p>
@@ -2871,7 +2794,7 @@
       </p:sp>
       <p:sp>
         <p:nvSpPr>
-          <p:cNvPr id="11" name="Shape 9"/>
+          <p:cNvPr id="9" name="Text 7"/>
           <p:cNvSpPr/>
           <p:nvPr/>
         </p:nvSpPr>
@@ -2880,33 +2803,6 @@
             <a:off x="640080" y="4892040"/>
             <a:ext cx="548640" cy="548640"/>
           </a:xfrm>
-          <a:prstGeom prst="roundRect">
-            <a:avLst>
-              <a:gd name="adj" fmla="val 13333"/>
-            </a:avLst>
-          </a:prstGeom>
-          <a:solidFill>
-            <a:srgbClr val="D0E4FF"/>
-          </a:solidFill>
-          <a:ln w="19050">
-            <a:solidFill>
-              <a:srgbClr val="FFFFFF"/>
-            </a:solidFill>
-            <a:prstDash val="solid"/>
-          </a:ln>
-        </p:spPr>
-      </p:sp>
-      <p:sp>
-        <p:nvSpPr>
-          <p:cNvPr id="12" name="Text 10"/>
-          <p:cNvSpPr/>
-          <p:nvPr/>
-        </p:nvSpPr>
-        <p:spPr>
-          <a:xfrm>
-            <a:off x="640080" y="4892040"/>
-            <a:ext cx="548640" cy="548640"/>
-          </a:xfrm>
           <a:prstGeom prst="rect">
             <a:avLst/>
           </a:prstGeom>
@@ -2914,22 +2810,22 @@
           <a:ln/>
         </p:spPr>
         <p:txBody>
-          <a:bodyPr wrap="square" lIns="0" tIns="0" rIns="0" bIns="0" rtlCol="0" anchor="ctr"/>
+          <a:bodyPr wrap="square" lIns="0" tIns="0" rIns="0" bIns="0" rtlCol="0" anchor="t"/>
           <a:lstStyle/>
           <a:p>
-            <a:pPr algn="ctr" indent="0" marL="0">
+            <a:pPr indent="0" marL="0">
               <a:buNone/>
             </a:pPr>
             <a:r>
               <a:rPr lang="en-US" sz="2400" b="1" dirty="0">
                 <a:solidFill>
-                  <a:srgbClr val="102D69"/>
+                  <a:srgbClr val="FAB900"/>
                 </a:solidFill>
                 <a:latin typeface="Courier New" pitchFamily="34" charset="0"/>
                 <a:ea typeface="Courier New" pitchFamily="34" charset="-122"/>
                 <a:cs typeface="Courier New" pitchFamily="34" charset="-120"/>
               </a:rPr>
-              <a:t>3</a:t>
+              <a:t>3.</a:t>
             </a:r>
             <a:endParaRPr lang="en-US" sz="2400" dirty="0"/>
           </a:p>
@@ -2937,14 +2833,14 @@
       </p:sp>
       <p:sp>
         <p:nvSpPr>
-          <p:cNvPr id="13" name="Text 11"/>
+          <p:cNvPr id="10" name="Text 8"/>
           <p:cNvSpPr/>
           <p:nvPr/>
         </p:nvSpPr>
         <p:spPr>
           <a:xfrm>
-            <a:off x="1417320" y="4846320"/>
-            <a:ext cx="10058400" cy="548640"/>
+            <a:off x="1280160" y="4892040"/>
+            <a:ext cx="10058400" cy="457200"/>
           </a:xfrm>
           <a:prstGeom prst="rect">
             <a:avLst/>
@@ -2953,14 +2849,14 @@
           <a:ln/>
         </p:spPr>
         <p:txBody>
-          <a:bodyPr wrap="square" lIns="0" tIns="0" rIns="0" bIns="0" rtlCol="0" anchor="ctr"/>
+          <a:bodyPr wrap="square" lIns="0" tIns="0" rIns="0" bIns="0" rtlCol="0" anchor="t"/>
           <a:lstStyle/>
           <a:p>
             <a:pPr indent="0" marL="0">
               <a:buNone/>
             </a:pPr>
             <a:r>
-              <a:rPr lang="en-US" sz="2200" b="1" dirty="0">
+              <a:rPr lang="en-US" sz="2100" b="1" dirty="0">
                 <a:solidFill>
                   <a:srgbClr val="FFFFFF"/>
                 </a:solidFill>
@@ -2968,21 +2864,21 @@
                 <a:ea typeface="Calibri" pitchFamily="34" charset="-122"/>
                 <a:cs typeface="Calibri" pitchFamily="34" charset="-120"/>
               </a:rPr>
-              <a:t>Инженерный выход готов</a:t>
+              <a:t>Результат воспроизводим</a:t>
             </a:r>
-            <a:endParaRPr lang="en-US" sz="2200" dirty="0"/>
+            <a:endParaRPr lang="en-US" sz="2100" dirty="0"/>
           </a:p>
         </p:txBody>
       </p:sp>
       <p:sp>
         <p:nvSpPr>
-          <p:cNvPr id="14" name="Text 12"/>
+          <p:cNvPr id="11" name="Text 9"/>
           <p:cNvSpPr/>
           <p:nvPr/>
         </p:nvSpPr>
         <p:spPr>
           <a:xfrm>
-            <a:off x="1417320" y="5422392"/>
+            <a:off x="1280160" y="5394960"/>
             <a:ext cx="10058400" cy="731520"/>
           </a:xfrm>
           <a:prstGeom prst="rect">
@@ -3010,7 +2906,7 @@
                 <a:ea typeface="Calibri" pitchFamily="34" charset="-122"/>
                 <a:cs typeface="Calibri" pitchFamily="34" charset="-120"/>
               </a:rPr>
-              <a:t>MCP-сервер (schema-less через vLLM) + воспроизводимый лидерборд одной командой.</a:t>
+              <a:t>есть MCP-сервер и скрипт, который считает всю таблицу заново одной командой.</a:t>
             </a:r>
             <a:endParaRPr lang="en-US" sz="1500" dirty="0"/>
           </a:p>
@@ -3018,7 +2914,7 @@
       </p:sp>
       <p:sp>
         <p:nvSpPr>
-          <p:cNvPr id="15" name="Text 13"/>
+          <p:cNvPr id="12" name="Text 10"/>
           <p:cNvSpPr/>
           <p:nvPr/>
         </p:nvSpPr>
@@ -3049,7 +2945,7 @@
                 <a:ea typeface="Calibri" pitchFamily="34" charset="-122"/>
                 <a:cs typeface="Calibri" pitchFamily="34" charset="-120"/>
               </a:rPr>
-              <a:t>DB2Model · ветка SFT/LoRA</a:t>
+              <a:t>DB2Model · SFT/LoRA</a:t>
             </a:r>
             <a:endParaRPr lang="en-US" sz="900" dirty="0"/>
           </a:p>
@@ -3057,7 +2953,7 @@
       </p:sp>
       <p:sp>
         <p:nvSpPr>
-          <p:cNvPr id="16" name="Text 14"/>
+          <p:cNvPr id="13" name="Text 11"/>
           <p:cNvSpPr/>
           <p:nvPr/>
         </p:nvSpPr>
@@ -3188,7 +3084,7 @@
         </p:nvSpPr>
         <p:spPr>
           <a:xfrm>
-            <a:off x="457200" y="384048"/>
+            <a:off x="457200" y="411480"/>
             <a:ext cx="9875520" cy="685800"/>
           </a:xfrm>
           <a:prstGeom prst="rect">
@@ -3205,7 +3101,7 @@
               <a:buNone/>
             </a:pPr>
             <a:r>
-              <a:rPr lang="en-US" sz="3200" b="1" dirty="0">
+              <a:rPr lang="en-US" sz="3100" b="1" dirty="0">
                 <a:solidFill>
                   <a:srgbClr val="102D69"/>
                 </a:solidFill>
@@ -3213,9 +3109,9 @@
                 <a:ea typeface="Calibri" pitchFamily="34" charset="-122"/>
                 <a:cs typeface="Calibri" pitchFamily="34" charset="-120"/>
               </a:rPr>
-              <a:t>Пайплайн</a:t>
+              <a:t>Как получали адаптер</a:t>
             </a:r>
-            <a:endParaRPr lang="en-US" sz="3200" dirty="0"/>
+            <a:endParaRPr lang="en-US" sz="3100" dirty="0"/>
           </a:p>
         </p:txBody>
       </p:sp>
@@ -3227,7 +3123,7 @@
         </p:nvSpPr>
         <p:spPr>
           <a:xfrm>
-            <a:off x="457200" y="1097280"/>
+            <a:off x="457200" y="1115568"/>
             <a:ext cx="9966960" cy="365760"/>
           </a:xfrm>
           <a:prstGeom prst="rect">
@@ -3244,7 +3140,7 @@
               <a:buNone/>
             </a:pPr>
             <a:r>
-              <a:rPr lang="en-US" sz="1500" dirty="0">
+              <a:rPr lang="en-US" sz="1400" dirty="0">
                 <a:solidFill>
                   <a:srgbClr val="444444"/>
                 </a:solidFill>
@@ -3252,9 +3148,9 @@
                 <a:ea typeface="Calibri" pitchFamily="34" charset="-122"/>
                 <a:cs typeface="Calibri" pitchFamily="34" charset="-120"/>
               </a:rPr>
-              <a:t>Всё локально (ssh-туннель к БД), обучение — на Kaggle</a:t>
+              <a:t>Сбор данных и оценка — локально через ssh-туннель, обучение — на Kaggle</a:t>
             </a:r>
-            <a:endParaRPr lang="en-US" sz="1500" dirty="0"/>
+            <a:endParaRPr lang="en-US" sz="1400" dirty="0"/>
           </a:p>
         </p:txBody>
       </p:sp>
@@ -3266,8 +3162,8 @@
         </p:nvSpPr>
         <p:spPr>
           <a:xfrm>
-            <a:off x="457200" y="2514600"/>
-            <a:ext cx="1993392" cy="2194560"/>
+            <a:off x="457200" y="2468880"/>
+            <a:ext cx="1993392" cy="2286000"/>
           </a:xfrm>
           <a:prstGeom prst="roundRect">
             <a:avLst>
@@ -3293,7 +3189,7 @@
         </p:nvSpPr>
         <p:spPr>
           <a:xfrm>
-            <a:off x="1179576" y="2770632"/>
+            <a:off x="1179576" y="2724912"/>
             <a:ext cx="548640" cy="548640"/>
           </a:xfrm>
           <a:prstGeom prst="ellipse">
@@ -3313,7 +3209,7 @@
         </p:nvSpPr>
         <p:spPr>
           <a:xfrm>
-            <a:off x="1179576" y="2770632"/>
+            <a:off x="1179576" y="2724912"/>
             <a:ext cx="548640" cy="548640"/>
           </a:xfrm>
           <a:prstGeom prst="rect">
@@ -3352,7 +3248,7 @@
         </p:nvSpPr>
         <p:spPr>
           <a:xfrm>
-            <a:off x="548640" y="3447288"/>
+            <a:off x="548640" y="3401568"/>
             <a:ext cx="1810512" cy="457200"/>
           </a:xfrm>
           <a:prstGeom prst="rect">
@@ -3391,8 +3287,8 @@
         </p:nvSpPr>
         <p:spPr>
           <a:xfrm>
-            <a:off x="548640" y="3886200"/>
-            <a:ext cx="1810512" cy="731520"/>
+            <a:off x="594360" y="3840480"/>
+            <a:ext cx="1719072" cy="822960"/>
           </a:xfrm>
           <a:prstGeom prst="rect">
             <a:avLst/>
@@ -3419,7 +3315,7 @@
                 <a:ea typeface="Calibri" pitchFamily="34" charset="-122"/>
                 <a:cs typeface="Calibri" pitchFamily="34" charset="-120"/>
               </a:rPr>
-              <a:t>схема + FK + pg_stats + значения</a:t>
+              <a:t>схема, ключи, статистика, примеры значений</a:t>
             </a:r>
             <a:endParaRPr lang="en-US" sz="1150" dirty="0"/>
           </a:p>
@@ -3433,7 +3329,7 @@
         </p:nvSpPr>
         <p:spPr>
           <a:xfrm>
-            <a:off x="2468880" y="3063240"/>
+            <a:off x="2468880" y="3017520"/>
             <a:ext cx="283464" cy="731520"/>
           </a:xfrm>
           <a:prstGeom prst="rect">
@@ -3450,9 +3346,9 @@
               <a:buNone/>
             </a:pPr>
             <a:r>
-              <a:rPr lang="en-US" sz="2800" b="1" dirty="0">
+              <a:rPr lang="en-US" sz="2600" b="1" dirty="0">
                 <a:solidFill>
-                  <a:srgbClr val="E61E3C"/>
+                  <a:srgbClr val="C9B894"/>
                 </a:solidFill>
                 <a:latin typeface="Calibri" pitchFamily="34" charset="0"/>
                 <a:ea typeface="Calibri" pitchFamily="34" charset="-122"/>
@@ -3460,7 +3356,7 @@
               </a:rPr>
               <a:t>›</a:t>
             </a:r>
-            <a:endParaRPr lang="en-US" sz="2800" dirty="0"/>
+            <a:endParaRPr lang="en-US" sz="2600" dirty="0"/>
           </a:p>
         </p:txBody>
       </p:sp>
@@ -3472,8 +3368,8 @@
         </p:nvSpPr>
         <p:spPr>
           <a:xfrm>
-            <a:off x="2770632" y="2514600"/>
-            <a:ext cx="1993392" cy="2194560"/>
+            <a:off x="2770632" y="2468880"/>
+            <a:ext cx="1993392" cy="2286000"/>
           </a:xfrm>
           <a:prstGeom prst="roundRect">
             <a:avLst>
@@ -3499,7 +3395,7 @@
         </p:nvSpPr>
         <p:spPr>
           <a:xfrm>
-            <a:off x="3493008" y="2770632"/>
+            <a:off x="3493008" y="2724912"/>
             <a:ext cx="548640" cy="548640"/>
           </a:xfrm>
           <a:prstGeom prst="ellipse">
@@ -3519,7 +3415,7 @@
         </p:nvSpPr>
         <p:spPr>
           <a:xfrm>
-            <a:off x="3493008" y="2770632"/>
+            <a:off x="3493008" y="2724912"/>
             <a:ext cx="548640" cy="548640"/>
           </a:xfrm>
           <a:prstGeom prst="rect">
@@ -3558,7 +3454,7 @@
         </p:nvSpPr>
         <p:spPr>
           <a:xfrm>
-            <a:off x="2862072" y="3447288"/>
+            <a:off x="2862072" y="3401568"/>
             <a:ext cx="1810512" cy="457200"/>
           </a:xfrm>
           <a:prstGeom prst="rect">
@@ -3597,8 +3493,8 @@
         </p:nvSpPr>
         <p:spPr>
           <a:xfrm>
-            <a:off x="2862072" y="3886200"/>
-            <a:ext cx="1810512" cy="731520"/>
+            <a:off x="2907792" y="3840480"/>
+            <a:ext cx="1719072" cy="822960"/>
           </a:xfrm>
           <a:prstGeom prst="rect">
             <a:avLst/>
@@ -3625,7 +3521,7 @@
                 <a:ea typeface="Calibri" pitchFamily="34" charset="-122"/>
                 <a:cs typeface="Calibri" pitchFamily="34" charset="-120"/>
               </a:rPr>
-              <a:t>пары от учителя Qwen3.6-27B</a:t>
+              <a:t>учитель Qwen-27B пишет пары «вопрос → SQL»</a:t>
             </a:r>
             <a:endParaRPr lang="en-US" sz="1150" dirty="0"/>
           </a:p>
@@ -3639,7 +3535,7 @@
         </p:nvSpPr>
         <p:spPr>
           <a:xfrm>
-            <a:off x="4782312" y="3063240"/>
+            <a:off x="4782312" y="3017520"/>
             <a:ext cx="283464" cy="731520"/>
           </a:xfrm>
           <a:prstGeom prst="rect">
@@ -3656,9 +3552,9 @@
               <a:buNone/>
             </a:pPr>
             <a:r>
-              <a:rPr lang="en-US" sz="2800" b="1" dirty="0">
+              <a:rPr lang="en-US" sz="2600" b="1" dirty="0">
                 <a:solidFill>
-                  <a:srgbClr val="E61E3C"/>
+                  <a:srgbClr val="C9B894"/>
                 </a:solidFill>
                 <a:latin typeface="Calibri" pitchFamily="34" charset="0"/>
                 <a:ea typeface="Calibri" pitchFamily="34" charset="-122"/>
@@ -3666,7 +3562,7 @@
               </a:rPr>
               <a:t>›</a:t>
             </a:r>
-            <a:endParaRPr lang="en-US" sz="2800" dirty="0"/>
+            <a:endParaRPr lang="en-US" sz="2600" dirty="0"/>
           </a:p>
         </p:txBody>
       </p:sp>
@@ -3678,8 +3574,8 @@
         </p:nvSpPr>
         <p:spPr>
           <a:xfrm>
-            <a:off x="5084064" y="2514600"/>
-            <a:ext cx="1993392" cy="2194560"/>
+            <a:off x="5084064" y="2468880"/>
+            <a:ext cx="1993392" cy="2286000"/>
           </a:xfrm>
           <a:prstGeom prst="roundRect">
             <a:avLst>
@@ -3705,7 +3601,7 @@
         </p:nvSpPr>
         <p:spPr>
           <a:xfrm>
-            <a:off x="5806440" y="2770632"/>
+            <a:off x="5806440" y="2724912"/>
             <a:ext cx="548640" cy="548640"/>
           </a:xfrm>
           <a:prstGeom prst="ellipse">
@@ -3725,7 +3621,7 @@
         </p:nvSpPr>
         <p:spPr>
           <a:xfrm>
-            <a:off x="5806440" y="2770632"/>
+            <a:off x="5806440" y="2724912"/>
             <a:ext cx="548640" cy="548640"/>
           </a:xfrm>
           <a:prstGeom prst="rect">
@@ -3764,7 +3660,7 @@
         </p:nvSpPr>
         <p:spPr>
           <a:xfrm>
-            <a:off x="5175504" y="3447288"/>
+            <a:off x="5175504" y="3401568"/>
             <a:ext cx="1810512" cy="457200"/>
           </a:xfrm>
           <a:prstGeom prst="rect">
@@ -3803,8 +3699,8 @@
         </p:nvSpPr>
         <p:spPr>
           <a:xfrm>
-            <a:off x="5175504" y="3886200"/>
-            <a:ext cx="1810512" cy="731520"/>
+            <a:off x="5221224" y="3840480"/>
+            <a:ext cx="1719072" cy="822960"/>
           </a:xfrm>
           <a:prstGeom prst="rect">
             <a:avLst/>
@@ -3831,7 +3727,7 @@
                 <a:ea typeface="Calibri" pitchFamily="34" charset="-122"/>
                 <a:cs typeface="Calibri" pitchFamily="34" charset="-120"/>
               </a:rPr>
-              <a:t>исполнение на живой базе</a:t>
+              <a:t>оставляем только SQL, что исполнился на базе</a:t>
             </a:r>
             <a:endParaRPr lang="en-US" sz="1150" dirty="0"/>
           </a:p>
@@ -3845,7 +3741,7 @@
         </p:nvSpPr>
         <p:spPr>
           <a:xfrm>
-            <a:off x="7095744" y="3063240"/>
+            <a:off x="7095744" y="3017520"/>
             <a:ext cx="283464" cy="731520"/>
           </a:xfrm>
           <a:prstGeom prst="rect">
@@ -3862,9 +3758,9 @@
               <a:buNone/>
             </a:pPr>
             <a:r>
-              <a:rPr lang="en-US" sz="2800" b="1" dirty="0">
+              <a:rPr lang="en-US" sz="2600" b="1" dirty="0">
                 <a:solidFill>
-                  <a:srgbClr val="E61E3C"/>
+                  <a:srgbClr val="C9B894"/>
                 </a:solidFill>
                 <a:latin typeface="Calibri" pitchFamily="34" charset="0"/>
                 <a:ea typeface="Calibri" pitchFamily="34" charset="-122"/>
@@ -3872,7 +3768,7 @@
               </a:rPr>
               <a:t>›</a:t>
             </a:r>
-            <a:endParaRPr lang="en-US" sz="2800" dirty="0"/>
+            <a:endParaRPr lang="en-US" sz="2600" dirty="0"/>
           </a:p>
         </p:txBody>
       </p:sp>
@@ -3884,8 +3780,8 @@
         </p:nvSpPr>
         <p:spPr>
           <a:xfrm>
-            <a:off x="7397496" y="2514600"/>
-            <a:ext cx="1993392" cy="2194560"/>
+            <a:off x="7397496" y="2468880"/>
+            <a:ext cx="1993392" cy="2286000"/>
           </a:xfrm>
           <a:prstGeom prst="roundRect">
             <a:avLst>
@@ -3911,7 +3807,7 @@
         </p:nvSpPr>
         <p:spPr>
           <a:xfrm>
-            <a:off x="8119872" y="2770632"/>
+            <a:off x="8119872" y="2724912"/>
             <a:ext cx="548640" cy="548640"/>
           </a:xfrm>
           <a:prstGeom prst="ellipse">
@@ -3931,7 +3827,7 @@
         </p:nvSpPr>
         <p:spPr>
           <a:xfrm>
-            <a:off x="8119872" y="2770632"/>
+            <a:off x="8119872" y="2724912"/>
             <a:ext cx="548640" cy="548640"/>
           </a:xfrm>
           <a:prstGeom prst="rect">
@@ -3970,7 +3866,7 @@
         </p:nvSpPr>
         <p:spPr>
           <a:xfrm>
-            <a:off x="7488936" y="3447288"/>
+            <a:off x="7488936" y="3401568"/>
             <a:ext cx="1810512" cy="457200"/>
           </a:xfrm>
           <a:prstGeom prst="rect">
@@ -4009,8 +3905,8 @@
         </p:nvSpPr>
         <p:spPr>
           <a:xfrm>
-            <a:off x="7488936" y="3886200"/>
-            <a:ext cx="1810512" cy="731520"/>
+            <a:off x="7534656" y="3840480"/>
+            <a:ext cx="1719072" cy="822960"/>
           </a:xfrm>
           <a:prstGeom prst="rect">
             <a:avLst/>
@@ -4037,7 +3933,7 @@
                 <a:ea typeface="Calibri" pitchFamily="34" charset="-122"/>
                 <a:cs typeface="Calibri" pitchFamily="34" charset="-120"/>
               </a:rPr>
-              <a:t>обучение адаптера (Kaggle)</a:t>
+              <a:t>дообучаем адаптер на чистых парах</a:t>
             </a:r>
             <a:endParaRPr lang="en-US" sz="1150" dirty="0"/>
           </a:p>
@@ -4051,7 +3947,7 @@
         </p:nvSpPr>
         <p:spPr>
           <a:xfrm>
-            <a:off x="9409176" y="3063240"/>
+            <a:off x="9409176" y="3017520"/>
             <a:ext cx="283464" cy="731520"/>
           </a:xfrm>
           <a:prstGeom prst="rect">
@@ -4068,9 +3964,9 @@
               <a:buNone/>
             </a:pPr>
             <a:r>
-              <a:rPr lang="en-US" sz="2800" b="1" dirty="0">
+              <a:rPr lang="en-US" sz="2600" b="1" dirty="0">
                 <a:solidFill>
-                  <a:srgbClr val="E61E3C"/>
+                  <a:srgbClr val="C9B894"/>
                 </a:solidFill>
                 <a:latin typeface="Calibri" pitchFamily="34" charset="0"/>
                 <a:ea typeface="Calibri" pitchFamily="34" charset="-122"/>
@@ -4078,7 +3974,7 @@
               </a:rPr>
               <a:t>›</a:t>
             </a:r>
-            <a:endParaRPr lang="en-US" sz="2800" dirty="0"/>
+            <a:endParaRPr lang="en-US" sz="2600" dirty="0"/>
           </a:p>
         </p:txBody>
       </p:sp>
@@ -4090,8 +3986,8 @@
         </p:nvSpPr>
         <p:spPr>
           <a:xfrm>
-            <a:off x="9710928" y="2514600"/>
-            <a:ext cx="1993392" cy="2194560"/>
+            <a:off x="9710928" y="2468880"/>
+            <a:ext cx="1993392" cy="2286000"/>
           </a:xfrm>
           <a:prstGeom prst="roundRect">
             <a:avLst>
@@ -4117,7 +4013,7 @@
         </p:nvSpPr>
         <p:spPr>
           <a:xfrm>
-            <a:off x="10433304" y="2770632"/>
+            <a:off x="10433304" y="2724912"/>
             <a:ext cx="548640" cy="548640"/>
           </a:xfrm>
           <a:prstGeom prst="ellipse">
@@ -4137,7 +4033,7 @@
         </p:nvSpPr>
         <p:spPr>
           <a:xfrm>
-            <a:off x="10433304" y="2770632"/>
+            <a:off x="10433304" y="2724912"/>
             <a:ext cx="548640" cy="548640"/>
           </a:xfrm>
           <a:prstGeom prst="rect">
@@ -4176,7 +4072,7 @@
         </p:nvSpPr>
         <p:spPr>
           <a:xfrm>
-            <a:off x="9802368" y="3447288"/>
+            <a:off x="9802368" y="3401568"/>
             <a:ext cx="1810512" cy="457200"/>
           </a:xfrm>
           <a:prstGeom prst="rect">
@@ -4215,8 +4111,8 @@
         </p:nvSpPr>
         <p:spPr>
           <a:xfrm>
-            <a:off x="9802368" y="3886200"/>
-            <a:ext cx="1810512" cy="731520"/>
+            <a:off x="9848088" y="3840480"/>
+            <a:ext cx="1719072" cy="822960"/>
           </a:xfrm>
           <a:prstGeom prst="rect">
             <a:avLst/>
@@ -4243,7 +4139,7 @@
                 <a:ea typeface="Calibri" pitchFamily="34" charset="-122"/>
                 <a:cs typeface="Calibri" pitchFamily="34" charset="-120"/>
               </a:rPr>
-              <a:t>EX / VES / токены дома</a:t>
+              <a:t>EX / VES / токены на 91 вопросе</a:t>
             </a:r>
             <a:endParaRPr lang="en-US" sz="1150" dirty="0"/>
           </a:p>
@@ -4257,8 +4153,8 @@
         </p:nvSpPr>
         <p:spPr>
           <a:xfrm>
-            <a:off x="457200" y="5120640"/>
-            <a:ext cx="11247120" cy="548640"/>
+            <a:off x="457200" y="5212080"/>
+            <a:ext cx="11247120" cy="457200"/>
           </a:xfrm>
           <a:prstGeom prst="rect">
             <a:avLst/>
@@ -4274,7 +4170,7 @@
               <a:buNone/>
             </a:pPr>
             <a:r>
-              <a:rPr lang="en-US" sz="1300" i="1" dirty="0">
+              <a:rPr lang="en-US" sz="1300" dirty="0">
                 <a:solidFill>
                   <a:srgbClr val="444444"/>
                 </a:solidFill>
@@ -4282,7 +4178,7 @@
                 <a:ea typeface="Calibri" pitchFamily="34" charset="-122"/>
                 <a:cs typeface="Calibri" pitchFamily="34" charset="-120"/>
               </a:rPr>
-              <a:t>Baseline = та же target-модель, но со схемой в промпте. Все армы обеих веток мерим одинаково: один split, один исполнитель SQL, один парсер.</a:t>
+              <a:t>Baseline для сравнения — та же модель, но со схемой в промпте.</a:t>
             </a:r>
             <a:endParaRPr lang="en-US" sz="1300" dirty="0"/>
           </a:p>
@@ -4321,7 +4217,7 @@
                 <a:ea typeface="Calibri" pitchFamily="34" charset="-122"/>
                 <a:cs typeface="Calibri" pitchFamily="34" charset="-120"/>
               </a:rPr>
-              <a:t>DB2Model · ветка SFT/LoRA</a:t>
+              <a:t>DB2Model · SFT/LoRA</a:t>
             </a:r>
             <a:endParaRPr lang="en-US" sz="900" dirty="0"/>
           </a:p>
@@ -4460,7 +4356,7 @@
         </p:nvSpPr>
         <p:spPr>
           <a:xfrm>
-            <a:off x="457200" y="384048"/>
+            <a:off x="457200" y="411480"/>
             <a:ext cx="9875520" cy="685800"/>
           </a:xfrm>
           <a:prstGeom prst="rect">
@@ -4477,7 +4373,7 @@
               <a:buNone/>
             </a:pPr>
             <a:r>
-              <a:rPr lang="en-US" sz="3200" b="1" dirty="0">
+              <a:rPr lang="en-US" sz="3100" b="1" dirty="0">
                 <a:solidFill>
                   <a:srgbClr val="102D69"/>
                 </a:solidFill>
@@ -4487,7 +4383,7 @@
               </a:rPr>
               <a:t>Как считали токены</a:t>
             </a:r>
-            <a:endParaRPr lang="en-US" sz="3200" dirty="0"/>
+            <a:endParaRPr lang="en-US" sz="3100" dirty="0"/>
           </a:p>
         </p:txBody>
       </p:sp>
@@ -4499,7 +4395,7 @@
         </p:nvSpPr>
         <p:spPr>
           <a:xfrm>
-            <a:off x="457200" y="1097280"/>
+            <a:off x="457200" y="1115568"/>
             <a:ext cx="9966960" cy="365760"/>
           </a:xfrm>
           <a:prstGeom prst="rect">
@@ -4516,7 +4412,7 @@
               <a:buNone/>
             </a:pPr>
             <a:r>
-              <a:rPr lang="en-US" sz="1500" dirty="0">
+              <a:rPr lang="en-US" sz="1400" dirty="0">
                 <a:solidFill>
                   <a:srgbClr val="444444"/>
                 </a:solidFill>
@@ -4524,9 +4420,9 @@
                 <a:ea typeface="Calibri" pitchFamily="34" charset="-122"/>
                 <a:cs typeface="Calibri" pitchFamily="34" charset="-120"/>
               </a:rPr>
-              <a:t>Честно и воспроизводимо — скрипт measure_tokens.py</a:t>
+              <a:t>Скрипт measure_tokens.py — тот же промпт, что на инференсе, токенайзер Qwen</a:t>
             </a:r>
-            <a:endParaRPr lang="en-US" sz="1500" dirty="0"/>
+            <a:endParaRPr lang="en-US" sz="1400" dirty="0"/>
           </a:p>
         </p:txBody>
       </p:sp>
@@ -4538,8 +4434,8 @@
         </p:nvSpPr>
         <p:spPr>
           <a:xfrm>
-            <a:off x="457200" y="1965960"/>
-            <a:ext cx="5943600" cy="2926080"/>
+            <a:off x="457200" y="2011680"/>
+            <a:ext cx="5852160" cy="2377440"/>
           </a:xfrm>
           <a:prstGeom prst="rect">
             <a:avLst/>
@@ -4556,7 +4452,7 @@
                 <a:spcPts val="2200"/>
               </a:lnSpc>
               <a:spcAft>
-                <a:spcPts val="1100"/>
+                <a:spcPts val="1000"/>
               </a:spcAft>
               <a:buSzPct val="100000"/>
               <a:buChar char="•"/>
@@ -4570,7 +4466,7 @@
                 <a:ea typeface="Calibri" pitchFamily="34" charset="-122"/>
                 <a:cs typeface="Calibri" pitchFamily="34" charset="-120"/>
               </a:rPr>
-              <a:t>Берём РОВНО тот промпт, что уходит модели на инференсе (тот же код build_prompt)</a:t>
+              <a:t>Строим промпт ровно как боевой инференс (общая функция build_prompt)</a:t>
             </a:r>
             <a:endParaRPr lang="en-US" sz="1600" dirty="0"/>
           </a:p>
@@ -4580,7 +4476,7 @@
                 <a:spcPts val="2200"/>
               </a:lnSpc>
               <a:spcAft>
-                <a:spcPts val="1100"/>
+                <a:spcPts val="1000"/>
               </a:spcAft>
               <a:buSzPct val="100000"/>
               <a:buChar char="•"/>
@@ -4594,7 +4490,7 @@
                 <a:ea typeface="Calibri" pitchFamily="34" charset="-122"/>
                 <a:cs typeface="Calibri" pitchFamily="34" charset="-120"/>
               </a:rPr>
-              <a:t>Считаем токенайзером самой Qwen2.5-Coder, а не сторонним — через её chat-template</a:t>
+              <a:t>Токенизируем самой Qwen2.5-Coder через её chat-template</a:t>
             </a:r>
             <a:endParaRPr lang="en-US" sz="1600" dirty="0"/>
           </a:p>
@@ -4615,7 +4511,7 @@
                 <a:ea typeface="Calibri" pitchFamily="34" charset="-122"/>
                 <a:cs typeface="Calibri" pitchFamily="34" charset="-120"/>
               </a:rPr>
-              <a:t>Один вызов модели на вопрос — это и есть весь бюджет; берём среднее по 91 вопросу</a:t>
+              <a:t>Один вызов на вопрос, берём среднее по 91 вопросу</a:t>
             </a:r>
             <a:endParaRPr lang="en-US" sz="1600" dirty="0"/>
           </a:p>
@@ -4623,7 +4519,49 @@
       </p:sp>
       <p:sp>
         <p:nvSpPr>
-          <p:cNvPr id="7" name="Shape 5"/>
+          <p:cNvPr id="7" name="Text 5"/>
+          <p:cNvSpPr/>
+          <p:nvPr/>
+        </p:nvSpPr>
+        <p:spPr>
+          <a:xfrm>
+            <a:off x="457200" y="4343400"/>
+            <a:ext cx="5852160" cy="1188720"/>
+          </a:xfrm>
+          <a:prstGeom prst="rect">
+            <a:avLst/>
+          </a:prstGeom>
+          <a:noFill/>
+          <a:ln/>
+        </p:spPr>
+        <p:txBody>
+          <a:bodyPr wrap="square" lIns="0" tIns="0" rIns="0" bIns="0" rtlCol="0" anchor="t"/>
+          <a:lstStyle/>
+          <a:p>
+            <a:pPr indent="0" marL="0">
+              <a:lnSpc>
+                <a:spcPts val="1800"/>
+              </a:lnSpc>
+              <a:buNone/>
+            </a:pPr>
+            <a:r>
+              <a:rPr lang="en-US" sz="1300" dirty="0">
+                <a:solidFill>
+                  <a:srgbClr val="444444"/>
+                </a:solidFill>
+                <a:latin typeface="Calibri" pitchFamily="34" charset="0"/>
+                <a:ea typeface="Calibri" pitchFamily="34" charset="-122"/>
+                <a:cs typeface="Calibri" pitchFamily="34" charset="-120"/>
+              </a:rPr>
+              <a:t>Отношение 288 / 90 ≈ 3.2 — вот и вся «экономия контекста». Разброс у schema-less — только от длины самого вопроса.</a:t>
+            </a:r>
+            <a:endParaRPr lang="en-US" sz="1300" dirty="0"/>
+          </a:p>
+        </p:txBody>
+      </p:sp>
+      <p:sp>
+        <p:nvSpPr>
+          <p:cNvPr id="8" name="Shape 6"/>
           <p:cNvSpPr/>
           <p:nvPr/>
         </p:nvSpPr>
@@ -4650,7 +4588,7 @@
       </p:sp>
       <p:sp>
         <p:nvSpPr>
-          <p:cNvPr id="8" name="Text 6"/>
+          <p:cNvPr id="9" name="Text 7"/>
           <p:cNvSpPr/>
           <p:nvPr/>
         </p:nvSpPr>
@@ -4689,13 +4627,13 @@
       </p:sp>
       <p:sp>
         <p:nvSpPr>
-          <p:cNvPr id="9" name="Text 7"/>
+          <p:cNvPr id="10" name="Text 8"/>
           <p:cNvSpPr/>
           <p:nvPr/>
         </p:nvSpPr>
         <p:spPr>
           <a:xfrm>
-            <a:off x="6812280" y="2468880"/>
+            <a:off x="6812280" y="2487168"/>
             <a:ext cx="3657600" cy="822960"/>
           </a:xfrm>
           <a:prstGeom prst="rect">
@@ -4751,7 +4689,7 @@
       </p:sp>
       <p:sp>
         <p:nvSpPr>
-          <p:cNvPr id="10" name="Text 8"/>
+          <p:cNvPr id="11" name="Text 9"/>
           <p:cNvSpPr/>
           <p:nvPr/>
         </p:nvSpPr>
@@ -4790,7 +4728,7 @@
       </p:sp>
       <p:sp>
         <p:nvSpPr>
-          <p:cNvPr id="11" name="Shape 9"/>
+          <p:cNvPr id="12" name="Shape 10"/>
           <p:cNvSpPr/>
           <p:nvPr/>
         </p:nvSpPr>
@@ -4817,7 +4755,7 @@
       </p:sp>
       <p:sp>
         <p:nvSpPr>
-          <p:cNvPr id="12" name="Text 10"/>
+          <p:cNvPr id="13" name="Text 11"/>
           <p:cNvSpPr/>
           <p:nvPr/>
         </p:nvSpPr>
@@ -4856,13 +4794,13 @@
       </p:sp>
       <p:sp>
         <p:nvSpPr>
-          <p:cNvPr id="13" name="Text 11"/>
+          <p:cNvPr id="14" name="Text 12"/>
           <p:cNvSpPr/>
           <p:nvPr/>
         </p:nvSpPr>
         <p:spPr>
           <a:xfrm>
-            <a:off x="6812280" y="4343400"/>
+            <a:off x="6812280" y="4361688"/>
             <a:ext cx="3657600" cy="822960"/>
           </a:xfrm>
           <a:prstGeom prst="rect">
@@ -4890,7 +4828,7 @@
                 <a:ea typeface="Courier New" pitchFamily="34" charset="-122"/>
                 <a:cs typeface="Courier New" pitchFamily="34" charset="-120"/>
               </a:rPr>
-              <a:t>…то же  +  Schema: table(col type, …)</a:t>
+              <a:t>…то же  +  Schema: table(col type,…)</a:t>
             </a:r>
             <a:endParaRPr lang="en-US" sz="1100" dirty="0"/>
           </a:p>
@@ -4918,7 +4856,7 @@
       </p:sp>
       <p:sp>
         <p:nvSpPr>
-          <p:cNvPr id="14" name="Text 12"/>
+          <p:cNvPr id="15" name="Text 13"/>
           <p:cNvSpPr/>
           <p:nvPr/>
         </p:nvSpPr>
@@ -4957,48 +4895,6 @@
       </p:sp>
       <p:sp>
         <p:nvSpPr>
-          <p:cNvPr id="15" name="Text 13"/>
-          <p:cNvSpPr/>
-          <p:nvPr/>
-        </p:nvSpPr>
-        <p:spPr>
-          <a:xfrm>
-            <a:off x="457200" y="4434840"/>
-            <a:ext cx="5943600" cy="1097280"/>
-          </a:xfrm>
-          <a:prstGeom prst="rect">
-            <a:avLst/>
-          </a:prstGeom>
-          <a:noFill/>
-          <a:ln/>
-        </p:spPr>
-        <p:txBody>
-          <a:bodyPr wrap="square" lIns="0" tIns="0" rIns="0" bIns="0" rtlCol="0" anchor="t"/>
-          <a:lstStyle/>
-          <a:p>
-            <a:pPr indent="0" marL="0">
-              <a:lnSpc>
-                <a:spcPts val="1800"/>
-              </a:lnSpc>
-              <a:buNone/>
-            </a:pPr>
-            <a:r>
-              <a:rPr lang="en-US" sz="1300" i="1" dirty="0">
-                <a:solidFill>
-                  <a:srgbClr val="444444"/>
-                </a:solidFill>
-                <a:latin typeface="Calibri" pitchFamily="34" charset="0"/>
-                <a:ea typeface="Calibri" pitchFamily="34" charset="-122"/>
-                <a:cs typeface="Calibri" pitchFamily="34" charset="-120"/>
-              </a:rPr>
-              <a:t>Отношение ×3.18 — вот откуда «контекст в 3.2 раза меньше». Разброс schema-less (± 34.8 токена) — только от длины вопроса, схемы в промпте нет.</a:t>
-            </a:r>
-            <a:endParaRPr lang="en-US" sz="1300" dirty="0"/>
-          </a:p>
-        </p:txBody>
-      </p:sp>
-      <p:sp>
-        <p:nvSpPr>
           <p:cNvPr id="16" name="Text 14"/>
           <p:cNvSpPr/>
           <p:nvPr/>
@@ -5030,7 +4926,7 @@
                 <a:ea typeface="Calibri" pitchFamily="34" charset="-122"/>
                 <a:cs typeface="Calibri" pitchFamily="34" charset="-120"/>
               </a:rPr>
-              <a:t>DB2Model · ветка SFT/LoRA</a:t>
+              <a:t>DB2Model · SFT/LoRA</a:t>
             </a:r>
             <a:endParaRPr lang="en-US" sz="900" dirty="0"/>
           </a:p>
@@ -5132,7 +5028,7 @@
               <a:buNone/>
             </a:pPr>
             <a:r>
-              <a:rPr lang="en-US" sz="3200" b="1" dirty="0">
+              <a:rPr lang="en-US" sz="3100" b="1" dirty="0">
                 <a:solidFill>
                   <a:srgbClr val="FFFFFF"/>
                 </a:solidFill>
@@ -5140,9 +5036,9 @@
                 <a:ea typeface="Calibri" pitchFamily="34" charset="-122"/>
                 <a:cs typeface="Calibri" pitchFamily="34" charset="-120"/>
               </a:rPr>
-              <a:t>Главный результат</a:t>
+              <a:t>Результат</a:t>
             </a:r>
-            <a:endParaRPr lang="en-US" sz="3200" dirty="0"/>
+            <a:endParaRPr lang="en-US" sz="3100" dirty="0"/>
           </a:p>
         </p:txBody>
       </p:sp>
@@ -5171,7 +5067,193 @@
               <a:buNone/>
             </a:pPr>
             <a:r>
-              <a:rPr lang="en-US" sz="1400" dirty="0">
+              <a:rPr lang="en-US" sz="1500" dirty="0">
+                <a:solidFill>
+                  <a:srgbClr val="D0E4FF"/>
+                </a:solidFill>
+                <a:latin typeface="Calibri" pitchFamily="34" charset="0"/>
+                <a:ea typeface="Calibri" pitchFamily="34" charset="-122"/>
+                <a:cs typeface="Calibri" pitchFamily="34" charset="-120"/>
+              </a:rPr>
+              <a:t>target 7B, знание в весах против baseline со схемой в промпте</a:t>
+            </a:r>
+            <a:endParaRPr lang="en-US" sz="1500" dirty="0"/>
+          </a:p>
+        </p:txBody>
+      </p:sp>
+      <p:sp>
+        <p:nvSpPr>
+          <p:cNvPr id="4" name="Text 2"/>
+          <p:cNvSpPr/>
+          <p:nvPr/>
+        </p:nvSpPr>
+        <p:spPr>
+          <a:xfrm>
+            <a:off x="548640" y="2148840"/>
+            <a:ext cx="5120640" cy="1554480"/>
+          </a:xfrm>
+          <a:prstGeom prst="rect">
+            <a:avLst/>
+          </a:prstGeom>
+          <a:noFill/>
+          <a:ln/>
+        </p:spPr>
+        <p:txBody>
+          <a:bodyPr wrap="square" lIns="0" tIns="0" rIns="0" bIns="0" rtlCol="0" anchor="ctr"/>
+          <a:lstStyle/>
+          <a:p>
+            <a:pPr indent="0" marL="0">
+              <a:buNone/>
+            </a:pPr>
+            <a:r>
+              <a:rPr lang="en-US" sz="10000" b="1" dirty="0">
+                <a:solidFill>
+                  <a:srgbClr val="FAB900"/>
+                </a:solidFill>
+                <a:latin typeface="Calibri" pitchFamily="34" charset="0"/>
+                <a:ea typeface="Calibri" pitchFamily="34" charset="-122"/>
+                <a:cs typeface="Calibri" pitchFamily="34" charset="-120"/>
+              </a:rPr>
+              <a:t>41.0%</a:t>
+            </a:r>
+            <a:endParaRPr lang="en-US" sz="10000" dirty="0"/>
+          </a:p>
+        </p:txBody>
+      </p:sp>
+      <p:sp>
+        <p:nvSpPr>
+          <p:cNvPr id="5" name="Text 3"/>
+          <p:cNvSpPr/>
+          <p:nvPr/>
+        </p:nvSpPr>
+        <p:spPr>
+          <a:xfrm>
+            <a:off x="685800" y="3794760"/>
+            <a:ext cx="5486400" cy="548640"/>
+          </a:xfrm>
+          <a:prstGeom prst="rect">
+            <a:avLst/>
+          </a:prstGeom>
+          <a:noFill/>
+          <a:ln/>
+        </p:spPr>
+        <p:txBody>
+          <a:bodyPr wrap="square" lIns="0" tIns="0" rIns="0" bIns="0" rtlCol="0" anchor="t"/>
+          <a:lstStyle/>
+          <a:p>
+            <a:pPr indent="0" marL="0">
+              <a:lnSpc>
+                <a:spcPts val="1900"/>
+              </a:lnSpc>
+              <a:buNone/>
+            </a:pPr>
+            <a:r>
+              <a:rPr lang="en-US" sz="1500" dirty="0">
+                <a:solidFill>
+                  <a:srgbClr val="FFFFFF"/>
+                </a:solidFill>
+                <a:latin typeface="Calibri" pitchFamily="34" charset="0"/>
+                <a:ea typeface="Calibri" pitchFamily="34" charset="-122"/>
+                <a:cs typeface="Calibri" pitchFamily="34" charset="-120"/>
+              </a:rPr>
+              <a:t>execution accuracy, 7B, без схемы в промпте (± 1.4 по 3 сидам)</a:t>
+            </a:r>
+            <a:endParaRPr lang="en-US" sz="1500" dirty="0"/>
+          </a:p>
+        </p:txBody>
+      </p:sp>
+      <p:sp>
+        <p:nvSpPr>
+          <p:cNvPr id="6" name="Text 4"/>
+          <p:cNvSpPr/>
+          <p:nvPr/>
+        </p:nvSpPr>
+        <p:spPr>
+          <a:xfrm>
+            <a:off x="6766560" y="2148840"/>
+            <a:ext cx="4937760" cy="2103120"/>
+          </a:xfrm>
+          <a:prstGeom prst="rect">
+            <a:avLst/>
+          </a:prstGeom>
+          <a:noFill/>
+          <a:ln/>
+        </p:spPr>
+        <p:txBody>
+          <a:bodyPr wrap="square" rtlCol="0" anchor="t"/>
+          <a:lstStyle/>
+          <a:p>
+            <a:pPr indent="0" marL="0">
+              <a:lnSpc>
+                <a:spcPts val="2000"/>
+              </a:lnSpc>
+              <a:buNone/>
+            </a:pPr>
+            <a:r>
+              <a:rPr lang="en-US" sz="1300" dirty="0">
+                <a:solidFill>
+                  <a:srgbClr val="D0E4FF"/>
+                </a:solidFill>
+                <a:latin typeface="Calibri" pitchFamily="34" charset="0"/>
+                <a:ea typeface="Calibri" pitchFamily="34" charset="-122"/>
+                <a:cs typeface="Calibri" pitchFamily="34" charset="-120"/>
+              </a:rPr>
+              <a:t>baseline (7B, схема в промпте)</a:t>
+            </a:r>
+            <a:endParaRPr lang="en-US" sz="1300" dirty="0"/>
+          </a:p>
+          <a:p>
+            <a:pPr indent="0" marL="0">
+              <a:lnSpc>
+                <a:spcPts val="2000"/>
+              </a:lnSpc>
+              <a:spcAft>
+                <a:spcPts val="1600"/>
+              </a:spcAft>
+              <a:buNone/>
+            </a:pPr>
+            <a:r>
+              <a:rPr lang="en-US" sz="1800" b="1" dirty="0">
+                <a:solidFill>
+                  <a:srgbClr val="FFFFFF"/>
+                </a:solidFill>
+                <a:latin typeface="Courier New" pitchFamily="34" charset="0"/>
+                <a:ea typeface="Courier New" pitchFamily="34" charset="-122"/>
+                <a:cs typeface="Courier New" pitchFamily="34" charset="-120"/>
+              </a:rPr>
+              <a:t>30.8% EX      ~288 токенов</a:t>
+            </a:r>
+            <a:endParaRPr lang="en-US" sz="1300" dirty="0"/>
+          </a:p>
+          <a:p>
+            <a:pPr indent="0" marL="0">
+              <a:lnSpc>
+                <a:spcPts val="2000"/>
+              </a:lnSpc>
+              <a:buNone/>
+            </a:pPr>
+            <a:r>
+              <a:rPr lang="en-US" sz="1300" dirty="0">
+                <a:solidFill>
+                  <a:srgbClr val="D0E4FF"/>
+                </a:solidFill>
+                <a:latin typeface="Calibri" pitchFamily="34" charset="0"/>
+                <a:ea typeface="Calibri" pitchFamily="34" charset="-122"/>
+                <a:cs typeface="Calibri" pitchFamily="34" charset="-120"/>
+              </a:rPr>
+              <a:t>наш адаптер (7B, schema-less)</a:t>
+            </a:r>
+            <a:endParaRPr lang="en-US" sz="1300" dirty="0"/>
+          </a:p>
+          <a:p>
+            <a:pPr indent="0" marL="0">
+              <a:lnSpc>
+                <a:spcPts val="2000"/>
+              </a:lnSpc>
+              <a:buNone/>
+            </a:pPr>
+            <a:r>
+              <a:rPr lang="en-US" sz="1800" b="1" dirty="0">
                 <a:solidFill>
                   <a:srgbClr val="FAB900"/>
                 </a:solidFill>
@@ -5179,153 +5261,22 @@
                 <a:ea typeface="Courier New" pitchFamily="34" charset="-122"/>
                 <a:cs typeface="Courier New" pitchFamily="34" charset="-120"/>
               </a:rPr>
-              <a:t>target 7B · знание в весах · пересчёт 10.08.2026</a:t>
+              <a:t>41.0% EX      ~90 токенов</a:t>
             </a:r>
-            <a:endParaRPr lang="en-US" sz="1400" dirty="0"/>
+            <a:endParaRPr lang="en-US" sz="1300" dirty="0"/>
           </a:p>
         </p:txBody>
       </p:sp>
       <p:sp>
         <p:nvSpPr>
-          <p:cNvPr id="4" name="Text 2"/>
+          <p:cNvPr id="7" name="Text 5"/>
           <p:cNvSpPr/>
           <p:nvPr/>
         </p:nvSpPr>
         <p:spPr>
           <a:xfrm>
-            <a:off x="548640" y="1965960"/>
-            <a:ext cx="5852160" cy="1645920"/>
-          </a:xfrm>
-          <a:prstGeom prst="rect">
-            <a:avLst/>
-          </a:prstGeom>
-          <a:noFill/>
-          <a:ln/>
-        </p:spPr>
-        <p:txBody>
-          <a:bodyPr wrap="square" lIns="0" tIns="0" rIns="0" bIns="0" rtlCol="0" anchor="ctr"/>
-          <a:lstStyle/>
-          <a:p>
-            <a:pPr indent="0" marL="0">
-              <a:buNone/>
-            </a:pPr>
-            <a:r>
-              <a:rPr lang="en-US" sz="11000" b="1" dirty="0">
-                <a:solidFill>
-                  <a:srgbClr val="FAB900"/>
-                </a:solidFill>
-                <a:latin typeface="Calibri" pitchFamily="34" charset="0"/>
-                <a:ea typeface="Calibri" pitchFamily="34" charset="-122"/>
-                <a:cs typeface="Calibri" pitchFamily="34" charset="-120"/>
-              </a:rPr>
-              <a:t>41.03%</a:t>
-            </a:r>
-            <a:endParaRPr lang="en-US" sz="11000" dirty="0"/>
-          </a:p>
-        </p:txBody>
-      </p:sp>
-      <p:sp>
-        <p:nvSpPr>
-          <p:cNvPr id="5" name="Text 3"/>
-          <p:cNvSpPr/>
-          <p:nvPr/>
-        </p:nvSpPr>
-        <p:spPr>
-          <a:xfrm>
-            <a:off x="685800" y="3639312"/>
-            <a:ext cx="5852160" cy="457200"/>
-          </a:xfrm>
-          <a:prstGeom prst="rect">
-            <a:avLst/>
-          </a:prstGeom>
-          <a:noFill/>
-          <a:ln/>
-        </p:spPr>
-        <p:txBody>
-          <a:bodyPr wrap="square" lIns="0" tIns="0" rIns="0" bIns="0" rtlCol="0" anchor="ctr"/>
-          <a:lstStyle/>
-          <a:p>
-            <a:pPr indent="0" marL="0">
-              <a:buNone/>
-            </a:pPr>
-            <a:r>
-              <a:rPr lang="en-US" sz="2000" dirty="0">
-                <a:solidFill>
-                  <a:srgbClr val="D0E4FF"/>
-                </a:solidFill>
-                <a:latin typeface="Courier New" pitchFamily="34" charset="0"/>
-                <a:ea typeface="Courier New" pitchFamily="34" charset="-122"/>
-                <a:cs typeface="Courier New" pitchFamily="34" charset="-120"/>
-              </a:rPr>
-              <a:t>± 1.37   </a:t>
-            </a:r>
-            <a:pPr indent="0" marL="0">
-              <a:buNone/>
-            </a:pPr>
-            <a:r>
-              <a:rPr lang="en-US" sz="1800" dirty="0">
-                <a:solidFill>
-                  <a:srgbClr val="FFFFFF"/>
-                </a:solidFill>
-                <a:latin typeface="Calibri" pitchFamily="34" charset="0"/>
-                <a:ea typeface="Calibri" pitchFamily="34" charset="-122"/>
-                <a:cs typeface="Calibri" pitchFamily="34" charset="-120"/>
-              </a:rPr>
-              <a:t>EX, 7B, schema-less</a:t>
-            </a:r>
-            <a:endParaRPr lang="en-US" sz="2000" dirty="0"/>
-          </a:p>
-        </p:txBody>
-      </p:sp>
-      <p:sp>
-        <p:nvSpPr>
-          <p:cNvPr id="6" name="Text 4"/>
-          <p:cNvSpPr/>
-          <p:nvPr/>
-        </p:nvSpPr>
-        <p:spPr>
-          <a:xfrm>
-            <a:off x="6583680" y="2103120"/>
-            <a:ext cx="2651760" cy="548640"/>
-          </a:xfrm>
-          <a:prstGeom prst="rect">
-            <a:avLst/>
-          </a:prstGeom>
-          <a:noFill/>
-          <a:ln/>
-        </p:spPr>
-        <p:txBody>
-          <a:bodyPr wrap="square" lIns="0" tIns="0" rIns="0" bIns="0" rtlCol="0" anchor="ctr"/>
-          <a:lstStyle/>
-          <a:p>
-            <a:pPr indent="0" marL="0">
-              <a:buNone/>
-            </a:pPr>
-            <a:r>
-              <a:rPr lang="en-US" sz="2600" b="1" dirty="0">
-                <a:solidFill>
-                  <a:srgbClr val="D0E4FF"/>
-                </a:solidFill>
-                <a:latin typeface="Courier New" pitchFamily="34" charset="0"/>
-                <a:ea typeface="Courier New" pitchFamily="34" charset="-122"/>
-                <a:cs typeface="Courier New" pitchFamily="34" charset="-120"/>
-              </a:rPr>
-              <a:t>+10.3 п.п.</a:t>
-            </a:r>
-            <a:endParaRPr lang="en-US" sz="2600" dirty="0"/>
-          </a:p>
-        </p:txBody>
-      </p:sp>
-      <p:sp>
-        <p:nvSpPr>
-          <p:cNvPr id="7" name="Text 5"/>
-          <p:cNvSpPr/>
-          <p:nvPr/>
-        </p:nvSpPr>
-        <p:spPr>
-          <a:xfrm>
-            <a:off x="6583680" y="2633472"/>
-            <a:ext cx="2651760" cy="914400"/>
+            <a:off x="6766560" y="4343400"/>
+            <a:ext cx="4937760" cy="1463040"/>
           </a:xfrm>
           <a:prstGeom prst="rect">
             <a:avLst/>
@@ -5339,12 +5290,12 @@
           <a:p>
             <a:pPr indent="0" marL="0">
               <a:lnSpc>
-                <a:spcPts val="1500"/>
+                <a:spcPts val="1900"/>
               </a:lnSpc>
               <a:buNone/>
             </a:pPr>
             <a:r>
-              <a:rPr lang="en-US" sz="1250" dirty="0">
+              <a:rPr lang="en-US" sz="1300" dirty="0">
                 <a:solidFill>
                   <a:srgbClr val="D0E4FF"/>
                 </a:solidFill>
@@ -5352,258 +5303,15 @@
                 <a:ea typeface="Calibri" pitchFamily="34" charset="-122"/>
                 <a:cs typeface="Calibri" pitchFamily="34" charset="-120"/>
               </a:rPr>
-              <a:t>над baseline 7B (30.77%), ≈ 7.5 σ</a:t>
+              <a:t>+10 п.п. точнее и втрое короче контекст. Та же модель без схемы и без адаптера (zeroshot) даёт лишь 5.5% — значит прирост от обучения, а не от базовой модели.</a:t>
             </a:r>
-            <a:endParaRPr lang="en-US" sz="1250" dirty="0"/>
+            <a:endParaRPr lang="en-US" sz="1300" dirty="0"/>
           </a:p>
         </p:txBody>
       </p:sp>
       <p:sp>
         <p:nvSpPr>
           <p:cNvPr id="8" name="Text 6"/>
-          <p:cNvSpPr/>
-          <p:nvPr/>
-        </p:nvSpPr>
-        <p:spPr>
-          <a:xfrm>
-            <a:off x="9326880" y="2103120"/>
-            <a:ext cx="2651760" cy="548640"/>
-          </a:xfrm>
-          <a:prstGeom prst="rect">
-            <a:avLst/>
-          </a:prstGeom>
-          <a:noFill/>
-          <a:ln/>
-        </p:spPr>
-        <p:txBody>
-          <a:bodyPr wrap="square" lIns="0" tIns="0" rIns="0" bIns="0" rtlCol="0" anchor="ctr"/>
-          <a:lstStyle/>
-          <a:p>
-            <a:pPr indent="0" marL="0">
-              <a:buNone/>
-            </a:pPr>
-            <a:r>
-              <a:rPr lang="en-US" sz="2600" b="1" dirty="0">
-                <a:solidFill>
-                  <a:srgbClr val="D0E4FF"/>
-                </a:solidFill>
-                <a:latin typeface="Courier New" pitchFamily="34" charset="0"/>
-                <a:ea typeface="Courier New" pitchFamily="34" charset="-122"/>
-                <a:cs typeface="Courier New" pitchFamily="34" charset="-120"/>
-              </a:rPr>
-              <a:t>×3.2</a:t>
-            </a:r>
-            <a:endParaRPr lang="en-US" sz="2600" dirty="0"/>
-          </a:p>
-        </p:txBody>
-      </p:sp>
-      <p:sp>
-        <p:nvSpPr>
-          <p:cNvPr id="9" name="Text 7"/>
-          <p:cNvSpPr/>
-          <p:nvPr/>
-        </p:nvSpPr>
-        <p:spPr>
-          <a:xfrm>
-            <a:off x="9326880" y="2633472"/>
-            <a:ext cx="2651760" cy="914400"/>
-          </a:xfrm>
-          <a:prstGeom prst="rect">
-            <a:avLst/>
-          </a:prstGeom>
-          <a:noFill/>
-          <a:ln/>
-        </p:spPr>
-        <p:txBody>
-          <a:bodyPr wrap="square" lIns="0" tIns="0" rIns="0" bIns="0" rtlCol="0" anchor="t"/>
-          <a:lstStyle/>
-          <a:p>
-            <a:pPr indent="0" marL="0">
-              <a:lnSpc>
-                <a:spcPts val="1500"/>
-              </a:lnSpc>
-              <a:buNone/>
-            </a:pPr>
-            <a:r>
-              <a:rPr lang="en-US" sz="1250" dirty="0">
-                <a:solidFill>
-                  <a:srgbClr val="D0E4FF"/>
-                </a:solidFill>
-                <a:latin typeface="Calibri" pitchFamily="34" charset="0"/>
-                <a:ea typeface="Calibri" pitchFamily="34" charset="-122"/>
-                <a:cs typeface="Calibri" pitchFamily="34" charset="-120"/>
-              </a:rPr>
-              <a:t>меньше контекст (90.6 vs 288.2 токена)</a:t>
-            </a:r>
-            <a:endParaRPr lang="en-US" sz="1250" dirty="0"/>
-          </a:p>
-        </p:txBody>
-      </p:sp>
-      <p:sp>
-        <p:nvSpPr>
-          <p:cNvPr id="10" name="Text 8"/>
-          <p:cNvSpPr/>
-          <p:nvPr/>
-        </p:nvSpPr>
-        <p:spPr>
-          <a:xfrm>
-            <a:off x="6583680" y="3794760"/>
-            <a:ext cx="2651760" cy="548640"/>
-          </a:xfrm>
-          <a:prstGeom prst="rect">
-            <a:avLst/>
-          </a:prstGeom>
-          <a:noFill/>
-          <a:ln/>
-        </p:spPr>
-        <p:txBody>
-          <a:bodyPr wrap="square" lIns="0" tIns="0" rIns="0" bIns="0" rtlCol="0" anchor="ctr"/>
-          <a:lstStyle/>
-          <a:p>
-            <a:pPr indent="0" marL="0">
-              <a:buNone/>
-            </a:pPr>
-            <a:r>
-              <a:rPr lang="en-US" sz="2600" b="1" dirty="0">
-                <a:solidFill>
-                  <a:srgbClr val="D0E4FF"/>
-                </a:solidFill>
-                <a:latin typeface="Courier New" pitchFamily="34" charset="0"/>
-                <a:ea typeface="Courier New" pitchFamily="34" charset="-122"/>
-                <a:cs typeface="Courier New" pitchFamily="34" charset="-120"/>
-              </a:rPr>
-              <a:t>×1.44</a:t>
-            </a:r>
-            <a:endParaRPr lang="en-US" sz="2600" dirty="0"/>
-          </a:p>
-        </p:txBody>
-      </p:sp>
-      <p:sp>
-        <p:nvSpPr>
-          <p:cNvPr id="11" name="Text 9"/>
-          <p:cNvSpPr/>
-          <p:nvPr/>
-        </p:nvSpPr>
-        <p:spPr>
-          <a:xfrm>
-            <a:off x="6583680" y="4325112"/>
-            <a:ext cx="2651760" cy="914400"/>
-          </a:xfrm>
-          <a:prstGeom prst="rect">
-            <a:avLst/>
-          </a:prstGeom>
-          <a:noFill/>
-          <a:ln/>
-        </p:spPr>
-        <p:txBody>
-          <a:bodyPr wrap="square" lIns="0" tIns="0" rIns="0" bIns="0" rtlCol="0" anchor="t"/>
-          <a:lstStyle/>
-          <a:p>
-            <a:pPr indent="0" marL="0">
-              <a:lnSpc>
-                <a:spcPts val="1500"/>
-              </a:lnSpc>
-              <a:buNone/>
-            </a:pPr>
-            <a:r>
-              <a:rPr lang="en-US" sz="1250" dirty="0">
-                <a:solidFill>
-                  <a:srgbClr val="D0E4FF"/>
-                </a:solidFill>
-                <a:latin typeface="Calibri" pitchFamily="34" charset="0"/>
-                <a:ea typeface="Calibri" pitchFamily="34" charset="-122"/>
-                <a:cs typeface="Calibri" pitchFamily="34" charset="-120"/>
-              </a:rPr>
-              <a:t>быстрее генерация (короче prefill)</a:t>
-            </a:r>
-            <a:endParaRPr lang="en-US" sz="1250" dirty="0"/>
-          </a:p>
-        </p:txBody>
-      </p:sp>
-      <p:sp>
-        <p:nvSpPr>
-          <p:cNvPr id="12" name="Text 10"/>
-          <p:cNvSpPr/>
-          <p:nvPr/>
-        </p:nvSpPr>
-        <p:spPr>
-          <a:xfrm>
-            <a:off x="9326880" y="3794760"/>
-            <a:ext cx="2651760" cy="548640"/>
-          </a:xfrm>
-          <a:prstGeom prst="rect">
-            <a:avLst/>
-          </a:prstGeom>
-          <a:noFill/>
-          <a:ln/>
-        </p:spPr>
-        <p:txBody>
-          <a:bodyPr wrap="square" lIns="0" tIns="0" rIns="0" bIns="0" rtlCol="0" anchor="ctr"/>
-          <a:lstStyle/>
-          <a:p>
-            <a:pPr indent="0" marL="0">
-              <a:buNone/>
-            </a:pPr>
-            <a:r>
-              <a:rPr lang="en-US" sz="2600" b="1" dirty="0">
-                <a:solidFill>
-                  <a:srgbClr val="D0E4FF"/>
-                </a:solidFill>
-                <a:latin typeface="Courier New" pitchFamily="34" charset="0"/>
-                <a:ea typeface="Courier New" pitchFamily="34" charset="-122"/>
-                <a:cs typeface="Courier New" pitchFamily="34" charset="-120"/>
-              </a:rPr>
-              <a:t>5.49%</a:t>
-            </a:r>
-            <a:endParaRPr lang="en-US" sz="2600" dirty="0"/>
-          </a:p>
-        </p:txBody>
-      </p:sp>
-      <p:sp>
-        <p:nvSpPr>
-          <p:cNvPr id="13" name="Text 11"/>
-          <p:cNvSpPr/>
-          <p:nvPr/>
-        </p:nvSpPr>
-        <p:spPr>
-          <a:xfrm>
-            <a:off x="9326880" y="4325112"/>
-            <a:ext cx="2651760" cy="914400"/>
-          </a:xfrm>
-          <a:prstGeom prst="rect">
-            <a:avLst/>
-          </a:prstGeom>
-          <a:noFill/>
-          <a:ln/>
-        </p:spPr>
-        <p:txBody>
-          <a:bodyPr wrap="square" lIns="0" tIns="0" rIns="0" bIns="0" rtlCol="0" anchor="t"/>
-          <a:lstStyle/>
-          <a:p>
-            <a:pPr indent="0" marL="0">
-              <a:lnSpc>
-                <a:spcPts val="1500"/>
-              </a:lnSpc>
-              <a:buNone/>
-            </a:pPr>
-            <a:r>
-              <a:rPr lang="en-US" sz="1250" dirty="0">
-                <a:solidFill>
-                  <a:srgbClr val="D0E4FF"/>
-                </a:solidFill>
-                <a:latin typeface="Calibri" pitchFamily="34" charset="0"/>
-                <a:ea typeface="Calibri" pitchFamily="34" charset="-122"/>
-                <a:cs typeface="Calibri" pitchFamily="34" charset="-120"/>
-              </a:rPr>
-              <a:t>zeroshot-контроль: вклад адаптера реален</a:t>
-            </a:r>
-            <a:endParaRPr lang="en-US" sz="1250" dirty="0"/>
-          </a:p>
-        </p:txBody>
-      </p:sp>
-      <p:sp>
-        <p:nvSpPr>
-          <p:cNvPr id="14" name="Text 12"/>
           <p:cNvSpPr/>
           <p:nvPr/>
         </p:nvSpPr>
@@ -5634,7 +5342,7 @@
                 <a:ea typeface="Calibri" pitchFamily="34" charset="-122"/>
                 <a:cs typeface="Calibri" pitchFamily="34" charset="-120"/>
               </a:rPr>
-              <a:t>DB2Model · ветка SFT/LoRA</a:t>
+              <a:t>DB2Model · SFT/LoRA</a:t>
             </a:r>
             <a:endParaRPr lang="en-US" sz="900" dirty="0"/>
           </a:p>
@@ -5642,7 +5350,7 @@
       </p:sp>
       <p:sp>
         <p:nvSpPr>
-          <p:cNvPr id="15" name="Text 13"/>
+          <p:cNvPr id="9" name="Text 7"/>
           <p:cNvSpPr/>
           <p:nvPr/>
         </p:nvSpPr>
@@ -5773,7 +5481,7 @@
         </p:nvSpPr>
         <p:spPr>
           <a:xfrm>
-            <a:off x="457200" y="384048"/>
+            <a:off x="457200" y="411480"/>
             <a:ext cx="9875520" cy="685800"/>
           </a:xfrm>
           <a:prstGeom prst="rect">
@@ -5790,7 +5498,7 @@
               <a:buNone/>
             </a:pPr>
             <a:r>
-              <a:rPr lang="en-US" sz="3200" b="1" dirty="0">
+              <a:rPr lang="en-US" sz="3100" b="1" dirty="0">
                 <a:solidFill>
                   <a:srgbClr val="102D69"/>
                 </a:solidFill>
@@ -5798,9 +5506,9 @@
                 <a:ea typeface="Calibri" pitchFamily="34" charset="-122"/>
                 <a:cs typeface="Calibri" pitchFamily="34" charset="-120"/>
               </a:rPr>
-              <a:t>Знание в весах обгоняет контекст на обоих размерах</a:t>
+              <a:t>Точность по армам</a:t>
             </a:r>
-            <a:endParaRPr lang="en-US" sz="3200" dirty="0"/>
+            <a:endParaRPr lang="en-US" sz="3100" dirty="0"/>
           </a:p>
         </p:txBody>
       </p:sp>
@@ -5812,7 +5520,7 @@
         </p:nvSpPr>
         <p:spPr>
           <a:xfrm>
-            <a:off x="457200" y="1097280"/>
+            <a:off x="457200" y="1115568"/>
             <a:ext cx="9966960" cy="365760"/>
           </a:xfrm>
           <a:prstGeom prst="rect">
@@ -5829,7 +5537,7 @@
               <a:buNone/>
             </a:pPr>
             <a:r>
-              <a:rPr lang="en-US" sz="1500" dirty="0">
+              <a:rPr lang="en-US" sz="1400" dirty="0">
                 <a:solidFill>
                   <a:srgbClr val="444444"/>
                 </a:solidFill>
@@ -5837,9 +5545,9 @@
                 <a:ea typeface="Calibri" pitchFamily="34" charset="-122"/>
                 <a:cs typeface="Calibri" pitchFamily="34" charset="-120"/>
               </a:rPr>
-              <a:t>Прирост разный: +6.6 п.п. на 3B и +10.3 п.п. на 7B</a:t>
+              <a:t>Пять конфигураций, один split; lora — среднее по 3 сидам</a:t>
             </a:r>
-            <a:endParaRPr lang="en-US" sz="1500" dirty="0"/>
+            <a:endParaRPr lang="en-US" sz="1400" dirty="0"/>
           </a:p>
         </p:txBody>
       </p:sp>
@@ -5850,8 +5558,8 @@
           <p:nvPr/>
         </p:nvGraphicFramePr>
         <p:xfrm>
-          <a:off x="457200" y="1965960"/>
-          <a:ext cx="6949440" cy="4160520"/>
+          <a:off x="457200" y="2011680"/>
+          <a:ext cx="7315200" cy="4114800"/>
         </p:xfrm>
         <a:graphic xmlns:a="http://schemas.openxmlformats.org/drawingml/2006/main">
           <a:graphicData uri="http://schemas.openxmlformats.org/drawingml/2006/chart">
@@ -5861,30 +5569,62 @@
       </p:graphicFrame>
       <p:sp>
         <p:nvSpPr>
-          <p:cNvPr id="7" name="Shape 4"/>
+          <p:cNvPr id="7" name="Text 4"/>
           <p:cNvSpPr/>
           <p:nvPr/>
         </p:nvSpPr>
         <p:spPr>
           <a:xfrm>
-            <a:off x="7680960" y="1965960"/>
-            <a:ext cx="4023360" cy="4160520"/>
-          </a:xfrm>
-          <a:prstGeom prst="roundRect">
-            <a:avLst>
-              <a:gd name="adj" fmla="val 909"/>
-            </a:avLst>
-          </a:prstGeom>
-          <a:solidFill>
-            <a:srgbClr val="EEF4FF"/>
-          </a:solidFill>
-          <a:ln w="12700">
-            <a:solidFill>
-              <a:srgbClr val="C9B894"/>
-            </a:solidFill>
-            <a:prstDash val="solid"/>
-          </a:ln>
-        </p:spPr>
+            <a:off x="8046720" y="2651760"/>
+            <a:ext cx="3657600" cy="1463040"/>
+          </a:xfrm>
+          <a:prstGeom prst="rect">
+            <a:avLst/>
+          </a:prstGeom>
+          <a:noFill/>
+          <a:ln/>
+        </p:spPr>
+        <p:txBody>
+          <a:bodyPr wrap="square" rtlCol="0" anchor="t"/>
+          <a:lstStyle/>
+          <a:p>
+            <a:pPr indent="0" marL="0">
+              <a:spcAft>
+                <a:spcPts val="1200"/>
+              </a:spcAft>
+              <a:buNone/>
+            </a:pPr>
+            <a:r>
+              <a:rPr lang="en-US" sz="1400" dirty="0">
+                <a:solidFill>
+                  <a:srgbClr val="102D69"/>
+                </a:solidFill>
+                <a:latin typeface="Courier New" pitchFamily="34" charset="0"/>
+                <a:ea typeface="Courier New" pitchFamily="34" charset="-122"/>
+                <a:cs typeface="Courier New" pitchFamily="34" charset="-120"/>
+              </a:rPr>
+              <a:t>3B:  30.8% vs 24.2%   (+6.6 п.п.)</a:t>
+            </a:r>
+            <a:endParaRPr lang="en-US" sz="1400" dirty="0"/>
+          </a:p>
+          <a:p>
+            <a:pPr indent="0" marL="0">
+              <a:buNone/>
+            </a:pPr>
+            <a:r>
+              <a:rPr lang="en-US" sz="1400" dirty="0">
+                <a:solidFill>
+                  <a:srgbClr val="102D69"/>
+                </a:solidFill>
+                <a:latin typeface="Courier New" pitchFamily="34" charset="0"/>
+                <a:ea typeface="Courier New" pitchFamily="34" charset="-122"/>
+                <a:cs typeface="Courier New" pitchFamily="34" charset="-120"/>
+              </a:rPr>
+              <a:t>7B:  41.0% vs 30.8%   (+10.3 п.п.)</a:t>
+            </a:r>
+            <a:endParaRPr lang="en-US" sz="1400" dirty="0"/>
+          </a:p>
+        </p:txBody>
       </p:sp>
       <p:sp>
         <p:nvSpPr>
@@ -5894,8 +5634,8 @@
         </p:nvSpPr>
         <p:spPr>
           <a:xfrm>
-            <a:off x="7909560" y="2331720"/>
-            <a:ext cx="3566160" cy="731520"/>
+            <a:off x="8046720" y="4023360"/>
+            <a:ext cx="3657600" cy="1280160"/>
           </a:xfrm>
           <a:prstGeom prst="rect">
             <a:avLst/>
@@ -5909,24 +5649,7 @@
           <a:p>
             <a:pPr indent="0" marL="0">
               <a:lnSpc>
-                <a:spcPts val="1800"/>
-              </a:lnSpc>
-              <a:buNone/>
-            </a:pPr>
-            <a:r>
-              <a:rPr lang="en-US" sz="1400" b="1" dirty="0">
-                <a:solidFill>
-                  <a:srgbClr val="102D69"/>
-                </a:solidFill>
-                <a:latin typeface="Calibri" pitchFamily="34" charset="0"/>
-                <a:ea typeface="Calibri" pitchFamily="34" charset="-122"/>
-                <a:cs typeface="Calibri" pitchFamily="34" charset="-120"/>
-              </a:rPr>
-              <a:t>3B: </a:t>
-            </a:r>
-            <a:pPr indent="0" marL="0">
-              <a:lnSpc>
-                <a:spcPts val="1800"/>
+                <a:spcPts val="1900"/>
               </a:lnSpc>
               <a:buNone/>
             </a:pPr>
@@ -5939,7 +5662,7 @@
                 <a:ea typeface="Calibri" pitchFamily="34" charset="-122"/>
                 <a:cs typeface="Calibri" pitchFamily="34" charset="-120"/>
               </a:rPr>
-              <a:t>30.77 ± 1.55 vs 24.18 → +6.6 п.п. (≈4 σ)</a:t>
+              <a:t>На обоих размерах адаптер без схемы точнее baseline со схемой.</a:t>
             </a:r>
             <a:endParaRPr lang="en-US" sz="1400" dirty="0"/>
           </a:p>
@@ -5948,107 +5671,6 @@
       <p:sp>
         <p:nvSpPr>
           <p:cNvPr id="9" name="Text 6"/>
-          <p:cNvSpPr/>
-          <p:nvPr/>
-        </p:nvSpPr>
-        <p:spPr>
-          <a:xfrm>
-            <a:off x="7909560" y="3108960"/>
-            <a:ext cx="3566160" cy="731520"/>
-          </a:xfrm>
-          <a:prstGeom prst="rect">
-            <a:avLst/>
-          </a:prstGeom>
-          <a:noFill/>
-          <a:ln/>
-        </p:spPr>
-        <p:txBody>
-          <a:bodyPr wrap="square" lIns="0" tIns="0" rIns="0" bIns="0" rtlCol="0" anchor="t"/>
-          <a:lstStyle/>
-          <a:p>
-            <a:pPr indent="0" marL="0">
-              <a:lnSpc>
-                <a:spcPts val="1800"/>
-              </a:lnSpc>
-              <a:buNone/>
-            </a:pPr>
-            <a:r>
-              <a:rPr lang="en-US" sz="1400" b="1" dirty="0">
-                <a:solidFill>
-                  <a:srgbClr val="102D69"/>
-                </a:solidFill>
-                <a:latin typeface="Calibri" pitchFamily="34" charset="0"/>
-                <a:ea typeface="Calibri" pitchFamily="34" charset="-122"/>
-                <a:cs typeface="Calibri" pitchFamily="34" charset="-120"/>
-              </a:rPr>
-              <a:t>7B: </a:t>
-            </a:r>
-            <a:pPr indent="0" marL="0">
-              <a:lnSpc>
-                <a:spcPts val="1800"/>
-              </a:lnSpc>
-              <a:buNone/>
-            </a:pPr>
-            <a:r>
-              <a:rPr lang="en-US" sz="1400" dirty="0">
-                <a:solidFill>
-                  <a:srgbClr val="444444"/>
-                </a:solidFill>
-                <a:latin typeface="Calibri" pitchFamily="34" charset="0"/>
-                <a:ea typeface="Calibri" pitchFamily="34" charset="-122"/>
-                <a:cs typeface="Calibri" pitchFamily="34" charset="-120"/>
-              </a:rPr>
-              <a:t>41.03 ± 1.37 vs 30.77 → +10.3 п.п. (≈7.5 σ)</a:t>
-            </a:r>
-            <a:endParaRPr lang="en-US" sz="1400" dirty="0"/>
-          </a:p>
-        </p:txBody>
-      </p:sp>
-      <p:sp>
-        <p:nvSpPr>
-          <p:cNvPr id="10" name="Text 7"/>
-          <p:cNvSpPr/>
-          <p:nvPr/>
-        </p:nvSpPr>
-        <p:spPr>
-          <a:xfrm>
-            <a:off x="7909560" y="4023360"/>
-            <a:ext cx="3566160" cy="1828800"/>
-          </a:xfrm>
-          <a:prstGeom prst="rect">
-            <a:avLst/>
-          </a:prstGeom>
-          <a:noFill/>
-          <a:ln/>
-        </p:spPr>
-        <p:txBody>
-          <a:bodyPr wrap="square" lIns="0" tIns="0" rIns="0" bIns="0" rtlCol="0" anchor="t"/>
-          <a:lstStyle/>
-          <a:p>
-            <a:pPr indent="0" marL="0">
-              <a:lnSpc>
-                <a:spcPts val="1800"/>
-              </a:lnSpc>
-              <a:buNone/>
-            </a:pPr>
-            <a:r>
-              <a:rPr lang="en-US" sz="1300" i="1" dirty="0">
-                <a:solidFill>
-                  <a:srgbClr val="444444"/>
-                </a:solidFill>
-                <a:latin typeface="Calibri" pitchFamily="34" charset="0"/>
-                <a:ea typeface="Calibri" pitchFamily="34" charset="-122"/>
-                <a:cs typeface="Calibri" pitchFamily="34" charset="-120"/>
-              </a:rPr>
-              <a:t>Контроль zeroshot (5.49%) — без схемы и без адаптера. +25 п.п. переносит именно обучение, а не базовая модель.</a:t>
-            </a:r>
-            <a:endParaRPr lang="en-US" sz="1300" dirty="0"/>
-          </a:p>
-        </p:txBody>
-      </p:sp>
-      <p:sp>
-        <p:nvSpPr>
-          <p:cNvPr id="11" name="Text 8"/>
           <p:cNvSpPr/>
           <p:nvPr/>
         </p:nvSpPr>
@@ -6079,7 +5701,7 @@
                 <a:ea typeface="Calibri" pitchFamily="34" charset="-122"/>
                 <a:cs typeface="Calibri" pitchFamily="34" charset="-120"/>
               </a:rPr>
-              <a:t>DB2Model · ветка SFT/LoRA</a:t>
+              <a:t>DB2Model · SFT/LoRA</a:t>
             </a:r>
             <a:endParaRPr lang="en-US" sz="900" dirty="0"/>
           </a:p>
@@ -6087,7 +5709,7 @@
       </p:sp>
       <p:sp>
         <p:nvSpPr>
-          <p:cNvPr id="12" name="Text 9"/>
+          <p:cNvPr id="10" name="Text 7"/>
           <p:cNvSpPr/>
           <p:nvPr/>
         </p:nvSpPr>
@@ -6218,7 +5840,7 @@
         </p:nvSpPr>
         <p:spPr>
           <a:xfrm>
-            <a:off x="457200" y="384048"/>
+            <a:off x="457200" y="411480"/>
             <a:ext cx="9875520" cy="685800"/>
           </a:xfrm>
           <a:prstGeom prst="rect">
@@ -6235,7 +5857,7 @@
               <a:buNone/>
             </a:pPr>
             <a:r>
-              <a:rPr lang="en-US" sz="3200" b="1" dirty="0">
+              <a:rPr lang="en-US" sz="3100" b="1" dirty="0">
                 <a:solidFill>
                   <a:srgbClr val="102D69"/>
                 </a:solidFill>
@@ -6243,9 +5865,9 @@
                 <a:ea typeface="Calibri" pitchFamily="34" charset="-122"/>
                 <a:cs typeface="Calibri" pitchFamily="34" charset="-120"/>
               </a:rPr>
-              <a:t>Что даёт прирост — объём синтетики</a:t>
+              <a:t>Влияние объёма данных</a:t>
             </a:r>
-            <a:endParaRPr lang="en-US" sz="3200" dirty="0"/>
+            <a:endParaRPr lang="en-US" sz="3100" dirty="0"/>
           </a:p>
         </p:txBody>
       </p:sp>
@@ -6257,7 +5879,7 @@
         </p:nvSpPr>
         <p:spPr>
           <a:xfrm>
-            <a:off x="457200" y="1097280"/>
+            <a:off x="457200" y="1115568"/>
             <a:ext cx="9966960" cy="365760"/>
           </a:xfrm>
           <a:prstGeom prst="rect">
@@ -6271,6 +5893,64 @@
           <a:lstStyle/>
           <a:p>
             <a:pPr indent="0" marL="0">
+              <a:buNone/>
+            </a:pPr>
+            <a:r>
+              <a:rPr lang="en-US" sz="1400" dirty="0">
+                <a:solidFill>
+                  <a:srgbClr val="444444"/>
+                </a:solidFill>
+                <a:latin typeface="Calibri" pitchFamily="34" charset="0"/>
+                <a:ea typeface="Calibri" pitchFamily="34" charset="-122"/>
+                <a:cs typeface="Calibri" pitchFamily="34" charset="-120"/>
+              </a:rPr>
+              <a:t>EX в зависимости от числа обучающих пар (target 3B)</a:t>
+            </a:r>
+            <a:endParaRPr lang="en-US" sz="1400" dirty="0"/>
+          </a:p>
+        </p:txBody>
+      </p:sp>
+      <p:graphicFrame>
+        <p:nvGraphicFramePr>
+          <p:cNvPr id="6" name="Chart 0" descr=""/>
+          <p:cNvGraphicFramePr/>
+          <p:nvPr/>
+        </p:nvGraphicFramePr>
+        <p:xfrm>
+          <a:off x="457200" y="2011680"/>
+          <a:ext cx="7315200" cy="4114800"/>
+        </p:xfrm>
+        <a:graphic xmlns:a="http://schemas.openxmlformats.org/drawingml/2006/main">
+          <a:graphicData uri="http://schemas.openxmlformats.org/drawingml/2006/chart">
+            <c:chart xmlns:c="http://schemas.openxmlformats.org/drawingml/2006/chart" r:id="rId1"/>
+          </a:graphicData>
+        </a:graphic>
+      </p:graphicFrame>
+      <p:sp>
+        <p:nvSpPr>
+          <p:cNvPr id="7" name="Text 4"/>
+          <p:cNvSpPr/>
+          <p:nvPr/>
+        </p:nvSpPr>
+        <p:spPr>
+          <a:xfrm>
+            <a:off x="8046720" y="2651760"/>
+            <a:ext cx="3657600" cy="2743200"/>
+          </a:xfrm>
+          <a:prstGeom prst="rect">
+            <a:avLst/>
+          </a:prstGeom>
+          <a:noFill/>
+          <a:ln/>
+        </p:spPr>
+        <p:txBody>
+          <a:bodyPr wrap="square" lIns="0" tIns="0" rIns="0" bIns="0" rtlCol="0" anchor="t"/>
+          <a:lstStyle/>
+          <a:p>
+            <a:pPr indent="0" marL="0">
+              <a:lnSpc>
+                <a:spcPts val="2100"/>
+              </a:lnSpc>
               <a:buNone/>
             </a:pPr>
             <a:r>
@@ -6282,181 +5962,15 @@
                 <a:ea typeface="Calibri" pitchFamily="34" charset="-122"/>
                 <a:cs typeface="Calibri" pitchFamily="34" charset="-120"/>
               </a:rPr>
-              <a:t>Единственный ablation-эффект, устойчивый за пределами шума</a:t>
+              <a:t>EX растёт с 9.9 до 27.8% при росте набора в 23 раза — кривая ещё не вышла на плато. Это самый надёжный рычаг: данных нужно больше.</a:t>
             </a:r>
             <a:endParaRPr lang="en-US" sz="1500" dirty="0"/>
           </a:p>
         </p:txBody>
       </p:sp>
-      <p:graphicFrame>
-        <p:nvGraphicFramePr>
-          <p:cNvPr id="6" name="Chart 0" descr=""/>
-          <p:cNvGraphicFramePr/>
-          <p:nvPr/>
-        </p:nvGraphicFramePr>
-        <p:xfrm>
-          <a:off x="457200" y="1965960"/>
-          <a:ext cx="6949440" cy="4160520"/>
-        </p:xfrm>
-        <a:graphic xmlns:a="http://schemas.openxmlformats.org/drawingml/2006/main">
-          <a:graphicData uri="http://schemas.openxmlformats.org/drawingml/2006/chart">
-            <c:chart xmlns:c="http://schemas.openxmlformats.org/drawingml/2006/chart" r:id="rId1"/>
-          </a:graphicData>
-        </a:graphic>
-      </p:graphicFrame>
-      <p:sp>
-        <p:nvSpPr>
-          <p:cNvPr id="7" name="Shape 4"/>
-          <p:cNvSpPr/>
-          <p:nvPr/>
-        </p:nvSpPr>
-        <p:spPr>
-          <a:xfrm>
-            <a:off x="7680960" y="1965960"/>
-            <a:ext cx="4023360" cy="4160520"/>
-          </a:xfrm>
-          <a:prstGeom prst="roundRect">
-            <a:avLst>
-              <a:gd name="adj" fmla="val 909"/>
-            </a:avLst>
-          </a:prstGeom>
-          <a:solidFill>
-            <a:srgbClr val="102D69"/>
-          </a:solidFill>
-          <a:ln w="12700">
-            <a:solidFill>
-              <a:srgbClr val="102D69"/>
-            </a:solidFill>
-            <a:prstDash val="solid"/>
-          </a:ln>
-        </p:spPr>
-      </p:sp>
       <p:sp>
         <p:nvSpPr>
           <p:cNvPr id="8" name="Text 5"/>
-          <p:cNvSpPr/>
-          <p:nvPr/>
-        </p:nvSpPr>
-        <p:spPr>
-          <a:xfrm>
-            <a:off x="7909560" y="2331720"/>
-            <a:ext cx="3566160" cy="640080"/>
-          </a:xfrm>
-          <a:prstGeom prst="rect">
-            <a:avLst/>
-          </a:prstGeom>
-          <a:noFill/>
-          <a:ln/>
-        </p:spPr>
-        <p:txBody>
-          <a:bodyPr wrap="square" lIns="0" tIns="0" rIns="0" bIns="0" rtlCol="0" anchor="ctr"/>
-          <a:lstStyle/>
-          <a:p>
-            <a:pPr indent="0" marL="0">
-              <a:buNone/>
-            </a:pPr>
-            <a:r>
-              <a:rPr lang="en-US" sz="2600" b="1" dirty="0">
-                <a:solidFill>
-                  <a:srgbClr val="FAB900"/>
-                </a:solidFill>
-                <a:latin typeface="Courier New" pitchFamily="34" charset="0"/>
-                <a:ea typeface="Courier New" pitchFamily="34" charset="-122"/>
-                <a:cs typeface="Courier New" pitchFamily="34" charset="-120"/>
-              </a:rPr>
-              <a:t>9.9 → 27.84%</a:t>
-            </a:r>
-            <a:endParaRPr lang="en-US" sz="2600" dirty="0"/>
-          </a:p>
-        </p:txBody>
-      </p:sp>
-      <p:sp>
-        <p:nvSpPr>
-          <p:cNvPr id="9" name="Text 6"/>
-          <p:cNvSpPr/>
-          <p:nvPr/>
-        </p:nvSpPr>
-        <p:spPr>
-          <a:xfrm>
-            <a:off x="7909560" y="2971800"/>
-            <a:ext cx="3566160" cy="640080"/>
-          </a:xfrm>
-          <a:prstGeom prst="rect">
-            <a:avLst/>
-          </a:prstGeom>
-          <a:noFill/>
-          <a:ln/>
-        </p:spPr>
-        <p:txBody>
-          <a:bodyPr wrap="square" lIns="0" tIns="0" rIns="0" bIns="0" rtlCol="0" anchor="t"/>
-          <a:lstStyle/>
-          <a:p>
-            <a:pPr indent="0" marL="0">
-              <a:lnSpc>
-                <a:spcPts val="1900"/>
-              </a:lnSpc>
-              <a:buNone/>
-            </a:pPr>
-            <a:r>
-              <a:rPr lang="en-US" sz="1500" dirty="0">
-                <a:solidFill>
-                  <a:srgbClr val="FFFFFF"/>
-                </a:solidFill>
-                <a:latin typeface="Calibri" pitchFamily="34" charset="0"/>
-                <a:ea typeface="Calibri" pitchFamily="34" charset="-122"/>
-                <a:cs typeface="Calibri" pitchFamily="34" charset="-120"/>
-              </a:rPr>
-              <a:t>рост EX при росте данных ×23 — плато нет.</a:t>
-            </a:r>
-            <a:endParaRPr lang="en-US" sz="1500" dirty="0"/>
-          </a:p>
-        </p:txBody>
-      </p:sp>
-      <p:sp>
-        <p:nvSpPr>
-          <p:cNvPr id="10" name="Text 7"/>
-          <p:cNvSpPr/>
-          <p:nvPr/>
-        </p:nvSpPr>
-        <p:spPr>
-          <a:xfrm>
-            <a:off x="7909560" y="3703320"/>
-            <a:ext cx="3566160" cy="2103120"/>
-          </a:xfrm>
-          <a:prstGeom prst="rect">
-            <a:avLst/>
-          </a:prstGeom>
-          <a:noFill/>
-          <a:ln/>
-        </p:spPr>
-        <p:txBody>
-          <a:bodyPr wrap="square" lIns="0" tIns="0" rIns="0" bIns="0" rtlCol="0" anchor="t"/>
-          <a:lstStyle/>
-          <a:p>
-            <a:pPr indent="0" marL="0">
-              <a:lnSpc>
-                <a:spcPts val="2000"/>
-              </a:lnSpc>
-              <a:buNone/>
-            </a:pPr>
-            <a:r>
-              <a:rPr lang="en-US" sz="1400" dirty="0">
-                <a:solidFill>
-                  <a:srgbClr val="D0E4FF"/>
-                </a:solidFill>
-                <a:latin typeface="Calibri" pitchFamily="34" charset="0"/>
-                <a:ea typeface="Calibri" pitchFamily="34" charset="-122"/>
-                <a:cs typeface="Calibri" pitchFamily="34" charset="-120"/>
-              </a:rPr>
-              <a:t>На 347 парах lora ещё проигрывала baseline — масштаб синтетики перевернул знак.</a:t>
-            </a:r>
-            <a:endParaRPr lang="en-US" sz="1400" dirty="0"/>
-          </a:p>
-        </p:txBody>
-      </p:sp>
-      <p:sp>
-        <p:nvSpPr>
-          <p:cNvPr id="11" name="Text 8"/>
           <p:cNvSpPr/>
           <p:nvPr/>
         </p:nvSpPr>
@@ -6487,7 +6001,7 @@
                 <a:ea typeface="Calibri" pitchFamily="34" charset="-122"/>
                 <a:cs typeface="Calibri" pitchFamily="34" charset="-120"/>
               </a:rPr>
-              <a:t>DB2Model · ветка SFT/LoRA</a:t>
+              <a:t>DB2Model · SFT/LoRA</a:t>
             </a:r>
             <a:endParaRPr lang="en-US" sz="900" dirty="0"/>
           </a:p>
@@ -6495,7 +6009,7 @@
       </p:sp>
       <p:sp>
         <p:nvSpPr>
-          <p:cNvPr id="12" name="Text 9"/>
+          <p:cNvPr id="9" name="Text 6"/>
           <p:cNvSpPr/>
           <p:nvPr/>
         </p:nvSpPr>
@@ -6626,7 +6140,7 @@
         </p:nvSpPr>
         <p:spPr>
           <a:xfrm>
-            <a:off x="457200" y="384048"/>
+            <a:off x="457200" y="411480"/>
             <a:ext cx="9875520" cy="685800"/>
           </a:xfrm>
           <a:prstGeom prst="rect">
@@ -6643,7 +6157,7 @@
               <a:buNone/>
             </a:pPr>
             <a:r>
-              <a:rPr lang="en-US" sz="3200" b="1" dirty="0">
+              <a:rPr lang="en-US" sz="3100" b="1" dirty="0">
                 <a:solidFill>
                   <a:srgbClr val="102D69"/>
                 </a:solidFill>
@@ -6651,9 +6165,9 @@
                 <a:ea typeface="Calibri" pitchFamily="34" charset="-122"/>
                 <a:cs typeface="Calibri" pitchFamily="34" charset="-120"/>
               </a:rPr>
-              <a:t>Что сработало и что нет</a:t>
+              <a:t>Что проверяли ещё</a:t>
             </a:r>
-            <a:endParaRPr lang="en-US" sz="3200" dirty="0"/>
+            <a:endParaRPr lang="en-US" sz="3100" dirty="0"/>
           </a:p>
         </p:txBody>
       </p:sp>
@@ -6665,7 +6179,7 @@
         </p:nvSpPr>
         <p:spPr>
           <a:xfrm>
-            <a:off x="457200" y="1097280"/>
+            <a:off x="457200" y="1115568"/>
             <a:ext cx="9966960" cy="365760"/>
           </a:xfrm>
           <a:prstGeom prst="rect">
@@ -6682,7 +6196,7 @@
               <a:buNone/>
             </a:pPr>
             <a:r>
-              <a:rPr lang="en-US" sz="1500" dirty="0">
+              <a:rPr lang="en-US" sz="1400" dirty="0">
                 <a:solidFill>
                   <a:srgbClr val="444444"/>
                 </a:solidFill>
@@ -6690,683 +6204,735 @@
                 <a:ea typeface="Calibri" pitchFamily="34" charset="-122"/>
                 <a:cs typeface="Calibri" pitchFamily="34" charset="-120"/>
               </a:rPr>
-              <a:t>Что мы проверяли отдельно — и что из этого доказано</a:t>
+              <a:t>Из четырёх гипотез знак подтвердился у двух</a:t>
             </a:r>
-            <a:endParaRPr lang="en-US" sz="1500" dirty="0"/>
+            <a:endParaRPr lang="en-US" sz="1400" dirty="0"/>
           </a:p>
         </p:txBody>
       </p:sp>
-      <p:sp>
-        <p:nvSpPr>
-          <p:cNvPr id="6" name="Shape 4"/>
-          <p:cNvSpPr/>
-          <p:nvPr/>
-        </p:nvSpPr>
-        <p:spPr>
-          <a:xfrm>
-            <a:off x="457200" y="1965960"/>
-            <a:ext cx="11247120" cy="1005840"/>
-          </a:xfrm>
-          <a:prstGeom prst="roundRect">
-            <a:avLst>
-              <a:gd name="adj" fmla="val 3636"/>
-            </a:avLst>
-          </a:prstGeom>
-          <a:solidFill>
-            <a:srgbClr val="EEF4FF"/>
-          </a:solidFill>
-          <a:ln w="12700">
-            <a:solidFill>
-              <a:srgbClr val="C9B894"/>
-            </a:solidFill>
-            <a:prstDash val="solid"/>
-          </a:ln>
-        </p:spPr>
-      </p:sp>
-      <p:sp>
-        <p:nvSpPr>
-          <p:cNvPr id="7" name="Shape 5"/>
-          <p:cNvSpPr/>
-          <p:nvPr/>
-        </p:nvSpPr>
-        <p:spPr>
-          <a:xfrm>
-            <a:off x="731520" y="2221992"/>
-            <a:ext cx="502920" cy="502920"/>
-          </a:xfrm>
-          <a:prstGeom prst="ellipse">
-            <a:avLst/>
-          </a:prstGeom>
-          <a:solidFill>
-            <a:srgbClr val="5C7A3A"/>
-          </a:solidFill>
-          <a:ln/>
-        </p:spPr>
-      </p:sp>
-      <p:sp>
-        <p:nvSpPr>
-          <p:cNvPr id="8" name="Text 6"/>
-          <p:cNvSpPr/>
-          <p:nvPr/>
-        </p:nvSpPr>
-        <p:spPr>
-          <a:xfrm>
-            <a:off x="731520" y="2194560"/>
-            <a:ext cx="502920" cy="502920"/>
-          </a:xfrm>
-          <a:prstGeom prst="rect">
-            <a:avLst/>
-          </a:prstGeom>
-          <a:noFill/>
-          <a:ln/>
-        </p:spPr>
-        <p:txBody>
-          <a:bodyPr wrap="square" lIns="0" tIns="0" rIns="0" bIns="0" rtlCol="0" anchor="ctr"/>
-          <a:lstStyle/>
-          <a:p>
-            <a:pPr algn="ctr" indent="0" marL="0">
-              <a:buNone/>
-            </a:pPr>
-            <a:r>
-              <a:rPr lang="en-US" sz="2400" b="1" dirty="0">
-                <a:solidFill>
-                  <a:srgbClr val="FFFFFF"/>
-                </a:solidFill>
-                <a:latin typeface="Courier New" pitchFamily="34" charset="0"/>
-                <a:ea typeface="Courier New" pitchFamily="34" charset="-122"/>
-                <a:cs typeface="Courier New" pitchFamily="34" charset="-120"/>
-              </a:rPr>
-              <a:t>+</a:t>
-            </a:r>
-            <a:endParaRPr lang="en-US" sz="2400" dirty="0"/>
-          </a:p>
-        </p:txBody>
-      </p:sp>
-      <p:sp>
-        <p:nvSpPr>
-          <p:cNvPr id="9" name="Text 7"/>
-          <p:cNvSpPr/>
-          <p:nvPr/>
-        </p:nvSpPr>
-        <p:spPr>
-          <a:xfrm>
-            <a:off x="1463040" y="2093976"/>
-            <a:ext cx="3566160" cy="777240"/>
-          </a:xfrm>
-          <a:prstGeom prst="rect">
-            <a:avLst/>
-          </a:prstGeom>
-          <a:noFill/>
-          <a:ln/>
-        </p:spPr>
-        <p:txBody>
-          <a:bodyPr wrap="square" lIns="0" tIns="0" rIns="0" bIns="0" rtlCol="0" anchor="ctr"/>
-          <a:lstStyle/>
-          <a:p>
-            <a:pPr indent="0" marL="0">
-              <a:buNone/>
-            </a:pPr>
-            <a:r>
-              <a:rPr lang="en-US" sz="1600" b="1" dirty="0">
-                <a:solidFill>
-                  <a:srgbClr val="102D69"/>
-                </a:solidFill>
-                <a:latin typeface="Calibri" pitchFamily="34" charset="0"/>
-                <a:ea typeface="Calibri" pitchFamily="34" charset="-122"/>
-                <a:cs typeface="Calibri" pitchFamily="34" charset="-120"/>
-              </a:rPr>
-              <a:t>Больше данных</a:t>
-            </a:r>
-            <a:endParaRPr lang="en-US" sz="1600" dirty="0"/>
-          </a:p>
-        </p:txBody>
-      </p:sp>
-      <p:sp>
-        <p:nvSpPr>
-          <p:cNvPr id="10" name="Text 8"/>
-          <p:cNvSpPr/>
-          <p:nvPr/>
-        </p:nvSpPr>
-        <p:spPr>
-          <a:xfrm>
-            <a:off x="5120640" y="2093976"/>
-            <a:ext cx="6400800" cy="777240"/>
-          </a:xfrm>
-          <a:prstGeom prst="rect">
-            <a:avLst/>
-          </a:prstGeom>
-          <a:noFill/>
-          <a:ln/>
-        </p:spPr>
-        <p:txBody>
-          <a:bodyPr wrap="square" lIns="0" tIns="0" rIns="0" bIns="0" rtlCol="0" anchor="ctr"/>
-          <a:lstStyle/>
-          <a:p>
-            <a:pPr indent="0" marL="0">
-              <a:lnSpc>
-                <a:spcPts val="1600"/>
-              </a:lnSpc>
-              <a:buNone/>
-            </a:pPr>
-            <a:r>
-              <a:rPr lang="en-US" sz="1300" dirty="0">
-                <a:solidFill>
-                  <a:srgbClr val="444444"/>
-                </a:solidFill>
-                <a:latin typeface="Calibri" pitchFamily="34" charset="0"/>
-                <a:ea typeface="Calibri" pitchFamily="34" charset="-122"/>
-                <a:cs typeface="Calibri" pitchFamily="34" charset="-120"/>
-              </a:rPr>
-              <a:t>доказан: EX растёт 9.9 → 27.84% с ростом синтетики, плато нет</a:t>
-            </a:r>
-            <a:endParaRPr lang="en-US" sz="1300" dirty="0"/>
-          </a:p>
-        </p:txBody>
-      </p:sp>
-      <p:sp>
-        <p:nvSpPr>
-          <p:cNvPr id="11" name="Shape 9"/>
-          <p:cNvSpPr/>
-          <p:nvPr/>
-        </p:nvSpPr>
-        <p:spPr>
-          <a:xfrm>
-            <a:off x="457200" y="3081528"/>
-            <a:ext cx="11247120" cy="1005840"/>
-          </a:xfrm>
-          <a:prstGeom prst="roundRect">
-            <a:avLst>
-              <a:gd name="adj" fmla="val 3636"/>
-            </a:avLst>
-          </a:prstGeom>
-          <a:solidFill>
-            <a:srgbClr val="EEF4FF"/>
-          </a:solidFill>
-          <a:ln w="12700">
-            <a:solidFill>
-              <a:srgbClr val="C9B894"/>
-            </a:solidFill>
-            <a:prstDash val="solid"/>
-          </a:ln>
-        </p:spPr>
-      </p:sp>
-      <p:sp>
-        <p:nvSpPr>
-          <p:cNvPr id="12" name="Shape 10"/>
-          <p:cNvSpPr/>
-          <p:nvPr/>
-        </p:nvSpPr>
-        <p:spPr>
-          <a:xfrm>
-            <a:off x="731520" y="3337560"/>
-            <a:ext cx="502920" cy="502920"/>
-          </a:xfrm>
-          <a:prstGeom prst="ellipse">
-            <a:avLst/>
-          </a:prstGeom>
-          <a:solidFill>
-            <a:srgbClr val="E61E3C"/>
-          </a:solidFill>
-          <a:ln/>
-        </p:spPr>
-      </p:sp>
-      <p:sp>
-        <p:nvSpPr>
-          <p:cNvPr id="13" name="Text 11"/>
-          <p:cNvSpPr/>
-          <p:nvPr/>
-        </p:nvSpPr>
-        <p:spPr>
-          <a:xfrm>
-            <a:off x="731520" y="3310128"/>
-            <a:ext cx="502920" cy="502920"/>
-          </a:xfrm>
-          <a:prstGeom prst="rect">
-            <a:avLst/>
-          </a:prstGeom>
-          <a:noFill/>
-          <a:ln/>
-        </p:spPr>
-        <p:txBody>
-          <a:bodyPr wrap="square" lIns="0" tIns="0" rIns="0" bIns="0" rtlCol="0" anchor="ctr"/>
-          <a:lstStyle/>
-          <a:p>
-            <a:pPr algn="ctr" indent="0" marL="0">
-              <a:buNone/>
-            </a:pPr>
-            <a:r>
-              <a:rPr lang="en-US" sz="2400" b="1" dirty="0">
-                <a:solidFill>
-                  <a:srgbClr val="FFFFFF"/>
-                </a:solidFill>
-                <a:latin typeface="Courier New" pitchFamily="34" charset="0"/>
-                <a:ea typeface="Courier New" pitchFamily="34" charset="-122"/>
-                <a:cs typeface="Courier New" pitchFamily="34" charset="-120"/>
-              </a:rPr>
-              <a:t>−</a:t>
-            </a:r>
-            <a:endParaRPr lang="en-US" sz="2400" dirty="0"/>
-          </a:p>
-        </p:txBody>
-      </p:sp>
-      <p:sp>
-        <p:nvSpPr>
-          <p:cNvPr id="14" name="Text 12"/>
-          <p:cNvSpPr/>
-          <p:nvPr/>
-        </p:nvSpPr>
-        <p:spPr>
-          <a:xfrm>
-            <a:off x="1463040" y="3209544"/>
-            <a:ext cx="3566160" cy="777240"/>
-          </a:xfrm>
-          <a:prstGeom prst="rect">
-            <a:avLst/>
-          </a:prstGeom>
-          <a:noFill/>
-          <a:ln/>
-        </p:spPr>
-        <p:txBody>
-          <a:bodyPr wrap="square" lIns="0" tIns="0" rIns="0" bIns="0" rtlCol="0" anchor="ctr"/>
-          <a:lstStyle/>
-          <a:p>
-            <a:pPr indent="0" marL="0">
-              <a:buNone/>
-            </a:pPr>
-            <a:r>
-              <a:rPr lang="en-US" sz="1600" b="1" dirty="0">
-                <a:solidFill>
-                  <a:srgbClr val="102D69"/>
-                </a:solidFill>
-                <a:latin typeface="Calibri" pitchFamily="34" charset="0"/>
-                <a:ea typeface="Calibri" pitchFamily="34" charset="-122"/>
-                <a:cs typeface="Calibri" pitchFamily="34" charset="-120"/>
-              </a:rPr>
-              <a:t>Reasoning (Think2SQL)</a:t>
-            </a:r>
-            <a:endParaRPr lang="en-US" sz="1600" dirty="0"/>
-          </a:p>
-        </p:txBody>
-      </p:sp>
-      <p:sp>
-        <p:nvSpPr>
-          <p:cNvPr id="15" name="Text 13"/>
-          <p:cNvSpPr/>
-          <p:nvPr/>
-        </p:nvSpPr>
-        <p:spPr>
-          <a:xfrm>
-            <a:off x="5120640" y="3209544"/>
-            <a:ext cx="6400800" cy="777240"/>
-          </a:xfrm>
-          <a:prstGeom prst="rect">
-            <a:avLst/>
-          </a:prstGeom>
-          <a:noFill/>
-          <a:ln/>
-        </p:spPr>
-        <p:txBody>
-          <a:bodyPr wrap="square" lIns="0" tIns="0" rIns="0" bIns="0" rtlCol="0" anchor="ctr"/>
-          <a:lstStyle/>
-          <a:p>
-            <a:pPr indent="0" marL="0">
-              <a:lnSpc>
-                <a:spcPts val="1600"/>
-              </a:lnSpc>
-              <a:buNone/>
-            </a:pPr>
-            <a:r>
-              <a:rPr lang="en-US" sz="1300" dirty="0">
-                <a:solidFill>
-                  <a:srgbClr val="444444"/>
-                </a:solidFill>
-                <a:latin typeface="Calibri" pitchFamily="34" charset="0"/>
-                <a:ea typeface="Calibri" pitchFamily="34" charset="-122"/>
-                <a:cs typeface="Calibri" pitchFamily="34" charset="-120"/>
-              </a:rPr>
-              <a:t>доказан, но ВРЕДИТ: учили ещё и цепочке рассуждений — модель разучилась помнить схему, −10.3 п.п.</a:t>
-            </a:r>
-            <a:endParaRPr lang="en-US" sz="1300" dirty="0"/>
-          </a:p>
-        </p:txBody>
-      </p:sp>
-      <p:sp>
-        <p:nvSpPr>
-          <p:cNvPr id="16" name="Shape 14"/>
-          <p:cNvSpPr/>
-          <p:nvPr/>
-        </p:nvSpPr>
-        <p:spPr>
-          <a:xfrm>
-            <a:off x="457200" y="4197096"/>
-            <a:ext cx="11247120" cy="1005840"/>
-          </a:xfrm>
-          <a:prstGeom prst="roundRect">
-            <a:avLst>
-              <a:gd name="adj" fmla="val 3636"/>
-            </a:avLst>
-          </a:prstGeom>
-          <a:solidFill>
-            <a:srgbClr val="EEF4FF"/>
-          </a:solidFill>
-          <a:ln w="12700">
-            <a:solidFill>
-              <a:srgbClr val="C9B894"/>
-            </a:solidFill>
-            <a:prstDash val="solid"/>
-          </a:ln>
-        </p:spPr>
-      </p:sp>
-      <p:sp>
-        <p:nvSpPr>
-          <p:cNvPr id="17" name="Shape 15"/>
-          <p:cNvSpPr/>
-          <p:nvPr/>
-        </p:nvSpPr>
-        <p:spPr>
-          <a:xfrm>
-            <a:off x="731520" y="4453128"/>
-            <a:ext cx="502920" cy="502920"/>
-          </a:xfrm>
-          <a:prstGeom prst="ellipse">
-            <a:avLst/>
-          </a:prstGeom>
-          <a:solidFill>
-            <a:srgbClr val="444444"/>
-          </a:solidFill>
-          <a:ln/>
-        </p:spPr>
-      </p:sp>
-      <p:sp>
-        <p:nvSpPr>
-          <p:cNvPr id="18" name="Text 16"/>
-          <p:cNvSpPr/>
-          <p:nvPr/>
-        </p:nvSpPr>
-        <p:spPr>
-          <a:xfrm>
-            <a:off x="731520" y="4425696"/>
-            <a:ext cx="502920" cy="502920"/>
-          </a:xfrm>
-          <a:prstGeom prst="rect">
-            <a:avLst/>
-          </a:prstGeom>
-          <a:noFill/>
-          <a:ln/>
-        </p:spPr>
-        <p:txBody>
-          <a:bodyPr wrap="square" lIns="0" tIns="0" rIns="0" bIns="0" rtlCol="0" anchor="ctr"/>
-          <a:lstStyle/>
-          <a:p>
-            <a:pPr algn="ctr" indent="0" marL="0">
-              <a:buNone/>
-            </a:pPr>
-            <a:r>
-              <a:rPr lang="en-US" sz="2400" b="1" dirty="0">
-                <a:solidFill>
-                  <a:srgbClr val="FFFFFF"/>
-                </a:solidFill>
-                <a:latin typeface="Courier New" pitchFamily="34" charset="0"/>
-                <a:ea typeface="Courier New" pitchFamily="34" charset="-122"/>
-                <a:cs typeface="Courier New" pitchFamily="34" charset="-120"/>
-              </a:rPr>
-              <a:t>≈</a:t>
-            </a:r>
-            <a:endParaRPr lang="en-US" sz="2400" dirty="0"/>
-          </a:p>
-        </p:txBody>
-      </p:sp>
-      <p:sp>
-        <p:nvSpPr>
-          <p:cNvPr id="19" name="Text 17"/>
-          <p:cNvSpPr/>
-          <p:nvPr/>
-        </p:nvSpPr>
-        <p:spPr>
-          <a:xfrm>
-            <a:off x="1463040" y="4325112"/>
-            <a:ext cx="3566160" cy="777240"/>
-          </a:xfrm>
-          <a:prstGeom prst="rect">
-            <a:avLst/>
-          </a:prstGeom>
-          <a:noFill/>
-          <a:ln/>
-        </p:spPr>
-        <p:txBody>
-          <a:bodyPr wrap="square" lIns="0" tIns="0" rIns="0" bIns="0" rtlCol="0" anchor="ctr"/>
-          <a:lstStyle/>
-          <a:p>
-            <a:pPr indent="0" marL="0">
-              <a:buNone/>
-            </a:pPr>
-            <a:r>
-              <a:rPr lang="en-US" sz="1600" b="1" dirty="0">
-                <a:solidFill>
-                  <a:srgbClr val="102D69"/>
-                </a:solidFill>
-                <a:latin typeface="Calibri" pitchFamily="34" charset="0"/>
-                <a:ea typeface="Calibri" pitchFamily="34" charset="-122"/>
-                <a:cs typeface="Calibri" pitchFamily="34" charset="-120"/>
-              </a:rPr>
-              <a:t>Мультизадачность (ROUTE)</a:t>
-            </a:r>
-            <a:endParaRPr lang="en-US" sz="1600" dirty="0"/>
-          </a:p>
-        </p:txBody>
-      </p:sp>
-      <p:sp>
-        <p:nvSpPr>
-          <p:cNvPr id="20" name="Text 18"/>
-          <p:cNvSpPr/>
-          <p:nvPr/>
-        </p:nvSpPr>
-        <p:spPr>
-          <a:xfrm>
-            <a:off x="5120640" y="4325112"/>
-            <a:ext cx="6400800" cy="777240"/>
-          </a:xfrm>
-          <a:prstGeom prst="rect">
-            <a:avLst/>
-          </a:prstGeom>
-          <a:noFill/>
-          <a:ln/>
-        </p:spPr>
-        <p:txBody>
-          <a:bodyPr wrap="square" lIns="0" tIns="0" rIns="0" bIns="0" rtlCol="0" anchor="ctr"/>
-          <a:lstStyle/>
-          <a:p>
-            <a:pPr indent="0" marL="0">
-              <a:lnSpc>
-                <a:spcPts val="1600"/>
-              </a:lnSpc>
-              <a:buNone/>
-            </a:pPr>
-            <a:r>
-              <a:rPr lang="en-US" sz="1300" dirty="0">
-                <a:solidFill>
-                  <a:srgbClr val="444444"/>
-                </a:solidFill>
-                <a:latin typeface="Calibri" pitchFamily="34" charset="0"/>
-                <a:ea typeface="Calibri" pitchFamily="34" charset="-122"/>
-                <a:cs typeface="Calibri" pitchFamily="34" charset="-120"/>
-              </a:rPr>
-              <a:t>учили не только SQL, но и вспомогательным задачам. Результат 28.57% — в пределах шума, прироста нет → выключено</a:t>
-            </a:r>
-            <a:endParaRPr lang="en-US" sz="1300" dirty="0"/>
-          </a:p>
-        </p:txBody>
-      </p:sp>
-      <p:sp>
-        <p:nvSpPr>
-          <p:cNvPr id="21" name="Shape 19"/>
-          <p:cNvSpPr/>
-          <p:nvPr/>
-        </p:nvSpPr>
-        <p:spPr>
-          <a:xfrm>
-            <a:off x="457200" y="5312664"/>
-            <a:ext cx="11247120" cy="1005840"/>
-          </a:xfrm>
-          <a:prstGeom prst="roundRect">
-            <a:avLst>
-              <a:gd name="adj" fmla="val 3636"/>
-            </a:avLst>
-          </a:prstGeom>
-          <a:solidFill>
-            <a:srgbClr val="EEF4FF"/>
-          </a:solidFill>
-          <a:ln w="12700">
-            <a:solidFill>
-              <a:srgbClr val="C9B894"/>
-            </a:solidFill>
-            <a:prstDash val="solid"/>
-          </a:ln>
-        </p:spPr>
-      </p:sp>
-      <p:sp>
-        <p:nvSpPr>
-          <p:cNvPr id="22" name="Shape 20"/>
-          <p:cNvSpPr/>
-          <p:nvPr/>
-        </p:nvSpPr>
-        <p:spPr>
-          <a:xfrm>
-            <a:off x="731520" y="5568696"/>
-            <a:ext cx="502920" cy="502920"/>
-          </a:xfrm>
-          <a:prstGeom prst="ellipse">
-            <a:avLst/>
-          </a:prstGeom>
-          <a:solidFill>
-            <a:srgbClr val="444444"/>
-          </a:solidFill>
-          <a:ln/>
-        </p:spPr>
-      </p:sp>
-      <p:sp>
-        <p:nvSpPr>
-          <p:cNvPr id="23" name="Text 21"/>
-          <p:cNvSpPr/>
-          <p:nvPr/>
-        </p:nvSpPr>
-        <p:spPr>
-          <a:xfrm>
-            <a:off x="731520" y="5541264"/>
-            <a:ext cx="502920" cy="502920"/>
-          </a:xfrm>
-          <a:prstGeom prst="rect">
-            <a:avLst/>
-          </a:prstGeom>
-          <a:noFill/>
-          <a:ln/>
-        </p:spPr>
-        <p:txBody>
-          <a:bodyPr wrap="square" lIns="0" tIns="0" rIns="0" bIns="0" rtlCol="0" anchor="ctr"/>
-          <a:lstStyle/>
-          <a:p>
-            <a:pPr algn="ctr" indent="0" marL="0">
-              <a:buNone/>
-            </a:pPr>
-            <a:r>
-              <a:rPr lang="en-US" sz="2400" b="1" dirty="0">
-                <a:solidFill>
-                  <a:srgbClr val="FFFFFF"/>
-                </a:solidFill>
-                <a:latin typeface="Courier New" pitchFamily="34" charset="0"/>
-                <a:ea typeface="Courier New" pitchFamily="34" charset="-122"/>
-                <a:cs typeface="Courier New" pitchFamily="34" charset="-120"/>
-              </a:rPr>
-              <a:t>≈</a:t>
-            </a:r>
-            <a:endParaRPr lang="en-US" sz="2400" dirty="0"/>
-          </a:p>
-        </p:txBody>
-      </p:sp>
-      <p:sp>
-        <p:nvSpPr>
-          <p:cNvPr id="24" name="Text 22"/>
-          <p:cNvSpPr/>
-          <p:nvPr/>
-        </p:nvSpPr>
-        <p:spPr>
-          <a:xfrm>
-            <a:off x="1463040" y="5440680"/>
-            <a:ext cx="3566160" cy="777240"/>
-          </a:xfrm>
-          <a:prstGeom prst="rect">
-            <a:avLst/>
-          </a:prstGeom>
-          <a:noFill/>
-          <a:ln/>
-        </p:spPr>
-        <p:txBody>
-          <a:bodyPr wrap="square" lIns="0" tIns="0" rIns="0" bIns="0" rtlCol="0" anchor="ctr"/>
-          <a:lstStyle/>
-          <a:p>
-            <a:pPr indent="0" marL="0">
-              <a:buNone/>
-            </a:pPr>
-            <a:r>
-              <a:rPr lang="en-US" sz="1600" b="1" dirty="0">
-                <a:solidFill>
-                  <a:srgbClr val="102D69"/>
-                </a:solidFill>
-                <a:latin typeface="Calibri" pitchFamily="34" charset="0"/>
-                <a:ea typeface="Calibri" pitchFamily="34" charset="-122"/>
-                <a:cs typeface="Calibri" pitchFamily="34" charset="-120"/>
-              </a:rPr>
-              <a:t>Сильнее учитель · фильтр</a:t>
-            </a:r>
-            <a:endParaRPr lang="en-US" sz="1600" dirty="0"/>
-          </a:p>
-        </p:txBody>
-      </p:sp>
-      <p:sp>
-        <p:nvSpPr>
-          <p:cNvPr id="25" name="Text 23"/>
-          <p:cNvSpPr/>
-          <p:nvPr/>
-        </p:nvSpPr>
-        <p:spPr>
-          <a:xfrm>
-            <a:off x="5120640" y="5440680"/>
-            <a:ext cx="6400800" cy="777240"/>
-          </a:xfrm>
-          <a:prstGeom prst="rect">
-            <a:avLst/>
-          </a:prstGeom>
-          <a:noFill/>
-          <a:ln/>
-        </p:spPr>
-        <p:txBody>
-          <a:bodyPr wrap="square" lIns="0" tIns="0" rIns="0" bIns="0" rtlCol="0" anchor="ctr"/>
-          <a:lstStyle/>
-          <a:p>
-            <a:pPr indent="0" marL="0">
-              <a:lnSpc>
-                <a:spcPts val="1600"/>
-              </a:lnSpc>
-              <a:buNone/>
-            </a:pPr>
-            <a:r>
-              <a:rPr lang="en-US" sz="1300" dirty="0">
-                <a:solidFill>
-                  <a:srgbClr val="444444"/>
-                </a:solidFill>
-                <a:latin typeface="Calibri" pitchFamily="34" charset="0"/>
-                <a:ea typeface="Calibri" pitchFamily="34" charset="-122"/>
-                <a:cs typeface="Calibri" pitchFamily="34" charset="-120"/>
-              </a:rPr>
-              <a:t>разница внутри шума — знак не доказан</a:t>
-            </a:r>
-            <a:endParaRPr lang="en-US" sz="1300" dirty="0"/>
-          </a:p>
-        </p:txBody>
-      </p:sp>
-      <p:sp>
-        <p:nvSpPr>
-          <p:cNvPr id="26" name="Text 24"/>
+      <p:graphicFrame>
+        <p:nvGraphicFramePr>
+          <p:cNvPr id="8" name="Table 0"/>
+          <p:cNvGraphicFramePr>
+            <a:graphicFrameLocks noGrp="1"/>
+          </p:cNvGraphicFramePr>
+          <p:nvPr>
+            <p:extLst>
+              <p:ext uri="{D42A27DB-BD31-4B8C-83A1-F6EECF244321}">
+                <p14:modId xmlns:p14="http://schemas.microsoft.com/office/powerpoint/2010/main" val="1579011935"/>
+              </p:ext>
+            </p:extLst>
+          </p:nvPr>
+        </p:nvGraphicFramePr>
+        <p:xfrm>
+          <a:off x="457200" y="2103120"/>
+          <a:ext cx="11247120" cy="914400"/>
+        </p:xfrm>
+        <a:graphic>
+          <a:graphicData uri="http://schemas.openxmlformats.org/drawingml/2006/table">
+            <a:tbl>
+              <a:tblPr/>
+              <a:tblGrid>
+                <a:gridCol w="4572000"/>
+                <a:gridCol w="6675120"/>
+              </a:tblGrid>
+              <a:tr h="777240">
+                <a:tc>
+                  <a:txBody>
+                    <a:bodyPr/>
+                    <a:lstStyle/>
+                    <a:p>
+                      <a:pPr indent="0" marL="0">
+                        <a:buNone/>
+                      </a:pPr>
+                      <a:r>
+                        <a:rPr lang="en-US" sz="1300" b="1" dirty="0">
+                          <a:solidFill>
+                            <a:srgbClr val="FFFFFF"/>
+                          </a:solidFill>
+                          <a:latin typeface="Calibri" pitchFamily="34" charset="0"/>
+                          <a:ea typeface="Calibri" pitchFamily="34" charset="-122"/>
+                          <a:cs typeface="Calibri" pitchFamily="34" charset="-120"/>
+                        </a:rPr>
+                        <a:t>Что проверяли</a:t>
+                      </a:r>
+                      <a:endParaRPr lang="en-US" sz="1300" dirty="0">
+                        <a:latin typeface="Calibri" charset="0"/>
+                        <a:ea typeface="Calibri" charset="0"/>
+                        <a:cs typeface="Calibri" charset="0"/>
+                      </a:endParaRPr>
+                    </a:p>
+                  </a:txBody>
+                  <a:tcPr marL="91440" marR="91440" marT="45720" marB="45720" anchor="ctr">
+                    <a:lnL w="6350" cap="flat" cmpd="sng" algn="ctr">
+                      <a:solidFill>
+                        <a:srgbClr val="C9B894"/>
+                      </a:solidFill>
+                      <a:prstDash val="solid"/>
+                      <a:round/>
+                      <a:headEnd type="none" w="med" len="med"/>
+                      <a:tailEnd type="none" w="med" len="med"/>
+                    </a:lnL>
+                    <a:lnR w="6350" cap="flat" cmpd="sng" algn="ctr">
+                      <a:solidFill>
+                        <a:srgbClr val="C9B894"/>
+                      </a:solidFill>
+                      <a:prstDash val="solid"/>
+                      <a:round/>
+                      <a:headEnd type="none" w="med" len="med"/>
+                      <a:tailEnd type="none" w="med" len="med"/>
+                    </a:lnR>
+                    <a:lnT w="6350" cap="flat" cmpd="sng" algn="ctr">
+                      <a:solidFill>
+                        <a:srgbClr val="C9B894"/>
+                      </a:solidFill>
+                      <a:prstDash val="solid"/>
+                      <a:round/>
+                      <a:headEnd type="none" w="med" len="med"/>
+                      <a:tailEnd type="none" w="med" len="med"/>
+                    </a:lnT>
+                    <a:lnB w="6350" cap="flat" cmpd="sng" algn="ctr">
+                      <a:solidFill>
+                        <a:srgbClr val="C9B894"/>
+                      </a:solidFill>
+                      <a:prstDash val="solid"/>
+                      <a:round/>
+                      <a:headEnd type="none" w="med" len="med"/>
+                      <a:tailEnd type="none" w="med" len="med"/>
+                    </a:lnB>
+                    <a:solidFill>
+                      <a:srgbClr val="102D69"/>
+                    </a:solidFill>
+                  </a:tcPr>
+                </a:tc>
+                <a:tc>
+                  <a:txBody>
+                    <a:bodyPr/>
+                    <a:lstStyle/>
+                    <a:p>
+                      <a:pPr indent="0" marL="0">
+                        <a:buNone/>
+                      </a:pPr>
+                      <a:r>
+                        <a:rPr lang="en-US" sz="1300" b="1" dirty="0">
+                          <a:solidFill>
+                            <a:srgbClr val="FFFFFF"/>
+                          </a:solidFill>
+                          <a:latin typeface="Calibri" pitchFamily="34" charset="0"/>
+                          <a:ea typeface="Calibri" pitchFamily="34" charset="-122"/>
+                          <a:cs typeface="Calibri" pitchFamily="34" charset="-120"/>
+                        </a:rPr>
+                        <a:t>Вывод</a:t>
+                      </a:r>
+                      <a:endParaRPr lang="en-US" sz="1300" dirty="0">
+                        <a:latin typeface="Calibri" charset="0"/>
+                        <a:ea typeface="Calibri" charset="0"/>
+                        <a:cs typeface="Calibri" charset="0"/>
+                      </a:endParaRPr>
+                    </a:p>
+                  </a:txBody>
+                  <a:tcPr marL="91440" marR="91440" marT="45720" marB="45720" anchor="ctr">
+                    <a:lnL w="6350" cap="flat" cmpd="sng" algn="ctr">
+                      <a:solidFill>
+                        <a:srgbClr val="C9B894"/>
+                      </a:solidFill>
+                      <a:prstDash val="solid"/>
+                      <a:round/>
+                      <a:headEnd type="none" w="med" len="med"/>
+                      <a:tailEnd type="none" w="med" len="med"/>
+                    </a:lnL>
+                    <a:lnR w="6350" cap="flat" cmpd="sng" algn="ctr">
+                      <a:solidFill>
+                        <a:srgbClr val="C9B894"/>
+                      </a:solidFill>
+                      <a:prstDash val="solid"/>
+                      <a:round/>
+                      <a:headEnd type="none" w="med" len="med"/>
+                      <a:tailEnd type="none" w="med" len="med"/>
+                    </a:lnR>
+                    <a:lnT w="6350" cap="flat" cmpd="sng" algn="ctr">
+                      <a:solidFill>
+                        <a:srgbClr val="C9B894"/>
+                      </a:solidFill>
+                      <a:prstDash val="solid"/>
+                      <a:round/>
+                      <a:headEnd type="none" w="med" len="med"/>
+                      <a:tailEnd type="none" w="med" len="med"/>
+                    </a:lnT>
+                    <a:lnB w="6350" cap="flat" cmpd="sng" algn="ctr">
+                      <a:solidFill>
+                        <a:srgbClr val="C9B894"/>
+                      </a:solidFill>
+                      <a:prstDash val="solid"/>
+                      <a:round/>
+                      <a:headEnd type="none" w="med" len="med"/>
+                      <a:tailEnd type="none" w="med" len="med"/>
+                    </a:lnB>
+                    <a:solidFill>
+                      <a:srgbClr val="102D69"/>
+                    </a:solidFill>
+                  </a:tcPr>
+                </a:tc>
+              </a:tr>
+              <a:tr h="777240">
+                <a:tc>
+                  <a:txBody>
+                    <a:bodyPr/>
+                    <a:lstStyle/>
+                    <a:p>
+                      <a:pPr indent="0" marL="0">
+                        <a:buNone/>
+                      </a:pPr>
+                      <a:r>
+                        <a:rPr lang="en-US" sz="1400" b="1" dirty="0">
+                          <a:solidFill>
+                            <a:srgbClr val="102D69"/>
+                          </a:solidFill>
+                          <a:latin typeface="Calibri" pitchFamily="34" charset="0"/>
+                          <a:ea typeface="Calibri" pitchFamily="34" charset="-122"/>
+                          <a:cs typeface="Calibri" pitchFamily="34" charset="-120"/>
+                        </a:rPr>
+                        <a:t>Больше обучающих данных</a:t>
+                      </a:r>
+                      <a:endParaRPr lang="en-US" sz="1400" dirty="0">
+                        <a:latin typeface="Calibri" charset="0"/>
+                        <a:ea typeface="Calibri" charset="0"/>
+                        <a:cs typeface="Calibri" charset="0"/>
+                      </a:endParaRPr>
+                    </a:p>
+                  </a:txBody>
+                  <a:tcPr marL="91440" marR="91440" marT="45720" marB="45720" anchor="ctr">
+                    <a:lnL w="6350" cap="flat" cmpd="sng" algn="ctr">
+                      <a:solidFill>
+                        <a:srgbClr val="C9B894"/>
+                      </a:solidFill>
+                      <a:prstDash val="solid"/>
+                      <a:round/>
+                      <a:headEnd type="none" w="med" len="med"/>
+                      <a:tailEnd type="none" w="med" len="med"/>
+                    </a:lnL>
+                    <a:lnR w="6350" cap="flat" cmpd="sng" algn="ctr">
+                      <a:solidFill>
+                        <a:srgbClr val="C9B894"/>
+                      </a:solidFill>
+                      <a:prstDash val="solid"/>
+                      <a:round/>
+                      <a:headEnd type="none" w="med" len="med"/>
+                      <a:tailEnd type="none" w="med" len="med"/>
+                    </a:lnR>
+                    <a:lnT w="6350" cap="flat" cmpd="sng" algn="ctr">
+                      <a:solidFill>
+                        <a:srgbClr val="C9B894"/>
+                      </a:solidFill>
+                      <a:prstDash val="solid"/>
+                      <a:round/>
+                      <a:headEnd type="none" w="med" len="med"/>
+                      <a:tailEnd type="none" w="med" len="med"/>
+                    </a:lnT>
+                    <a:lnB w="6350" cap="flat" cmpd="sng" algn="ctr">
+                      <a:solidFill>
+                        <a:srgbClr val="C9B894"/>
+                      </a:solidFill>
+                      <a:prstDash val="solid"/>
+                      <a:round/>
+                      <a:headEnd type="none" w="med" len="med"/>
+                      <a:tailEnd type="none" w="med" len="med"/>
+                    </a:lnB>
+                    <a:solidFill>
+                      <a:srgbClr val="FFFFFF"/>
+                    </a:solidFill>
+                  </a:tcPr>
+                </a:tc>
+                <a:tc>
+                  <a:txBody>
+                    <a:bodyPr/>
+                    <a:lstStyle/>
+                    <a:p>
+                      <a:pPr indent="0" marL="0">
+                        <a:buNone/>
+                      </a:pPr>
+                      <a:r>
+                        <a:rPr lang="en-US" sz="1400" dirty="0">
+                          <a:solidFill>
+                            <a:srgbClr val="444444"/>
+                          </a:solidFill>
+                          <a:latin typeface="Calibri" pitchFamily="34" charset="0"/>
+                          <a:ea typeface="Calibri" pitchFamily="34" charset="-122"/>
+                          <a:cs typeface="Calibri" pitchFamily="34" charset="-120"/>
+                        </a:rPr>
+                        <a:t>EX растёт 9.9 → 27.8%, плато нет — подтверждено</a:t>
+                      </a:r>
+                      <a:endParaRPr lang="en-US" sz="1400" dirty="0">
+                        <a:latin typeface="Calibri" charset="0"/>
+                        <a:ea typeface="Calibri" charset="0"/>
+                        <a:cs typeface="Calibri" charset="0"/>
+                      </a:endParaRPr>
+                    </a:p>
+                  </a:txBody>
+                  <a:tcPr marL="91440" marR="91440" marT="45720" marB="45720" anchor="ctr">
+                    <a:lnL w="6350" cap="flat" cmpd="sng" algn="ctr">
+                      <a:solidFill>
+                        <a:srgbClr val="C9B894"/>
+                      </a:solidFill>
+                      <a:prstDash val="solid"/>
+                      <a:round/>
+                      <a:headEnd type="none" w="med" len="med"/>
+                      <a:tailEnd type="none" w="med" len="med"/>
+                    </a:lnL>
+                    <a:lnR w="6350" cap="flat" cmpd="sng" algn="ctr">
+                      <a:solidFill>
+                        <a:srgbClr val="C9B894"/>
+                      </a:solidFill>
+                      <a:prstDash val="solid"/>
+                      <a:round/>
+                      <a:headEnd type="none" w="med" len="med"/>
+                      <a:tailEnd type="none" w="med" len="med"/>
+                    </a:lnR>
+                    <a:lnT w="6350" cap="flat" cmpd="sng" algn="ctr">
+                      <a:solidFill>
+                        <a:srgbClr val="C9B894"/>
+                      </a:solidFill>
+                      <a:prstDash val="solid"/>
+                      <a:round/>
+                      <a:headEnd type="none" w="med" len="med"/>
+                      <a:tailEnd type="none" w="med" len="med"/>
+                    </a:lnT>
+                    <a:lnB w="6350" cap="flat" cmpd="sng" algn="ctr">
+                      <a:solidFill>
+                        <a:srgbClr val="C9B894"/>
+                      </a:solidFill>
+                      <a:prstDash val="solid"/>
+                      <a:round/>
+                      <a:headEnd type="none" w="med" len="med"/>
+                      <a:tailEnd type="none" w="med" len="med"/>
+                    </a:lnB>
+                    <a:solidFill>
+                      <a:srgbClr val="FFFFFF"/>
+                    </a:solidFill>
+                  </a:tcPr>
+                </a:tc>
+              </a:tr>
+              <a:tr h="777240">
+                <a:tc>
+                  <a:txBody>
+                    <a:bodyPr/>
+                    <a:lstStyle/>
+                    <a:p>
+                      <a:pPr indent="0" marL="0">
+                        <a:buNone/>
+                      </a:pPr>
+                      <a:r>
+                        <a:rPr lang="en-US" sz="1400" b="1" dirty="0">
+                          <a:solidFill>
+                            <a:srgbClr val="102D69"/>
+                          </a:solidFill>
+                          <a:latin typeface="Calibri" pitchFamily="34" charset="0"/>
+                          <a:ea typeface="Calibri" pitchFamily="34" charset="-122"/>
+                          <a:cs typeface="Calibri" pitchFamily="34" charset="-120"/>
+                        </a:rPr>
+                        <a:t>Reasoning / обучение с рассуждениями</a:t>
+                      </a:r>
+                      <a:endParaRPr lang="en-US" sz="1400" dirty="0">
+                        <a:latin typeface="Calibri" charset="0"/>
+                        <a:ea typeface="Calibri" charset="0"/>
+                        <a:cs typeface="Calibri" charset="0"/>
+                      </a:endParaRPr>
+                    </a:p>
+                  </a:txBody>
+                  <a:tcPr marL="91440" marR="91440" marT="45720" marB="45720" anchor="ctr">
+                    <a:lnL w="6350" cap="flat" cmpd="sng" algn="ctr">
+                      <a:solidFill>
+                        <a:srgbClr val="C9B894"/>
+                      </a:solidFill>
+                      <a:prstDash val="solid"/>
+                      <a:round/>
+                      <a:headEnd type="none" w="med" len="med"/>
+                      <a:tailEnd type="none" w="med" len="med"/>
+                    </a:lnL>
+                    <a:lnR w="6350" cap="flat" cmpd="sng" algn="ctr">
+                      <a:solidFill>
+                        <a:srgbClr val="C9B894"/>
+                      </a:solidFill>
+                      <a:prstDash val="solid"/>
+                      <a:round/>
+                      <a:headEnd type="none" w="med" len="med"/>
+                      <a:tailEnd type="none" w="med" len="med"/>
+                    </a:lnR>
+                    <a:lnT w="6350" cap="flat" cmpd="sng" algn="ctr">
+                      <a:solidFill>
+                        <a:srgbClr val="C9B894"/>
+                      </a:solidFill>
+                      <a:prstDash val="solid"/>
+                      <a:round/>
+                      <a:headEnd type="none" w="med" len="med"/>
+                      <a:tailEnd type="none" w="med" len="med"/>
+                    </a:lnT>
+                    <a:lnB w="6350" cap="flat" cmpd="sng" algn="ctr">
+                      <a:solidFill>
+                        <a:srgbClr val="C9B894"/>
+                      </a:solidFill>
+                      <a:prstDash val="solid"/>
+                      <a:round/>
+                      <a:headEnd type="none" w="med" len="med"/>
+                      <a:tailEnd type="none" w="med" len="med"/>
+                    </a:lnB>
+                    <a:solidFill>
+                      <a:srgbClr val="FFFFFF"/>
+                    </a:solidFill>
+                  </a:tcPr>
+                </a:tc>
+                <a:tc>
+                  <a:txBody>
+                    <a:bodyPr/>
+                    <a:lstStyle/>
+                    <a:p>
+                      <a:pPr indent="0" marL="0">
+                        <a:buNone/>
+                      </a:pPr>
+                      <a:r>
+                        <a:rPr lang="en-US" sz="1400" dirty="0">
+                          <a:solidFill>
+                            <a:srgbClr val="444444"/>
+                          </a:solidFill>
+                          <a:latin typeface="Calibri" pitchFamily="34" charset="0"/>
+                          <a:ea typeface="Calibri" pitchFamily="34" charset="-122"/>
+                          <a:cs typeface="Calibri" pitchFamily="34" charset="-120"/>
+                        </a:rPr>
+                        <a:t>вредит: −10 п.п., модель хуже помнит схему — подтверждено</a:t>
+                      </a:r>
+                      <a:endParaRPr lang="en-US" sz="1400" dirty="0">
+                        <a:latin typeface="Calibri" charset="0"/>
+                        <a:ea typeface="Calibri" charset="0"/>
+                        <a:cs typeface="Calibri" charset="0"/>
+                      </a:endParaRPr>
+                    </a:p>
+                  </a:txBody>
+                  <a:tcPr marL="91440" marR="91440" marT="45720" marB="45720" anchor="ctr">
+                    <a:lnL w="6350" cap="flat" cmpd="sng" algn="ctr">
+                      <a:solidFill>
+                        <a:srgbClr val="C9B894"/>
+                      </a:solidFill>
+                      <a:prstDash val="solid"/>
+                      <a:round/>
+                      <a:headEnd type="none" w="med" len="med"/>
+                      <a:tailEnd type="none" w="med" len="med"/>
+                    </a:lnL>
+                    <a:lnR w="6350" cap="flat" cmpd="sng" algn="ctr">
+                      <a:solidFill>
+                        <a:srgbClr val="C9B894"/>
+                      </a:solidFill>
+                      <a:prstDash val="solid"/>
+                      <a:round/>
+                      <a:headEnd type="none" w="med" len="med"/>
+                      <a:tailEnd type="none" w="med" len="med"/>
+                    </a:lnR>
+                    <a:lnT w="6350" cap="flat" cmpd="sng" algn="ctr">
+                      <a:solidFill>
+                        <a:srgbClr val="C9B894"/>
+                      </a:solidFill>
+                      <a:prstDash val="solid"/>
+                      <a:round/>
+                      <a:headEnd type="none" w="med" len="med"/>
+                      <a:tailEnd type="none" w="med" len="med"/>
+                    </a:lnT>
+                    <a:lnB w="6350" cap="flat" cmpd="sng" algn="ctr">
+                      <a:solidFill>
+                        <a:srgbClr val="C9B894"/>
+                      </a:solidFill>
+                      <a:prstDash val="solid"/>
+                      <a:round/>
+                      <a:headEnd type="none" w="med" len="med"/>
+                      <a:tailEnd type="none" w="med" len="med"/>
+                    </a:lnB>
+                    <a:solidFill>
+                      <a:srgbClr val="FFFFFF"/>
+                    </a:solidFill>
+                  </a:tcPr>
+                </a:tc>
+              </a:tr>
+              <a:tr h="777240">
+                <a:tc>
+                  <a:txBody>
+                    <a:bodyPr/>
+                    <a:lstStyle/>
+                    <a:p>
+                      <a:pPr indent="0" marL="0">
+                        <a:buNone/>
+                      </a:pPr>
+                      <a:r>
+                        <a:rPr lang="en-US" sz="1400" b="1" dirty="0">
+                          <a:solidFill>
+                            <a:srgbClr val="102D69"/>
+                          </a:solidFill>
+                          <a:latin typeface="Calibri" pitchFamily="34" charset="0"/>
+                          <a:ea typeface="Calibri" pitchFamily="34" charset="-122"/>
+                          <a:cs typeface="Calibri" pitchFamily="34" charset="-120"/>
+                        </a:rPr>
+                        <a:t>Мультизадачность (ROUTE)</a:t>
+                      </a:r>
+                      <a:endParaRPr lang="en-US" sz="1400" dirty="0">
+                        <a:latin typeface="Calibri" charset="0"/>
+                        <a:ea typeface="Calibri" charset="0"/>
+                        <a:cs typeface="Calibri" charset="0"/>
+                      </a:endParaRPr>
+                    </a:p>
+                  </a:txBody>
+                  <a:tcPr marL="91440" marR="91440" marT="45720" marB="45720" anchor="ctr">
+                    <a:lnL w="6350" cap="flat" cmpd="sng" algn="ctr">
+                      <a:solidFill>
+                        <a:srgbClr val="C9B894"/>
+                      </a:solidFill>
+                      <a:prstDash val="solid"/>
+                      <a:round/>
+                      <a:headEnd type="none" w="med" len="med"/>
+                      <a:tailEnd type="none" w="med" len="med"/>
+                    </a:lnL>
+                    <a:lnR w="6350" cap="flat" cmpd="sng" algn="ctr">
+                      <a:solidFill>
+                        <a:srgbClr val="C9B894"/>
+                      </a:solidFill>
+                      <a:prstDash val="solid"/>
+                      <a:round/>
+                      <a:headEnd type="none" w="med" len="med"/>
+                      <a:tailEnd type="none" w="med" len="med"/>
+                    </a:lnR>
+                    <a:lnT w="6350" cap="flat" cmpd="sng" algn="ctr">
+                      <a:solidFill>
+                        <a:srgbClr val="C9B894"/>
+                      </a:solidFill>
+                      <a:prstDash val="solid"/>
+                      <a:round/>
+                      <a:headEnd type="none" w="med" len="med"/>
+                      <a:tailEnd type="none" w="med" len="med"/>
+                    </a:lnT>
+                    <a:lnB w="6350" cap="flat" cmpd="sng" algn="ctr">
+                      <a:solidFill>
+                        <a:srgbClr val="C9B894"/>
+                      </a:solidFill>
+                      <a:prstDash val="solid"/>
+                      <a:round/>
+                      <a:headEnd type="none" w="med" len="med"/>
+                      <a:tailEnd type="none" w="med" len="med"/>
+                    </a:lnB>
+                    <a:solidFill>
+                      <a:srgbClr val="FFFFFF"/>
+                    </a:solidFill>
+                  </a:tcPr>
+                </a:tc>
+                <a:tc>
+                  <a:txBody>
+                    <a:bodyPr/>
+                    <a:lstStyle/>
+                    <a:p>
+                      <a:pPr indent="0" marL="0">
+                        <a:buNone/>
+                      </a:pPr>
+                      <a:r>
+                        <a:rPr lang="en-US" sz="1400" dirty="0">
+                          <a:solidFill>
+                            <a:srgbClr val="444444"/>
+                          </a:solidFill>
+                          <a:latin typeface="Calibri" pitchFamily="34" charset="0"/>
+                          <a:ea typeface="Calibri" pitchFamily="34" charset="-122"/>
+                          <a:cs typeface="Calibri" pitchFamily="34" charset="-120"/>
+                        </a:rPr>
+                        <a:t>28.6% — в пределах шума, прироста нет, выключили</a:t>
+                      </a:r>
+                      <a:endParaRPr lang="en-US" sz="1400" dirty="0">
+                        <a:latin typeface="Calibri" charset="0"/>
+                        <a:ea typeface="Calibri" charset="0"/>
+                        <a:cs typeface="Calibri" charset="0"/>
+                      </a:endParaRPr>
+                    </a:p>
+                  </a:txBody>
+                  <a:tcPr marL="91440" marR="91440" marT="45720" marB="45720" anchor="ctr">
+                    <a:lnL w="6350" cap="flat" cmpd="sng" algn="ctr">
+                      <a:solidFill>
+                        <a:srgbClr val="C9B894"/>
+                      </a:solidFill>
+                      <a:prstDash val="solid"/>
+                      <a:round/>
+                      <a:headEnd type="none" w="med" len="med"/>
+                      <a:tailEnd type="none" w="med" len="med"/>
+                    </a:lnL>
+                    <a:lnR w="6350" cap="flat" cmpd="sng" algn="ctr">
+                      <a:solidFill>
+                        <a:srgbClr val="C9B894"/>
+                      </a:solidFill>
+                      <a:prstDash val="solid"/>
+                      <a:round/>
+                      <a:headEnd type="none" w="med" len="med"/>
+                      <a:tailEnd type="none" w="med" len="med"/>
+                    </a:lnR>
+                    <a:lnT w="6350" cap="flat" cmpd="sng" algn="ctr">
+                      <a:solidFill>
+                        <a:srgbClr val="C9B894"/>
+                      </a:solidFill>
+                      <a:prstDash val="solid"/>
+                      <a:round/>
+                      <a:headEnd type="none" w="med" len="med"/>
+                      <a:tailEnd type="none" w="med" len="med"/>
+                    </a:lnT>
+                    <a:lnB w="6350" cap="flat" cmpd="sng" algn="ctr">
+                      <a:solidFill>
+                        <a:srgbClr val="C9B894"/>
+                      </a:solidFill>
+                      <a:prstDash val="solid"/>
+                      <a:round/>
+                      <a:headEnd type="none" w="med" len="med"/>
+                      <a:tailEnd type="none" w="med" len="med"/>
+                    </a:lnB>
+                    <a:solidFill>
+                      <a:srgbClr val="FFFFFF"/>
+                    </a:solidFill>
+                  </a:tcPr>
+                </a:tc>
+              </a:tr>
+              <a:tr h="777240">
+                <a:tc>
+                  <a:txBody>
+                    <a:bodyPr/>
+                    <a:lstStyle/>
+                    <a:p>
+                      <a:pPr indent="0" marL="0">
+                        <a:buNone/>
+                      </a:pPr>
+                      <a:r>
+                        <a:rPr lang="en-US" sz="1400" b="1" dirty="0">
+                          <a:solidFill>
+                            <a:srgbClr val="102D69"/>
+                          </a:solidFill>
+                          <a:latin typeface="Calibri" pitchFamily="34" charset="0"/>
+                          <a:ea typeface="Calibri" pitchFamily="34" charset="-122"/>
+                          <a:cs typeface="Calibri" pitchFamily="34" charset="-120"/>
+                        </a:rPr>
+                        <a:t>Более сильный учитель, фильтр</a:t>
+                      </a:r>
+                      <a:endParaRPr lang="en-US" sz="1400" dirty="0">
+                        <a:latin typeface="Calibri" charset="0"/>
+                        <a:ea typeface="Calibri" charset="0"/>
+                        <a:cs typeface="Calibri" charset="0"/>
+                      </a:endParaRPr>
+                    </a:p>
+                  </a:txBody>
+                  <a:tcPr marL="91440" marR="91440" marT="45720" marB="45720" anchor="ctr">
+                    <a:lnL w="6350" cap="flat" cmpd="sng" algn="ctr">
+                      <a:solidFill>
+                        <a:srgbClr val="C9B894"/>
+                      </a:solidFill>
+                      <a:prstDash val="solid"/>
+                      <a:round/>
+                      <a:headEnd type="none" w="med" len="med"/>
+                      <a:tailEnd type="none" w="med" len="med"/>
+                    </a:lnL>
+                    <a:lnR w="6350" cap="flat" cmpd="sng" algn="ctr">
+                      <a:solidFill>
+                        <a:srgbClr val="C9B894"/>
+                      </a:solidFill>
+                      <a:prstDash val="solid"/>
+                      <a:round/>
+                      <a:headEnd type="none" w="med" len="med"/>
+                      <a:tailEnd type="none" w="med" len="med"/>
+                    </a:lnR>
+                    <a:lnT w="6350" cap="flat" cmpd="sng" algn="ctr">
+                      <a:solidFill>
+                        <a:srgbClr val="C9B894"/>
+                      </a:solidFill>
+                      <a:prstDash val="solid"/>
+                      <a:round/>
+                      <a:headEnd type="none" w="med" len="med"/>
+                      <a:tailEnd type="none" w="med" len="med"/>
+                    </a:lnT>
+                    <a:lnB w="6350" cap="flat" cmpd="sng" algn="ctr">
+                      <a:solidFill>
+                        <a:srgbClr val="C9B894"/>
+                      </a:solidFill>
+                      <a:prstDash val="solid"/>
+                      <a:round/>
+                      <a:headEnd type="none" w="med" len="med"/>
+                      <a:tailEnd type="none" w="med" len="med"/>
+                    </a:lnB>
+                    <a:solidFill>
+                      <a:srgbClr val="FFFFFF"/>
+                    </a:solidFill>
+                  </a:tcPr>
+                </a:tc>
+                <a:tc>
+                  <a:txBody>
+                    <a:bodyPr/>
+                    <a:lstStyle/>
+                    <a:p>
+                      <a:pPr indent="0" marL="0">
+                        <a:buNone/>
+                      </a:pPr>
+                      <a:r>
+                        <a:rPr lang="en-US" sz="1400" dirty="0">
+                          <a:solidFill>
+                            <a:srgbClr val="444444"/>
+                          </a:solidFill>
+                          <a:latin typeface="Calibri" pitchFamily="34" charset="0"/>
+                          <a:ea typeface="Calibri" pitchFamily="34" charset="-122"/>
+                          <a:cs typeface="Calibri" pitchFamily="34" charset="-120"/>
+                        </a:rPr>
+                        <a:t>разница внутри шума — не доказано</a:t>
+                      </a:r>
+                      <a:endParaRPr lang="en-US" sz="1400" dirty="0">
+                        <a:latin typeface="Calibri" charset="0"/>
+                        <a:ea typeface="Calibri" charset="0"/>
+                        <a:cs typeface="Calibri" charset="0"/>
+                      </a:endParaRPr>
+                    </a:p>
+                  </a:txBody>
+                  <a:tcPr marL="91440" marR="91440" marT="45720" marB="45720" anchor="ctr">
+                    <a:lnL w="6350" cap="flat" cmpd="sng" algn="ctr">
+                      <a:solidFill>
+                        <a:srgbClr val="C9B894"/>
+                      </a:solidFill>
+                      <a:prstDash val="solid"/>
+                      <a:round/>
+                      <a:headEnd type="none" w="med" len="med"/>
+                      <a:tailEnd type="none" w="med" len="med"/>
+                    </a:lnL>
+                    <a:lnR w="6350" cap="flat" cmpd="sng" algn="ctr">
+                      <a:solidFill>
+                        <a:srgbClr val="C9B894"/>
+                      </a:solidFill>
+                      <a:prstDash val="solid"/>
+                      <a:round/>
+                      <a:headEnd type="none" w="med" len="med"/>
+                      <a:tailEnd type="none" w="med" len="med"/>
+                    </a:lnR>
+                    <a:lnT w="6350" cap="flat" cmpd="sng" algn="ctr">
+                      <a:solidFill>
+                        <a:srgbClr val="C9B894"/>
+                      </a:solidFill>
+                      <a:prstDash val="solid"/>
+                      <a:round/>
+                      <a:headEnd type="none" w="med" len="med"/>
+                      <a:tailEnd type="none" w="med" len="med"/>
+                    </a:lnT>
+                    <a:lnB w="6350" cap="flat" cmpd="sng" algn="ctr">
+                      <a:solidFill>
+                        <a:srgbClr val="C9B894"/>
+                      </a:solidFill>
+                      <a:prstDash val="solid"/>
+                      <a:round/>
+                      <a:headEnd type="none" w="med" len="med"/>
+                      <a:tailEnd type="none" w="med" len="med"/>
+                    </a:lnB>
+                    <a:solidFill>
+                      <a:srgbClr val="FFFFFF"/>
+                    </a:solidFill>
+                  </a:tcPr>
+                </a:tc>
+              </a:tr>
+            </a:tbl>
+          </a:graphicData>
+        </a:graphic>
+      </p:graphicFrame>
+      <p:sp>
+        <p:nvSpPr>
+          <p:cNvPr id="7" name="Text 4"/>
           <p:cNvSpPr/>
           <p:nvPr/>
         </p:nvSpPr>
@@ -7397,7 +6963,7 @@
                 <a:ea typeface="Calibri" pitchFamily="34" charset="-122"/>
                 <a:cs typeface="Calibri" pitchFamily="34" charset="-120"/>
               </a:rPr>
-              <a:t>DB2Model · ветка SFT/LoRA</a:t>
+              <a:t>DB2Model · SFT/LoRA</a:t>
             </a:r>
             <a:endParaRPr lang="en-US" sz="900" dirty="0"/>
           </a:p>
@@ -7405,7 +6971,7 @@
       </p:sp>
       <p:sp>
         <p:nvSpPr>
-          <p:cNvPr id="27" name="Text 25"/>
+          <p:cNvPr id="8" name="Text 5"/>
           <p:cNvSpPr/>
           <p:nvPr/>
         </p:nvSpPr>
@@ -7536,7 +7102,7 @@
         </p:nvSpPr>
         <p:spPr>
           <a:xfrm>
-            <a:off x="457200" y="384048"/>
+            <a:off x="457200" y="411480"/>
             <a:ext cx="9875520" cy="685800"/>
           </a:xfrm>
           <a:prstGeom prst="rect">
@@ -7553,7 +7119,7 @@
               <a:buNone/>
             </a:pPr>
             <a:r>
-              <a:rPr lang="en-US" sz="3200" b="1" dirty="0">
+              <a:rPr lang="en-US" sz="3100" b="1" dirty="0">
                 <a:solidFill>
                   <a:srgbClr val="102D69"/>
                 </a:solidFill>
@@ -7561,9 +7127,9 @@
                 <a:ea typeface="Calibri" pitchFamily="34" charset="-122"/>
                 <a:cs typeface="Calibri" pitchFamily="34" charset="-120"/>
               </a:rPr>
-              <a:t>Тезис виден вживую, не только в цифрах</a:t>
+              <a:t>MCP-сервер</a:t>
             </a:r>
-            <a:endParaRPr lang="en-US" sz="3200" dirty="0"/>
+            <a:endParaRPr lang="en-US" sz="3100" dirty="0"/>
           </a:p>
         </p:txBody>
       </p:sp>
@@ -7575,7 +7141,7 @@
         </p:nvSpPr>
         <p:spPr>
           <a:xfrm>
-            <a:off x="457200" y="1097280"/>
+            <a:off x="457200" y="1115568"/>
             <a:ext cx="9966960" cy="365760"/>
           </a:xfrm>
           <a:prstGeom prst="rect">
@@ -7592,7 +7158,7 @@
               <a:buNone/>
             </a:pPr>
             <a:r>
-              <a:rPr lang="en-US" sz="1500" dirty="0">
+              <a:rPr lang="en-US" sz="1400" dirty="0">
                 <a:solidFill>
                   <a:srgbClr val="444444"/>
                 </a:solidFill>
@@ -7600,9 +7166,9 @@
                 <a:ea typeface="Calibri" pitchFamily="34" charset="-122"/>
                 <a:cs typeface="Calibri" pitchFamily="34" charset="-120"/>
               </a:rPr>
-              <a:t>MCP-сервер: адаптер через vLLM, вопрос → SQL → живая база</a:t>
+              <a:t>Адаптер через vLLM: вопрос → SQL → живая база, проверка на трёх базах</a:t>
             </a:r>
-            <a:endParaRPr lang="en-US" sz="1500" dirty="0"/>
+            <a:endParaRPr lang="en-US" sz="1400" dirty="0"/>
           </a:p>
         </p:txBody>
       </p:sp>
@@ -7614,12 +7180,12 @@
         </p:nvSpPr>
         <p:spPr>
           <a:xfrm>
-            <a:off x="457200" y="2057400"/>
-            <a:ext cx="5486400" cy="3474720"/>
+            <a:off x="457200" y="2103120"/>
+            <a:ext cx="5486400" cy="3383280"/>
           </a:xfrm>
           <a:prstGeom prst="roundRect">
             <a:avLst>
-              <a:gd name="adj" fmla="val 1053"/>
+              <a:gd name="adj" fmla="val 1081"/>
             </a:avLst>
           </a:prstGeom>
           <a:solidFill>
@@ -7641,7 +7207,7 @@
         </p:nvSpPr>
         <p:spPr>
           <a:xfrm>
-            <a:off x="731520" y="2331720"/>
+            <a:off x="731520" y="2377440"/>
             <a:ext cx="4937760" cy="365760"/>
           </a:xfrm>
           <a:prstGeom prst="rect">
@@ -7658,17 +7224,17 @@
               <a:buNone/>
             </a:pPr>
             <a:r>
-              <a:rPr lang="en-US" sz="1400" b="1" dirty="0">
+              <a:rPr lang="en-US" sz="1500" b="1" dirty="0">
                 <a:solidFill>
                   <a:srgbClr val="FAB900"/>
                 </a:solidFill>
-                <a:latin typeface="Courier New" pitchFamily="34" charset="0"/>
-                <a:ea typeface="Courier New" pitchFamily="34" charset="-122"/>
-                <a:cs typeface="Courier New" pitchFamily="34" charset="-120"/>
+                <a:latin typeface="Calibri" pitchFamily="34" charset="0"/>
+                <a:ea typeface="Calibri" pitchFamily="34" charset="-122"/>
+                <a:cs typeface="Calibri" pitchFamily="34" charset="-120"/>
               </a:rPr>
-              <a:t>schema-less (наш адаптер)</a:t>
+              <a:t>наш адаптер (без схемы)</a:t>
             </a:r>
-            <a:endParaRPr lang="en-US" sz="1400" dirty="0"/>
+            <a:endParaRPr lang="en-US" sz="1500" dirty="0"/>
           </a:p>
         </p:txBody>
       </p:sp>
@@ -7680,7 +7246,7 @@
         </p:nvSpPr>
         <p:spPr>
           <a:xfrm>
-            <a:off x="731520" y="2743200"/>
+            <a:off x="731520" y="2788920"/>
             <a:ext cx="4937760" cy="914400"/>
           </a:xfrm>
           <a:prstGeom prst="rect">
@@ -7697,7 +7263,7 @@
               <a:buNone/>
             </a:pPr>
             <a:r>
-              <a:rPr lang="en-US" sz="5000" b="1" dirty="0">
+              <a:rPr lang="en-US" sz="5200" b="1" dirty="0">
                 <a:solidFill>
                   <a:srgbClr val="FFFFFF"/>
                 </a:solidFill>
@@ -7705,9 +7271,9 @@
                 <a:ea typeface="Courier New" pitchFamily="34" charset="-122"/>
                 <a:cs typeface="Courier New" pitchFamily="34" charset="-120"/>
               </a:rPr>
-              <a:t>3 / 3 PASS</a:t>
+              <a:t>3 / 3</a:t>
             </a:r>
-            <a:endParaRPr lang="en-US" sz="5000" dirty="0"/>
+            <a:endParaRPr lang="en-US" sz="5200" dirty="0"/>
           </a:p>
         </p:txBody>
       </p:sp>
@@ -7719,7 +7285,7 @@
         </p:nvSpPr>
         <p:spPr>
           <a:xfrm>
-            <a:off x="731520" y="3794760"/>
+            <a:off x="731520" y="3840480"/>
             <a:ext cx="4937760" cy="1371600"/>
           </a:xfrm>
           <a:prstGeom prst="rect">
@@ -7747,7 +7313,7 @@
                 <a:ea typeface="Calibri" pitchFamily="34" charset="-122"/>
                 <a:cs typeface="Calibri" pitchFamily="34" charset="-120"/>
               </a:rPr>
-              <a:t>Верный SQL по всем трём базам без единого упоминания схемы в промпте.</a:t>
+              <a:t>Верный SQL по всем трём базам — схему в промпт не подавали.</a:t>
             </a:r>
             <a:endParaRPr lang="en-US" sz="1500" dirty="0"/>
           </a:p>
@@ -7761,12 +7327,12 @@
         </p:nvSpPr>
         <p:spPr>
           <a:xfrm>
-            <a:off x="6217920" y="2057400"/>
-            <a:ext cx="5486400" cy="3474720"/>
+            <a:off x="6217920" y="2103120"/>
+            <a:ext cx="5486400" cy="3383280"/>
           </a:xfrm>
           <a:prstGeom prst="roundRect">
             <a:avLst>
-              <a:gd name="adj" fmla="val 1053"/>
+              <a:gd name="adj" fmla="val 1081"/>
             </a:avLst>
           </a:prstGeom>
           <a:solidFill>
@@ -7788,7 +7354,7 @@
         </p:nvSpPr>
         <p:spPr>
           <a:xfrm>
-            <a:off x="6492240" y="2331720"/>
+            <a:off x="6492240" y="2377440"/>
             <a:ext cx="4937760" cy="365760"/>
           </a:xfrm>
           <a:prstGeom prst="rect">
@@ -7805,17 +7371,17 @@
               <a:buNone/>
             </a:pPr>
             <a:r>
-              <a:rPr lang="en-US" sz="1400" b="1" dirty="0">
+              <a:rPr lang="en-US" sz="1500" b="1" dirty="0">
                 <a:solidFill>
                   <a:srgbClr val="444444"/>
                 </a:solidFill>
-                <a:latin typeface="Courier New" pitchFamily="34" charset="0"/>
-                <a:ea typeface="Courier New" pitchFamily="34" charset="-122"/>
-                <a:cs typeface="Courier New" pitchFamily="34" charset="-120"/>
+                <a:latin typeface="Calibri" pitchFamily="34" charset="0"/>
+                <a:ea typeface="Calibri" pitchFamily="34" charset="-122"/>
+                <a:cs typeface="Calibri" pitchFamily="34" charset="-120"/>
               </a:rPr>
-              <a:t>baseline (базовая модель + схема)</a:t>
+              <a:t>базовая модель + схема</a:t>
             </a:r>
-            <a:endParaRPr lang="en-US" sz="1400" dirty="0"/>
+            <a:endParaRPr lang="en-US" sz="1500" dirty="0"/>
           </a:p>
         </p:txBody>
       </p:sp>
@@ -7827,7 +7393,7 @@
         </p:nvSpPr>
         <p:spPr>
           <a:xfrm>
-            <a:off x="6492240" y="2743200"/>
+            <a:off x="6492240" y="2788920"/>
             <a:ext cx="4937760" cy="914400"/>
           </a:xfrm>
           <a:prstGeom prst="rect">
@@ -7844,7 +7410,7 @@
               <a:buNone/>
             </a:pPr>
             <a:r>
-              <a:rPr lang="en-US" sz="5000" b="1" dirty="0">
+              <a:rPr lang="en-US" sz="5200" b="1" dirty="0">
                 <a:solidFill>
                   <a:srgbClr val="102D69"/>
                 </a:solidFill>
@@ -7852,9 +7418,9 @@
                 <a:ea typeface="Courier New" pitchFamily="34" charset="-122"/>
                 <a:cs typeface="Courier New" pitchFamily="34" charset="-120"/>
               </a:rPr>
-              <a:t>2 / 3 PASS</a:t>
+              <a:t>2 / 3</a:t>
             </a:r>
-            <a:endParaRPr lang="en-US" sz="5000" dirty="0"/>
+            <a:endParaRPr lang="en-US" sz="5200" dirty="0"/>
           </a:p>
         </p:txBody>
       </p:sp>
@@ -7866,7 +7432,7 @@
         </p:nvSpPr>
         <p:spPr>
           <a:xfrm>
-            <a:off x="6492240" y="3794760"/>
+            <a:off x="6492240" y="3840480"/>
             <a:ext cx="4937760" cy="1371600"/>
           </a:xfrm>
           <a:prstGeom prst="rect">
@@ -7894,7 +7460,7 @@
                 <a:ea typeface="Calibri" pitchFamily="34" charset="-122"/>
                 <a:cs typeface="Calibri" pitchFamily="34" charset="-120"/>
               </a:rPr>
-              <a:t>На codebase_community базовая модель СО СХЕМОЙ сослалась на несуществующую колонку userid.</a:t>
+              <a:t>На codebase_community сослалась на несуществующую колонку userid — даже имея схему в промпте.</a:t>
             </a:r>
             <a:endParaRPr lang="en-US" sz="1500" dirty="0"/>
           </a:p>
@@ -7933,7 +7499,7 @@
                 <a:ea typeface="Calibri" pitchFamily="34" charset="-122"/>
                 <a:cs typeface="Calibri" pitchFamily="34" charset="-120"/>
               </a:rPr>
-              <a:t>DB2Model · ветка SFT/LoRA</a:t>
+              <a:t>DB2Model · SFT/LoRA</a:t>
             </a:r>
             <a:endParaRPr lang="en-US" sz="900" dirty="0"/>
           </a:p>
@@ -8072,7 +7638,7 @@
         </p:nvSpPr>
         <p:spPr>
           <a:xfrm>
-            <a:off x="457200" y="384048"/>
+            <a:off x="457200" y="411480"/>
             <a:ext cx="9875520" cy="685800"/>
           </a:xfrm>
           <a:prstGeom prst="rect">
@@ -8089,7 +7655,7 @@
               <a:buNone/>
             </a:pPr>
             <a:r>
-              <a:rPr lang="en-US" sz="3200" b="1" dirty="0">
+              <a:rPr lang="en-US" sz="3100" b="1" dirty="0">
                 <a:solidFill>
                   <a:srgbClr val="102D69"/>
                 </a:solidFill>
@@ -8097,9 +7663,9 @@
                 <a:ea typeface="Calibri" pitchFamily="34" charset="-122"/>
                 <a:cs typeface="Calibri" pitchFamily="34" charset="-120"/>
               </a:rPr>
-              <a:t>Финальная таблица — обе ветки</a:t>
+              <a:t>Сводная таблица</a:t>
             </a:r>
-            <a:endParaRPr lang="en-US" sz="3200" dirty="0"/>
+            <a:endParaRPr lang="en-US" sz="3100" dirty="0"/>
           </a:p>
         </p:txBody>
       </p:sp>
@@ -8111,7 +7677,7 @@
         </p:nvSpPr>
         <p:spPr>
           <a:xfrm>
-            <a:off x="457200" y="1097280"/>
+            <a:off x="457200" y="1115568"/>
             <a:ext cx="9966960" cy="365760"/>
           </a:xfrm>
           <a:prstGeom prst="rect">
@@ -8128,7 +7694,7 @@
               <a:buNone/>
             </a:pPr>
             <a:r>
-              <a:rPr lang="en-US" sz="1500" dirty="0">
+              <a:rPr lang="en-US" sz="1400" dirty="0">
                 <a:solidFill>
                   <a:srgbClr val="444444"/>
                 </a:solidFill>
@@ -8136,9 +7702,9 @@
                 <a:ea typeface="Calibri" pitchFamily="34" charset="-122"/>
                 <a:cs typeface="Calibri" pitchFamily="34" charset="-120"/>
               </a:rPr>
-              <a:t>Один split (91 вопрос), один оценщик и парсер для всех армов</a:t>
+              <a:t>Обе ветки на одном split (91 вопрос)</a:t>
             </a:r>
-            <a:endParaRPr lang="en-US" sz="1500" dirty="0"/>
+            <a:endParaRPr lang="en-US" sz="1400" dirty="0"/>
           </a:p>
         </p:txBody>
       </p:sp>
@@ -8530,7 +8096,7 @@
                           <a:ea typeface="Calibri" pitchFamily="34" charset="-122"/>
                           <a:cs typeface="Calibri" pitchFamily="34" charset="-120"/>
                         </a:rPr>
-                        <a:t>prompt-ток.</a:t>
+                        <a:t>токены</a:t>
                       </a:r>
                       <a:endParaRPr lang="en-US" sz="1200" dirty="0">
                         <a:latin typeface="Calibri" charset="0"/>
@@ -10308,7 +9874,7 @@
                           <a:ea typeface="Calibri" pitchFamily="34" charset="-122"/>
                           <a:cs typeface="Calibri" pitchFamily="34" charset="-120"/>
                         </a:rPr>
-                        <a:t>V3 (граф, top_k=15)</a:t>
+                        <a:t>V3 (граф)</a:t>
                       </a:r>
                       <a:endParaRPr lang="en-US" sz="1200" dirty="0">
                         <a:latin typeface="Calibri" charset="0"/>
@@ -11128,7 +10694,7 @@
                           <a:ea typeface="Calibri" pitchFamily="34" charset="-122"/>
                           <a:cs typeface="Calibri" pitchFamily="34" charset="-120"/>
                         </a:rPr>
-                        <a:t>lora sql-only (3 сида)</a:t>
+                        <a:t>lora (3 сида)</a:t>
                       </a:r>
                       <a:endParaRPr lang="en-US" sz="1200" dirty="0">
                         <a:latin typeface="Calibri" charset="0"/>
@@ -11538,7 +11104,7 @@
                           <a:ea typeface="Calibri" pitchFamily="34" charset="-122"/>
                           <a:cs typeface="Calibri" pitchFamily="34" charset="-120"/>
                         </a:rPr>
-                        <a:t>lora sql-only (3 сида)</a:t>
+                        <a:t>lora (3 сида)</a:t>
                       </a:r>
                       <a:endParaRPr lang="en-US" sz="1200" dirty="0">
                         <a:latin typeface="Calibri" charset="0"/>
@@ -11899,7 +11465,7 @@
                 <a:ea typeface="Calibri" pitchFamily="34" charset="-122"/>
                 <a:cs typeface="Calibri" pitchFamily="34" charset="-120"/>
               </a:rPr>
-              <a:t>DB2Model · ветка SFT/LoRA</a:t>
+              <a:t>DB2Model · SFT/LoRA</a:t>
             </a:r>
             <a:endParaRPr lang="en-US" sz="900" dirty="0"/>
           </a:p>

--- a/db2model/DB2Model_SFT_LoRA_defense.pptx
+++ b/db2model/DB2Model_SFT_LoRA_defense.pptx
@@ -156,7 +156,7 @@
               <a:lstStyle/>
               <a:p>
                 <a:pPr>
-                  <a:defRPr b="0" i="0" strike="noStrike" sz="1200" u="none">
+                  <a:defRPr b="0" i="0" strike="noStrike" sz="1100" u="none">
                     <a:solidFill>
                       <a:srgbClr val="102D69"/>
                     </a:solidFill>
@@ -175,9 +175,9 @@
           </c:dLbls>
           <c:cat>
             <c:multiLvlStrRef>
-              <c:f>Sheet1!$A$2:$A$6</c:f>
+              <c:f>Sheet1!$A$2:$A$7</c:f>
               <c:multiLvlStrCache>
-                <c:ptCount val="5"/>
+                <c:ptCount val="6"/>
                 <c:lvl>
                   <c:pt idx="0">
                     <c:v>zeroshot 3B</c:v>
@@ -186,12 +186,15 @@
                     <c:v>baseline 3B</c:v>
                   </c:pt>
                   <c:pt idx="2">
+                    <c:v>ROUTE 3B</c:v>
+                  </c:pt>
+                  <c:pt idx="3">
                     <c:v>lora 3B</c:v>
                   </c:pt>
-                  <c:pt idx="3">
+                  <c:pt idx="4">
                     <c:v>baseline 7B</c:v>
                   </c:pt>
-                  <c:pt idx="4">
+                  <c:pt idx="5">
                     <c:v>lora 7B</c:v>
                   </c:pt>
                 </c:lvl>
@@ -200,10 +203,10 @@
           </c:cat>
           <c:val>
             <c:numRef>
-              <c:f>Sheet1!$B$2:$B$6</c:f>
+              <c:f>Sheet1!$B$2:$B$7</c:f>
               <c:numCache>
                 <c:formatCode>General</c:formatCode>
-                <c:ptCount val="5"/>
+                <c:ptCount val="6"/>
                 <c:pt idx="0">
                   <c:v>5.49</c:v>
                 </c:pt>
@@ -211,12 +214,15 @@
                   <c:v>24.18</c:v>
                 </c:pt>
                 <c:pt idx="2">
-                  <c:v>30.77</c:v>
+                  <c:v>28.57</c:v>
                 </c:pt>
                 <c:pt idx="3">
                   <c:v>30.77</c:v>
                 </c:pt>
                 <c:pt idx="4">
+                  <c:v>30.77</c:v>
+                </c:pt>
+                <c:pt idx="5">
                   <c:v>41.03</c:v>
                 </c:pt>
               </c:numCache>
@@ -230,7 +236,7 @@
             <a:lstStyle/>
             <a:p>
               <a:pPr>
-                <a:defRPr b="0" i="0" strike="noStrike" sz="1200" u="none">
+                <a:defRPr b="0" i="0" strike="noStrike" sz="1100" u="none">
                   <a:solidFill>
                     <a:srgbClr val="102D69"/>
                   </a:solidFill>
@@ -278,7 +284,7 @@
           <a:lstStyle/>
           <a:p>
             <a:pPr>
-              <a:defRPr sz="1100" b="0" i="0" u="none" strike="noStrike">
+              <a:defRPr sz="1000" b="0" i="0" u="none" strike="noStrike">
                 <a:solidFill>
                   <a:srgbClr val="444444"/>
                 </a:solidFill>
@@ -3109,7 +3115,7 @@
                 <a:ea typeface="Calibri" pitchFamily="34" charset="-122"/>
                 <a:cs typeface="Calibri" pitchFamily="34" charset="-120"/>
               </a:rPr>
-              <a:t>Как получали адаптер</a:t>
+              <a:t>Данные для адаптера пишет учитель, отбирает — база</a:t>
             </a:r>
             <a:endParaRPr lang="en-US" sz="3100" dirty="0"/>
           </a:p>
@@ -3148,7 +3154,7 @@
                 <a:ea typeface="Calibri" pitchFamily="34" charset="-122"/>
                 <a:cs typeface="Calibri" pitchFamily="34" charset="-120"/>
               </a:rPr>
-              <a:t>Сбор данных и оценка — локально через ssh-туннель, обучение — на Kaggle</a:t>
+              <a:t>Генерация пар → фильтр исполнением → QLoRA; локально, обучение на Kaggle</a:t>
             </a:r>
             <a:endParaRPr lang="en-US" sz="1400" dirty="0"/>
           </a:p>
@@ -4381,7 +4387,7 @@
                 <a:ea typeface="Calibri" pitchFamily="34" charset="-122"/>
                 <a:cs typeface="Calibri" pitchFamily="34" charset="-120"/>
               </a:rPr>
-              <a:t>Как считали токены</a:t>
+              <a:t>Тот же вопрос — 90 токенов вместо 288</a:t>
             </a:r>
             <a:endParaRPr lang="en-US" sz="3100" dirty="0"/>
           </a:p>
@@ -4420,7 +4426,7 @@
                 <a:ea typeface="Calibri" pitchFamily="34" charset="-122"/>
                 <a:cs typeface="Calibri" pitchFamily="34" charset="-120"/>
               </a:rPr>
-              <a:t>Скрипт measure_tokens.py — тот же промпт, что на инференсе, токенайзер Qwen</a:t>
+              <a:t>Считаем токенайзером Qwen тот же промпт, что уходит на инференсе (measure_tokens.py)</a:t>
             </a:r>
             <a:endParaRPr lang="en-US" sz="1400" dirty="0"/>
           </a:p>
@@ -5028,7 +5034,7 @@
               <a:buNone/>
             </a:pPr>
             <a:r>
-              <a:rPr lang="en-US" sz="3100" b="1" dirty="0">
+              <a:rPr lang="en-US" sz="2900" b="1" dirty="0">
                 <a:solidFill>
                   <a:srgbClr val="FFFFFF"/>
                 </a:solidFill>
@@ -5036,9 +5042,9 @@
                 <a:ea typeface="Calibri" pitchFamily="34" charset="-122"/>
                 <a:cs typeface="Calibri" pitchFamily="34" charset="-120"/>
               </a:rPr>
-              <a:t>Результат</a:t>
-            </a:r>
-            <a:endParaRPr lang="en-US" sz="3100" dirty="0"/>
+              <a:t>Знание в весах обгоняет контекст на 10 пунктов</a:t>
+            </a:r>
+            <a:endParaRPr lang="en-US" sz="2900" dirty="0"/>
           </a:p>
         </p:txBody>
       </p:sp>
@@ -5075,7 +5081,7 @@
                 <a:ea typeface="Calibri" pitchFamily="34" charset="-122"/>
                 <a:cs typeface="Calibri" pitchFamily="34" charset="-120"/>
               </a:rPr>
-              <a:t>target 7B, знание в весах против baseline со схемой в промпте</a:t>
+              <a:t>target 7B: адаптер без схемы против baseline со схемой в промпте</a:t>
             </a:r>
             <a:endParaRPr lang="en-US" sz="1500" dirty="0"/>
           </a:p>
@@ -5506,7 +5512,7 @@
                 <a:ea typeface="Calibri" pitchFamily="34" charset="-122"/>
                 <a:cs typeface="Calibri" pitchFamily="34" charset="-120"/>
               </a:rPr>
-              <a:t>Точность по армам</a:t>
+              <a:t>Адаптер без схемы точнее baseline на обоих размерах</a:t>
             </a:r>
             <a:endParaRPr lang="en-US" sz="3100" dirty="0"/>
           </a:p>
@@ -5545,7 +5551,7 @@
                 <a:ea typeface="Calibri" pitchFamily="34" charset="-122"/>
                 <a:cs typeface="Calibri" pitchFamily="34" charset="-120"/>
               </a:rPr>
-              <a:t>Пять конфигураций, один split; lora — среднее по 3 сидам</a:t>
+              <a:t>EX по армам, один split; lora — среднее по 3 сидам</a:t>
             </a:r>
             <a:endParaRPr lang="en-US" sz="1400" dirty="0"/>
           </a:p>
@@ -5575,8 +5581,8 @@
         </p:nvSpPr>
         <p:spPr>
           <a:xfrm>
-            <a:off x="8046720" y="2651760"/>
-            <a:ext cx="3657600" cy="1463040"/>
+            <a:off x="8046720" y="2606040"/>
+            <a:ext cx="3657600" cy="1371600"/>
           </a:xfrm>
           <a:prstGeom prst="rect">
             <a:avLst/>
@@ -5590,12 +5596,12 @@
           <a:p>
             <a:pPr indent="0" marL="0">
               <a:spcAft>
-                <a:spcPts val="1200"/>
+                <a:spcPts val="1000"/>
               </a:spcAft>
               <a:buNone/>
             </a:pPr>
             <a:r>
-              <a:rPr lang="en-US" sz="1400" dirty="0">
+              <a:rPr lang="en-US" sz="1300" dirty="0">
                 <a:solidFill>
                   <a:srgbClr val="102D69"/>
                 </a:solidFill>
@@ -5605,14 +5611,14 @@
               </a:rPr>
               <a:t>3B:  30.8% vs 24.2%   (+6.6 п.п.)</a:t>
             </a:r>
-            <a:endParaRPr lang="en-US" sz="1400" dirty="0"/>
+            <a:endParaRPr lang="en-US" sz="1300" dirty="0"/>
           </a:p>
           <a:p>
             <a:pPr indent="0" marL="0">
               <a:buNone/>
             </a:pPr>
             <a:r>
-              <a:rPr lang="en-US" sz="1400" dirty="0">
+              <a:rPr lang="en-US" sz="1300" dirty="0">
                 <a:solidFill>
                   <a:srgbClr val="102D69"/>
                 </a:solidFill>
@@ -5622,7 +5628,7 @@
               </a:rPr>
               <a:t>7B:  41.0% vs 30.8%   (+10.3 п.п.)</a:t>
             </a:r>
-            <a:endParaRPr lang="en-US" sz="1400" dirty="0"/>
+            <a:endParaRPr lang="en-US" sz="1300" dirty="0"/>
           </a:p>
         </p:txBody>
       </p:sp>
@@ -5634,8 +5640,8 @@
         </p:nvSpPr>
         <p:spPr>
           <a:xfrm>
-            <a:off x="8046720" y="4023360"/>
-            <a:ext cx="3657600" cy="1280160"/>
+            <a:off x="8046720" y="3977640"/>
+            <a:ext cx="3657600" cy="1828800"/>
           </a:xfrm>
           <a:prstGeom prst="rect">
             <a:avLst/>
@@ -5662,7 +5668,7 @@
                 <a:ea typeface="Calibri" pitchFamily="34" charset="-122"/>
                 <a:cs typeface="Calibri" pitchFamily="34" charset="-120"/>
               </a:rPr>
-              <a:t>На обоих размерах адаптер без схемы точнее baseline со схемой.</a:t>
+              <a:t>ROUTE (мультизадачность) — 28.6%: между baseline и lora, в пределах шума. Прироста над обычным lora не дала.</a:t>
             </a:r>
             <a:endParaRPr lang="en-US" sz="1400" dirty="0"/>
           </a:p>
@@ -5865,7 +5871,7 @@
                 <a:ea typeface="Calibri" pitchFamily="34" charset="-122"/>
                 <a:cs typeface="Calibri" pitchFamily="34" charset="-120"/>
               </a:rPr>
-              <a:t>Влияние объёма данных</a:t>
+              <a:t>Точность упирается в объём данных, а не в потолок</a:t>
             </a:r>
             <a:endParaRPr lang="en-US" sz="3100" dirty="0"/>
           </a:p>
@@ -6165,7 +6171,7 @@
                 <a:ea typeface="Calibri" pitchFamily="34" charset="-122"/>
                 <a:cs typeface="Calibri" pitchFamily="34" charset="-120"/>
               </a:rPr>
-              <a:t>Что проверяли ещё</a:t>
+              <a:t>Из проверенных добавок помог только объём данных</a:t>
             </a:r>
             <a:endParaRPr lang="en-US" sz="3100" dirty="0"/>
           </a:p>
@@ -6204,7 +6210,7 @@
                 <a:ea typeface="Calibri" pitchFamily="34" charset="-122"/>
                 <a:cs typeface="Calibri" pitchFamily="34" charset="-120"/>
               </a:rPr>
-              <a:t>Из четырёх гипотез знак подтвердился у двух</a:t>
+              <a:t>Reasoning навредил, мультизадачность и фильтр — в пределах шума</a:t>
             </a:r>
             <a:endParaRPr lang="en-US" sz="1400" dirty="0"/>
           </a:p>
@@ -7127,7 +7133,7 @@
                 <a:ea typeface="Calibri" pitchFamily="34" charset="-122"/>
                 <a:cs typeface="Calibri" pitchFamily="34" charset="-120"/>
               </a:rPr>
-              <a:t>MCP-сервер</a:t>
+              <a:t>MCP отдаёт готовый SQL по живой базе</a:t>
             </a:r>
             <a:endParaRPr lang="en-US" sz="3100" dirty="0"/>
           </a:p>
@@ -7166,7 +7172,7 @@
                 <a:ea typeface="Calibri" pitchFamily="34" charset="-122"/>
                 <a:cs typeface="Calibri" pitchFamily="34" charset="-120"/>
               </a:rPr>
-              <a:t>Адаптер через vLLM: вопрос → SQL → живая база, проверка на трёх базах</a:t>
+              <a:t>Реальный прогон smoke-теста: вопрос → адаптер (без схемы) → SQL → результат</a:t>
             </a:r>
             <a:endParaRPr lang="en-US" sz="1400" dirty="0"/>
           </a:p>
@@ -7180,12 +7186,12 @@
         </p:nvSpPr>
         <p:spPr>
           <a:xfrm>
-            <a:off x="457200" y="2103120"/>
-            <a:ext cx="5486400" cy="3383280"/>
+            <a:off x="457200" y="1965960"/>
+            <a:ext cx="11247120" cy="3703320"/>
           </a:xfrm>
           <a:prstGeom prst="roundRect">
             <a:avLst>
-              <a:gd name="adj" fmla="val 1081"/>
+              <a:gd name="adj" fmla="val 988"/>
             </a:avLst>
           </a:prstGeom>
           <a:solidFill>
@@ -7207,8 +7213,8 @@
         </p:nvSpPr>
         <p:spPr>
           <a:xfrm>
-            <a:off x="731520" y="2377440"/>
-            <a:ext cx="4937760" cy="365760"/>
+            <a:off x="777240" y="2084832"/>
+            <a:ext cx="10058400" cy="274320"/>
           </a:xfrm>
           <a:prstGeom prst="rect">
             <a:avLst/>
@@ -7224,17 +7230,17 @@
               <a:buNone/>
             </a:pPr>
             <a:r>
-              <a:rPr lang="en-US" sz="1500" b="1" dirty="0">
+              <a:rPr lang="en-US" sz="1100" b="1" dirty="0">
                 <a:solidFill>
                   <a:srgbClr val="FAB900"/>
                 </a:solidFill>
-                <a:latin typeface="Calibri" pitchFamily="34" charset="0"/>
-                <a:ea typeface="Calibri" pitchFamily="34" charset="-122"/>
-                <a:cs typeface="Calibri" pitchFamily="34" charset="-120"/>
+                <a:latin typeface="Courier New" pitchFamily="34" charset="0"/>
+                <a:ea typeface="Courier New" pitchFamily="34" charset="-122"/>
+                <a:cs typeface="Courier New" pitchFamily="34" charset="-120"/>
               </a:rPr>
-              <a:t>наш адаптер (без схемы)</a:t>
-            </a:r>
-            <a:endParaRPr lang="en-US" sz="1500" dirty="0"/>
+              <a:t>MCP · schema-less арм</a:t>
+            </a:r>
+            <a:endParaRPr lang="en-US" sz="1100" dirty="0"/>
           </a:p>
         </p:txBody>
       </p:sp>
@@ -7246,8 +7252,8 @@
         </p:nvSpPr>
         <p:spPr>
           <a:xfrm>
-            <a:off x="731520" y="2788920"/>
-            <a:ext cx="4937760" cy="914400"/>
+            <a:off x="777240" y="2514600"/>
+            <a:ext cx="10607040" cy="301752"/>
           </a:xfrm>
           <a:prstGeom prst="rect">
             <a:avLst/>
@@ -7263,7 +7269,74 @@
               <a:buNone/>
             </a:pPr>
             <a:r>
-              <a:rPr lang="en-US" sz="5200" b="1" dirty="0">
+              <a:rPr lang="en-US" sz="1300" b="1" dirty="0">
+                <a:solidFill>
+                  <a:srgbClr val="FAB900"/>
+                </a:solidFill>
+                <a:latin typeface="Courier New" pitchFamily="34" charset="0"/>
+                <a:ea typeface="Courier New" pitchFamily="34" charset="-122"/>
+                <a:cs typeface="Courier New" pitchFamily="34" charset="-120"/>
+              </a:rPr>
+              <a:t>financial            </a:t>
+            </a:r>
+            <a:pPr indent="0" marL="0">
+              <a:buNone/>
+            </a:pPr>
+            <a:r>
+              <a:rPr lang="en-US" sz="1300" dirty="0">
+                <a:solidFill>
+                  <a:srgbClr val="D0E4FF"/>
+                </a:solidFill>
+                <a:latin typeface="Courier New" pitchFamily="34" charset="0"/>
+                <a:ea typeface="Courier New" pitchFamily="34" charset="-122"/>
+                <a:cs typeface="Courier New" pitchFamily="34" charset="-120"/>
+              </a:rPr>
+              <a:t>вопрос: сколько всего счетов?</a:t>
+            </a:r>
+            <a:endParaRPr lang="en-US" sz="1300" dirty="0"/>
+          </a:p>
+        </p:txBody>
+      </p:sp>
+      <p:sp>
+        <p:nvSpPr>
+          <p:cNvPr id="9" name="Text 7"/>
+          <p:cNvSpPr/>
+          <p:nvPr/>
+        </p:nvSpPr>
+        <p:spPr>
+          <a:xfrm>
+            <a:off x="1965960" y="2852928"/>
+            <a:ext cx="9509760" cy="301752"/>
+          </a:xfrm>
+          <a:prstGeom prst="rect">
+            <a:avLst/>
+          </a:prstGeom>
+          <a:noFill/>
+          <a:ln/>
+        </p:spPr>
+        <p:txBody>
+          <a:bodyPr wrap="square" lIns="0" tIns="0" rIns="0" bIns="0" rtlCol="0" anchor="ctr"/>
+          <a:lstStyle/>
+          <a:p>
+            <a:pPr indent="0" marL="0">
+              <a:buNone/>
+            </a:pPr>
+            <a:r>
+              <a:rPr lang="en-US" sz="1300" dirty="0">
+                <a:solidFill>
+                  <a:srgbClr val="D0E4FF"/>
+                </a:solidFill>
+                <a:latin typeface="Courier New" pitchFamily="34" charset="0"/>
+                <a:ea typeface="Courier New" pitchFamily="34" charset="-122"/>
+                <a:cs typeface="Courier New" pitchFamily="34" charset="-120"/>
+              </a:rPr>
+              <a:t>SQL   </a:t>
+            </a:r>
+            <a:pPr indent="0" marL="0">
+              <a:buNone/>
+            </a:pPr>
+            <a:r>
+              <a:rPr lang="en-US" sz="1300" dirty="0">
                 <a:solidFill>
                   <a:srgbClr val="FFFFFF"/>
                 </a:solidFill>
@@ -7271,22 +7344,22 @@
                 <a:ea typeface="Courier New" pitchFamily="34" charset="-122"/>
                 <a:cs typeface="Courier New" pitchFamily="34" charset="-120"/>
               </a:rPr>
-              <a:t>3 / 3</a:t>
-            </a:r>
-            <a:endParaRPr lang="en-US" sz="5200" dirty="0"/>
+              <a:t>SELECT COUNT(account_id) FROM account</a:t>
+            </a:r>
+            <a:endParaRPr lang="en-US" sz="1300" dirty="0"/>
           </a:p>
         </p:txBody>
       </p:sp>
       <p:sp>
         <p:nvSpPr>
-          <p:cNvPr id="9" name="Text 7"/>
+          <p:cNvPr id="10" name="Text 8"/>
           <p:cNvSpPr/>
           <p:nvPr/>
         </p:nvSpPr>
         <p:spPr>
           <a:xfrm>
-            <a:off x="731520" y="3840480"/>
-            <a:ext cx="4937760" cy="1371600"/>
+            <a:off x="1965960" y="3163824"/>
+            <a:ext cx="9509760" cy="301752"/>
           </a:xfrm>
           <a:prstGeom prst="rect">
             <a:avLst/>
@@ -7295,83 +7368,388 @@
           <a:ln/>
         </p:spPr>
         <p:txBody>
-          <a:bodyPr wrap="square" lIns="0" tIns="0" rIns="0" bIns="0" rtlCol="0" anchor="t"/>
+          <a:bodyPr wrap="square" lIns="0" tIns="0" rIns="0" bIns="0" rtlCol="0" anchor="ctr"/>
+          <a:lstStyle/>
+          <a:p>
+            <a:pPr indent="0" marL="0">
+              <a:buNone/>
+            </a:pPr>
+            <a:r>
+              <a:rPr lang="en-US" sz="1300" dirty="0">
+                <a:solidFill>
+                  <a:srgbClr val="D0E4FF"/>
+                </a:solidFill>
+                <a:latin typeface="Courier New" pitchFamily="34" charset="0"/>
+                <a:ea typeface="Courier New" pitchFamily="34" charset="-122"/>
+                <a:cs typeface="Courier New" pitchFamily="34" charset="-120"/>
+              </a:rPr>
+              <a:t>→ </a:t>
+            </a:r>
+            <a:pPr indent="0" marL="0">
+              <a:buNone/>
+            </a:pPr>
+            <a:r>
+              <a:rPr lang="en-US" sz="1300" b="1" dirty="0">
+                <a:solidFill>
+                  <a:srgbClr val="FAB900"/>
+                </a:solidFill>
+                <a:latin typeface="Courier New" pitchFamily="34" charset="0"/>
+                <a:ea typeface="Courier New" pitchFamily="34" charset="-122"/>
+                <a:cs typeface="Courier New" pitchFamily="34" charset="-120"/>
+              </a:rPr>
+              <a:t>4500</a:t>
+            </a:r>
+            <a:endParaRPr lang="en-US" sz="1300" dirty="0"/>
+          </a:p>
+        </p:txBody>
+      </p:sp>
+      <p:sp>
+        <p:nvSpPr>
+          <p:cNvPr id="11" name="Text 9"/>
+          <p:cNvSpPr/>
+          <p:nvPr/>
+        </p:nvSpPr>
+        <p:spPr>
+          <a:xfrm>
+            <a:off x="777240" y="3538728"/>
+            <a:ext cx="10607040" cy="301752"/>
+          </a:xfrm>
+          <a:prstGeom prst="rect">
+            <a:avLst/>
+          </a:prstGeom>
+          <a:noFill/>
+          <a:ln/>
+        </p:spPr>
+        <p:txBody>
+          <a:bodyPr wrap="square" lIns="0" tIns="0" rIns="0" bIns="0" rtlCol="0" anchor="ctr"/>
+          <a:lstStyle/>
+          <a:p>
+            <a:pPr indent="0" marL="0">
+              <a:buNone/>
+            </a:pPr>
+            <a:r>
+              <a:rPr lang="en-US" sz="1300" b="1" dirty="0">
+                <a:solidFill>
+                  <a:srgbClr val="FAB900"/>
+                </a:solidFill>
+                <a:latin typeface="Courier New" pitchFamily="34" charset="0"/>
+                <a:ea typeface="Courier New" pitchFamily="34" charset="-122"/>
+                <a:cs typeface="Courier New" pitchFamily="34" charset="-120"/>
+              </a:rPr>
+              <a:t>toxicology           </a:t>
+            </a:r>
+            <a:pPr indent="0" marL="0">
+              <a:buNone/>
+            </a:pPr>
+            <a:r>
+              <a:rPr lang="en-US" sz="1300" dirty="0">
+                <a:solidFill>
+                  <a:srgbClr val="D0E4FF"/>
+                </a:solidFill>
+                <a:latin typeface="Courier New" pitchFamily="34" charset="0"/>
+                <a:ea typeface="Courier New" pitchFamily="34" charset="-122"/>
+                <a:cs typeface="Courier New" pitchFamily="34" charset="-120"/>
+              </a:rPr>
+              <a:t>вопрос: какие бывают типы связей?</a:t>
+            </a:r>
+            <a:endParaRPr lang="en-US" sz="1300" dirty="0"/>
+          </a:p>
+        </p:txBody>
+      </p:sp>
+      <p:sp>
+        <p:nvSpPr>
+          <p:cNvPr id="12" name="Text 10"/>
+          <p:cNvSpPr/>
+          <p:nvPr/>
+        </p:nvSpPr>
+        <p:spPr>
+          <a:xfrm>
+            <a:off x="1965960" y="3877056"/>
+            <a:ext cx="9509760" cy="301752"/>
+          </a:xfrm>
+          <a:prstGeom prst="rect">
+            <a:avLst/>
+          </a:prstGeom>
+          <a:noFill/>
+          <a:ln/>
+        </p:spPr>
+        <p:txBody>
+          <a:bodyPr wrap="square" lIns="0" tIns="0" rIns="0" bIns="0" rtlCol="0" anchor="ctr"/>
+          <a:lstStyle/>
+          <a:p>
+            <a:pPr indent="0" marL="0">
+              <a:buNone/>
+            </a:pPr>
+            <a:r>
+              <a:rPr lang="en-US" sz="1300" dirty="0">
+                <a:solidFill>
+                  <a:srgbClr val="D0E4FF"/>
+                </a:solidFill>
+                <a:latin typeface="Courier New" pitchFamily="34" charset="0"/>
+                <a:ea typeface="Courier New" pitchFamily="34" charset="-122"/>
+                <a:cs typeface="Courier New" pitchFamily="34" charset="-120"/>
+              </a:rPr>
+              <a:t>SQL   </a:t>
+            </a:r>
+            <a:pPr indent="0" marL="0">
+              <a:buNone/>
+            </a:pPr>
+            <a:r>
+              <a:rPr lang="en-US" sz="1300" dirty="0">
+                <a:solidFill>
+                  <a:srgbClr val="FFFFFF"/>
+                </a:solidFill>
+                <a:latin typeface="Courier New" pitchFamily="34" charset="0"/>
+                <a:ea typeface="Courier New" pitchFamily="34" charset="-122"/>
+                <a:cs typeface="Courier New" pitchFamily="34" charset="-120"/>
+              </a:rPr>
+              <a:t>SELECT DISTINCT bond_type FROM bond LIMIT 3</a:t>
+            </a:r>
+            <a:endParaRPr lang="en-US" sz="1300" dirty="0"/>
+          </a:p>
+        </p:txBody>
+      </p:sp>
+      <p:sp>
+        <p:nvSpPr>
+          <p:cNvPr id="13" name="Text 11"/>
+          <p:cNvSpPr/>
+          <p:nvPr/>
+        </p:nvSpPr>
+        <p:spPr>
+          <a:xfrm>
+            <a:off x="1965960" y="4187952"/>
+            <a:ext cx="9509760" cy="301752"/>
+          </a:xfrm>
+          <a:prstGeom prst="rect">
+            <a:avLst/>
+          </a:prstGeom>
+          <a:noFill/>
+          <a:ln/>
+        </p:spPr>
+        <p:txBody>
+          <a:bodyPr wrap="square" lIns="0" tIns="0" rIns="0" bIns="0" rtlCol="0" anchor="ctr"/>
+          <a:lstStyle/>
+          <a:p>
+            <a:pPr indent="0" marL="0">
+              <a:buNone/>
+            </a:pPr>
+            <a:r>
+              <a:rPr lang="en-US" sz="1300" dirty="0">
+                <a:solidFill>
+                  <a:srgbClr val="D0E4FF"/>
+                </a:solidFill>
+                <a:latin typeface="Courier New" pitchFamily="34" charset="0"/>
+                <a:ea typeface="Courier New" pitchFamily="34" charset="-122"/>
+                <a:cs typeface="Courier New" pitchFamily="34" charset="-120"/>
+              </a:rPr>
+              <a:t>→ </a:t>
+            </a:r>
+            <a:pPr indent="0" marL="0">
+              <a:buNone/>
+            </a:pPr>
+            <a:r>
+              <a:rPr lang="en-US" sz="1300" b="1" dirty="0">
+                <a:solidFill>
+                  <a:srgbClr val="FAB900"/>
+                </a:solidFill>
+                <a:latin typeface="Courier New" pitchFamily="34" charset="0"/>
+                <a:ea typeface="Courier New" pitchFamily="34" charset="-122"/>
+                <a:cs typeface="Courier New" pitchFamily="34" charset="-120"/>
+              </a:rPr>
+              <a:t>3 строки</a:t>
+            </a:r>
+            <a:endParaRPr lang="en-US" sz="1300" dirty="0"/>
+          </a:p>
+        </p:txBody>
+      </p:sp>
+      <p:sp>
+        <p:nvSpPr>
+          <p:cNvPr id="14" name="Text 12"/>
+          <p:cNvSpPr/>
+          <p:nvPr/>
+        </p:nvSpPr>
+        <p:spPr>
+          <a:xfrm>
+            <a:off x="777240" y="4562856"/>
+            <a:ext cx="10607040" cy="301752"/>
+          </a:xfrm>
+          <a:prstGeom prst="rect">
+            <a:avLst/>
+          </a:prstGeom>
+          <a:noFill/>
+          <a:ln/>
+        </p:spPr>
+        <p:txBody>
+          <a:bodyPr wrap="square" lIns="0" tIns="0" rIns="0" bIns="0" rtlCol="0" anchor="ctr"/>
+          <a:lstStyle/>
+          <a:p>
+            <a:pPr indent="0" marL="0">
+              <a:buNone/>
+            </a:pPr>
+            <a:r>
+              <a:rPr lang="en-US" sz="1300" b="1" dirty="0">
+                <a:solidFill>
+                  <a:srgbClr val="FAB900"/>
+                </a:solidFill>
+                <a:latin typeface="Courier New" pitchFamily="34" charset="0"/>
+                <a:ea typeface="Courier New" pitchFamily="34" charset="-122"/>
+                <a:cs typeface="Courier New" pitchFamily="34" charset="-120"/>
+              </a:rPr>
+              <a:t>codebase_community   </a:t>
+            </a:r>
+            <a:pPr indent="0" marL="0">
+              <a:buNone/>
+            </a:pPr>
+            <a:r>
+              <a:rPr lang="en-US" sz="1300" dirty="0">
+                <a:solidFill>
+                  <a:srgbClr val="D0E4FF"/>
+                </a:solidFill>
+                <a:latin typeface="Courier New" pitchFamily="34" charset="0"/>
+                <a:ea typeface="Courier New" pitchFamily="34" charset="-122"/>
+                <a:cs typeface="Courier New" pitchFamily="34" charset="-120"/>
+              </a:rPr>
+              <a:t>вопрос: сколько пользователей?</a:t>
+            </a:r>
+            <a:endParaRPr lang="en-US" sz="1300" dirty="0"/>
+          </a:p>
+        </p:txBody>
+      </p:sp>
+      <p:sp>
+        <p:nvSpPr>
+          <p:cNvPr id="15" name="Text 13"/>
+          <p:cNvSpPr/>
+          <p:nvPr/>
+        </p:nvSpPr>
+        <p:spPr>
+          <a:xfrm>
+            <a:off x="1965960" y="4901184"/>
+            <a:ext cx="9509760" cy="301752"/>
+          </a:xfrm>
+          <a:prstGeom prst="rect">
+            <a:avLst/>
+          </a:prstGeom>
+          <a:noFill/>
+          <a:ln/>
+        </p:spPr>
+        <p:txBody>
+          <a:bodyPr wrap="square" lIns="0" tIns="0" rIns="0" bIns="0" rtlCol="0" anchor="ctr"/>
+          <a:lstStyle/>
+          <a:p>
+            <a:pPr indent="0" marL="0">
+              <a:buNone/>
+            </a:pPr>
+            <a:r>
+              <a:rPr lang="en-US" sz="1300" dirty="0">
+                <a:solidFill>
+                  <a:srgbClr val="D0E4FF"/>
+                </a:solidFill>
+                <a:latin typeface="Courier New" pitchFamily="34" charset="0"/>
+                <a:ea typeface="Courier New" pitchFamily="34" charset="-122"/>
+                <a:cs typeface="Courier New" pitchFamily="34" charset="-120"/>
+              </a:rPr>
+              <a:t>SQL   </a:t>
+            </a:r>
+            <a:pPr indent="0" marL="0">
+              <a:buNone/>
+            </a:pPr>
+            <a:r>
+              <a:rPr lang="en-US" sz="1300" dirty="0">
+                <a:solidFill>
+                  <a:srgbClr val="FFFFFF"/>
+                </a:solidFill>
+                <a:latin typeface="Courier New" pitchFamily="34" charset="0"/>
+                <a:ea typeface="Courier New" pitchFamily="34" charset="-122"/>
+                <a:cs typeface="Courier New" pitchFamily="34" charset="-120"/>
+              </a:rPr>
+              <a:t>SELECT COUNT(*) FROM users</a:t>
+            </a:r>
+            <a:endParaRPr lang="en-US" sz="1300" dirty="0"/>
+          </a:p>
+        </p:txBody>
+      </p:sp>
+      <p:sp>
+        <p:nvSpPr>
+          <p:cNvPr id="16" name="Text 14"/>
+          <p:cNvSpPr/>
+          <p:nvPr/>
+        </p:nvSpPr>
+        <p:spPr>
+          <a:xfrm>
+            <a:off x="1965960" y="5212080"/>
+            <a:ext cx="9509760" cy="301752"/>
+          </a:xfrm>
+          <a:prstGeom prst="rect">
+            <a:avLst/>
+          </a:prstGeom>
+          <a:noFill/>
+          <a:ln/>
+        </p:spPr>
+        <p:txBody>
+          <a:bodyPr wrap="square" lIns="0" tIns="0" rIns="0" bIns="0" rtlCol="0" anchor="ctr"/>
+          <a:lstStyle/>
+          <a:p>
+            <a:pPr indent="0" marL="0">
+              <a:buNone/>
+            </a:pPr>
+            <a:r>
+              <a:rPr lang="en-US" sz="1300" dirty="0">
+                <a:solidFill>
+                  <a:srgbClr val="D0E4FF"/>
+                </a:solidFill>
+                <a:latin typeface="Courier New" pitchFamily="34" charset="0"/>
+                <a:ea typeface="Courier New" pitchFamily="34" charset="-122"/>
+                <a:cs typeface="Courier New" pitchFamily="34" charset="-120"/>
+              </a:rPr>
+              <a:t>→ </a:t>
+            </a:r>
+            <a:pPr indent="0" marL="0">
+              <a:buNone/>
+            </a:pPr>
+            <a:r>
+              <a:rPr lang="en-US" sz="1300" b="1" dirty="0">
+                <a:solidFill>
+                  <a:srgbClr val="FAB900"/>
+                </a:solidFill>
+                <a:latin typeface="Courier New" pitchFamily="34" charset="0"/>
+                <a:ea typeface="Courier New" pitchFamily="34" charset="-122"/>
+                <a:cs typeface="Courier New" pitchFamily="34" charset="-120"/>
+              </a:rPr>
+              <a:t>40325</a:t>
+            </a:r>
+            <a:endParaRPr lang="en-US" sz="1300" dirty="0"/>
+          </a:p>
+        </p:txBody>
+      </p:sp>
+      <p:sp>
+        <p:nvSpPr>
+          <p:cNvPr id="17" name="Text 15"/>
+          <p:cNvSpPr/>
+          <p:nvPr/>
+        </p:nvSpPr>
+        <p:spPr>
+          <a:xfrm>
+            <a:off x="457200" y="5806440"/>
+            <a:ext cx="11247120" cy="457200"/>
+          </a:xfrm>
+          <a:prstGeom prst="rect">
+            <a:avLst/>
+          </a:prstGeom>
+          <a:noFill/>
+          <a:ln/>
+        </p:spPr>
+        <p:txBody>
+          <a:bodyPr wrap="square" lIns="0" tIns="0" rIns="0" bIns="0" rtlCol="0" anchor="ctr"/>
           <a:lstStyle/>
           <a:p>
             <a:pPr indent="0" marL="0">
               <a:lnSpc>
-                <a:spcPts val="2000"/>
+                <a:spcPts val="1600"/>
               </a:lnSpc>
               <a:buNone/>
             </a:pPr>
             <a:r>
-              <a:rPr lang="en-US" sz="1500" dirty="0">
-                <a:solidFill>
-                  <a:srgbClr val="D0E4FF"/>
-                </a:solidFill>
-                <a:latin typeface="Calibri" pitchFamily="34" charset="0"/>
-                <a:ea typeface="Calibri" pitchFamily="34" charset="-122"/>
-                <a:cs typeface="Calibri" pitchFamily="34" charset="-120"/>
-              </a:rPr>
-              <a:t>Верный SQL по всем трём базам — схему в промпт не подавали.</a:t>
-            </a:r>
-            <a:endParaRPr lang="en-US" sz="1500" dirty="0"/>
-          </a:p>
-        </p:txBody>
-      </p:sp>
-      <p:sp>
-        <p:nvSpPr>
-          <p:cNvPr id="10" name="Shape 8"/>
-          <p:cNvSpPr/>
-          <p:nvPr/>
-        </p:nvSpPr>
-        <p:spPr>
-          <a:xfrm>
-            <a:off x="6217920" y="2103120"/>
-            <a:ext cx="5486400" cy="3383280"/>
-          </a:xfrm>
-          <a:prstGeom prst="roundRect">
-            <a:avLst>
-              <a:gd name="adj" fmla="val 1081"/>
-            </a:avLst>
-          </a:prstGeom>
-          <a:solidFill>
-            <a:srgbClr val="EEF4FF"/>
-          </a:solidFill>
-          <a:ln w="12700">
-            <a:solidFill>
-              <a:srgbClr val="C9B894"/>
-            </a:solidFill>
-            <a:prstDash val="solid"/>
-          </a:ln>
-        </p:spPr>
-      </p:sp>
-      <p:sp>
-        <p:nvSpPr>
-          <p:cNvPr id="11" name="Text 9"/>
-          <p:cNvSpPr/>
-          <p:nvPr/>
-        </p:nvSpPr>
-        <p:spPr>
-          <a:xfrm>
-            <a:off x="6492240" y="2377440"/>
-            <a:ext cx="4937760" cy="365760"/>
-          </a:xfrm>
-          <a:prstGeom prst="rect">
-            <a:avLst/>
-          </a:prstGeom>
-          <a:noFill/>
-          <a:ln/>
-        </p:spPr>
-        <p:txBody>
-          <a:bodyPr wrap="square" lIns="0" tIns="0" rIns="0" bIns="0" rtlCol="0" anchor="ctr"/>
-          <a:lstStyle/>
-          <a:p>
-            <a:pPr indent="0" marL="0">
-              <a:buNone/>
-            </a:pPr>
-            <a:r>
-              <a:rPr lang="en-US" sz="1500" b="1" dirty="0">
+              <a:rPr lang="en-US" sz="1300" dirty="0">
                 <a:solidFill>
                   <a:srgbClr val="444444"/>
                 </a:solidFill>
@@ -7379,96 +7757,15 @@
                 <a:ea typeface="Calibri" pitchFamily="34" charset="-122"/>
                 <a:cs typeface="Calibri" pitchFamily="34" charset="-120"/>
               </a:rPr>
-              <a:t>базовая модель + схема</a:t>
-            </a:r>
-            <a:endParaRPr lang="en-US" sz="1500" dirty="0"/>
+              <a:t>Схему в промпт не подавали — 3 из 3. Базовая модель со схемой на codebase_community ошиблась в имени колонки userid (2 из 3).</a:t>
+            </a:r>
+            <a:endParaRPr lang="en-US" sz="1300" dirty="0"/>
           </a:p>
         </p:txBody>
       </p:sp>
       <p:sp>
         <p:nvSpPr>
-          <p:cNvPr id="12" name="Text 10"/>
-          <p:cNvSpPr/>
-          <p:nvPr/>
-        </p:nvSpPr>
-        <p:spPr>
-          <a:xfrm>
-            <a:off x="6492240" y="2788920"/>
-            <a:ext cx="4937760" cy="914400"/>
-          </a:xfrm>
-          <a:prstGeom prst="rect">
-            <a:avLst/>
-          </a:prstGeom>
-          <a:noFill/>
-          <a:ln/>
-        </p:spPr>
-        <p:txBody>
-          <a:bodyPr wrap="square" lIns="0" tIns="0" rIns="0" bIns="0" rtlCol="0" anchor="ctr"/>
-          <a:lstStyle/>
-          <a:p>
-            <a:pPr indent="0" marL="0">
-              <a:buNone/>
-            </a:pPr>
-            <a:r>
-              <a:rPr lang="en-US" sz="5200" b="1" dirty="0">
-                <a:solidFill>
-                  <a:srgbClr val="102D69"/>
-                </a:solidFill>
-                <a:latin typeface="Courier New" pitchFamily="34" charset="0"/>
-                <a:ea typeface="Courier New" pitchFamily="34" charset="-122"/>
-                <a:cs typeface="Courier New" pitchFamily="34" charset="-120"/>
-              </a:rPr>
-              <a:t>2 / 3</a:t>
-            </a:r>
-            <a:endParaRPr lang="en-US" sz="5200" dirty="0"/>
-          </a:p>
-        </p:txBody>
-      </p:sp>
-      <p:sp>
-        <p:nvSpPr>
-          <p:cNvPr id="13" name="Text 11"/>
-          <p:cNvSpPr/>
-          <p:nvPr/>
-        </p:nvSpPr>
-        <p:spPr>
-          <a:xfrm>
-            <a:off x="6492240" y="3840480"/>
-            <a:ext cx="4937760" cy="1371600"/>
-          </a:xfrm>
-          <a:prstGeom prst="rect">
-            <a:avLst/>
-          </a:prstGeom>
-          <a:noFill/>
-          <a:ln/>
-        </p:spPr>
-        <p:txBody>
-          <a:bodyPr wrap="square" lIns="0" tIns="0" rIns="0" bIns="0" rtlCol="0" anchor="t"/>
-          <a:lstStyle/>
-          <a:p>
-            <a:pPr indent="0" marL="0">
-              <a:lnSpc>
-                <a:spcPts val="2000"/>
-              </a:lnSpc>
-              <a:buNone/>
-            </a:pPr>
-            <a:r>
-              <a:rPr lang="en-US" sz="1500" dirty="0">
-                <a:solidFill>
-                  <a:srgbClr val="444444"/>
-                </a:solidFill>
-                <a:latin typeface="Calibri" pitchFamily="34" charset="0"/>
-                <a:ea typeface="Calibri" pitchFamily="34" charset="-122"/>
-                <a:cs typeface="Calibri" pitchFamily="34" charset="-120"/>
-              </a:rPr>
-              <a:t>На codebase_community сослалась на несуществующую колонку userid — даже имея схему в промпте.</a:t>
-            </a:r>
-            <a:endParaRPr lang="en-US" sz="1500" dirty="0"/>
-          </a:p>
-        </p:txBody>
-      </p:sp>
-      <p:sp>
-        <p:nvSpPr>
-          <p:cNvPr id="14" name="Text 12"/>
+          <p:cNvPr id="18" name="Text 16"/>
           <p:cNvSpPr/>
           <p:nvPr/>
         </p:nvSpPr>
@@ -7507,7 +7804,7 @@
       </p:sp>
       <p:sp>
         <p:nvSpPr>
-          <p:cNvPr id="15" name="Text 13"/>
+          <p:cNvPr id="19" name="Text 17"/>
           <p:cNvSpPr/>
           <p:nvPr/>
         </p:nvSpPr>
@@ -7663,7 +7960,7 @@
                 <a:ea typeface="Calibri" pitchFamily="34" charset="-122"/>
                 <a:cs typeface="Calibri" pitchFamily="34" charset="-120"/>
               </a:rPr>
-              <a:t>Сводная таблица</a:t>
+              <a:t>Знание в весах — лучший баланс точности и контекста</a:t>
             </a:r>
             <a:endParaRPr lang="en-US" sz="3100" dirty="0"/>
           </a:p>
@@ -7702,7 +7999,7 @@
                 <a:ea typeface="Calibri" pitchFamily="34" charset="-122"/>
                 <a:cs typeface="Calibri" pitchFamily="34" charset="-120"/>
               </a:rPr>
-              <a:t>Обе ветки на одном split (91 вопрос)</a:t>
+              <a:t>Обе ветки на одном split (91 вопрос); выделен лучший результат</a:t>
             </a:r>
             <a:endParaRPr lang="en-US" sz="1400" dirty="0"/>
           </a:p>

--- a/db2model/DB2Model_SFT_LoRA_defense.pptx
+++ b/db2model/DB2Model_SFT_LoRA_defense.pptx
@@ -156,7 +156,7 @@
               <a:lstStyle/>
               <a:p>
                 <a:pPr>
-                  <a:defRPr b="0" i="0" strike="noStrike" sz="1100" u="none">
+                  <a:defRPr b="0" i="0" strike="noStrike" sz="1000" u="none">
                     <a:solidFill>
                       <a:srgbClr val="102D69"/>
                     </a:solidFill>
@@ -175,9 +175,9 @@
           </c:dLbls>
           <c:cat>
             <c:multiLvlStrRef>
-              <c:f>Sheet1!$A$2:$A$7</c:f>
+              <c:f>Sheet1!$A$2:$A$8</c:f>
               <c:multiLvlStrCache>
-                <c:ptCount val="6"/>
+                <c:ptCount val="7"/>
                 <c:lvl>
                   <c:pt idx="0">
                     <c:v>zeroshot 3B</c:v>
@@ -195,6 +195,9 @@
                     <c:v>baseline 7B</c:v>
                   </c:pt>
                   <c:pt idx="5">
+                    <c:v>ROUTE 7B</c:v>
+                  </c:pt>
+                  <c:pt idx="6">
                     <c:v>lora 7B</c:v>
                   </c:pt>
                 </c:lvl>
@@ -203,10 +206,10 @@
           </c:cat>
           <c:val>
             <c:numRef>
-              <c:f>Sheet1!$B$2:$B$7</c:f>
+              <c:f>Sheet1!$B$2:$B$8</c:f>
               <c:numCache>
                 <c:formatCode>General</c:formatCode>
-                <c:ptCount val="6"/>
+                <c:ptCount val="7"/>
                 <c:pt idx="0">
                   <c:v>5.49</c:v>
                 </c:pt>
@@ -223,6 +226,9 @@
                   <c:v>30.77</c:v>
                 </c:pt>
                 <c:pt idx="5">
+                  <c:v>39.56</c:v>
+                </c:pt>
+                <c:pt idx="6">
                   <c:v>41.03</c:v>
                 </c:pt>
               </c:numCache>
@@ -236,7 +242,7 @@
             <a:lstStyle/>
             <a:p>
               <a:pPr>
-                <a:defRPr b="0" i="0" strike="noStrike" sz="1100" u="none">
+                <a:defRPr b="0" i="0" strike="noStrike" sz="1000" u="none">
                   <a:solidFill>
                     <a:srgbClr val="102D69"/>
                   </a:solidFill>
@@ -284,7 +290,7 @@
           <a:lstStyle/>
           <a:p>
             <a:pPr>
-              <a:defRPr sz="1000" b="0" i="0" u="none" strike="noStrike">
+              <a:defRPr sz="900" b="0" i="0" u="none" strike="noStrike">
                 <a:solidFill>
                   <a:srgbClr val="444444"/>
                 </a:solidFill>
@@ -3115,7 +3121,7 @@
                 <a:ea typeface="Calibri" pitchFamily="34" charset="-122"/>
                 <a:cs typeface="Calibri" pitchFamily="34" charset="-120"/>
               </a:rPr>
-              <a:t>Данные для адаптера пишет учитель, отбирает — база</a:t>
+              <a:t>Данные для адаптера пишет учитель, а отбирает их база</a:t>
             </a:r>
             <a:endParaRPr lang="en-US" sz="3100" dirty="0"/>
           </a:p>
@@ -3154,7 +3160,7 @@
                 <a:ea typeface="Calibri" pitchFamily="34" charset="-122"/>
                 <a:cs typeface="Calibri" pitchFamily="34" charset="-120"/>
               </a:rPr>
-              <a:t>Генерация пар → фильтр исполнением → QLoRA; локально, обучение на Kaggle</a:t>
+              <a:t>Учитель генерирует пары «вопрос — SQL», база оставляет только исполнимые, и уже на них дообучается адаптер</a:t>
             </a:r>
             <a:endParaRPr lang="en-US" sz="1400" dirty="0"/>
           </a:p>
@@ -4441,7 +4447,7 @@
         <p:spPr>
           <a:xfrm>
             <a:off x="457200" y="2011680"/>
-            <a:ext cx="5852160" cy="2377440"/>
+            <a:ext cx="5852160" cy="2743200"/>
           </a:xfrm>
           <a:prstGeom prst="rect">
             <a:avLst/>
@@ -4450,18 +4456,14 @@
           <a:ln/>
         </p:spPr>
         <p:txBody>
-          <a:bodyPr wrap="square" rtlCol="0" anchor="t"/>
+          <a:bodyPr wrap="square" lIns="0" tIns="0" rIns="0" bIns="0" rtlCol="0" anchor="t"/>
           <a:lstStyle/>
           <a:p>
-            <a:pPr marL="342900" indent="-342900">
+            <a:pPr indent="0" marL="0">
               <a:lnSpc>
-                <a:spcPts val="2200"/>
+                <a:spcPts val="2300"/>
               </a:lnSpc>
-              <a:spcAft>
-                <a:spcPts val="1000"/>
-              </a:spcAft>
-              <a:buSzPct val="100000"/>
-              <a:buChar char="•"/>
+              <a:buNone/>
             </a:pPr>
             <a:r>
               <a:rPr lang="en-US" sz="1600" dirty="0">
@@ -4472,55 +4474,10 @@
                 <a:ea typeface="Calibri" pitchFamily="34" charset="-122"/>
                 <a:cs typeface="Calibri" pitchFamily="34" charset="-120"/>
               </a:rPr>
-              <a:t>Строим промпт ровно как боевой инференс (общая функция build_prompt)</a:t>
+              <a:t>Чтобы число было честным, мы берём ровно тот промпт, который уходит модели на инференсе — ту же функцию build_prompt. Дальше токенизируем его самой Qwen2.5-Coder через её chat-template, а не сторонним токенайзером. На каждый вопрос приходится один вызов модели, поэтому за бюджет берём его длину и усредняем по всем 91 вопросу.</a:t>
             </a:r>
             <a:endParaRPr lang="en-US" sz="1600" dirty="0"/>
           </a:p>
-          <a:p>
-            <a:pPr marL="342900" indent="-342900">
-              <a:lnSpc>
-                <a:spcPts val="2200"/>
-              </a:lnSpc>
-              <a:spcAft>
-                <a:spcPts val="1000"/>
-              </a:spcAft>
-              <a:buSzPct val="100000"/>
-              <a:buChar char="•"/>
-            </a:pPr>
-            <a:r>
-              <a:rPr lang="en-US" sz="1600" dirty="0">
-                <a:solidFill>
-                  <a:srgbClr val="444444"/>
-                </a:solidFill>
-                <a:latin typeface="Calibri" pitchFamily="34" charset="0"/>
-                <a:ea typeface="Calibri" pitchFamily="34" charset="-122"/>
-                <a:cs typeface="Calibri" pitchFamily="34" charset="-120"/>
-              </a:rPr>
-              <a:t>Токенизируем самой Qwen2.5-Coder через её chat-template</a:t>
-            </a:r>
-            <a:endParaRPr lang="en-US" sz="1600" dirty="0"/>
-          </a:p>
-          <a:p>
-            <a:pPr marL="342900" indent="-342900">
-              <a:lnSpc>
-                <a:spcPts val="2200"/>
-              </a:lnSpc>
-              <a:buSzPct val="100000"/>
-              <a:buChar char="•"/>
-            </a:pPr>
-            <a:r>
-              <a:rPr lang="en-US" sz="1600" dirty="0">
-                <a:solidFill>
-                  <a:srgbClr val="444444"/>
-                </a:solidFill>
-                <a:latin typeface="Calibri" pitchFamily="34" charset="0"/>
-                <a:ea typeface="Calibri" pitchFamily="34" charset="-122"/>
-                <a:cs typeface="Calibri" pitchFamily="34" charset="-120"/>
-              </a:rPr>
-              <a:t>Один вызов на вопрос, берём среднее по 91 вопросу</a:t>
-            </a:r>
-            <a:endParaRPr lang="en-US" sz="1600" dirty="0"/>
-          </a:p>
         </p:txBody>
       </p:sp>
       <p:sp>
@@ -4531,8 +4488,8 @@
         </p:nvSpPr>
         <p:spPr>
           <a:xfrm>
-            <a:off x="457200" y="4343400"/>
-            <a:ext cx="5852160" cy="1188720"/>
+            <a:off x="457200" y="4846320"/>
+            <a:ext cx="5852160" cy="1371600"/>
           </a:xfrm>
           <a:prstGeom prst="rect">
             <a:avLst/>
@@ -4546,7 +4503,7 @@
           <a:p>
             <a:pPr indent="0" marL="0">
               <a:lnSpc>
-                <a:spcPts val="1800"/>
+                <a:spcPts val="1900"/>
               </a:lnSpc>
               <a:buNone/>
             </a:pPr>
@@ -4559,7 +4516,7 @@
                 <a:ea typeface="Calibri" pitchFamily="34" charset="-122"/>
                 <a:cs typeface="Calibri" pitchFamily="34" charset="-120"/>
               </a:rPr>
-              <a:t>Отношение 288 / 90 ≈ 3.2 — вот и вся «экономия контекста». Разброс у schema-less — только от длины самого вопроса.</a:t>
+              <a:t>Разница получается примерно втрое — именно столько контекста мы экономим на каждом запросе. Небольшой разброс у schema-less объясняется только тем, что вопросы бывают разной длины.</a:t>
             </a:r>
             <a:endParaRPr lang="en-US" sz="1300" dirty="0"/>
           </a:p>
@@ -5551,7 +5508,7 @@
                 <a:ea typeface="Calibri" pitchFamily="34" charset="-122"/>
                 <a:cs typeface="Calibri" pitchFamily="34" charset="-120"/>
               </a:rPr>
-              <a:t>EX по армам, один split; lora — среднее по 3 сидам</a:t>
+              <a:t>Все конфигурации на одном наборе из 91 вопроса; для адаптеров — среднее по трём сидам</a:t>
             </a:r>
             <a:endParaRPr lang="en-US" sz="1400" dirty="0"/>
           </a:p>
@@ -5564,8 +5521,8 @@
           <p:nvPr/>
         </p:nvGraphicFramePr>
         <p:xfrm>
-          <a:off x="457200" y="2011680"/>
-          <a:ext cx="7315200" cy="4114800"/>
+          <a:off x="365760" y="2011680"/>
+          <a:ext cx="7406640" cy="4114800"/>
         </p:xfrm>
         <a:graphic xmlns:a="http://schemas.openxmlformats.org/drawingml/2006/main">
           <a:graphicData uri="http://schemas.openxmlformats.org/drawingml/2006/chart">
@@ -5581,67 +5538,8 @@
         </p:nvSpPr>
         <p:spPr>
           <a:xfrm>
-            <a:off x="8046720" y="2606040"/>
-            <a:ext cx="3657600" cy="1371600"/>
-          </a:xfrm>
-          <a:prstGeom prst="rect">
-            <a:avLst/>
-          </a:prstGeom>
-          <a:noFill/>
-          <a:ln/>
-        </p:spPr>
-        <p:txBody>
-          <a:bodyPr wrap="square" rtlCol="0" anchor="t"/>
-          <a:lstStyle/>
-          <a:p>
-            <a:pPr indent="0" marL="0">
-              <a:spcAft>
-                <a:spcPts val="1000"/>
-              </a:spcAft>
-              <a:buNone/>
-            </a:pPr>
-            <a:r>
-              <a:rPr lang="en-US" sz="1300" dirty="0">
-                <a:solidFill>
-                  <a:srgbClr val="102D69"/>
-                </a:solidFill>
-                <a:latin typeface="Courier New" pitchFamily="34" charset="0"/>
-                <a:ea typeface="Courier New" pitchFamily="34" charset="-122"/>
-                <a:cs typeface="Courier New" pitchFamily="34" charset="-120"/>
-              </a:rPr>
-              <a:t>3B:  30.8% vs 24.2%   (+6.6 п.п.)</a:t>
-            </a:r>
-            <a:endParaRPr lang="en-US" sz="1300" dirty="0"/>
-          </a:p>
-          <a:p>
-            <a:pPr indent="0" marL="0">
-              <a:buNone/>
-            </a:pPr>
-            <a:r>
-              <a:rPr lang="en-US" sz="1300" dirty="0">
-                <a:solidFill>
-                  <a:srgbClr val="102D69"/>
-                </a:solidFill>
-                <a:latin typeface="Courier New" pitchFamily="34" charset="0"/>
-                <a:ea typeface="Courier New" pitchFamily="34" charset="-122"/>
-                <a:cs typeface="Courier New" pitchFamily="34" charset="-120"/>
-              </a:rPr>
-              <a:t>7B:  41.0% vs 30.8%   (+10.3 п.п.)</a:t>
-            </a:r>
-            <a:endParaRPr lang="en-US" sz="1300" dirty="0"/>
-          </a:p>
-        </p:txBody>
-      </p:sp>
-      <p:sp>
-        <p:nvSpPr>
-          <p:cNvPr id="8" name="Text 5"/>
-          <p:cNvSpPr/>
-          <p:nvPr/>
-        </p:nvSpPr>
-        <p:spPr>
-          <a:xfrm>
-            <a:off x="8046720" y="3977640"/>
-            <a:ext cx="3657600" cy="1828800"/>
+            <a:off x="8046720" y="2377440"/>
+            <a:ext cx="3657600" cy="1737360"/>
           </a:xfrm>
           <a:prstGeom prst="rect">
             <a:avLst/>
@@ -5655,7 +5553,7 @@
           <a:p>
             <a:pPr indent="0" marL="0">
               <a:lnSpc>
-                <a:spcPts val="1900"/>
+                <a:spcPts val="2000"/>
               </a:lnSpc>
               <a:buNone/>
             </a:pPr>
@@ -5668,7 +5566,49 @@
                 <a:ea typeface="Calibri" pitchFamily="34" charset="-122"/>
                 <a:cs typeface="Calibri" pitchFamily="34" charset="-120"/>
               </a:rPr>
-              <a:t>ROUTE (мультизадачность) — 28.6%: между baseline и lora, в пределах шума. Прироста над обычным lora не дала.</a:t>
+              <a:t>На обоих размерах адаптер без схемы оказался точнее, чем baseline со схемой в промпте: он прибавляет 6.6 пункта на модели 3B и 10.3 пункта на 7B.</a:t>
+            </a:r>
+            <a:endParaRPr lang="en-US" sz="1400" dirty="0"/>
+          </a:p>
+        </p:txBody>
+      </p:sp>
+      <p:sp>
+        <p:nvSpPr>
+          <p:cNvPr id="8" name="Text 5"/>
+          <p:cNvSpPr/>
+          <p:nvPr/>
+        </p:nvSpPr>
+        <p:spPr>
+          <a:xfrm>
+            <a:off x="8046720" y="4114800"/>
+            <a:ext cx="3657600" cy="2011680"/>
+          </a:xfrm>
+          <a:prstGeom prst="rect">
+            <a:avLst/>
+          </a:prstGeom>
+          <a:noFill/>
+          <a:ln/>
+        </p:spPr>
+        <p:txBody>
+          <a:bodyPr wrap="square" lIns="0" tIns="0" rIns="0" bIns="0" rtlCol="0" anchor="t"/>
+          <a:lstStyle/>
+          <a:p>
+            <a:pPr indent="0" marL="0">
+              <a:lnSpc>
+                <a:spcPts val="2000"/>
+              </a:lnSpc>
+              <a:buNone/>
+            </a:pPr>
+            <a:r>
+              <a:rPr lang="en-US" sz="1400" dirty="0">
+                <a:solidFill>
+                  <a:srgbClr val="444444"/>
+                </a:solidFill>
+                <a:latin typeface="Calibri" pitchFamily="34" charset="0"/>
+                <a:ea typeface="Calibri" pitchFamily="34" charset="-122"/>
+                <a:cs typeface="Calibri" pitchFamily="34" charset="-120"/>
+              </a:rPr>
+              <a:t>Мультизадачность (ROUTE) мы проверили тоже на обоих размерах — она даёт 28.6% на 3B и 39.6% на 7B. В обоих случаях это остаётся в пределах разброса обычного адаптера, так что заметного выигрыша она не приносит.</a:t>
             </a:r>
             <a:endParaRPr lang="en-US" sz="1400" dirty="0"/>
           </a:p>
@@ -6171,7 +6111,7 @@
                 <a:ea typeface="Calibri" pitchFamily="34" charset="-122"/>
                 <a:cs typeface="Calibri" pitchFamily="34" charset="-120"/>
               </a:rPr>
-              <a:t>Из проверенных добавок помог только объём данных</a:t>
+              <a:t>Из проверенных идей подтвердились только две</a:t>
             </a:r>
             <a:endParaRPr lang="en-US" sz="3100" dirty="0"/>
           </a:p>
@@ -6210,7 +6150,7 @@
                 <a:ea typeface="Calibri" pitchFamily="34" charset="-122"/>
                 <a:cs typeface="Calibri" pitchFamily="34" charset="-120"/>
               </a:rPr>
-              <a:t>Reasoning навредил, мультизадачность и фильтр — в пределах шума</a:t>
+              <a:t>Помогает объём данных, а обучение с рассуждениями наоборот вредит; остальное осталось в пределах шума</a:t>
             </a:r>
             <a:endParaRPr lang="en-US" sz="1400" dirty="0"/>
           </a:p>
@@ -6231,7 +6171,7 @@
           </p:nvPr>
         </p:nvGraphicFramePr>
         <p:xfrm>
-          <a:off x="457200" y="2103120"/>
+          <a:off x="457200" y="2057400"/>
           <a:ext cx="11247120" cy="914400"/>
         </p:xfrm>
         <a:graphic>
@@ -6239,10 +6179,10 @@
             <a:tbl>
               <a:tblPr/>
               <a:tblGrid>
-                <a:gridCol w="4572000"/>
-                <a:gridCol w="6675120"/>
+                <a:gridCol w="3931920"/>
+                <a:gridCol w="7315200"/>
               </a:tblGrid>
-              <a:tr h="777240">
+              <a:tr h="868680">
                 <a:tc>
                   <a:txBody>
                     <a:bodyPr/>
@@ -6328,7 +6268,7 @@
                           <a:ea typeface="Calibri" pitchFamily="34" charset="-122"/>
                           <a:cs typeface="Calibri" pitchFamily="34" charset="-120"/>
                         </a:rPr>
-                        <a:t>Вывод</a:t>
+                        <a:t>Что получилось</a:t>
                       </a:r>
                       <a:endParaRPr lang="en-US" sz="1300" dirty="0">
                         <a:latin typeface="Calibri" charset="0"/>
@@ -6380,7 +6320,7 @@
                   </a:tcPr>
                 </a:tc>
               </a:tr>
-              <a:tr h="777240">
+              <a:tr h="868680">
                 <a:tc>
                   <a:txBody>
                     <a:bodyPr/>
@@ -6390,7 +6330,7 @@
                         <a:buNone/>
                       </a:pPr>
                       <a:r>
-                        <a:rPr lang="en-US" sz="1400" b="1" dirty="0">
+                        <a:rPr lang="en-US" sz="1350" b="1" dirty="0">
                           <a:solidFill>
                             <a:srgbClr val="102D69"/>
                           </a:solidFill>
@@ -6400,7 +6340,7 @@
                         </a:rPr>
                         <a:t>Больше обучающих данных</a:t>
                       </a:r>
-                      <a:endParaRPr lang="en-US" sz="1400" dirty="0">
+                      <a:endParaRPr lang="en-US" sz="1350" dirty="0">
                         <a:latin typeface="Calibri" charset="0"/>
                         <a:ea typeface="Calibri" charset="0"/>
                         <a:cs typeface="Calibri" charset="0"/>
@@ -6458,7 +6398,7 @@
                         <a:buNone/>
                       </a:pPr>
                       <a:r>
-                        <a:rPr lang="en-US" sz="1400" dirty="0">
+                        <a:rPr lang="en-US" sz="1350" dirty="0">
                           <a:solidFill>
                             <a:srgbClr val="444444"/>
                           </a:solidFill>
@@ -6466,9 +6406,9 @@
                           <a:ea typeface="Calibri" pitchFamily="34" charset="-122"/>
                           <a:cs typeface="Calibri" pitchFamily="34" charset="-120"/>
                         </a:rPr>
-                        <a:t>EX растёт 9.9 → 27.8%, плато нет — подтверждено</a:t>
+                        <a:t>Точность стабильно растёт вместе с объёмом обучающих пар и пока не выходит на плато — это подтверждённый эффект.</a:t>
                       </a:r>
-                      <a:endParaRPr lang="en-US" sz="1400" dirty="0">
+                      <a:endParaRPr lang="en-US" sz="1350" dirty="0">
                         <a:latin typeface="Calibri" charset="0"/>
                         <a:ea typeface="Calibri" charset="0"/>
                         <a:cs typeface="Calibri" charset="0"/>
@@ -6518,7 +6458,7 @@
                   </a:tcPr>
                 </a:tc>
               </a:tr>
-              <a:tr h="777240">
+              <a:tr h="868680">
                 <a:tc>
                   <a:txBody>
                     <a:bodyPr/>
@@ -6528,7 +6468,7 @@
                         <a:buNone/>
                       </a:pPr>
                       <a:r>
-                        <a:rPr lang="en-US" sz="1400" b="1" dirty="0">
+                        <a:rPr lang="en-US" sz="1350" b="1" dirty="0">
                           <a:solidFill>
                             <a:srgbClr val="102D69"/>
                           </a:solidFill>
@@ -6536,9 +6476,9 @@
                           <a:ea typeface="Calibri" pitchFamily="34" charset="-122"/>
                           <a:cs typeface="Calibri" pitchFamily="34" charset="-120"/>
                         </a:rPr>
-                        <a:t>Reasoning / обучение с рассуждениями</a:t>
+                        <a:t>Обучение с рассуждениями (reasoning)</a:t>
                       </a:r>
-                      <a:endParaRPr lang="en-US" sz="1400" dirty="0">
+                      <a:endParaRPr lang="en-US" sz="1350" dirty="0">
                         <a:latin typeface="Calibri" charset="0"/>
                         <a:ea typeface="Calibri" charset="0"/>
                         <a:cs typeface="Calibri" charset="0"/>
@@ -6596,7 +6536,7 @@
                         <a:buNone/>
                       </a:pPr>
                       <a:r>
-                        <a:rPr lang="en-US" sz="1400" dirty="0">
+                        <a:rPr lang="en-US" sz="1350" dirty="0">
                           <a:solidFill>
                             <a:srgbClr val="444444"/>
                           </a:solidFill>
@@ -6604,9 +6544,9 @@
                           <a:ea typeface="Calibri" pitchFamily="34" charset="-122"/>
                           <a:cs typeface="Calibri" pitchFamily="34" charset="-120"/>
                         </a:rPr>
-                        <a:t>вредит: −10 п.п., модель хуже помнит схему — подтверждено</a:t>
+                        <a:t>Наоборот вредит: модель начинает хуже помнить схему и теряет около десяти пунктов точности.</a:t>
                       </a:r>
-                      <a:endParaRPr lang="en-US" sz="1400" dirty="0">
+                      <a:endParaRPr lang="en-US" sz="1350" dirty="0">
                         <a:latin typeface="Calibri" charset="0"/>
                         <a:ea typeface="Calibri" charset="0"/>
                         <a:cs typeface="Calibri" charset="0"/>
@@ -6656,7 +6596,7 @@
                   </a:tcPr>
                 </a:tc>
               </a:tr>
-              <a:tr h="777240">
+              <a:tr h="868680">
                 <a:tc>
                   <a:txBody>
                     <a:bodyPr/>
@@ -6666,7 +6606,7 @@
                         <a:buNone/>
                       </a:pPr>
                       <a:r>
-                        <a:rPr lang="en-US" sz="1400" b="1" dirty="0">
+                        <a:rPr lang="en-US" sz="1350" b="1" dirty="0">
                           <a:solidFill>
                             <a:srgbClr val="102D69"/>
                           </a:solidFill>
@@ -6676,7 +6616,7 @@
                         </a:rPr>
                         <a:t>Мультизадачность (ROUTE)</a:t>
                       </a:r>
-                      <a:endParaRPr lang="en-US" sz="1400" dirty="0">
+                      <a:endParaRPr lang="en-US" sz="1350" dirty="0">
                         <a:latin typeface="Calibri" charset="0"/>
                         <a:ea typeface="Calibri" charset="0"/>
                         <a:cs typeface="Calibri" charset="0"/>
@@ -6734,7 +6674,7 @@
                         <a:buNone/>
                       </a:pPr>
                       <a:r>
-                        <a:rPr lang="en-US" sz="1400" dirty="0">
+                        <a:rPr lang="en-US" sz="1350" dirty="0">
                           <a:solidFill>
                             <a:srgbClr val="444444"/>
                           </a:solidFill>
@@ -6742,9 +6682,9 @@
                           <a:ea typeface="Calibri" pitchFamily="34" charset="-122"/>
                           <a:cs typeface="Calibri" pitchFamily="34" charset="-120"/>
                         </a:rPr>
-                        <a:t>28.6% — в пределах шума, прироста нет, выключили</a:t>
+                        <a:t>На обоих размерах даёт примерно тот же результат, что обычный адаптер (28.6% на 3B и 39.6% на 7B), поэтому мы её отключили.</a:t>
                       </a:r>
-                      <a:endParaRPr lang="en-US" sz="1400" dirty="0">
+                      <a:endParaRPr lang="en-US" sz="1350" dirty="0">
                         <a:latin typeface="Calibri" charset="0"/>
                         <a:ea typeface="Calibri" charset="0"/>
                         <a:cs typeface="Calibri" charset="0"/>
@@ -6794,7 +6734,7 @@
                   </a:tcPr>
                 </a:tc>
               </a:tr>
-              <a:tr h="777240">
+              <a:tr h="868680">
                 <a:tc>
                   <a:txBody>
                     <a:bodyPr/>
@@ -6804,7 +6744,7 @@
                         <a:buNone/>
                       </a:pPr>
                       <a:r>
-                        <a:rPr lang="en-US" sz="1400" b="1" dirty="0">
+                        <a:rPr lang="en-US" sz="1350" b="1" dirty="0">
                           <a:solidFill>
                             <a:srgbClr val="102D69"/>
                           </a:solidFill>
@@ -6812,9 +6752,9 @@
                           <a:ea typeface="Calibri" pitchFamily="34" charset="-122"/>
                           <a:cs typeface="Calibri" pitchFamily="34" charset="-120"/>
                         </a:rPr>
-                        <a:t>Более сильный учитель, фильтр</a:t>
+                        <a:t>Более сильный учитель и фильтр</a:t>
                       </a:r>
-                      <a:endParaRPr lang="en-US" sz="1400" dirty="0">
+                      <a:endParaRPr lang="en-US" sz="1350" dirty="0">
                         <a:latin typeface="Calibri" charset="0"/>
                         <a:ea typeface="Calibri" charset="0"/>
                         <a:cs typeface="Calibri" charset="0"/>
@@ -6872,7 +6812,7 @@
                         <a:buNone/>
                       </a:pPr>
                       <a:r>
-                        <a:rPr lang="en-US" sz="1400" dirty="0">
+                        <a:rPr lang="en-US" sz="1350" dirty="0">
                           <a:solidFill>
                             <a:srgbClr val="444444"/>
                           </a:solidFill>
@@ -6880,9 +6820,9 @@
                           <a:ea typeface="Calibri" pitchFamily="34" charset="-122"/>
                           <a:cs typeface="Calibri" pitchFamily="34" charset="-120"/>
                         </a:rPr>
-                        <a:t>разница внутри шума — не доказано</a:t>
+                        <a:t>Разница держится внутри шума, так что отдельный вклад этих факторов доказать не удалось.</a:t>
                       </a:r>
-                      <a:endParaRPr lang="en-US" sz="1400" dirty="0">
+                      <a:endParaRPr lang="en-US" sz="1350" dirty="0">
                         <a:latin typeface="Calibri" charset="0"/>
                         <a:ea typeface="Calibri" charset="0"/>
                         <a:cs typeface="Calibri" charset="0"/>
